--- a/LabBook_10.pptx
+++ b/LabBook_10.pptx
@@ -5646,7 +5646,7 @@
         </p:blipFill>
         <p:spPr>
           <a:xfrm>
-            <a:off x="-152400" y="517639"/>
+            <a:off x="-304801" y="736661"/>
             <a:ext cx="4882906" cy="4297689"/>
           </a:xfrm>
           <a:prstGeom prst="rect">

--- a/LabBook_10.pptx
+++ b/LabBook_10.pptx
@@ -5,21 +5,24 @@
     <p:sldMasterId id="2147483648" r:id="rId1"/>
   </p:sldMasterIdLst>
   <p:notesMasterIdLst>
-    <p:notesMasterId r:id="rId11"/>
+    <p:notesMasterId r:id="rId14"/>
   </p:notesMasterIdLst>
   <p:handoutMasterIdLst>
-    <p:handoutMasterId r:id="rId12"/>
+    <p:handoutMasterId r:id="rId15"/>
   </p:handoutMasterIdLst>
   <p:sldIdLst>
     <p:sldId id="256" r:id="rId2"/>
     <p:sldId id="295" r:id="rId3"/>
-    <p:sldId id="290" r:id="rId4"/>
-    <p:sldId id="298" r:id="rId5"/>
-    <p:sldId id="299" r:id="rId6"/>
-    <p:sldId id="292" r:id="rId7"/>
-    <p:sldId id="297" r:id="rId8"/>
+    <p:sldId id="303" r:id="rId4"/>
+    <p:sldId id="292" r:id="rId5"/>
+    <p:sldId id="305" r:id="rId6"/>
+    <p:sldId id="297" r:id="rId7"/>
+    <p:sldId id="304" r:id="rId8"/>
     <p:sldId id="293" r:id="rId9"/>
-    <p:sldId id="288" r:id="rId10"/>
+    <p:sldId id="300" r:id="rId10"/>
+    <p:sldId id="301" r:id="rId11"/>
+    <p:sldId id="302" r:id="rId12"/>
+    <p:sldId id="288" r:id="rId13"/>
   </p:sldIdLst>
   <p:sldSz cx="12192000" cy="6858000"/>
   <p:notesSz cx="12192000" cy="6858000"/>
@@ -394,7 +397,7 @@
           <a:p>
             <a:fld id="{8438F8DC-35B0-48E6-A86E-42F1F08DD00F}" type="datetimeFigureOut">
               <a:rPr lang="es-ES" smtClean="0"/>
-              <a:t>16/02/2026</a:t>
+              <a:t>08/03/2026</a:t>
             </a:fld>
             <a:endParaRPr lang="es-ES"/>
           </a:p>
@@ -571,7 +574,7 @@
           <a:p>
             <a:fld id="{FACBDC12-F39B-4B97-8F4D-6734F9D366FF}" type="datetimeFigureOut">
               <a:rPr lang="es-ES" smtClean="0"/>
-              <a:t>16/02/2026</a:t>
+              <a:t>08/03/2026</a:t>
             </a:fld>
             <a:endParaRPr lang="es-ES"/>
           </a:p>
@@ -843,7 +846,13 @@
   <p:cSld>
     <p:spTree>
       <p:nvGrpSpPr>
-        <p:cNvPr id="1" name=""/>
+        <p:cNvPr id="1" name="">
+          <a:extLst>
+            <a:ext uri="{FF2B5EF4-FFF2-40B4-BE49-F238E27FC236}">
+              <a16:creationId xmlns:a16="http://schemas.microsoft.com/office/drawing/2014/main" id="{96311CD6-01C8-141A-355C-D9D37FF2601E}"/>
+            </a:ext>
+          </a:extLst>
+        </p:cNvPr>
         <p:cNvGrpSpPr/>
         <p:nvPr/>
       </p:nvGrpSpPr>
@@ -857,7 +866,13 @@
       </p:grpSpPr>
       <p:sp>
         <p:nvSpPr>
-          <p:cNvPr id="2" name="Marcador de imagen de diapositiva 1"/>
+          <p:cNvPr id="2" name="Marcador de imagen de diapositiva 1">
+            <a:extLst>
+              <a:ext uri="{FF2B5EF4-FFF2-40B4-BE49-F238E27FC236}">
+                <a16:creationId xmlns:a16="http://schemas.microsoft.com/office/drawing/2014/main" id="{0E96AB1D-C5B5-F145-EEAE-736125BB7A3A}"/>
+              </a:ext>
+            </a:extLst>
+          </p:cNvPr>
           <p:cNvSpPr>
             <a:spLocks noGrp="1" noRot="1" noChangeAspect="1"/>
           </p:cNvSpPr>
@@ -869,7 +884,13 @@
       </p:sp>
       <p:sp>
         <p:nvSpPr>
-          <p:cNvPr id="3" name="Marcador de notas 2"/>
+          <p:cNvPr id="3" name="Marcador de notas 2">
+            <a:extLst>
+              <a:ext uri="{FF2B5EF4-FFF2-40B4-BE49-F238E27FC236}">
+                <a16:creationId xmlns:a16="http://schemas.microsoft.com/office/drawing/2014/main" id="{114E47A9-D86D-9C64-3D52-AC2A21166040}"/>
+              </a:ext>
+            </a:extLst>
+          </p:cNvPr>
           <p:cNvSpPr>
             <a:spLocks noGrp="1"/>
           </p:cNvSpPr>
@@ -888,7 +909,13 @@
       </p:sp>
       <p:sp>
         <p:nvSpPr>
-          <p:cNvPr id="4" name="Marcador de número de diapositiva 3"/>
+          <p:cNvPr id="4" name="Marcador de número de diapositiva 3">
+            <a:extLst>
+              <a:ext uri="{FF2B5EF4-FFF2-40B4-BE49-F238E27FC236}">
+                <a16:creationId xmlns:a16="http://schemas.microsoft.com/office/drawing/2014/main" id="{23BFF99E-312F-446C-5537-5C786FBE44A6}"/>
+              </a:ext>
+            </a:extLst>
+          </p:cNvPr>
           <p:cNvSpPr>
             <a:spLocks noGrp="1"/>
           </p:cNvSpPr>
@@ -912,7 +939,7 @@
     </p:spTree>
     <p:extLst>
       <p:ext uri="{BB962C8B-B14F-4D97-AF65-F5344CB8AC3E}">
-        <p14:creationId xmlns:p14="http://schemas.microsoft.com/office/powerpoint/2010/main" val="2092532372"/>
+        <p14:creationId xmlns:p14="http://schemas.microsoft.com/office/powerpoint/2010/main" val="1067873630"/>
       </p:ext>
     </p:extLst>
   </p:cSld>
@@ -1011,7 +1038,7 @@
           <a:p>
             <a:fld id="{676223B9-C868-4436-87D9-1A3152E1157A}" type="slidenum">
               <a:rPr lang="es-ES" smtClean="0"/>
-              <a:t>6</a:t>
+              <a:t>4</a:t>
             </a:fld>
             <a:endParaRPr lang="es-ES"/>
           </a:p>
@@ -1119,7 +1146,7 @@
           <a:p>
             <a:fld id="{676223B9-C868-4436-87D9-1A3152E1157A}" type="slidenum">
               <a:rPr lang="es-ES" smtClean="0"/>
-              <a:t>7</a:t>
+              <a:t>6</a:t>
             </a:fld>
             <a:endParaRPr lang="es-ES"/>
           </a:p>
@@ -1139,6 +1166,114 @@
 </file>
 
 <file path=ppt/notesSlides/notesSlide4.xml><?xml version="1.0" encoding="utf-8"?>
+<p:notes xmlns:a="http://schemas.openxmlformats.org/drawingml/2006/main" xmlns:r="http://schemas.openxmlformats.org/officeDocument/2006/relationships" xmlns:p="http://schemas.openxmlformats.org/presentationml/2006/main">
+  <p:cSld>
+    <p:spTree>
+      <p:nvGrpSpPr>
+        <p:cNvPr id="1" name="">
+          <a:extLst>
+            <a:ext uri="{FF2B5EF4-FFF2-40B4-BE49-F238E27FC236}">
+              <a16:creationId xmlns:a16="http://schemas.microsoft.com/office/drawing/2014/main" id="{E3419223-2C93-5541-EB44-AB3A51762D56}"/>
+            </a:ext>
+          </a:extLst>
+        </p:cNvPr>
+        <p:cNvGrpSpPr/>
+        <p:nvPr/>
+      </p:nvGrpSpPr>
+      <p:grpSpPr>
+        <a:xfrm>
+          <a:off x="0" y="0"/>
+          <a:ext cx="0" cy="0"/>
+          <a:chOff x="0" y="0"/>
+          <a:chExt cx="0" cy="0"/>
+        </a:xfrm>
+      </p:grpSpPr>
+      <p:sp>
+        <p:nvSpPr>
+          <p:cNvPr id="2" name="Marcador de imagen de diapositiva 1">
+            <a:extLst>
+              <a:ext uri="{FF2B5EF4-FFF2-40B4-BE49-F238E27FC236}">
+                <a16:creationId xmlns:a16="http://schemas.microsoft.com/office/drawing/2014/main" id="{A7919821-F968-F138-FC3E-B31C11F49B62}"/>
+              </a:ext>
+            </a:extLst>
+          </p:cNvPr>
+          <p:cNvSpPr>
+            <a:spLocks noGrp="1" noRot="1" noChangeAspect="1"/>
+          </p:cNvSpPr>
+          <p:nvPr>
+            <p:ph type="sldImg"/>
+          </p:nvPr>
+        </p:nvSpPr>
+        <p:spPr/>
+      </p:sp>
+      <p:sp>
+        <p:nvSpPr>
+          <p:cNvPr id="3" name="Marcador de notas 2">
+            <a:extLst>
+              <a:ext uri="{FF2B5EF4-FFF2-40B4-BE49-F238E27FC236}">
+                <a16:creationId xmlns:a16="http://schemas.microsoft.com/office/drawing/2014/main" id="{C2758D11-FD03-FBE9-1FA9-8BCF0B141AF3}"/>
+              </a:ext>
+            </a:extLst>
+          </p:cNvPr>
+          <p:cNvSpPr>
+            <a:spLocks noGrp="1"/>
+          </p:cNvSpPr>
+          <p:nvPr>
+            <p:ph type="body" idx="1"/>
+          </p:nvPr>
+        </p:nvSpPr>
+        <p:spPr/>
+        <p:txBody>
+          <a:bodyPr/>
+          <a:lstStyle/>
+          <a:p>
+            <a:endParaRPr lang="es-ES" dirty="0"/>
+          </a:p>
+        </p:txBody>
+      </p:sp>
+      <p:sp>
+        <p:nvSpPr>
+          <p:cNvPr id="4" name="Marcador de número de diapositiva 3">
+            <a:extLst>
+              <a:ext uri="{FF2B5EF4-FFF2-40B4-BE49-F238E27FC236}">
+                <a16:creationId xmlns:a16="http://schemas.microsoft.com/office/drawing/2014/main" id="{93C28B94-F730-3510-17A7-BD919142456B}"/>
+              </a:ext>
+            </a:extLst>
+          </p:cNvPr>
+          <p:cNvSpPr>
+            <a:spLocks noGrp="1"/>
+          </p:cNvSpPr>
+          <p:nvPr>
+            <p:ph type="sldNum" sz="quarter" idx="5"/>
+          </p:nvPr>
+        </p:nvSpPr>
+        <p:spPr/>
+        <p:txBody>
+          <a:bodyPr/>
+          <a:lstStyle/>
+          <a:p>
+            <a:fld id="{676223B9-C868-4436-87D9-1A3152E1157A}" type="slidenum">
+              <a:rPr lang="es-ES" smtClean="0"/>
+              <a:t>7</a:t>
+            </a:fld>
+            <a:endParaRPr lang="es-ES"/>
+          </a:p>
+        </p:txBody>
+      </p:sp>
+    </p:spTree>
+    <p:extLst>
+      <p:ext uri="{BB962C8B-B14F-4D97-AF65-F5344CB8AC3E}">
+        <p14:creationId xmlns:p14="http://schemas.microsoft.com/office/powerpoint/2010/main" val="96607246"/>
+      </p:ext>
+    </p:extLst>
+  </p:cSld>
+  <p:clrMapOvr>
+    <a:masterClrMapping/>
+  </p:clrMapOvr>
+</p:notes>
+</file>
+
+<file path=ppt/notesSlides/notesSlide5.xml><?xml version="1.0" encoding="utf-8"?>
 <p:notes xmlns:a="http://schemas.openxmlformats.org/drawingml/2006/main" xmlns:r="http://schemas.openxmlformats.org/officeDocument/2006/relationships" xmlns:p="http://schemas.openxmlformats.org/presentationml/2006/main">
   <p:cSld>
     <p:spTree>
@@ -1237,6 +1372,222 @@
     <p:extLst>
       <p:ext uri="{BB962C8B-B14F-4D97-AF65-F5344CB8AC3E}">
         <p14:creationId xmlns:p14="http://schemas.microsoft.com/office/powerpoint/2010/main" val="2917382716"/>
+      </p:ext>
+    </p:extLst>
+  </p:cSld>
+  <p:clrMapOvr>
+    <a:masterClrMapping/>
+  </p:clrMapOvr>
+</p:notes>
+</file>
+
+<file path=ppt/notesSlides/notesSlide6.xml><?xml version="1.0" encoding="utf-8"?>
+<p:notes xmlns:a="http://schemas.openxmlformats.org/drawingml/2006/main" xmlns:r="http://schemas.openxmlformats.org/officeDocument/2006/relationships" xmlns:p="http://schemas.openxmlformats.org/presentationml/2006/main">
+  <p:cSld>
+    <p:spTree>
+      <p:nvGrpSpPr>
+        <p:cNvPr id="1" name="">
+          <a:extLst>
+            <a:ext uri="{FF2B5EF4-FFF2-40B4-BE49-F238E27FC236}">
+              <a16:creationId xmlns:a16="http://schemas.microsoft.com/office/drawing/2014/main" id="{888D2C71-CD59-3BD8-333E-7EA96AB9A27F}"/>
+            </a:ext>
+          </a:extLst>
+        </p:cNvPr>
+        <p:cNvGrpSpPr/>
+        <p:nvPr/>
+      </p:nvGrpSpPr>
+      <p:grpSpPr>
+        <a:xfrm>
+          <a:off x="0" y="0"/>
+          <a:ext cx="0" cy="0"/>
+          <a:chOff x="0" y="0"/>
+          <a:chExt cx="0" cy="0"/>
+        </a:xfrm>
+      </p:grpSpPr>
+      <p:sp>
+        <p:nvSpPr>
+          <p:cNvPr id="2" name="Marcador de imagen de diapositiva 1">
+            <a:extLst>
+              <a:ext uri="{FF2B5EF4-FFF2-40B4-BE49-F238E27FC236}">
+                <a16:creationId xmlns:a16="http://schemas.microsoft.com/office/drawing/2014/main" id="{65615D25-B039-1DA8-80F2-FC6D122E4CC2}"/>
+              </a:ext>
+            </a:extLst>
+          </p:cNvPr>
+          <p:cNvSpPr>
+            <a:spLocks noGrp="1" noRot="1" noChangeAspect="1"/>
+          </p:cNvSpPr>
+          <p:nvPr>
+            <p:ph type="sldImg"/>
+          </p:nvPr>
+        </p:nvSpPr>
+        <p:spPr/>
+      </p:sp>
+      <p:sp>
+        <p:nvSpPr>
+          <p:cNvPr id="3" name="Marcador de notas 2">
+            <a:extLst>
+              <a:ext uri="{FF2B5EF4-FFF2-40B4-BE49-F238E27FC236}">
+                <a16:creationId xmlns:a16="http://schemas.microsoft.com/office/drawing/2014/main" id="{DEC41004-3186-1F4B-2E4B-250101368A9B}"/>
+              </a:ext>
+            </a:extLst>
+          </p:cNvPr>
+          <p:cNvSpPr>
+            <a:spLocks noGrp="1"/>
+          </p:cNvSpPr>
+          <p:nvPr>
+            <p:ph type="body" idx="1"/>
+          </p:nvPr>
+        </p:nvSpPr>
+        <p:spPr/>
+        <p:txBody>
+          <a:bodyPr/>
+          <a:lstStyle/>
+          <a:p>
+            <a:endParaRPr lang="es-ES" dirty="0"/>
+          </a:p>
+        </p:txBody>
+      </p:sp>
+      <p:sp>
+        <p:nvSpPr>
+          <p:cNvPr id="4" name="Marcador de número de diapositiva 3">
+            <a:extLst>
+              <a:ext uri="{FF2B5EF4-FFF2-40B4-BE49-F238E27FC236}">
+                <a16:creationId xmlns:a16="http://schemas.microsoft.com/office/drawing/2014/main" id="{2782D47A-62A3-8EEC-1456-3D0F9B0BC50C}"/>
+              </a:ext>
+            </a:extLst>
+          </p:cNvPr>
+          <p:cNvSpPr>
+            <a:spLocks noGrp="1"/>
+          </p:cNvSpPr>
+          <p:nvPr>
+            <p:ph type="sldNum" sz="quarter" idx="5"/>
+          </p:nvPr>
+        </p:nvSpPr>
+        <p:spPr/>
+        <p:txBody>
+          <a:bodyPr/>
+          <a:lstStyle/>
+          <a:p>
+            <a:fld id="{676223B9-C868-4436-87D9-1A3152E1157A}" type="slidenum">
+              <a:rPr lang="es-ES" smtClean="0"/>
+              <a:t>10</a:t>
+            </a:fld>
+            <a:endParaRPr lang="es-ES"/>
+          </a:p>
+        </p:txBody>
+      </p:sp>
+    </p:spTree>
+    <p:extLst>
+      <p:ext uri="{BB962C8B-B14F-4D97-AF65-F5344CB8AC3E}">
+        <p14:creationId xmlns:p14="http://schemas.microsoft.com/office/powerpoint/2010/main" val="1082822213"/>
+      </p:ext>
+    </p:extLst>
+  </p:cSld>
+  <p:clrMapOvr>
+    <a:masterClrMapping/>
+  </p:clrMapOvr>
+</p:notes>
+</file>
+
+<file path=ppt/notesSlides/notesSlide7.xml><?xml version="1.0" encoding="utf-8"?>
+<p:notes xmlns:a="http://schemas.openxmlformats.org/drawingml/2006/main" xmlns:r="http://schemas.openxmlformats.org/officeDocument/2006/relationships" xmlns:p="http://schemas.openxmlformats.org/presentationml/2006/main">
+  <p:cSld>
+    <p:spTree>
+      <p:nvGrpSpPr>
+        <p:cNvPr id="1" name="">
+          <a:extLst>
+            <a:ext uri="{FF2B5EF4-FFF2-40B4-BE49-F238E27FC236}">
+              <a16:creationId xmlns:a16="http://schemas.microsoft.com/office/drawing/2014/main" id="{E3EA54F4-C02B-7220-2D64-3A2AE385BFD0}"/>
+            </a:ext>
+          </a:extLst>
+        </p:cNvPr>
+        <p:cNvGrpSpPr/>
+        <p:nvPr/>
+      </p:nvGrpSpPr>
+      <p:grpSpPr>
+        <a:xfrm>
+          <a:off x="0" y="0"/>
+          <a:ext cx="0" cy="0"/>
+          <a:chOff x="0" y="0"/>
+          <a:chExt cx="0" cy="0"/>
+        </a:xfrm>
+      </p:grpSpPr>
+      <p:sp>
+        <p:nvSpPr>
+          <p:cNvPr id="2" name="Marcador de imagen de diapositiva 1">
+            <a:extLst>
+              <a:ext uri="{FF2B5EF4-FFF2-40B4-BE49-F238E27FC236}">
+                <a16:creationId xmlns:a16="http://schemas.microsoft.com/office/drawing/2014/main" id="{A2456676-6849-3EC2-5B4F-FB09CD7F41FB}"/>
+              </a:ext>
+            </a:extLst>
+          </p:cNvPr>
+          <p:cNvSpPr>
+            <a:spLocks noGrp="1" noRot="1" noChangeAspect="1"/>
+          </p:cNvSpPr>
+          <p:nvPr>
+            <p:ph type="sldImg"/>
+          </p:nvPr>
+        </p:nvSpPr>
+        <p:spPr/>
+      </p:sp>
+      <p:sp>
+        <p:nvSpPr>
+          <p:cNvPr id="3" name="Marcador de notas 2">
+            <a:extLst>
+              <a:ext uri="{FF2B5EF4-FFF2-40B4-BE49-F238E27FC236}">
+                <a16:creationId xmlns:a16="http://schemas.microsoft.com/office/drawing/2014/main" id="{E2F146ED-6C4C-C8D0-1483-2CCD722AA58C}"/>
+              </a:ext>
+            </a:extLst>
+          </p:cNvPr>
+          <p:cNvSpPr>
+            <a:spLocks noGrp="1"/>
+          </p:cNvSpPr>
+          <p:nvPr>
+            <p:ph type="body" idx="1"/>
+          </p:nvPr>
+        </p:nvSpPr>
+        <p:spPr/>
+        <p:txBody>
+          <a:bodyPr/>
+          <a:lstStyle/>
+          <a:p>
+            <a:endParaRPr lang="es-ES" dirty="0"/>
+          </a:p>
+        </p:txBody>
+      </p:sp>
+      <p:sp>
+        <p:nvSpPr>
+          <p:cNvPr id="4" name="Marcador de número de diapositiva 3">
+            <a:extLst>
+              <a:ext uri="{FF2B5EF4-FFF2-40B4-BE49-F238E27FC236}">
+                <a16:creationId xmlns:a16="http://schemas.microsoft.com/office/drawing/2014/main" id="{8A10541F-C9EE-11AB-1624-C3CCA9F77474}"/>
+              </a:ext>
+            </a:extLst>
+          </p:cNvPr>
+          <p:cNvSpPr>
+            <a:spLocks noGrp="1"/>
+          </p:cNvSpPr>
+          <p:nvPr>
+            <p:ph type="sldNum" sz="quarter" idx="5"/>
+          </p:nvPr>
+        </p:nvSpPr>
+        <p:spPr/>
+        <p:txBody>
+          <a:bodyPr/>
+          <a:lstStyle/>
+          <a:p>
+            <a:fld id="{676223B9-C868-4436-87D9-1A3152E1157A}" type="slidenum">
+              <a:rPr lang="es-ES" smtClean="0"/>
+              <a:t>11</a:t>
+            </a:fld>
+            <a:endParaRPr lang="es-ES"/>
+          </a:p>
+        </p:txBody>
+      </p:sp>
+    </p:spTree>
+    <p:extLst>
+      <p:ext uri="{BB962C8B-B14F-4D97-AF65-F5344CB8AC3E}">
+        <p14:creationId xmlns:p14="http://schemas.microsoft.com/office/powerpoint/2010/main" val="1318116301"/>
       </p:ext>
     </p:extLst>
   </p:cSld>
@@ -2838,6 +3189,1707 @@
 </p:sld>
 </file>
 
+<file path=ppt/slides/slide10.xml><?xml version="1.0" encoding="utf-8"?>
+<p:sld xmlns:a="http://schemas.openxmlformats.org/drawingml/2006/main" xmlns:r="http://schemas.openxmlformats.org/officeDocument/2006/relationships" xmlns:p="http://schemas.openxmlformats.org/presentationml/2006/main">
+  <p:cSld>
+    <p:spTree>
+      <p:nvGrpSpPr>
+        <p:cNvPr id="1" name="">
+          <a:extLst>
+            <a:ext uri="{FF2B5EF4-FFF2-40B4-BE49-F238E27FC236}">
+              <a16:creationId xmlns:a16="http://schemas.microsoft.com/office/drawing/2014/main" id="{9963C3E0-CAD1-131E-0737-1520FF60D6BB}"/>
+            </a:ext>
+          </a:extLst>
+        </p:cNvPr>
+        <p:cNvGrpSpPr/>
+        <p:nvPr/>
+      </p:nvGrpSpPr>
+      <p:grpSpPr>
+        <a:xfrm>
+          <a:off x="0" y="0"/>
+          <a:ext cx="0" cy="0"/>
+          <a:chOff x="0" y="0"/>
+          <a:chExt cx="0" cy="0"/>
+        </a:xfrm>
+      </p:grpSpPr>
+      <p:sp>
+        <p:nvSpPr>
+          <p:cNvPr id="16" name="object 16">
+            <a:extLst>
+              <a:ext uri="{FF2B5EF4-FFF2-40B4-BE49-F238E27FC236}">
+                <a16:creationId xmlns:a16="http://schemas.microsoft.com/office/drawing/2014/main" id="{B7DBF6FD-DC4F-75C4-3B08-9D173C2837DF}"/>
+              </a:ext>
+            </a:extLst>
+          </p:cNvPr>
+          <p:cNvSpPr txBox="1">
+            <a:spLocks noGrp="1"/>
+          </p:cNvSpPr>
+          <p:nvPr>
+            <p:ph type="title"/>
+          </p:nvPr>
+        </p:nvSpPr>
+        <p:spPr>
+          <a:xfrm>
+            <a:off x="685800" y="228600"/>
+            <a:ext cx="10994410" cy="705321"/>
+          </a:xfrm>
+          <a:prstGeom prst="rect">
+            <a:avLst/>
+          </a:prstGeom>
+        </p:spPr>
+        <p:txBody>
+          <a:bodyPr vert="horz" wrap="square" lIns="0" tIns="12700" rIns="0" bIns="0" rtlCol="0">
+            <a:spAutoFit/>
+          </a:bodyPr>
+          <a:lstStyle/>
+          <a:p>
+            <a:pPr marL="12700">
+              <a:lnSpc>
+                <a:spcPct val="100000"/>
+              </a:lnSpc>
+              <a:spcBef>
+                <a:spcPts val="100"/>
+              </a:spcBef>
+            </a:pPr>
+            <a:r>
+              <a:rPr lang="en-US" sz="2500" dirty="0"/>
+              <a:t>Learning outcome #1 – Convergence tests</a:t>
+            </a:r>
+            <a:br>
+              <a:rPr lang="en-US" sz="2500" dirty="0"/>
+            </a:br>
+            <a:r>
+              <a:rPr lang="nl-NL" b="0" dirty="0"/>
+              <a:t>DE waveguide, w = 0.5 µm, neff_TE0, wvl 1.55 µm. </a:t>
+            </a:r>
+            <a:endParaRPr sz="2500" b="0" dirty="0">
+              <a:latin typeface="+mj-lt"/>
+              <a:cs typeface="Lucida Sans"/>
+            </a:endParaRPr>
+          </a:p>
+        </p:txBody>
+      </p:sp>
+      <p:pic>
+        <p:nvPicPr>
+          <p:cNvPr id="83" name="Gráfico 82">
+            <a:extLst>
+              <a:ext uri="{FF2B5EF4-FFF2-40B4-BE49-F238E27FC236}">
+                <a16:creationId xmlns:a16="http://schemas.microsoft.com/office/drawing/2014/main" id="{EA44E7AE-DDEB-8AB7-22B4-6377EDD020B5}"/>
+              </a:ext>
+            </a:extLst>
+          </p:cNvPr>
+          <p:cNvPicPr>
+            <a:picLocks noChangeAspect="1"/>
+          </p:cNvPicPr>
+          <p:nvPr/>
+        </p:nvPicPr>
+        <p:blipFill>
+          <a:blip r:embed="rId3">
+            <a:extLst>
+              <a:ext uri="{96DAC541-7B7A-43D3-8B79-37D633B846F1}">
+                <asvg:svgBlip xmlns:asvg="http://schemas.microsoft.com/office/drawing/2016/SVG/main" r:embed="rId4"/>
+              </a:ext>
+            </a:extLst>
+          </a:blip>
+          <a:stretch>
+            <a:fillRect/>
+          </a:stretch>
+        </p:blipFill>
+        <p:spPr>
+          <a:xfrm>
+            <a:off x="5045006" y="6356057"/>
+            <a:ext cx="6409575" cy="363174"/>
+          </a:xfrm>
+          <a:prstGeom prst="rect">
+            <a:avLst/>
+          </a:prstGeom>
+        </p:spPr>
+      </p:pic>
+      <p:sp>
+        <p:nvSpPr>
+          <p:cNvPr id="84" name="Marcador de número de diapositiva 83">
+            <a:extLst>
+              <a:ext uri="{FF2B5EF4-FFF2-40B4-BE49-F238E27FC236}">
+                <a16:creationId xmlns:a16="http://schemas.microsoft.com/office/drawing/2014/main" id="{A947DA0A-552A-A57F-3B30-BEC5AEA4AEB6}"/>
+              </a:ext>
+            </a:extLst>
+          </p:cNvPr>
+          <p:cNvSpPr>
+            <a:spLocks noGrp="1"/>
+          </p:cNvSpPr>
+          <p:nvPr>
+            <p:ph type="sldNum" sz="quarter" idx="7"/>
+          </p:nvPr>
+        </p:nvSpPr>
+        <p:spPr/>
+        <p:txBody>
+          <a:bodyPr/>
+          <a:lstStyle/>
+          <a:p>
+            <a:fld id="{B6F15528-21DE-4FAA-801E-634DDDAF4B2B}" type="slidenum">
+              <a:rPr lang="es-ES" smtClean="0"/>
+              <a:t>10</a:t>
+            </a:fld>
+            <a:endParaRPr lang="es-ES"/>
+          </a:p>
+        </p:txBody>
+      </p:sp>
+      <p:sp>
+        <p:nvSpPr>
+          <p:cNvPr id="3" name="Marcador de pie de página 2">
+            <a:extLst>
+              <a:ext uri="{FF2B5EF4-FFF2-40B4-BE49-F238E27FC236}">
+                <a16:creationId xmlns:a16="http://schemas.microsoft.com/office/drawing/2014/main" id="{0EB8AECE-898D-724C-4EC8-9D4C9C8D892E}"/>
+              </a:ext>
+            </a:extLst>
+          </p:cNvPr>
+          <p:cNvSpPr>
+            <a:spLocks noGrp="1"/>
+          </p:cNvSpPr>
+          <p:nvPr>
+            <p:ph type="ftr" sz="quarter" idx="5"/>
+          </p:nvPr>
+        </p:nvSpPr>
+        <p:spPr/>
+        <p:txBody>
+          <a:bodyPr/>
+          <a:lstStyle/>
+          <a:p>
+            <a:pPr marL="12700">
+              <a:spcBef>
+                <a:spcPts val="15"/>
+              </a:spcBef>
+            </a:pPr>
+            <a:r>
+              <a:rPr lang="es-ES" spc="-5"/>
+              <a:t>LAB 1.0. WAVEGUIDES</a:t>
+            </a:r>
+            <a:endParaRPr lang="es-ES" spc="-5" dirty="0"/>
+          </a:p>
+        </p:txBody>
+      </p:sp>
+      <p:sp>
+        <p:nvSpPr>
+          <p:cNvPr id="8" name="CuadroTexto 7">
+            <a:extLst>
+              <a:ext uri="{FF2B5EF4-FFF2-40B4-BE49-F238E27FC236}">
+                <a16:creationId xmlns:a16="http://schemas.microsoft.com/office/drawing/2014/main" id="{808D4E70-0666-5046-7C69-E521529B5891}"/>
+              </a:ext>
+            </a:extLst>
+          </p:cNvPr>
+          <p:cNvSpPr txBox="1"/>
+          <p:nvPr/>
+        </p:nvSpPr>
+        <p:spPr>
+          <a:xfrm>
+            <a:off x="1079403" y="2528813"/>
+            <a:ext cx="4546634" cy="923330"/>
+          </a:xfrm>
+          <a:prstGeom prst="rect">
+            <a:avLst/>
+          </a:prstGeom>
+          <a:noFill/>
+        </p:spPr>
+        <p:txBody>
+          <a:bodyPr wrap="square" rtlCol="0">
+            <a:spAutoFit/>
+          </a:bodyPr>
+          <a:lstStyle/>
+          <a:p>
+            <a:pPr algn="ctr"/>
+            <a:r>
+              <a:rPr lang="en-US" b="1" dirty="0"/>
+              <a:t>deep</a:t>
+            </a:r>
+            <a:r>
+              <a:rPr lang="en-US" dirty="0"/>
+              <a:t> waveguide</a:t>
+            </a:r>
+          </a:p>
+          <a:p>
+            <a:pPr algn="ctr"/>
+            <a:endParaRPr lang="en-US" dirty="0"/>
+          </a:p>
+          <a:p>
+            <a:pPr algn="ctr"/>
+            <a:r>
+              <a:rPr lang="en-US" dirty="0"/>
+              <a:t>Paste neff_TE0 vs </a:t>
+            </a:r>
+            <a:r>
+              <a:rPr lang="en-US" dirty="0" err="1"/>
+              <a:t>grid_resolution</a:t>
+            </a:r>
+            <a:r>
+              <a:rPr lang="en-US" dirty="0"/>
+              <a:t> plot here</a:t>
+            </a:r>
+          </a:p>
+        </p:txBody>
+      </p:sp>
+      <mc:AlternateContent xmlns:mc="http://schemas.openxmlformats.org/markup-compatibility/2006">
+        <mc:Choice xmlns:a14="http://schemas.microsoft.com/office/drawing/2010/main" Requires="a14">
+          <p:sp>
+            <p:nvSpPr>
+              <p:cNvPr id="10" name="CuadroTexto 9">
+                <a:extLst>
+                  <a:ext uri="{FF2B5EF4-FFF2-40B4-BE49-F238E27FC236}">
+                    <a16:creationId xmlns:a16="http://schemas.microsoft.com/office/drawing/2014/main" id="{4D35888E-3128-E6DD-BF91-8F58E33F7931}"/>
+                  </a:ext>
+                </a:extLst>
+              </p:cNvPr>
+              <p:cNvSpPr txBox="1"/>
+              <p:nvPr/>
+            </p:nvSpPr>
+            <p:spPr>
+              <a:xfrm>
+                <a:off x="601313" y="4993620"/>
+                <a:ext cx="11199971" cy="1407180"/>
+              </a:xfrm>
+              <a:prstGeom prst="rect">
+                <a:avLst/>
+              </a:prstGeom>
+              <a:solidFill>
+                <a:schemeClr val="bg1">
+                  <a:lumMod val="95000"/>
+                </a:schemeClr>
+              </a:solidFill>
+              <a:ln w="28575">
+                <a:solidFill>
+                  <a:srgbClr val="E0700D"/>
+                </a:solidFill>
+              </a:ln>
+            </p:spPr>
+            <p:txBody>
+              <a:bodyPr wrap="square" rtlCol="0">
+                <a:spAutoFit/>
+              </a:bodyPr>
+              <a:lstStyle/>
+              <a:p>
+                <a:pPr algn="just"/>
+                <a:r>
+                  <a:rPr lang="es-CO" sz="1200" dirty="0"/>
+                  <a:t>The </a:t>
+                </a:r>
+                <a:r>
+                  <a:rPr lang="es-CO" sz="1200" dirty="0" err="1"/>
+                  <a:t>simulated</a:t>
+                </a:r>
+                <a:r>
+                  <a:rPr lang="es-CO" sz="1200" dirty="0"/>
+                  <a:t> </a:t>
+                </a:r>
+                <a:r>
+                  <a:rPr lang="es-CO" sz="1200" dirty="0" err="1"/>
+                  <a:t>waveguide</a:t>
+                </a:r>
+                <a:r>
+                  <a:rPr lang="es-CO" sz="1200" dirty="0"/>
+                  <a:t> </a:t>
+                </a:r>
+                <a:r>
+                  <a:rPr lang="es-CO" sz="1200" dirty="0" err="1"/>
+                  <a:t>is</a:t>
+                </a:r>
+                <a:r>
+                  <a:rPr lang="es-CO" sz="1200" dirty="0"/>
+                  <a:t> </a:t>
+                </a:r>
+                <a:r>
+                  <a:rPr lang="es-CO" sz="1200" dirty="0" err="1"/>
+                  <a:t>based</a:t>
+                </a:r>
+                <a:r>
+                  <a:rPr lang="es-CO" sz="1200" dirty="0"/>
+                  <a:t> </a:t>
+                </a:r>
+                <a:r>
+                  <a:rPr lang="es-CO" sz="1200" dirty="0" err="1"/>
+                  <a:t>on</a:t>
+                </a:r>
+                <a:r>
+                  <a:rPr lang="es-CO" sz="1200" dirty="0"/>
+                  <a:t> SOI (Silicon-</a:t>
+                </a:r>
+                <a:r>
+                  <a:rPr lang="es-CO" sz="1200" dirty="0" err="1"/>
+                  <a:t>on</a:t>
+                </a:r>
+                <a:r>
+                  <a:rPr lang="es-CO" sz="1200" dirty="0"/>
+                  <a:t>-</a:t>
+                </a:r>
+                <a:r>
+                  <a:rPr lang="es-CO" sz="1200" dirty="0" err="1"/>
+                  <a:t>Insulator</a:t>
+                </a:r>
+                <a:r>
+                  <a:rPr lang="es-CO" sz="1200" dirty="0"/>
+                  <a:t>) </a:t>
+                </a:r>
+                <a:r>
+                  <a:rPr lang="es-CO" sz="1200" dirty="0" err="1"/>
+                  <a:t>technology</a:t>
+                </a:r>
+                <a:r>
+                  <a:rPr lang="es-CO" sz="1200" dirty="0"/>
+                  <a:t>, </a:t>
+                </a:r>
+                <a:r>
+                  <a:rPr lang="es-CO" sz="1200" dirty="0" err="1"/>
+                  <a:t>with</a:t>
+                </a:r>
+                <a:r>
+                  <a:rPr lang="es-CO" sz="1200" dirty="0"/>
+                  <a:t> </a:t>
+                </a:r>
+                <a:r>
+                  <a:rPr lang="es-CO" sz="1200" dirty="0" err="1"/>
+                  <a:t>dimensions</a:t>
+                </a:r>
+                <a:r>
+                  <a:rPr lang="es-CO" sz="1200" dirty="0"/>
+                  <a:t> </a:t>
+                </a:r>
+                <a:r>
+                  <a:rPr lang="es-CO" sz="1200" dirty="0" err="1"/>
+                  <a:t>of</a:t>
+                </a:r>
+                <a:r>
+                  <a:rPr lang="es-CO" sz="1200" dirty="0"/>
+                  <a:t> 220 nm </a:t>
+                </a:r>
+                <a:r>
+                  <a:rPr lang="es-CO" sz="1200" dirty="0" err="1"/>
+                  <a:t>height</a:t>
+                </a:r>
+                <a:r>
+                  <a:rPr lang="es-CO" sz="1200" dirty="0"/>
+                  <a:t> and 500 nm </a:t>
+                </a:r>
+                <a:r>
+                  <a:rPr lang="es-CO" sz="1200" dirty="0" err="1"/>
+                  <a:t>width</a:t>
+                </a:r>
+                <a:r>
+                  <a:rPr lang="es-CO" sz="1200" dirty="0"/>
+                  <a:t>. </a:t>
+                </a:r>
+                <a:r>
+                  <a:rPr lang="es-CO" sz="1200" dirty="0" err="1"/>
+                  <a:t>By</a:t>
+                </a:r>
+                <a:r>
+                  <a:rPr lang="es-CO" sz="1200" dirty="0"/>
+                  <a:t> </a:t>
+                </a:r>
+                <a:r>
+                  <a:rPr lang="es-CO" sz="1200" dirty="0" err="1"/>
+                  <a:t>performing</a:t>
+                </a:r>
+                <a:r>
+                  <a:rPr lang="es-CO" sz="1200" dirty="0"/>
+                  <a:t> </a:t>
+                </a:r>
+                <a:r>
+                  <a:rPr lang="es-CO" sz="1200" dirty="0" err="1"/>
+                  <a:t>simulations</a:t>
+                </a:r>
+                <a:r>
+                  <a:rPr lang="es-CO" sz="1200" dirty="0"/>
+                  <a:t> </a:t>
+                </a:r>
+                <a:r>
+                  <a:rPr lang="es-CO" sz="1200" dirty="0" err="1"/>
+                  <a:t>with</a:t>
+                </a:r>
+                <a:r>
+                  <a:rPr lang="es-CO" sz="1200" dirty="0"/>
+                  <a:t> </a:t>
+                </a:r>
+                <a:r>
+                  <a:rPr lang="es-CO" sz="1200" dirty="0" err="1"/>
+                  <a:t>different</a:t>
+                </a:r>
+                <a:r>
+                  <a:rPr lang="es-CO" sz="1200" dirty="0"/>
+                  <a:t> </a:t>
+                </a:r>
+                <a:r>
+                  <a:rPr lang="es-CO" sz="1200" dirty="0" err="1"/>
+                  <a:t>grid</a:t>
+                </a:r>
+                <a:r>
+                  <a:rPr lang="es-CO" sz="1200" dirty="0"/>
+                  <a:t> </a:t>
+                </a:r>
+                <a:r>
+                  <a:rPr lang="es-CO" sz="1200" dirty="0" err="1"/>
+                  <a:t>resolutions</a:t>
+                </a:r>
+                <a:r>
+                  <a:rPr lang="es-CO" sz="1200" dirty="0"/>
+                  <a:t>, </a:t>
+                </a:r>
+                <a:r>
+                  <a:rPr lang="es-CO" sz="1200" dirty="0" err="1"/>
+                  <a:t>it</a:t>
+                </a:r>
+                <a:r>
+                  <a:rPr lang="es-CO" sz="1200" dirty="0"/>
+                  <a:t> </a:t>
+                </a:r>
+                <a:r>
+                  <a:rPr lang="es-CO" sz="1200" dirty="0" err="1"/>
+                  <a:t>is</a:t>
+                </a:r>
+                <a:r>
+                  <a:rPr lang="es-CO" sz="1200" dirty="0"/>
+                  <a:t> </a:t>
+                </a:r>
+                <a:r>
+                  <a:rPr lang="es-CO" sz="1200" dirty="0" err="1"/>
+                  <a:t>observed</a:t>
+                </a:r>
+                <a:r>
+                  <a:rPr lang="es-CO" sz="1200" dirty="0"/>
+                  <a:t> </a:t>
+                </a:r>
+                <a:r>
+                  <a:rPr lang="es-CO" sz="1200" dirty="0" err="1"/>
+                  <a:t>that</a:t>
+                </a:r>
+                <a:r>
+                  <a:rPr lang="es-CO" sz="1200" dirty="0"/>
+                  <a:t> </a:t>
+                </a:r>
+                <a:r>
+                  <a:rPr lang="es-CO" sz="1200" dirty="0" err="1"/>
+                  <a:t>the</a:t>
+                </a:r>
+                <a:r>
+                  <a:rPr lang="es-CO" sz="1200" dirty="0"/>
+                  <a:t> </a:t>
+                </a:r>
+                <a:r>
+                  <a:rPr lang="es-CO" sz="1200" dirty="0" err="1"/>
+                  <a:t>effective</a:t>
+                </a:r>
+                <a:r>
+                  <a:rPr lang="es-CO" sz="1200" dirty="0"/>
+                  <a:t> refractive </a:t>
+                </a:r>
+                <a:r>
+                  <a:rPr lang="es-CO" sz="1200" dirty="0" err="1"/>
+                  <a:t>index</a:t>
+                </a:r>
+                <a:r>
+                  <a:rPr lang="es-CO" sz="1200" dirty="0"/>
+                  <a:t> </a:t>
+                </a:r>
+                <a:r>
+                  <a:rPr lang="es-CO" sz="1200" dirty="0" err="1"/>
+                  <a:t>stabilizes</a:t>
+                </a:r>
+                <a:r>
+                  <a:rPr lang="es-CO" sz="1200" dirty="0"/>
+                  <a:t> </a:t>
+                </a:r>
+                <a:r>
+                  <a:rPr lang="es-CO" sz="1200" dirty="0" err="1"/>
+                  <a:t>around</a:t>
+                </a:r>
+                <a:r>
+                  <a:rPr lang="es-CO" sz="1200" dirty="0"/>
+                  <a:t> </a:t>
+                </a:r>
+                <a:r>
+                  <a:rPr lang="es-CO" sz="1200" dirty="0" err="1"/>
+                  <a:t>an</a:t>
+                </a:r>
+                <a:r>
+                  <a:rPr lang="es-CO" sz="1200" dirty="0"/>
+                  <a:t> </a:t>
+                </a:r>
+                <a:r>
+                  <a:rPr lang="es-CO" sz="1200" dirty="0" err="1"/>
+                  <a:t>average</a:t>
+                </a:r>
+                <a:r>
+                  <a:rPr lang="es-CO" sz="1200" dirty="0"/>
+                  <a:t> </a:t>
+                </a:r>
+                <a:r>
+                  <a:rPr lang="es-CO" sz="1200" dirty="0" err="1"/>
+                  <a:t>value</a:t>
+                </a:r>
+                <a:r>
+                  <a:rPr lang="es-CO" sz="1200" dirty="0"/>
+                  <a:t> </a:t>
+                </a:r>
+                <a:r>
+                  <a:rPr lang="es-CO" sz="1200" dirty="0" err="1"/>
+                  <a:t>of</a:t>
+                </a:r>
+                <a:r>
+                  <a:rPr lang="es-CO" sz="1200" dirty="0"/>
+                  <a:t> </a:t>
+                </a:r>
+                <a14:m>
+                  <m:oMath xmlns:m="http://schemas.openxmlformats.org/officeDocument/2006/math">
+                    <m:sSub>
+                      <m:sSubPr>
+                        <m:ctrlPr>
+                          <a:rPr lang="ar-AE" sz="1200"/>
+                        </m:ctrlPr>
+                      </m:sSubPr>
+                      <m:e>
+                        <m:r>
+                          <m:rPr>
+                            <m:sty m:val="p"/>
+                          </m:rPr>
+                          <a:rPr lang="ar-AE" sz="1200" b="0" i="1"/>
+                          <m:t>n</m:t>
+                        </m:r>
+                      </m:e>
+                      <m:sub>
+                        <m:r>
+                          <m:rPr>
+                            <m:nor/>
+                          </m:rPr>
+                          <a:rPr lang="es-CO" sz="1200"/>
+                          <m:t>eff</m:t>
+                        </m:r>
+                      </m:sub>
+                    </m:sSub>
+                    <m:r>
+                      <a:rPr lang="ar-AE" sz="1200" b="0"/>
+                      <m:t>≈</m:t>
+                    </m:r>
+                    <m:r>
+                      <a:rPr lang="ar-AE" sz="1200" b="0"/>
+                      <m:t>2</m:t>
+                    </m:r>
+                    <m:r>
+                      <a:rPr lang="ar-AE" sz="1200" b="0"/>
+                      <m:t>.</m:t>
+                    </m:r>
+                    <m:r>
+                      <a:rPr lang="ar-AE" sz="1200" b="0"/>
+                      <m:t>44</m:t>
+                    </m:r>
+                    <m:r>
+                      <a:rPr lang="es-MX" sz="1200" b="0" i="0" smtClean="0">
+                        <a:latin typeface="Cambria Math" panose="02040503050406030204" pitchFamily="18" charset="0"/>
+                      </a:rPr>
+                      <m:t>3</m:t>
+                    </m:r>
+                  </m:oMath>
+                </a14:m>
+                <a:r>
+                  <a:rPr lang="ar-AE" sz="1200" dirty="0"/>
+                  <a:t>. </a:t>
+                </a:r>
+                <a:endParaRPr lang="es-MX" sz="1200" dirty="0"/>
+              </a:p>
+              <a:p>
+                <a:pPr algn="just"/>
+                <a:r>
+                  <a:rPr lang="en-US" sz="1200" dirty="0"/>
+                  <a:t>For the grid resolution parameter, a larger value subdivides the computational cell into smaller elements, which increases numerical accuracy but also raises the computational cost. Since the objective is to reduce the simulation time a grid resolution of 40 points per micron is selected.</a:t>
+                </a:r>
+              </a:p>
+              <a:p>
+                <a:pPr algn="just"/>
+                <a:r>
+                  <a:rPr lang="en-US" sz="1200" dirty="0"/>
+                  <a:t>For the variation of </a:t>
+                </a:r>
+                <a:r>
+                  <a:rPr lang="en-US" sz="1200" dirty="0" err="1"/>
+                  <a:t>max_grid_scaling</a:t>
+                </a:r>
+                <a:r>
+                  <a:rPr lang="en-US" sz="1200" dirty="0"/>
+                  <a:t>, the grid resolution was fixed at 40, an average effective index of </a:t>
+                </a:r>
+                <a14:m>
+                  <m:oMath xmlns:m="http://schemas.openxmlformats.org/officeDocument/2006/math">
+                    <m:sSub>
+                      <m:sSubPr>
+                        <m:ctrlPr>
+                          <a:rPr lang="es-CO" sz="1200"/>
+                        </m:ctrlPr>
+                      </m:sSubPr>
+                      <m:e>
+                        <m:r>
+                          <a:rPr lang="es-CO" sz="1200"/>
+                          <m:t>𝑛</m:t>
+                        </m:r>
+                      </m:e>
+                      <m:sub>
+                        <m:r>
+                          <m:rPr>
+                            <m:nor/>
+                          </m:rPr>
+                          <a:rPr lang="en-US" sz="1200"/>
+                          <m:t>eff</m:t>
+                        </m:r>
+                      </m:sub>
+                    </m:sSub>
+                    <m:r>
+                      <a:rPr lang="en-US" sz="1200"/>
+                      <m:t>≈</m:t>
+                    </m:r>
+                  </m:oMath>
+                </a14:m>
+                <a:r>
+                  <a:rPr lang="en-US" sz="1200" dirty="0"/>
+                  <a:t>2.478 is obtained in the region where the response stabilizes. In this case, a smaller value of </a:t>
+                </a:r>
+                <a:r>
+                  <a:rPr lang="en-US" sz="1200" dirty="0" err="1"/>
+                  <a:t>max_grid_scaling</a:t>
+                </a:r>
+                <a:r>
+                  <a:rPr lang="en-US" sz="1200" dirty="0"/>
+                  <a:t> results in a finer mesh near material interfaces, improving accuracy but increasing the simulation time. To reduce the computational cost a value of 1.6 was selected.</a:t>
+                </a:r>
+                <a:endParaRPr lang="es-CO" sz="1200" dirty="0"/>
+              </a:p>
+            </p:txBody>
+          </p:sp>
+        </mc:Choice>
+        <mc:Fallback>
+          <p:sp>
+            <p:nvSpPr>
+              <p:cNvPr id="10" name="CuadroTexto 9">
+                <a:extLst>
+                  <a:ext uri="{FF2B5EF4-FFF2-40B4-BE49-F238E27FC236}">
+                    <a16:creationId xmlns:a16="http://schemas.microsoft.com/office/drawing/2014/main" id="{4D35888E-3128-E6DD-BF91-8F58E33F7931}"/>
+                  </a:ext>
+                </a:extLst>
+              </p:cNvPr>
+              <p:cNvSpPr txBox="1">
+                <a:spLocks noRot="1" noChangeAspect="1" noMove="1" noResize="1" noEditPoints="1" noAdjustHandles="1" noChangeArrowheads="1" noChangeShapeType="1" noTextEdit="1"/>
+              </p:cNvSpPr>
+              <p:nvPr/>
+            </p:nvSpPr>
+            <p:spPr>
+              <a:xfrm>
+                <a:off x="601313" y="4993620"/>
+                <a:ext cx="11199971" cy="1407180"/>
+              </a:xfrm>
+              <a:prstGeom prst="rect">
+                <a:avLst/>
+              </a:prstGeom>
+              <a:blipFill>
+                <a:blip r:embed="rId5"/>
+                <a:stretch>
+                  <a:fillRect b="-1271"/>
+                </a:stretch>
+              </a:blipFill>
+              <a:ln w="28575">
+                <a:solidFill>
+                  <a:srgbClr val="E0700D"/>
+                </a:solidFill>
+              </a:ln>
+            </p:spPr>
+            <p:txBody>
+              <a:bodyPr/>
+              <a:lstStyle/>
+              <a:p>
+                <a:r>
+                  <a:rPr lang="es-CO">
+                    <a:noFill/>
+                  </a:rPr>
+                  <a:t> </a:t>
+                </a:r>
+              </a:p>
+            </p:txBody>
+          </p:sp>
+        </mc:Fallback>
+      </mc:AlternateContent>
+      <p:sp>
+        <p:nvSpPr>
+          <p:cNvPr id="4" name="CuadroTexto 3">
+            <a:extLst>
+              <a:ext uri="{FF2B5EF4-FFF2-40B4-BE49-F238E27FC236}">
+                <a16:creationId xmlns:a16="http://schemas.microsoft.com/office/drawing/2014/main" id="{53C3C539-B749-A81F-D386-8E045E7BD068}"/>
+              </a:ext>
+            </a:extLst>
+          </p:cNvPr>
+          <p:cNvSpPr txBox="1"/>
+          <p:nvPr/>
+        </p:nvSpPr>
+        <p:spPr>
+          <a:xfrm>
+            <a:off x="6792815" y="2518668"/>
+            <a:ext cx="4546634" cy="923330"/>
+          </a:xfrm>
+          <a:prstGeom prst="rect">
+            <a:avLst/>
+          </a:prstGeom>
+          <a:noFill/>
+        </p:spPr>
+        <p:txBody>
+          <a:bodyPr wrap="square" rtlCol="0">
+            <a:spAutoFit/>
+          </a:bodyPr>
+          <a:lstStyle/>
+          <a:p>
+            <a:pPr algn="ctr"/>
+            <a:r>
+              <a:rPr lang="en-US" b="1" dirty="0"/>
+              <a:t>deep</a:t>
+            </a:r>
+            <a:r>
+              <a:rPr lang="en-US" dirty="0"/>
+              <a:t> waveguide</a:t>
+            </a:r>
+          </a:p>
+          <a:p>
+            <a:pPr algn="ctr"/>
+            <a:endParaRPr lang="en-US" dirty="0"/>
+          </a:p>
+          <a:p>
+            <a:pPr algn="ctr"/>
+            <a:r>
+              <a:rPr lang="en-US" dirty="0"/>
+              <a:t>Paste neff_TE0 vs </a:t>
+            </a:r>
+            <a:r>
+              <a:rPr lang="en-US" dirty="0" err="1"/>
+              <a:t>max_grid_scaling</a:t>
+            </a:r>
+            <a:r>
+              <a:rPr lang="en-US" dirty="0"/>
+              <a:t> plot here</a:t>
+            </a:r>
+          </a:p>
+        </p:txBody>
+      </p:sp>
+      <p:pic>
+        <p:nvPicPr>
+          <p:cNvPr id="7" name="Picture 6">
+            <a:extLst>
+              <a:ext uri="{FF2B5EF4-FFF2-40B4-BE49-F238E27FC236}">
+                <a16:creationId xmlns:a16="http://schemas.microsoft.com/office/drawing/2014/main" id="{6F829E8C-7F1D-56E2-F252-36E6095521BF}"/>
+              </a:ext>
+            </a:extLst>
+          </p:cNvPr>
+          <p:cNvPicPr>
+            <a:picLocks noChangeAspect="1"/>
+          </p:cNvPicPr>
+          <p:nvPr/>
+        </p:nvPicPr>
+        <p:blipFill>
+          <a:blip r:embed="rId6">
+            <a:extLst>
+              <a:ext uri="{28A0092B-C50C-407E-A947-70E740481C1C}">
+                <a14:useLocalDpi xmlns:a14="http://schemas.microsoft.com/office/drawing/2010/main" val="0"/>
+              </a:ext>
+            </a:extLst>
+          </a:blip>
+          <a:stretch>
+            <a:fillRect/>
+          </a:stretch>
+        </p:blipFill>
+        <p:spPr>
+          <a:xfrm>
+            <a:off x="678094" y="933450"/>
+            <a:ext cx="5349251" cy="4023368"/>
+          </a:xfrm>
+          <a:prstGeom prst="rect">
+            <a:avLst/>
+          </a:prstGeom>
+        </p:spPr>
+      </p:pic>
+      <p:sp>
+        <p:nvSpPr>
+          <p:cNvPr id="6" name="Rectángulo 5">
+            <a:extLst>
+              <a:ext uri="{FF2B5EF4-FFF2-40B4-BE49-F238E27FC236}">
+                <a16:creationId xmlns:a16="http://schemas.microsoft.com/office/drawing/2014/main" id="{1E35CD35-CE32-257D-C368-73A058347163}"/>
+              </a:ext>
+            </a:extLst>
+          </p:cNvPr>
+          <p:cNvSpPr/>
+          <p:nvPr/>
+        </p:nvSpPr>
+        <p:spPr>
+          <a:xfrm>
+            <a:off x="601313" y="914400"/>
+            <a:ext cx="5486559" cy="4037090"/>
+          </a:xfrm>
+          <a:prstGeom prst="rect">
+            <a:avLst/>
+          </a:prstGeom>
+          <a:noFill/>
+          <a:ln w="28575">
+            <a:solidFill>
+              <a:srgbClr val="E0700D"/>
+            </a:solidFill>
+          </a:ln>
+        </p:spPr>
+        <p:style>
+          <a:lnRef idx="2">
+            <a:schemeClr val="accent1">
+              <a:shade val="15000"/>
+            </a:schemeClr>
+          </a:lnRef>
+          <a:fillRef idx="1">
+            <a:schemeClr val="accent1"/>
+          </a:fillRef>
+          <a:effectRef idx="0">
+            <a:schemeClr val="accent1"/>
+          </a:effectRef>
+          <a:fontRef idx="minor">
+            <a:schemeClr val="lt1"/>
+          </a:fontRef>
+        </p:style>
+        <p:txBody>
+          <a:bodyPr rtlCol="0" anchor="ctr"/>
+          <a:lstStyle/>
+          <a:p>
+            <a:pPr algn="ctr"/>
+            <a:endParaRPr lang="en-US"/>
+          </a:p>
+        </p:txBody>
+      </p:sp>
+      <p:pic>
+        <p:nvPicPr>
+          <p:cNvPr id="12" name="Picture 11">
+            <a:extLst>
+              <a:ext uri="{FF2B5EF4-FFF2-40B4-BE49-F238E27FC236}">
+                <a16:creationId xmlns:a16="http://schemas.microsoft.com/office/drawing/2014/main" id="{D72D6E9D-FA1C-FD4D-4F2C-71286AF6DC01}"/>
+              </a:ext>
+            </a:extLst>
+          </p:cNvPr>
+          <p:cNvPicPr>
+            <a:picLocks noChangeAspect="1"/>
+          </p:cNvPicPr>
+          <p:nvPr/>
+        </p:nvPicPr>
+        <p:blipFill>
+          <a:blip r:embed="rId7">
+            <a:extLst>
+              <a:ext uri="{28A0092B-C50C-407E-A947-70E740481C1C}">
+                <a14:useLocalDpi xmlns:a14="http://schemas.microsoft.com/office/drawing/2010/main" val="0"/>
+              </a:ext>
+            </a:extLst>
+          </a:blip>
+          <a:stretch>
+            <a:fillRect/>
+          </a:stretch>
+        </p:blipFill>
+        <p:spPr>
+          <a:xfrm>
+            <a:off x="6324600" y="933450"/>
+            <a:ext cx="5440691" cy="4023368"/>
+          </a:xfrm>
+          <a:prstGeom prst="rect">
+            <a:avLst/>
+          </a:prstGeom>
+        </p:spPr>
+      </p:pic>
+      <p:sp>
+        <p:nvSpPr>
+          <p:cNvPr id="13" name="Rectángulo 5">
+            <a:extLst>
+              <a:ext uri="{FF2B5EF4-FFF2-40B4-BE49-F238E27FC236}">
+                <a16:creationId xmlns:a16="http://schemas.microsoft.com/office/drawing/2014/main" id="{09D930E7-805D-1907-0781-EE088CE13B64}"/>
+              </a:ext>
+            </a:extLst>
+          </p:cNvPr>
+          <p:cNvSpPr/>
+          <p:nvPr/>
+        </p:nvSpPr>
+        <p:spPr>
+          <a:xfrm>
+            <a:off x="6324441" y="915910"/>
+            <a:ext cx="5486559" cy="4037090"/>
+          </a:xfrm>
+          <a:prstGeom prst="rect">
+            <a:avLst/>
+          </a:prstGeom>
+          <a:noFill/>
+          <a:ln w="28575">
+            <a:solidFill>
+              <a:srgbClr val="E0700D"/>
+            </a:solidFill>
+          </a:ln>
+        </p:spPr>
+        <p:style>
+          <a:lnRef idx="2">
+            <a:schemeClr val="accent1">
+              <a:shade val="15000"/>
+            </a:schemeClr>
+          </a:lnRef>
+          <a:fillRef idx="1">
+            <a:schemeClr val="accent1"/>
+          </a:fillRef>
+          <a:effectRef idx="0">
+            <a:schemeClr val="accent1"/>
+          </a:effectRef>
+          <a:fontRef idx="minor">
+            <a:schemeClr val="lt1"/>
+          </a:fontRef>
+        </p:style>
+        <p:txBody>
+          <a:bodyPr rtlCol="0" anchor="ctr"/>
+          <a:lstStyle/>
+          <a:p>
+            <a:pPr algn="ctr"/>
+            <a:endParaRPr lang="en-US"/>
+          </a:p>
+        </p:txBody>
+      </p:sp>
+    </p:spTree>
+    <p:extLst>
+      <p:ext uri="{BB962C8B-B14F-4D97-AF65-F5344CB8AC3E}">
+        <p14:creationId xmlns:p14="http://schemas.microsoft.com/office/powerpoint/2010/main" val="1788515462"/>
+      </p:ext>
+    </p:extLst>
+  </p:cSld>
+  <p:clrMapOvr>
+    <a:masterClrMapping/>
+  </p:clrMapOvr>
+</p:sld>
+</file>
+
+<file path=ppt/slides/slide11.xml><?xml version="1.0" encoding="utf-8"?>
+<p:sld xmlns:a="http://schemas.openxmlformats.org/drawingml/2006/main" xmlns:r="http://schemas.openxmlformats.org/officeDocument/2006/relationships" xmlns:p="http://schemas.openxmlformats.org/presentationml/2006/main">
+  <p:cSld>
+    <p:spTree>
+      <p:nvGrpSpPr>
+        <p:cNvPr id="1" name="">
+          <a:extLst>
+            <a:ext uri="{FF2B5EF4-FFF2-40B4-BE49-F238E27FC236}">
+              <a16:creationId xmlns:a16="http://schemas.microsoft.com/office/drawing/2014/main" id="{480ABAA4-6266-7FD4-6E85-790EBFC2F812}"/>
+            </a:ext>
+          </a:extLst>
+        </p:cNvPr>
+        <p:cNvGrpSpPr/>
+        <p:nvPr/>
+      </p:nvGrpSpPr>
+      <p:grpSpPr>
+        <a:xfrm>
+          <a:off x="0" y="0"/>
+          <a:ext cx="0" cy="0"/>
+          <a:chOff x="0" y="0"/>
+          <a:chExt cx="0" cy="0"/>
+        </a:xfrm>
+      </p:grpSpPr>
+      <p:pic>
+        <p:nvPicPr>
+          <p:cNvPr id="83" name="Gráfico 82">
+            <a:extLst>
+              <a:ext uri="{FF2B5EF4-FFF2-40B4-BE49-F238E27FC236}">
+                <a16:creationId xmlns:a16="http://schemas.microsoft.com/office/drawing/2014/main" id="{1135843E-1455-DF05-89A5-388958040F27}"/>
+              </a:ext>
+            </a:extLst>
+          </p:cNvPr>
+          <p:cNvPicPr>
+            <a:picLocks noChangeAspect="1"/>
+          </p:cNvPicPr>
+          <p:nvPr/>
+        </p:nvPicPr>
+        <p:blipFill>
+          <a:blip r:embed="rId3">
+            <a:extLst>
+              <a:ext uri="{96DAC541-7B7A-43D3-8B79-37D633B846F1}">
+                <asvg:svgBlip xmlns:asvg="http://schemas.microsoft.com/office/drawing/2016/SVG/main" r:embed="rId4"/>
+              </a:ext>
+            </a:extLst>
+          </a:blip>
+          <a:stretch>
+            <a:fillRect/>
+          </a:stretch>
+        </p:blipFill>
+        <p:spPr>
+          <a:xfrm>
+            <a:off x="5045006" y="6356057"/>
+            <a:ext cx="6409575" cy="363174"/>
+          </a:xfrm>
+          <a:prstGeom prst="rect">
+            <a:avLst/>
+          </a:prstGeom>
+        </p:spPr>
+      </p:pic>
+      <p:sp>
+        <p:nvSpPr>
+          <p:cNvPr id="84" name="Marcador de número de diapositiva 83">
+            <a:extLst>
+              <a:ext uri="{FF2B5EF4-FFF2-40B4-BE49-F238E27FC236}">
+                <a16:creationId xmlns:a16="http://schemas.microsoft.com/office/drawing/2014/main" id="{6E48B71E-B9F5-67B0-1307-4D8FAA52C4D3}"/>
+              </a:ext>
+            </a:extLst>
+          </p:cNvPr>
+          <p:cNvSpPr>
+            <a:spLocks noGrp="1"/>
+          </p:cNvSpPr>
+          <p:nvPr>
+            <p:ph type="sldNum" sz="quarter" idx="7"/>
+          </p:nvPr>
+        </p:nvSpPr>
+        <p:spPr/>
+        <p:txBody>
+          <a:bodyPr/>
+          <a:lstStyle/>
+          <a:p>
+            <a:fld id="{B6F15528-21DE-4FAA-801E-634DDDAF4B2B}" type="slidenum">
+              <a:rPr lang="es-ES" smtClean="0"/>
+              <a:t>11</a:t>
+            </a:fld>
+            <a:endParaRPr lang="es-ES"/>
+          </a:p>
+        </p:txBody>
+      </p:sp>
+      <p:sp>
+        <p:nvSpPr>
+          <p:cNvPr id="3" name="Marcador de pie de página 2">
+            <a:extLst>
+              <a:ext uri="{FF2B5EF4-FFF2-40B4-BE49-F238E27FC236}">
+                <a16:creationId xmlns:a16="http://schemas.microsoft.com/office/drawing/2014/main" id="{21E2304A-D8B2-C518-5A68-FDE3D8F9BC27}"/>
+              </a:ext>
+            </a:extLst>
+          </p:cNvPr>
+          <p:cNvSpPr>
+            <a:spLocks noGrp="1"/>
+          </p:cNvSpPr>
+          <p:nvPr>
+            <p:ph type="ftr" sz="quarter" idx="5"/>
+          </p:nvPr>
+        </p:nvSpPr>
+        <p:spPr/>
+        <p:txBody>
+          <a:bodyPr/>
+          <a:lstStyle/>
+          <a:p>
+            <a:pPr marL="12700">
+              <a:spcBef>
+                <a:spcPts val="15"/>
+              </a:spcBef>
+            </a:pPr>
+            <a:r>
+              <a:rPr lang="es-ES" spc="-5"/>
+              <a:t>LAB 1.0. WAVEGUIDES</a:t>
+            </a:r>
+            <a:endParaRPr lang="es-ES" spc="-5" dirty="0"/>
+          </a:p>
+        </p:txBody>
+      </p:sp>
+      <p:sp>
+        <p:nvSpPr>
+          <p:cNvPr id="8" name="CuadroTexto 7">
+            <a:extLst>
+              <a:ext uri="{FF2B5EF4-FFF2-40B4-BE49-F238E27FC236}">
+                <a16:creationId xmlns:a16="http://schemas.microsoft.com/office/drawing/2014/main" id="{9A8F0443-F878-E4CB-7E4C-58B83D20B4D5}"/>
+              </a:ext>
+            </a:extLst>
+          </p:cNvPr>
+          <p:cNvSpPr txBox="1"/>
+          <p:nvPr/>
+        </p:nvSpPr>
+        <p:spPr>
+          <a:xfrm>
+            <a:off x="1079403" y="2528813"/>
+            <a:ext cx="4546634" cy="923330"/>
+          </a:xfrm>
+          <a:prstGeom prst="rect">
+            <a:avLst/>
+          </a:prstGeom>
+          <a:noFill/>
+        </p:spPr>
+        <p:txBody>
+          <a:bodyPr wrap="square" rtlCol="0">
+            <a:spAutoFit/>
+          </a:bodyPr>
+          <a:lstStyle/>
+          <a:p>
+            <a:pPr algn="ctr"/>
+            <a:r>
+              <a:rPr lang="en-US" b="1" dirty="0"/>
+              <a:t>deep</a:t>
+            </a:r>
+            <a:r>
+              <a:rPr lang="en-US" dirty="0"/>
+              <a:t> waveguide</a:t>
+            </a:r>
+          </a:p>
+          <a:p>
+            <a:pPr algn="ctr"/>
+            <a:endParaRPr lang="en-US" dirty="0"/>
+          </a:p>
+          <a:p>
+            <a:pPr algn="ctr"/>
+            <a:r>
+              <a:rPr lang="en-US" dirty="0"/>
+              <a:t>Paste neff_TE0 vs </a:t>
+            </a:r>
+            <a:r>
+              <a:rPr lang="en-US" dirty="0" err="1"/>
+              <a:t>grid_resolution</a:t>
+            </a:r>
+            <a:r>
+              <a:rPr lang="en-US" dirty="0"/>
+              <a:t> plot here</a:t>
+            </a:r>
+          </a:p>
+        </p:txBody>
+      </p:sp>
+      <p:sp>
+        <p:nvSpPr>
+          <p:cNvPr id="10" name="CuadroTexto 9">
+            <a:extLst>
+              <a:ext uri="{FF2B5EF4-FFF2-40B4-BE49-F238E27FC236}">
+                <a16:creationId xmlns:a16="http://schemas.microsoft.com/office/drawing/2014/main" id="{631DE65C-6ADA-3F08-4180-4FE9CA3737D9}"/>
+              </a:ext>
+            </a:extLst>
+          </p:cNvPr>
+          <p:cNvSpPr txBox="1"/>
+          <p:nvPr/>
+        </p:nvSpPr>
+        <p:spPr>
+          <a:xfrm>
+            <a:off x="593693" y="5015552"/>
+            <a:ext cx="11199971" cy="461665"/>
+          </a:xfrm>
+          <a:prstGeom prst="rect">
+            <a:avLst/>
+          </a:prstGeom>
+          <a:solidFill>
+            <a:schemeClr val="bg1">
+              <a:lumMod val="95000"/>
+            </a:schemeClr>
+          </a:solidFill>
+          <a:ln w="28575">
+            <a:solidFill>
+              <a:srgbClr val="E0700D"/>
+            </a:solidFill>
+          </a:ln>
+        </p:spPr>
+        <p:txBody>
+          <a:bodyPr wrap="square" rtlCol="0">
+            <a:spAutoFit/>
+          </a:bodyPr>
+          <a:lstStyle/>
+          <a:p>
+            <a:pPr algn="just"/>
+            <a:r>
+              <a:rPr lang="en-US" sz="1200" dirty="0"/>
+              <a:t>The results show that increasing the waveguide width allows additional modes to propagate within the core. As previously observed for </a:t>
+            </a:r>
+            <a:r>
+              <a:rPr lang="en-US" sz="1200" dirty="0" err="1"/>
+              <a:t>Si₃N</a:t>
+            </a:r>
+            <a:r>
+              <a:rPr lang="en-US" sz="1200" dirty="0"/>
+              <a:t>₄ core waveguides, a thickness of 1.2 µm is sufficient to ensure single-mode operation. In contrast, for a silicon core waveguide with a width of 500 nm, the structure is close to the multimode regime</a:t>
+            </a:r>
+            <a:endParaRPr lang="es-CO" sz="1200" dirty="0"/>
+          </a:p>
+        </p:txBody>
+      </p:sp>
+      <p:sp>
+        <p:nvSpPr>
+          <p:cNvPr id="4" name="CuadroTexto 3">
+            <a:extLst>
+              <a:ext uri="{FF2B5EF4-FFF2-40B4-BE49-F238E27FC236}">
+                <a16:creationId xmlns:a16="http://schemas.microsoft.com/office/drawing/2014/main" id="{51C49BC6-A573-8600-007C-34B54CD68F97}"/>
+              </a:ext>
+            </a:extLst>
+          </p:cNvPr>
+          <p:cNvSpPr txBox="1"/>
+          <p:nvPr/>
+        </p:nvSpPr>
+        <p:spPr>
+          <a:xfrm>
+            <a:off x="6792815" y="2518668"/>
+            <a:ext cx="4546634" cy="923330"/>
+          </a:xfrm>
+          <a:prstGeom prst="rect">
+            <a:avLst/>
+          </a:prstGeom>
+          <a:noFill/>
+        </p:spPr>
+        <p:txBody>
+          <a:bodyPr wrap="square" rtlCol="0">
+            <a:spAutoFit/>
+          </a:bodyPr>
+          <a:lstStyle/>
+          <a:p>
+            <a:pPr algn="ctr"/>
+            <a:r>
+              <a:rPr lang="en-US" b="1" dirty="0"/>
+              <a:t>deep</a:t>
+            </a:r>
+            <a:r>
+              <a:rPr lang="en-US" dirty="0"/>
+              <a:t> waveguide</a:t>
+            </a:r>
+          </a:p>
+          <a:p>
+            <a:pPr algn="ctr"/>
+            <a:endParaRPr lang="en-US" dirty="0"/>
+          </a:p>
+          <a:p>
+            <a:pPr algn="ctr"/>
+            <a:r>
+              <a:rPr lang="en-US" dirty="0"/>
+              <a:t>Paste neff_TE0 vs </a:t>
+            </a:r>
+            <a:r>
+              <a:rPr lang="en-US" dirty="0" err="1"/>
+              <a:t>max_grid_scaling</a:t>
+            </a:r>
+            <a:r>
+              <a:rPr lang="en-US" dirty="0"/>
+              <a:t> plot here</a:t>
+            </a:r>
+          </a:p>
+        </p:txBody>
+      </p:sp>
+      <p:sp>
+        <p:nvSpPr>
+          <p:cNvPr id="14" name="object 16">
+            <a:extLst>
+              <a:ext uri="{FF2B5EF4-FFF2-40B4-BE49-F238E27FC236}">
+                <a16:creationId xmlns:a16="http://schemas.microsoft.com/office/drawing/2014/main" id="{5D5A02B1-B86F-BC07-895D-EC8A019DB1DA}"/>
+              </a:ext>
+            </a:extLst>
+          </p:cNvPr>
+          <p:cNvSpPr txBox="1">
+            <a:spLocks/>
+          </p:cNvSpPr>
+          <p:nvPr/>
+        </p:nvSpPr>
+        <p:spPr>
+          <a:xfrm>
+            <a:off x="128832" y="30387"/>
+            <a:ext cx="10994410" cy="705321"/>
+          </a:xfrm>
+          <a:prstGeom prst="rect">
+            <a:avLst/>
+          </a:prstGeom>
+        </p:spPr>
+        <p:txBody>
+          <a:bodyPr vert="horz" wrap="square" lIns="0" tIns="12700" rIns="0" bIns="0" rtlCol="0">
+            <a:spAutoFit/>
+          </a:bodyPr>
+          <a:lstStyle>
+            <a:lvl1pPr>
+              <a:defRPr sz="2000" b="1" i="0">
+                <a:solidFill>
+                  <a:schemeClr val="tx1"/>
+                </a:solidFill>
+                <a:latin typeface="Calibri"/>
+                <a:ea typeface="+mj-ea"/>
+                <a:cs typeface="Calibri"/>
+              </a:defRPr>
+            </a:lvl1pPr>
+          </a:lstStyle>
+          <a:p>
+            <a:pPr marL="12700">
+              <a:spcBef>
+                <a:spcPts val="100"/>
+              </a:spcBef>
+            </a:pPr>
+            <a:r>
+              <a:rPr lang="en-US" sz="2500" kern="0" dirty="0"/>
+              <a:t>Learning outcome #2 – Width dependence</a:t>
+            </a:r>
+            <a:br>
+              <a:rPr lang="en-US" sz="2500" kern="0" spc="-5" dirty="0">
+                <a:latin typeface="+mj-lt"/>
+                <a:cs typeface="Lucida Sans"/>
+              </a:rPr>
+            </a:br>
+            <a:r>
+              <a:rPr lang="en-US" b="0" kern="0" dirty="0"/>
+              <a:t>Width 0.6 - 1.6 µm (step 0.1 µm) Si core, Width 0.3 - 1.0 µm (step 0.1 µm) Si core – Wavelength 1.55 µm </a:t>
+            </a:r>
+            <a:endParaRPr lang="en-US" sz="2500" b="0" kern="0" dirty="0">
+              <a:latin typeface="+mj-lt"/>
+              <a:cs typeface="Lucida Sans"/>
+            </a:endParaRPr>
+          </a:p>
+        </p:txBody>
+      </p:sp>
+      <p:pic>
+        <p:nvPicPr>
+          <p:cNvPr id="17" name="Picture 16">
+            <a:extLst>
+              <a:ext uri="{FF2B5EF4-FFF2-40B4-BE49-F238E27FC236}">
+                <a16:creationId xmlns:a16="http://schemas.microsoft.com/office/drawing/2014/main" id="{1374FAC2-458E-C07A-077A-395769864C98}"/>
+              </a:ext>
+            </a:extLst>
+          </p:cNvPr>
+          <p:cNvPicPr>
+            <a:picLocks noChangeAspect="1"/>
+          </p:cNvPicPr>
+          <p:nvPr/>
+        </p:nvPicPr>
+        <p:blipFill>
+          <a:blip r:embed="rId5">
+            <a:extLst>
+              <a:ext uri="{28A0092B-C50C-407E-A947-70E740481C1C}">
+                <a14:useLocalDpi xmlns:a14="http://schemas.microsoft.com/office/drawing/2010/main" val="0"/>
+              </a:ext>
+            </a:extLst>
+          </a:blip>
+          <a:stretch>
+            <a:fillRect/>
+          </a:stretch>
+        </p:blipFill>
+        <p:spPr>
+          <a:xfrm>
+            <a:off x="678094" y="949187"/>
+            <a:ext cx="5349251" cy="4023368"/>
+          </a:xfrm>
+          <a:prstGeom prst="rect">
+            <a:avLst/>
+          </a:prstGeom>
+        </p:spPr>
+      </p:pic>
+      <p:pic>
+        <p:nvPicPr>
+          <p:cNvPr id="19" name="Picture 18">
+            <a:extLst>
+              <a:ext uri="{FF2B5EF4-FFF2-40B4-BE49-F238E27FC236}">
+                <a16:creationId xmlns:a16="http://schemas.microsoft.com/office/drawing/2014/main" id="{CCA9FA3A-CB99-DBAE-0518-860524C2F7DA}"/>
+              </a:ext>
+            </a:extLst>
+          </p:cNvPr>
+          <p:cNvPicPr>
+            <a:picLocks noChangeAspect="1"/>
+          </p:cNvPicPr>
+          <p:nvPr/>
+        </p:nvPicPr>
+        <p:blipFill>
+          <a:blip r:embed="rId6">
+            <a:extLst>
+              <a:ext uri="{28A0092B-C50C-407E-A947-70E740481C1C}">
+                <a14:useLocalDpi xmlns:a14="http://schemas.microsoft.com/office/drawing/2010/main" val="0"/>
+              </a:ext>
+            </a:extLst>
+          </a:blip>
+          <a:stretch>
+            <a:fillRect/>
+          </a:stretch>
+        </p:blipFill>
+        <p:spPr>
+          <a:xfrm>
+            <a:off x="6384968" y="930437"/>
+            <a:ext cx="5349251" cy="4023368"/>
+          </a:xfrm>
+          <a:prstGeom prst="rect">
+            <a:avLst/>
+          </a:prstGeom>
+        </p:spPr>
+      </p:pic>
+      <p:sp>
+        <p:nvSpPr>
+          <p:cNvPr id="6" name="Rectángulo 5">
+            <a:extLst>
+              <a:ext uri="{FF2B5EF4-FFF2-40B4-BE49-F238E27FC236}">
+                <a16:creationId xmlns:a16="http://schemas.microsoft.com/office/drawing/2014/main" id="{8FB56EBD-DF06-6E15-1F95-422244521D22}"/>
+              </a:ext>
+            </a:extLst>
+          </p:cNvPr>
+          <p:cNvSpPr/>
+          <p:nvPr/>
+        </p:nvSpPr>
+        <p:spPr>
+          <a:xfrm>
+            <a:off x="601313" y="914400"/>
+            <a:ext cx="5486559" cy="4023368"/>
+          </a:xfrm>
+          <a:prstGeom prst="rect">
+            <a:avLst/>
+          </a:prstGeom>
+          <a:noFill/>
+          <a:ln w="28575">
+            <a:solidFill>
+              <a:srgbClr val="E0700D"/>
+            </a:solidFill>
+          </a:ln>
+        </p:spPr>
+        <p:style>
+          <a:lnRef idx="2">
+            <a:schemeClr val="accent1">
+              <a:shade val="15000"/>
+            </a:schemeClr>
+          </a:lnRef>
+          <a:fillRef idx="1">
+            <a:schemeClr val="accent1"/>
+          </a:fillRef>
+          <a:effectRef idx="0">
+            <a:schemeClr val="accent1"/>
+          </a:effectRef>
+          <a:fontRef idx="minor">
+            <a:schemeClr val="lt1"/>
+          </a:fontRef>
+        </p:style>
+        <p:txBody>
+          <a:bodyPr rtlCol="0" anchor="ctr"/>
+          <a:lstStyle/>
+          <a:p>
+            <a:pPr algn="ctr"/>
+            <a:endParaRPr lang="en-US"/>
+          </a:p>
+        </p:txBody>
+      </p:sp>
+      <p:sp>
+        <p:nvSpPr>
+          <p:cNvPr id="20" name="Rectángulo 5">
+            <a:extLst>
+              <a:ext uri="{FF2B5EF4-FFF2-40B4-BE49-F238E27FC236}">
+                <a16:creationId xmlns:a16="http://schemas.microsoft.com/office/drawing/2014/main" id="{B653B700-A7E8-5846-680D-2BD02352F046}"/>
+              </a:ext>
+            </a:extLst>
+          </p:cNvPr>
+          <p:cNvSpPr/>
+          <p:nvPr/>
+        </p:nvSpPr>
+        <p:spPr>
+          <a:xfrm>
+            <a:off x="6307105" y="914400"/>
+            <a:ext cx="5486559" cy="4023368"/>
+          </a:xfrm>
+          <a:prstGeom prst="rect">
+            <a:avLst/>
+          </a:prstGeom>
+          <a:noFill/>
+          <a:ln w="28575">
+            <a:solidFill>
+              <a:srgbClr val="E0700D"/>
+            </a:solidFill>
+          </a:ln>
+        </p:spPr>
+        <p:style>
+          <a:lnRef idx="2">
+            <a:schemeClr val="accent1">
+              <a:shade val="15000"/>
+            </a:schemeClr>
+          </a:lnRef>
+          <a:fillRef idx="1">
+            <a:schemeClr val="accent1"/>
+          </a:fillRef>
+          <a:effectRef idx="0">
+            <a:schemeClr val="accent1"/>
+          </a:effectRef>
+          <a:fontRef idx="minor">
+            <a:schemeClr val="lt1"/>
+          </a:fontRef>
+        </p:style>
+        <p:txBody>
+          <a:bodyPr rtlCol="0" anchor="ctr"/>
+          <a:lstStyle/>
+          <a:p>
+            <a:pPr algn="ctr"/>
+            <a:endParaRPr lang="en-US"/>
+          </a:p>
+        </p:txBody>
+      </p:sp>
+      <p:pic>
+        <p:nvPicPr>
+          <p:cNvPr id="5" name="Picture 4">
+            <a:extLst>
+              <a:ext uri="{FF2B5EF4-FFF2-40B4-BE49-F238E27FC236}">
+                <a16:creationId xmlns:a16="http://schemas.microsoft.com/office/drawing/2014/main" id="{1DFBD88E-CE16-94A9-86A9-BE1BCC5C812B}"/>
+              </a:ext>
+            </a:extLst>
+          </p:cNvPr>
+          <p:cNvPicPr>
+            <a:picLocks noChangeAspect="1"/>
+          </p:cNvPicPr>
+          <p:nvPr/>
+        </p:nvPicPr>
+        <p:blipFill>
+          <a:blip r:embed="rId7"/>
+          <a:stretch>
+            <a:fillRect/>
+          </a:stretch>
+        </p:blipFill>
+        <p:spPr>
+          <a:xfrm>
+            <a:off x="5768589" y="4082475"/>
+            <a:ext cx="857800" cy="749732"/>
+          </a:xfrm>
+          <a:prstGeom prst="rect">
+            <a:avLst/>
+          </a:prstGeom>
+        </p:spPr>
+      </p:pic>
+    </p:spTree>
+    <p:extLst>
+      <p:ext uri="{BB962C8B-B14F-4D97-AF65-F5344CB8AC3E}">
+        <p14:creationId xmlns:p14="http://schemas.microsoft.com/office/powerpoint/2010/main" val="1379152177"/>
+      </p:ext>
+    </p:extLst>
+  </p:cSld>
+  <p:clrMapOvr>
+    <a:masterClrMapping/>
+  </p:clrMapOvr>
+</p:sld>
+</file>
+
+<file path=ppt/slides/slide12.xml><?xml version="1.0" encoding="utf-8"?>
+<p:sld xmlns:a="http://schemas.openxmlformats.org/drawingml/2006/main" xmlns:r="http://schemas.openxmlformats.org/officeDocument/2006/relationships" xmlns:p="http://schemas.openxmlformats.org/presentationml/2006/main">
+  <p:cSld>
+    <p:spTree>
+      <p:nvGrpSpPr>
+        <p:cNvPr id="1" name=""/>
+        <p:cNvGrpSpPr/>
+        <p:nvPr/>
+      </p:nvGrpSpPr>
+      <p:grpSpPr>
+        <a:xfrm>
+          <a:off x="0" y="0"/>
+          <a:ext cx="0" cy="0"/>
+          <a:chOff x="0" y="0"/>
+          <a:chExt cx="0" cy="0"/>
+        </a:xfrm>
+      </p:grpSpPr>
+      <p:sp>
+        <p:nvSpPr>
+          <p:cNvPr id="3" name="object 3"/>
+          <p:cNvSpPr/>
+          <p:nvPr/>
+        </p:nvSpPr>
+        <p:spPr>
+          <a:xfrm>
+            <a:off x="3945635" y="2636520"/>
+            <a:ext cx="8246363" cy="1584959"/>
+          </a:xfrm>
+          <a:prstGeom prst="rect">
+            <a:avLst/>
+          </a:prstGeom>
+          <a:blipFill>
+            <a:blip r:embed="rId2" cstate="print"/>
+            <a:stretch>
+              <a:fillRect/>
+            </a:stretch>
+          </a:blipFill>
+        </p:spPr>
+        <p:txBody>
+          <a:bodyPr wrap="square" lIns="0" tIns="0" rIns="0" bIns="0" rtlCol="0"/>
+          <a:lstStyle/>
+          <a:p>
+            <a:endParaRPr/>
+          </a:p>
+        </p:txBody>
+      </p:sp>
+      <p:sp>
+        <p:nvSpPr>
+          <p:cNvPr id="4" name="object 4"/>
+          <p:cNvSpPr txBox="1">
+            <a:spLocks noGrp="1"/>
+          </p:cNvSpPr>
+          <p:nvPr>
+            <p:ph type="title"/>
+          </p:nvPr>
+        </p:nvSpPr>
+        <p:spPr>
+          <a:xfrm>
+            <a:off x="4513326" y="3165729"/>
+            <a:ext cx="2233295" cy="513715"/>
+          </a:xfrm>
+          <a:prstGeom prst="rect">
+            <a:avLst/>
+          </a:prstGeom>
+        </p:spPr>
+        <p:txBody>
+          <a:bodyPr vert="horz" wrap="square" lIns="0" tIns="13335" rIns="0" bIns="0" rtlCol="0">
+            <a:spAutoFit/>
+          </a:bodyPr>
+          <a:lstStyle/>
+          <a:p>
+            <a:pPr marL="12700">
+              <a:lnSpc>
+                <a:spcPct val="100000"/>
+              </a:lnSpc>
+              <a:spcBef>
+                <a:spcPts val="105"/>
+              </a:spcBef>
+            </a:pPr>
+            <a:r>
+              <a:rPr sz="3200" b="1" spc="-5" dirty="0">
+                <a:solidFill>
+                  <a:srgbClr val="FFFFFF"/>
+                </a:solidFill>
+                <a:latin typeface="Lucida Sans"/>
+                <a:cs typeface="Lucida Sans"/>
+              </a:rPr>
+              <a:t>Thank</a:t>
+            </a:r>
+            <a:r>
+              <a:rPr sz="3200" b="1" spc="-55" dirty="0">
+                <a:solidFill>
+                  <a:srgbClr val="FFFFFF"/>
+                </a:solidFill>
+                <a:latin typeface="Lucida Sans"/>
+                <a:cs typeface="Lucida Sans"/>
+              </a:rPr>
+              <a:t> </a:t>
+            </a:r>
+            <a:r>
+              <a:rPr sz="3200" b="1" dirty="0">
+                <a:solidFill>
+                  <a:srgbClr val="FFFFFF"/>
+                </a:solidFill>
+                <a:latin typeface="Lucida Sans"/>
+                <a:cs typeface="Lucida Sans"/>
+              </a:rPr>
+              <a:t>you</a:t>
+            </a:r>
+            <a:endParaRPr sz="3200">
+              <a:latin typeface="Lucida Sans"/>
+              <a:cs typeface="Lucida Sans"/>
+            </a:endParaRPr>
+          </a:p>
+        </p:txBody>
+      </p:sp>
+      <p:sp>
+        <p:nvSpPr>
+          <p:cNvPr id="5" name="Marcador de número de diapositiva 4">
+            <a:extLst>
+              <a:ext uri="{FF2B5EF4-FFF2-40B4-BE49-F238E27FC236}">
+                <a16:creationId xmlns:a16="http://schemas.microsoft.com/office/drawing/2014/main" id="{B052DA19-AD24-7D24-2AE9-51F8F5A7F5E0}"/>
+              </a:ext>
+            </a:extLst>
+          </p:cNvPr>
+          <p:cNvSpPr>
+            <a:spLocks noGrp="1"/>
+          </p:cNvSpPr>
+          <p:nvPr>
+            <p:ph type="sldNum" sz="quarter" idx="7"/>
+          </p:nvPr>
+        </p:nvSpPr>
+        <p:spPr/>
+        <p:txBody>
+          <a:bodyPr/>
+          <a:lstStyle/>
+          <a:p>
+            <a:fld id="{B6F15528-21DE-4FAA-801E-634DDDAF4B2B}" type="slidenum">
+              <a:rPr lang="es-ES" smtClean="0"/>
+              <a:t>12</a:t>
+            </a:fld>
+            <a:endParaRPr lang="es-ES"/>
+          </a:p>
+        </p:txBody>
+      </p:sp>
+    </p:spTree>
+  </p:cSld>
+  <p:clrMapOvr>
+    <a:masterClrMapping/>
+  </p:clrMapOvr>
+</p:sld>
+</file>
+
 <file path=ppt/slides/slide2.xml><?xml version="1.0" encoding="utf-8"?>
 <p:sld xmlns:a="http://schemas.openxmlformats.org/drawingml/2006/main" xmlns:r="http://schemas.openxmlformats.org/officeDocument/2006/relationships" xmlns:p="http://schemas.openxmlformats.org/presentationml/2006/main">
   <p:cSld>
@@ -4797,7 +6849,7 @@
         <p:cNvPr id="1" name="">
           <a:extLst>
             <a:ext uri="{FF2B5EF4-FFF2-40B4-BE49-F238E27FC236}">
-              <a16:creationId xmlns:a16="http://schemas.microsoft.com/office/drawing/2014/main" id="{AE80DA9C-35AF-A1D7-01E5-BFD9DEF1550F}"/>
+              <a16:creationId xmlns:a16="http://schemas.microsoft.com/office/drawing/2014/main" id="{9EC5F63A-5025-7AC2-6AC5-BC528C871FF3}"/>
             </a:ext>
           </a:extLst>
         </p:cNvPr>
@@ -4812,12 +6864,84 @@
           <a:chExt cx="0" cy="0"/>
         </a:xfrm>
       </p:grpSpPr>
+      <p:pic>
+        <p:nvPicPr>
+          <p:cNvPr id="18" name="Picture 17">
+            <a:extLst>
+              <a:ext uri="{FF2B5EF4-FFF2-40B4-BE49-F238E27FC236}">
+                <a16:creationId xmlns:a16="http://schemas.microsoft.com/office/drawing/2014/main" id="{1B159F2F-CE1B-F6DE-30C4-E89CCE62C43C}"/>
+              </a:ext>
+            </a:extLst>
+          </p:cNvPr>
+          <p:cNvPicPr>
+            <a:picLocks noChangeAspect="1"/>
+          </p:cNvPicPr>
+          <p:nvPr/>
+        </p:nvPicPr>
+        <p:blipFill>
+          <a:blip r:embed="rId3">
+            <a:extLst>
+              <a:ext uri="{28A0092B-C50C-407E-A947-70E740481C1C}">
+                <a14:useLocalDpi xmlns:a14="http://schemas.microsoft.com/office/drawing/2010/main" val="0"/>
+              </a:ext>
+            </a:extLst>
+          </a:blip>
+          <a:stretch>
+            <a:fillRect/>
+          </a:stretch>
+        </p:blipFill>
+        <p:spPr>
+          <a:xfrm>
+            <a:off x="6309349" y="963638"/>
+            <a:ext cx="5349251" cy="4023368"/>
+          </a:xfrm>
+          <a:prstGeom prst="rect">
+            <a:avLst/>
+          </a:prstGeom>
+        </p:spPr>
+      </p:pic>
+      <p:pic>
+        <p:nvPicPr>
+          <p:cNvPr id="5" name="Picture 4">
+            <a:extLst>
+              <a:ext uri="{FF2B5EF4-FFF2-40B4-BE49-F238E27FC236}">
+                <a16:creationId xmlns:a16="http://schemas.microsoft.com/office/drawing/2014/main" id="{08D88ABA-24EF-67E5-C111-90843BF84058}"/>
+              </a:ext>
+            </a:extLst>
+          </p:cNvPr>
+          <p:cNvPicPr>
+            <a:picLocks noChangeAspect="1"/>
+          </p:cNvPicPr>
+          <p:nvPr/>
+        </p:nvPicPr>
+        <p:blipFill>
+          <a:blip r:embed="rId4">
+            <a:extLst>
+              <a:ext uri="{28A0092B-C50C-407E-A947-70E740481C1C}">
+                <a14:useLocalDpi xmlns:a14="http://schemas.microsoft.com/office/drawing/2010/main" val="0"/>
+              </a:ext>
+            </a:extLst>
+          </a:blip>
+          <a:stretch>
+            <a:fillRect/>
+          </a:stretch>
+        </p:blipFill>
+        <p:spPr>
+          <a:xfrm>
+            <a:off x="669966" y="949916"/>
+            <a:ext cx="5349251" cy="4023368"/>
+          </a:xfrm>
+          <a:prstGeom prst="rect">
+            <a:avLst/>
+          </a:prstGeom>
+        </p:spPr>
+      </p:pic>
       <p:sp>
         <p:nvSpPr>
           <p:cNvPr id="16" name="object 16">
             <a:extLst>
               <a:ext uri="{FF2B5EF4-FFF2-40B4-BE49-F238E27FC236}">
-                <a16:creationId xmlns:a16="http://schemas.microsoft.com/office/drawing/2014/main" id="{471E1424-6C4B-2D9A-1352-30AFB987AD41}"/>
+                <a16:creationId xmlns:a16="http://schemas.microsoft.com/office/drawing/2014/main" id="{2CEE214A-E652-D965-9CA2-25F2FC9AB727}"/>
               </a:ext>
             </a:extLst>
           </p:cNvPr>
@@ -4830,7 +6954,7 @@
         </p:nvSpPr>
         <p:spPr>
           <a:xfrm>
-            <a:off x="685800" y="408883"/>
+            <a:off x="685800" y="228600"/>
             <a:ext cx="10994410" cy="705321"/>
           </a:xfrm>
           <a:prstGeom prst="rect">
@@ -4874,7 +6998,7 @@
           <p:cNvPr id="83" name="Gráfico 82">
             <a:extLst>
               <a:ext uri="{FF2B5EF4-FFF2-40B4-BE49-F238E27FC236}">
-                <a16:creationId xmlns:a16="http://schemas.microsoft.com/office/drawing/2014/main" id="{9DCFD462-4416-65F8-5696-B0135B632765}"/>
+                <a16:creationId xmlns:a16="http://schemas.microsoft.com/office/drawing/2014/main" id="{641B9F49-232E-2F92-4E7D-9819ECC71026}"/>
               </a:ext>
             </a:extLst>
           </p:cNvPr>
@@ -4884,10 +7008,10 @@
           <p:nvPr/>
         </p:nvPicPr>
         <p:blipFill>
-          <a:blip r:embed="rId3">
+          <a:blip r:embed="rId5">
             <a:extLst>
               <a:ext uri="{96DAC541-7B7A-43D3-8B79-37D633B846F1}">
-                <asvg:svgBlip xmlns:asvg="http://schemas.microsoft.com/office/drawing/2016/SVG/main" r:embed="rId4"/>
+                <asvg:svgBlip xmlns:asvg="http://schemas.microsoft.com/office/drawing/2016/SVG/main" r:embed="rId6"/>
               </a:ext>
             </a:extLst>
           </a:blip>
@@ -4910,7 +7034,7 @@
           <p:cNvPr id="84" name="Marcador de número de diapositiva 83">
             <a:extLst>
               <a:ext uri="{FF2B5EF4-FFF2-40B4-BE49-F238E27FC236}">
-                <a16:creationId xmlns:a16="http://schemas.microsoft.com/office/drawing/2014/main" id="{293F5C1D-AFFF-4EA6-CA59-6503F34EBF5F}"/>
+                <a16:creationId xmlns:a16="http://schemas.microsoft.com/office/drawing/2014/main" id="{94393A10-BB8F-0FCD-60D4-09A69ECF3266}"/>
               </a:ext>
             </a:extLst>
           </p:cNvPr>
@@ -4939,7 +7063,7 @@
           <p:cNvPr id="3" name="Marcador de pie de página 2">
             <a:extLst>
               <a:ext uri="{FF2B5EF4-FFF2-40B4-BE49-F238E27FC236}">
-                <a16:creationId xmlns:a16="http://schemas.microsoft.com/office/drawing/2014/main" id="{34F13AC1-9668-7266-DF5B-D7CE084AB044}"/>
+                <a16:creationId xmlns:a16="http://schemas.microsoft.com/office/drawing/2014/main" id="{F234BD2B-3A3E-7574-615E-1BF4376BB055}"/>
               </a:ext>
             </a:extLst>
           </p:cNvPr>
@@ -4970,10 +7094,114 @@
       </p:sp>
       <p:sp>
         <p:nvSpPr>
+          <p:cNvPr id="10" name="CuadroTexto 9">
+            <a:extLst>
+              <a:ext uri="{FF2B5EF4-FFF2-40B4-BE49-F238E27FC236}">
+                <a16:creationId xmlns:a16="http://schemas.microsoft.com/office/drawing/2014/main" id="{7ED40CBC-8196-E77D-9A4A-0548F52C83C3}"/>
+              </a:ext>
+            </a:extLst>
+          </p:cNvPr>
+          <p:cNvSpPr txBox="1"/>
+          <p:nvPr/>
+        </p:nvSpPr>
+        <p:spPr>
+          <a:xfrm>
+            <a:off x="601313" y="4993620"/>
+            <a:ext cx="11199971" cy="1200329"/>
+          </a:xfrm>
+          <a:prstGeom prst="rect">
+            <a:avLst/>
+          </a:prstGeom>
+          <a:solidFill>
+            <a:schemeClr val="bg1">
+              <a:lumMod val="95000"/>
+            </a:schemeClr>
+          </a:solidFill>
+          <a:ln w="28575">
+            <a:solidFill>
+              <a:srgbClr val="E0700D"/>
+            </a:solidFill>
+          </a:ln>
+        </p:spPr>
+        <p:txBody>
+          <a:bodyPr wrap="square" rtlCol="0">
+            <a:spAutoFit/>
+          </a:bodyPr>
+          <a:lstStyle/>
+          <a:p>
+            <a:r>
+              <a:rPr lang="en-US" sz="1200" dirty="0"/>
+              <a:t>The simulated waveguide is based on </a:t>
+            </a:r>
+            <a:r>
+              <a:rPr lang="en-US" sz="1200" dirty="0" err="1"/>
+              <a:t>Si₃N</a:t>
+            </a:r>
+            <a:r>
+              <a:rPr lang="en-US" sz="1200" dirty="0"/>
+              <a:t>₄ (Silicon Nitride) technology, with dimensions of 300 nm height and 1.2 um width. By performing simulations with different grid resolutions, it is observed that the effective refractive index stabilizes around an average value of </a:t>
+            </a:r>
+            <a:r>
+              <a:rPr lang="en-US" sz="1200" dirty="0" err="1"/>
+              <a:t>n_"eff</a:t>
+            </a:r>
+            <a:r>
+              <a:rPr lang="en-US" sz="1200" dirty="0"/>
+              <a:t>" ≈1.605.</a:t>
+            </a:r>
+          </a:p>
+          <a:p>
+            <a:r>
+              <a:rPr lang="en-US" sz="1200" dirty="0"/>
+              <a:t>For the grid resolution parameter, a larger value subdivides the computational cell into smaller elements, which increases numerical accuracy but also raises the computational cost. Since the objective is to reduce the simulation time a grid resolution of 20 points per micron is selected.</a:t>
+            </a:r>
+          </a:p>
+          <a:p>
+            <a:r>
+              <a:rPr lang="en-US" sz="1200" dirty="0"/>
+              <a:t>For the variation of </a:t>
+            </a:r>
+            <a:r>
+              <a:rPr lang="en-US" sz="1200" dirty="0" err="1"/>
+              <a:t>max_</a:t>
+            </a:r>
+            <a:r>
+              <a:rPr lang="en-US" sz="1200" i="1" dirty="0" err="1"/>
+              <a:t>grid_scaling</a:t>
+            </a:r>
+            <a:r>
+              <a:rPr lang="en-US" sz="1200" i="1" dirty="0"/>
+              <a:t>, the grid resolution was fixed at 20, an average effective index of </a:t>
+            </a:r>
+            <a:r>
+              <a:rPr lang="en-US" sz="1200" i="1" dirty="0" err="1"/>
+              <a:t>n</a:t>
+            </a:r>
+            <a:r>
+              <a:rPr lang="en-US" sz="1200" dirty="0" err="1"/>
+              <a:t>"eff</a:t>
+            </a:r>
+            <a:r>
+              <a:rPr lang="en-US" sz="1200" dirty="0"/>
+              <a:t>" ≈1.605 is obtained. In this case, a smaller value of </a:t>
+            </a:r>
+            <a:r>
+              <a:rPr lang="en-US" sz="1200" dirty="0" err="1"/>
+              <a:t>max_grid_scaling</a:t>
+            </a:r>
+            <a:r>
+              <a:rPr lang="en-US" sz="1200" dirty="0"/>
+              <a:t> results in a finer mesh near material interfaces, improving accuracy but increasing the simulation time. To reduce the computational cost a value of 1.6 was selected.</a:t>
+            </a:r>
+          </a:p>
+        </p:txBody>
+      </p:sp>
+      <p:sp>
+        <p:nvSpPr>
           <p:cNvPr id="6" name="Rectángulo 5">
             <a:extLst>
               <a:ext uri="{FF2B5EF4-FFF2-40B4-BE49-F238E27FC236}">
-                <a16:creationId xmlns:a16="http://schemas.microsoft.com/office/drawing/2014/main" id="{067C6D40-33EE-D9BE-7F58-8D96221D0D59}"/>
+                <a16:creationId xmlns:a16="http://schemas.microsoft.com/office/drawing/2014/main" id="{48E4A6A3-3CE6-3E98-3ED8-993A3F7A72B8}"/>
               </a:ext>
             </a:extLst>
           </p:cNvPr>
@@ -4982,8 +7210,8 @@
         </p:nvSpPr>
         <p:spPr>
           <a:xfrm>
-            <a:off x="609441" y="1447800"/>
-            <a:ext cx="5486559" cy="3306028"/>
+            <a:off x="601313" y="914400"/>
+            <a:ext cx="5486559" cy="4037090"/>
           </a:xfrm>
           <a:prstGeom prst="rect">
             <a:avLst/>
@@ -5022,159 +7250,10 @@
       </p:sp>
       <p:sp>
         <p:nvSpPr>
-          <p:cNvPr id="8" name="CuadroTexto 7">
+          <p:cNvPr id="13" name="Rectángulo 5">
             <a:extLst>
               <a:ext uri="{FF2B5EF4-FFF2-40B4-BE49-F238E27FC236}">
-                <a16:creationId xmlns:a16="http://schemas.microsoft.com/office/drawing/2014/main" id="{53A5ECC9-91D2-2918-1681-822F99EB31CD}"/>
-              </a:ext>
-            </a:extLst>
-          </p:cNvPr>
-          <p:cNvSpPr txBox="1"/>
-          <p:nvPr/>
-        </p:nvSpPr>
-        <p:spPr>
-          <a:xfrm>
-            <a:off x="1079403" y="2709096"/>
-            <a:ext cx="4546634" cy="923330"/>
-          </a:xfrm>
-          <a:prstGeom prst="rect">
-            <a:avLst/>
-          </a:prstGeom>
-          <a:noFill/>
-        </p:spPr>
-        <p:txBody>
-          <a:bodyPr wrap="square" rtlCol="0">
-            <a:spAutoFit/>
-          </a:bodyPr>
-          <a:lstStyle/>
-          <a:p>
-            <a:pPr algn="ctr"/>
-            <a:r>
-              <a:rPr lang="en-US" b="1" dirty="0"/>
-              <a:t>deep</a:t>
-            </a:r>
-            <a:r>
-              <a:rPr lang="en-US" dirty="0"/>
-              <a:t> waveguide</a:t>
-            </a:r>
-          </a:p>
-          <a:p>
-            <a:pPr algn="ctr"/>
-            <a:endParaRPr lang="en-US" dirty="0"/>
-          </a:p>
-          <a:p>
-            <a:pPr algn="ctr"/>
-            <a:r>
-              <a:rPr lang="en-US" dirty="0"/>
-              <a:t>Paste neff_TE0 vs </a:t>
-            </a:r>
-            <a:r>
-              <a:rPr lang="en-US" dirty="0" err="1"/>
-              <a:t>grid_resolution</a:t>
-            </a:r>
-            <a:r>
-              <a:rPr lang="en-US" dirty="0"/>
-              <a:t> plot here</a:t>
-            </a:r>
-          </a:p>
-        </p:txBody>
-      </p:sp>
-      <p:sp>
-        <p:nvSpPr>
-          <p:cNvPr id="10" name="CuadroTexto 9">
-            <a:extLst>
-              <a:ext uri="{FF2B5EF4-FFF2-40B4-BE49-F238E27FC236}">
-                <a16:creationId xmlns:a16="http://schemas.microsoft.com/office/drawing/2014/main" id="{C814CDD6-2B59-8488-4EB8-82801B4D3F22}"/>
-              </a:ext>
-            </a:extLst>
-          </p:cNvPr>
-          <p:cNvSpPr txBox="1"/>
-          <p:nvPr/>
-        </p:nvSpPr>
-        <p:spPr>
-          <a:xfrm>
-            <a:off x="609441" y="4860334"/>
-            <a:ext cx="11199971" cy="1384995"/>
-          </a:xfrm>
-          <a:prstGeom prst="rect">
-            <a:avLst/>
-          </a:prstGeom>
-          <a:solidFill>
-            <a:schemeClr val="bg1">
-              <a:lumMod val="95000"/>
-            </a:schemeClr>
-          </a:solidFill>
-          <a:ln w="28575">
-            <a:solidFill>
-              <a:srgbClr val="E0700D"/>
-            </a:solidFill>
-          </a:ln>
-        </p:spPr>
-        <p:txBody>
-          <a:bodyPr wrap="square" rtlCol="0">
-            <a:spAutoFit/>
-          </a:bodyPr>
-          <a:lstStyle/>
-          <a:p>
-            <a:pPr algn="just"/>
-            <a:r>
-              <a:rPr lang="en-US" sz="1200" dirty="0">
-                <a:latin typeface="Arial" panose="020B0604020202020204" pitchFamily="34" charset="0"/>
-                <a:cs typeface="Arial" panose="020B0604020202020204" pitchFamily="34" charset="0"/>
-              </a:rPr>
-              <a:t>Comment results, determine above which grid value the effective index calculation does not change significantly</a:t>
-            </a:r>
-          </a:p>
-          <a:p>
-            <a:pPr algn="just"/>
-            <a:endParaRPr lang="en-US" sz="1200" dirty="0">
-              <a:latin typeface="Arial" panose="020B0604020202020204" pitchFamily="34" charset="0"/>
-              <a:cs typeface="Arial" panose="020B0604020202020204" pitchFamily="34" charset="0"/>
-            </a:endParaRPr>
-          </a:p>
-          <a:p>
-            <a:pPr algn="just"/>
-            <a:endParaRPr lang="en-US" sz="1200" dirty="0">
-              <a:latin typeface="Arial" panose="020B0604020202020204" pitchFamily="34" charset="0"/>
-              <a:cs typeface="Arial" panose="020B0604020202020204" pitchFamily="34" charset="0"/>
-            </a:endParaRPr>
-          </a:p>
-          <a:p>
-            <a:pPr algn="just"/>
-            <a:endParaRPr lang="en-US" sz="1200" dirty="0">
-              <a:latin typeface="Arial" panose="020B0604020202020204" pitchFamily="34" charset="0"/>
-              <a:cs typeface="Arial" panose="020B0604020202020204" pitchFamily="34" charset="0"/>
-            </a:endParaRPr>
-          </a:p>
-          <a:p>
-            <a:pPr algn="just"/>
-            <a:endParaRPr lang="en-US" sz="1200" dirty="0">
-              <a:latin typeface="Arial" panose="020B0604020202020204" pitchFamily="34" charset="0"/>
-              <a:cs typeface="Arial" panose="020B0604020202020204" pitchFamily="34" charset="0"/>
-            </a:endParaRPr>
-          </a:p>
-          <a:p>
-            <a:pPr algn="just"/>
-            <a:endParaRPr lang="en-US" sz="1200" dirty="0">
-              <a:latin typeface="Arial" panose="020B0604020202020204" pitchFamily="34" charset="0"/>
-              <a:cs typeface="Arial" panose="020B0604020202020204" pitchFamily="34" charset="0"/>
-            </a:endParaRPr>
-          </a:p>
-          <a:p>
-            <a:pPr algn="just"/>
-            <a:endParaRPr lang="en-US" sz="1200" dirty="0">
-              <a:latin typeface="Arial" panose="020B0604020202020204" pitchFamily="34" charset="0"/>
-              <a:cs typeface="Arial" panose="020B0604020202020204" pitchFamily="34" charset="0"/>
-            </a:endParaRPr>
-          </a:p>
-        </p:txBody>
-      </p:sp>
-      <p:sp>
-        <p:nvSpPr>
-          <p:cNvPr id="2" name="Rectángulo 1">
-            <a:extLst>
-              <a:ext uri="{FF2B5EF4-FFF2-40B4-BE49-F238E27FC236}">
-                <a16:creationId xmlns:a16="http://schemas.microsoft.com/office/drawing/2014/main" id="{029F2FF9-FEB4-7AA3-B3B4-EFA9CFA0E230}"/>
+                <a16:creationId xmlns:a16="http://schemas.microsoft.com/office/drawing/2014/main" id="{77714C99-3808-A9BB-46F2-AAA528372A5D}"/>
               </a:ext>
             </a:extLst>
           </p:cNvPr>
@@ -5183,8 +7262,8 @@
         </p:nvSpPr>
         <p:spPr>
           <a:xfrm>
-            <a:off x="6322853" y="1447800"/>
-            <a:ext cx="5486559" cy="3306028"/>
+            <a:off x="6324441" y="915910"/>
+            <a:ext cx="5486559" cy="4037090"/>
           </a:xfrm>
           <a:prstGeom prst="rect">
             <a:avLst/>
@@ -5221,69 +7300,10 @@
           </a:p>
         </p:txBody>
       </p:sp>
-      <p:sp>
-        <p:nvSpPr>
-          <p:cNvPr id="4" name="CuadroTexto 3">
-            <a:extLst>
-              <a:ext uri="{FF2B5EF4-FFF2-40B4-BE49-F238E27FC236}">
-                <a16:creationId xmlns:a16="http://schemas.microsoft.com/office/drawing/2014/main" id="{C2C94B57-6111-4070-F6BA-8C3B9C305618}"/>
-              </a:ext>
-            </a:extLst>
-          </p:cNvPr>
-          <p:cNvSpPr txBox="1"/>
-          <p:nvPr/>
-        </p:nvSpPr>
-        <p:spPr>
-          <a:xfrm>
-            <a:off x="6792815" y="2698951"/>
-            <a:ext cx="4546634" cy="923330"/>
-          </a:xfrm>
-          <a:prstGeom prst="rect">
-            <a:avLst/>
-          </a:prstGeom>
-          <a:noFill/>
-        </p:spPr>
-        <p:txBody>
-          <a:bodyPr wrap="square" rtlCol="0">
-            <a:spAutoFit/>
-          </a:bodyPr>
-          <a:lstStyle/>
-          <a:p>
-            <a:pPr algn="ctr"/>
-            <a:r>
-              <a:rPr lang="en-US" b="1" dirty="0"/>
-              <a:t>deep</a:t>
-            </a:r>
-            <a:r>
-              <a:rPr lang="en-US" dirty="0"/>
-              <a:t> waveguide</a:t>
-            </a:r>
-          </a:p>
-          <a:p>
-            <a:pPr algn="ctr"/>
-            <a:endParaRPr lang="en-US" dirty="0"/>
-          </a:p>
-          <a:p>
-            <a:pPr algn="ctr"/>
-            <a:r>
-              <a:rPr lang="en-US" dirty="0"/>
-              <a:t>Paste neff_TE0 vs </a:t>
-            </a:r>
-            <a:r>
-              <a:rPr lang="en-US" dirty="0" err="1"/>
-              <a:t>max_grid_scaling</a:t>
-            </a:r>
-            <a:r>
-              <a:rPr lang="en-US" dirty="0"/>
-              <a:t> plot here</a:t>
-            </a:r>
-          </a:p>
-        </p:txBody>
-      </p:sp>
     </p:spTree>
     <p:extLst>
       <p:ext uri="{BB962C8B-B14F-4D97-AF65-F5344CB8AC3E}">
-        <p14:creationId xmlns:p14="http://schemas.microsoft.com/office/powerpoint/2010/main" val="730501311"/>
+        <p14:creationId xmlns:p14="http://schemas.microsoft.com/office/powerpoint/2010/main" val="4212785521"/>
       </p:ext>
     </p:extLst>
   </p:cSld>
@@ -5298,194 +7318,10 @@
   <p:cSld>
     <p:spTree>
       <p:nvGrpSpPr>
-        <p:cNvPr id="1" name=""/>
-        <p:cNvGrpSpPr/>
-        <p:nvPr/>
-      </p:nvGrpSpPr>
-      <p:grpSpPr>
-        <a:xfrm>
-          <a:off x="0" y="0"/>
-          <a:ext cx="0" cy="0"/>
-          <a:chOff x="0" y="0"/>
-          <a:chExt cx="0" cy="0"/>
-        </a:xfrm>
-      </p:grpSpPr>
-      <p:sp>
-        <p:nvSpPr>
-          <p:cNvPr id="2" name="Title 1">
-            <a:extLst>
-              <a:ext uri="{FF2B5EF4-FFF2-40B4-BE49-F238E27FC236}">
-                <a16:creationId xmlns:a16="http://schemas.microsoft.com/office/drawing/2014/main" id="{402AE3E3-CCA1-FA59-FEB0-88E3E9258C71}"/>
-              </a:ext>
-            </a:extLst>
-          </p:cNvPr>
-          <p:cNvSpPr>
-            <a:spLocks noGrp="1"/>
-          </p:cNvSpPr>
-          <p:nvPr>
-            <p:ph type="title"/>
-          </p:nvPr>
-        </p:nvSpPr>
-        <p:spPr/>
-        <p:txBody>
-          <a:bodyPr/>
-          <a:lstStyle/>
-          <a:p>
-            <a:endParaRPr lang="es-CO"/>
-          </a:p>
-        </p:txBody>
-      </p:sp>
-      <p:sp>
-        <p:nvSpPr>
-          <p:cNvPr id="3" name="Text Placeholder 2">
-            <a:extLst>
-              <a:ext uri="{FF2B5EF4-FFF2-40B4-BE49-F238E27FC236}">
-                <a16:creationId xmlns:a16="http://schemas.microsoft.com/office/drawing/2014/main" id="{065C7DE4-91AC-E54C-F835-D5A3AB252545}"/>
-              </a:ext>
-            </a:extLst>
-          </p:cNvPr>
-          <p:cNvSpPr>
-            <a:spLocks noGrp="1"/>
-          </p:cNvSpPr>
-          <p:nvPr>
-            <p:ph type="body" idx="1"/>
-          </p:nvPr>
-        </p:nvSpPr>
-        <p:spPr>
-          <a:xfrm>
-            <a:off x="609600" y="685800"/>
-            <a:ext cx="10972800" cy="3950710"/>
-          </a:xfrm>
-        </p:spPr>
-        <p:txBody>
-          <a:bodyPr/>
-          <a:lstStyle/>
-          <a:p>
-            <a:endParaRPr lang="es-CO" dirty="0"/>
-          </a:p>
-        </p:txBody>
-      </p:sp>
-      <p:sp>
-        <p:nvSpPr>
-          <p:cNvPr id="4" name="Footer Placeholder 3">
-            <a:extLst>
-              <a:ext uri="{FF2B5EF4-FFF2-40B4-BE49-F238E27FC236}">
-                <a16:creationId xmlns:a16="http://schemas.microsoft.com/office/drawing/2014/main" id="{2B7A24A6-0FB3-04E4-58F1-0289212CE9F4}"/>
-              </a:ext>
-            </a:extLst>
-          </p:cNvPr>
-          <p:cNvSpPr>
-            <a:spLocks noGrp="1"/>
-          </p:cNvSpPr>
-          <p:nvPr>
-            <p:ph type="ftr" sz="quarter" idx="5"/>
-          </p:nvPr>
-        </p:nvSpPr>
-        <p:spPr/>
-        <p:txBody>
-          <a:bodyPr/>
-          <a:lstStyle/>
-          <a:p>
-            <a:pPr marL="12700">
-              <a:spcBef>
-                <a:spcPts val="15"/>
-              </a:spcBef>
-            </a:pPr>
-            <a:r>
-              <a:rPr lang="es-ES" spc="-5"/>
-              <a:t>LAB 1.0. WAVEGUIDES</a:t>
-            </a:r>
-            <a:endParaRPr lang="es-ES" spc="-5" dirty="0"/>
-          </a:p>
-        </p:txBody>
-      </p:sp>
-      <p:sp>
-        <p:nvSpPr>
-          <p:cNvPr id="5" name="Slide Number Placeholder 4">
-            <a:extLst>
-              <a:ext uri="{FF2B5EF4-FFF2-40B4-BE49-F238E27FC236}">
-                <a16:creationId xmlns:a16="http://schemas.microsoft.com/office/drawing/2014/main" id="{EFB2C962-B9F0-3F1F-4F0E-4E8748835D3C}"/>
-              </a:ext>
-            </a:extLst>
-          </p:cNvPr>
-          <p:cNvSpPr>
-            <a:spLocks noGrp="1"/>
-          </p:cNvSpPr>
-          <p:nvPr>
-            <p:ph type="sldNum" sz="quarter" idx="7"/>
-          </p:nvPr>
-        </p:nvSpPr>
-        <p:spPr/>
-        <p:txBody>
-          <a:bodyPr/>
-          <a:lstStyle/>
-          <a:p>
-            <a:fld id="{B6F15528-21DE-4FAA-801E-634DDDAF4B2B}" type="slidenum">
-              <a:rPr lang="es-CO" smtClean="0"/>
-              <a:t>4</a:t>
-            </a:fld>
-            <a:endParaRPr lang="es-CO"/>
-          </a:p>
-        </p:txBody>
-      </p:sp>
-      <p:pic>
-        <p:nvPicPr>
-          <p:cNvPr id="7" name="Picture 6">
-            <a:extLst>
-              <a:ext uri="{FF2B5EF4-FFF2-40B4-BE49-F238E27FC236}">
-                <a16:creationId xmlns:a16="http://schemas.microsoft.com/office/drawing/2014/main" id="{B9E47C66-1F3C-6E2A-1748-F4647BEFD3BE}"/>
-              </a:ext>
-            </a:extLst>
-          </p:cNvPr>
-          <p:cNvPicPr>
-            <a:picLocks noChangeAspect="1"/>
-          </p:cNvPicPr>
-          <p:nvPr/>
-        </p:nvPicPr>
-        <p:blipFill>
-          <a:blip r:embed="rId2">
-            <a:extLst>
-              <a:ext uri="{28A0092B-C50C-407E-A947-70E740481C1C}">
-                <a14:useLocalDpi xmlns:a14="http://schemas.microsoft.com/office/drawing/2010/main" val="0"/>
-              </a:ext>
-            </a:extLst>
-          </a:blip>
-          <a:stretch>
-            <a:fillRect/>
-          </a:stretch>
-        </p:blipFill>
-        <p:spPr>
-          <a:xfrm>
-            <a:off x="3654547" y="1143000"/>
-            <a:ext cx="4882906" cy="4297689"/>
-          </a:xfrm>
-          <a:prstGeom prst="rect">
-            <a:avLst/>
-          </a:prstGeom>
-        </p:spPr>
-      </p:pic>
-    </p:spTree>
-    <p:extLst>
-      <p:ext uri="{BB962C8B-B14F-4D97-AF65-F5344CB8AC3E}">
-        <p14:creationId xmlns:p14="http://schemas.microsoft.com/office/powerpoint/2010/main" val="557849636"/>
-      </p:ext>
-    </p:extLst>
-  </p:cSld>
-  <p:clrMapOvr>
-    <a:masterClrMapping/>
-  </p:clrMapOvr>
-</p:sld>
-</file>
-
-<file path=ppt/slides/slide5.xml><?xml version="1.0" encoding="utf-8"?>
-<p:sld xmlns:a="http://schemas.openxmlformats.org/drawingml/2006/main" xmlns:r="http://schemas.openxmlformats.org/officeDocument/2006/relationships" xmlns:p="http://schemas.openxmlformats.org/presentationml/2006/main">
-  <p:cSld>
-    <p:spTree>
-      <p:nvGrpSpPr>
         <p:cNvPr id="1" name="">
           <a:extLst>
             <a:ext uri="{FF2B5EF4-FFF2-40B4-BE49-F238E27FC236}">
-              <a16:creationId xmlns:a16="http://schemas.microsoft.com/office/drawing/2014/main" id="{4364464C-78F4-6AD7-9F52-4901C660C602}"/>
+              <a16:creationId xmlns:a16="http://schemas.microsoft.com/office/drawing/2014/main" id="{0D90AC3D-36B7-D786-3825-B4DD6EADD689}"/>
             </a:ext>
           </a:extLst>
         </p:cNvPr>
@@ -5500,166 +7336,12 @@
           <a:chExt cx="0" cy="0"/>
         </a:xfrm>
       </p:grpSpPr>
-      <p:sp>
-        <p:nvSpPr>
-          <p:cNvPr id="2" name="Title 1">
+      <p:pic>
+        <p:nvPicPr>
+          <p:cNvPr id="9" name="Picture 8">
             <a:extLst>
               <a:ext uri="{FF2B5EF4-FFF2-40B4-BE49-F238E27FC236}">
-                <a16:creationId xmlns:a16="http://schemas.microsoft.com/office/drawing/2014/main" id="{BF9125DA-7FFA-DA86-9A83-1577CA870365}"/>
-              </a:ext>
-            </a:extLst>
-          </p:cNvPr>
-          <p:cNvSpPr>
-            <a:spLocks noGrp="1"/>
-          </p:cNvSpPr>
-          <p:nvPr>
-            <p:ph type="title"/>
-          </p:nvPr>
-        </p:nvSpPr>
-        <p:spPr/>
-        <p:txBody>
-          <a:bodyPr/>
-          <a:lstStyle/>
-          <a:p>
-            <a:endParaRPr lang="es-CO"/>
-          </a:p>
-        </p:txBody>
-      </p:sp>
-      <p:sp>
-        <p:nvSpPr>
-          <p:cNvPr id="3" name="Text Placeholder 2">
-            <a:extLst>
-              <a:ext uri="{FF2B5EF4-FFF2-40B4-BE49-F238E27FC236}">
-                <a16:creationId xmlns:a16="http://schemas.microsoft.com/office/drawing/2014/main" id="{0F8893B3-E819-0870-F370-04B71A16E740}"/>
-              </a:ext>
-            </a:extLst>
-          </p:cNvPr>
-          <p:cNvSpPr>
-            <a:spLocks noGrp="1"/>
-          </p:cNvSpPr>
-          <p:nvPr>
-            <p:ph type="body" idx="1"/>
-          </p:nvPr>
-        </p:nvSpPr>
-        <p:spPr>
-          <a:xfrm>
-            <a:off x="609600" y="685800"/>
-            <a:ext cx="10972800" cy="3950710"/>
-          </a:xfrm>
-        </p:spPr>
-        <p:txBody>
-          <a:bodyPr/>
-          <a:lstStyle/>
-          <a:p>
-            <a:endParaRPr lang="es-CO" dirty="0"/>
-          </a:p>
-        </p:txBody>
-      </p:sp>
-      <p:sp>
-        <p:nvSpPr>
-          <p:cNvPr id="4" name="Footer Placeholder 3">
-            <a:extLst>
-              <a:ext uri="{FF2B5EF4-FFF2-40B4-BE49-F238E27FC236}">
-                <a16:creationId xmlns:a16="http://schemas.microsoft.com/office/drawing/2014/main" id="{353D3AD7-939F-5090-C341-F63E8AAB6900}"/>
-              </a:ext>
-            </a:extLst>
-          </p:cNvPr>
-          <p:cNvSpPr>
-            <a:spLocks noGrp="1"/>
-          </p:cNvSpPr>
-          <p:nvPr>
-            <p:ph type="ftr" sz="quarter" idx="5"/>
-          </p:nvPr>
-        </p:nvSpPr>
-        <p:spPr/>
-        <p:txBody>
-          <a:bodyPr/>
-          <a:lstStyle/>
-          <a:p>
-            <a:pPr marL="12700">
-              <a:spcBef>
-                <a:spcPts val="15"/>
-              </a:spcBef>
-            </a:pPr>
-            <a:r>
-              <a:rPr lang="es-ES" spc="-5"/>
-              <a:t>LAB 1.0. WAVEGUIDES</a:t>
-            </a:r>
-            <a:endParaRPr lang="es-ES" spc="-5" dirty="0"/>
-          </a:p>
-        </p:txBody>
-      </p:sp>
-      <p:sp>
-        <p:nvSpPr>
-          <p:cNvPr id="5" name="Slide Number Placeholder 4">
-            <a:extLst>
-              <a:ext uri="{FF2B5EF4-FFF2-40B4-BE49-F238E27FC236}">
-                <a16:creationId xmlns:a16="http://schemas.microsoft.com/office/drawing/2014/main" id="{9AA8A044-AD82-7BCE-8CB9-EFD4E6708AF9}"/>
-              </a:ext>
-            </a:extLst>
-          </p:cNvPr>
-          <p:cNvSpPr>
-            <a:spLocks noGrp="1"/>
-          </p:cNvSpPr>
-          <p:nvPr>
-            <p:ph type="sldNum" sz="quarter" idx="7"/>
-          </p:nvPr>
-        </p:nvSpPr>
-        <p:spPr/>
-        <p:txBody>
-          <a:bodyPr/>
-          <a:lstStyle/>
-          <a:p>
-            <a:fld id="{B6F15528-21DE-4FAA-801E-634DDDAF4B2B}" type="slidenum">
-              <a:rPr lang="es-CO" smtClean="0"/>
-              <a:t>5</a:t>
-            </a:fld>
-            <a:endParaRPr lang="es-CO"/>
-          </a:p>
-        </p:txBody>
-      </p:sp>
-      <p:pic>
-        <p:nvPicPr>
-          <p:cNvPr id="8" name="Picture 7">
-            <a:extLst>
-              <a:ext uri="{FF2B5EF4-FFF2-40B4-BE49-F238E27FC236}">
-                <a16:creationId xmlns:a16="http://schemas.microsoft.com/office/drawing/2014/main" id="{875B305C-12CD-07E6-4A66-60078DBEFD98}"/>
-              </a:ext>
-            </a:extLst>
-          </p:cNvPr>
-          <p:cNvPicPr>
-            <a:picLocks noChangeAspect="1"/>
-          </p:cNvPicPr>
-          <p:nvPr/>
-        </p:nvPicPr>
-        <p:blipFill>
-          <a:blip r:embed="rId2">
-            <a:extLst>
-              <a:ext uri="{28A0092B-C50C-407E-A947-70E740481C1C}">
-                <a14:useLocalDpi xmlns:a14="http://schemas.microsoft.com/office/drawing/2010/main" val="0"/>
-              </a:ext>
-            </a:extLst>
-          </a:blip>
-          <a:stretch>
-            <a:fillRect/>
-          </a:stretch>
-        </p:blipFill>
-        <p:spPr>
-          <a:xfrm>
-            <a:off x="-304801" y="736661"/>
-            <a:ext cx="4882906" cy="4297689"/>
-          </a:xfrm>
-          <a:prstGeom prst="rect">
-            <a:avLst/>
-          </a:prstGeom>
-        </p:spPr>
-      </p:pic>
-      <p:pic>
-        <p:nvPicPr>
-          <p:cNvPr id="10" name="Picture 9">
-            <a:extLst>
-              <a:ext uri="{FF2B5EF4-FFF2-40B4-BE49-F238E27FC236}">
-                <a16:creationId xmlns:a16="http://schemas.microsoft.com/office/drawing/2014/main" id="{AFE5BC3B-56A6-4237-7A57-B05A279C9FD3}"/>
+                <a16:creationId xmlns:a16="http://schemas.microsoft.com/office/drawing/2014/main" id="{5636D0E0-60AE-1AEF-199A-E8B0C6B535FF}"/>
               </a:ext>
             </a:extLst>
           </p:cNvPr>
@@ -5682,86 +7364,14 @@
         </p:blipFill>
         <p:spPr>
           <a:xfrm>
-            <a:off x="3352800" y="1825205"/>
-            <a:ext cx="4882906" cy="4297689"/>
+            <a:off x="838792" y="777231"/>
+            <a:ext cx="10789941" cy="4480569"/>
           </a:xfrm>
           <a:prstGeom prst="rect">
             <a:avLst/>
           </a:prstGeom>
         </p:spPr>
       </p:pic>
-      <p:pic>
-        <p:nvPicPr>
-          <p:cNvPr id="12" name="Picture 11">
-            <a:extLst>
-              <a:ext uri="{FF2B5EF4-FFF2-40B4-BE49-F238E27FC236}">
-                <a16:creationId xmlns:a16="http://schemas.microsoft.com/office/drawing/2014/main" id="{4432BF8C-71F0-7668-2898-778334C0EF70}"/>
-              </a:ext>
-            </a:extLst>
-          </p:cNvPr>
-          <p:cNvPicPr>
-            <a:picLocks noChangeAspect="1"/>
-          </p:cNvPicPr>
-          <p:nvPr/>
-        </p:nvPicPr>
-        <p:blipFill>
-          <a:blip r:embed="rId4">
-            <a:extLst>
-              <a:ext uri="{28A0092B-C50C-407E-A947-70E740481C1C}">
-                <a14:useLocalDpi xmlns:a14="http://schemas.microsoft.com/office/drawing/2010/main" val="0"/>
-              </a:ext>
-            </a:extLst>
-          </a:blip>
-          <a:stretch>
-            <a:fillRect/>
-          </a:stretch>
-        </p:blipFill>
-        <p:spPr>
-          <a:xfrm>
-            <a:off x="7613896" y="467084"/>
-            <a:ext cx="4882906" cy="4297689"/>
-          </a:xfrm>
-          <a:prstGeom prst="rect">
-            <a:avLst/>
-          </a:prstGeom>
-        </p:spPr>
-      </p:pic>
-    </p:spTree>
-    <p:extLst>
-      <p:ext uri="{BB962C8B-B14F-4D97-AF65-F5344CB8AC3E}">
-        <p14:creationId xmlns:p14="http://schemas.microsoft.com/office/powerpoint/2010/main" val="3200814040"/>
-      </p:ext>
-    </p:extLst>
-  </p:cSld>
-  <p:clrMapOvr>
-    <a:masterClrMapping/>
-  </p:clrMapOvr>
-</p:sld>
-</file>
-
-<file path=ppt/slides/slide6.xml><?xml version="1.0" encoding="utf-8"?>
-<p:sld xmlns:a="http://schemas.openxmlformats.org/drawingml/2006/main" xmlns:r="http://schemas.openxmlformats.org/officeDocument/2006/relationships" xmlns:p="http://schemas.openxmlformats.org/presentationml/2006/main">
-  <p:cSld>
-    <p:spTree>
-      <p:nvGrpSpPr>
-        <p:cNvPr id="1" name="">
-          <a:extLst>
-            <a:ext uri="{FF2B5EF4-FFF2-40B4-BE49-F238E27FC236}">
-              <a16:creationId xmlns:a16="http://schemas.microsoft.com/office/drawing/2014/main" id="{0D90AC3D-36B7-D786-3825-B4DD6EADD689}"/>
-            </a:ext>
-          </a:extLst>
-        </p:cNvPr>
-        <p:cNvGrpSpPr/>
-        <p:nvPr/>
-      </p:nvGrpSpPr>
-      <p:grpSpPr>
-        <a:xfrm>
-          <a:off x="0" y="0"/>
-          <a:ext cx="0" cy="0"/>
-          <a:chOff x="0" y="0"/>
-          <a:chExt cx="0" cy="0"/>
-        </a:xfrm>
-      </p:grpSpPr>
       <p:sp>
         <p:nvSpPr>
           <p:cNvPr id="16" name="object 16">
@@ -5780,7 +7390,7 @@
         </p:nvSpPr>
         <p:spPr>
           <a:xfrm>
-            <a:off x="685800" y="408883"/>
+            <a:off x="152400" y="137160"/>
             <a:ext cx="10994410" cy="705321"/>
           </a:xfrm>
           <a:prstGeom prst="rect">
@@ -5837,10 +7447,10 @@
           <p:nvPr/>
         </p:nvPicPr>
         <p:blipFill>
-          <a:blip r:embed="rId3">
+          <a:blip r:embed="rId4">
             <a:extLst>
               <a:ext uri="{96DAC541-7B7A-43D3-8B79-37D633B846F1}">
-                <asvg:svgBlip xmlns:asvg="http://schemas.microsoft.com/office/drawing/2016/SVG/main" r:embed="rId4"/>
+                <asvg:svgBlip xmlns:asvg="http://schemas.microsoft.com/office/drawing/2016/SVG/main" r:embed="rId5"/>
               </a:ext>
             </a:extLst>
           </a:blip>
@@ -5881,7 +7491,7 @@
           <a:p>
             <a:fld id="{B6F15528-21DE-4FAA-801E-634DDDAF4B2B}" type="slidenum">
               <a:rPr lang="es-ES" smtClean="0"/>
-              <a:t>6</a:t>
+              <a:t>4</a:t>
             </a:fld>
             <a:endParaRPr lang="es-ES"/>
           </a:p>
@@ -5934,8 +7544,8 @@
         </p:nvSpPr>
         <p:spPr>
           <a:xfrm>
-            <a:off x="609441" y="4860334"/>
-            <a:ext cx="11199971" cy="1200329"/>
+            <a:off x="607886" y="5263583"/>
+            <a:ext cx="11199971" cy="1015663"/>
           </a:xfrm>
           <a:prstGeom prst="rect">
             <a:avLst/>
@@ -5963,50 +7573,18 @@
                 <a:latin typeface="Arial" panose="020B0604020202020204" pitchFamily="34" charset="0"/>
                 <a:cs typeface="Arial" panose="020B0604020202020204" pitchFamily="34" charset="0"/>
               </a:rPr>
-              <a:t>Comment results (neff changes this way with width, polarization behavior, </a:t>
+              <a:t>As the waveguide width increases, the optical mode becomes more confined within the core, reducing the field penetration into the cladding. Consequently, the effective refractive index increases and approaches the refractive index of the silicon nitride core.</a:t>
             </a:r>
-            <a:r>
-              <a:rPr lang="en-US" sz="1200" dirty="0" err="1">
-                <a:latin typeface="Arial" panose="020B0604020202020204" pitchFamily="34" charset="0"/>
-                <a:cs typeface="Arial" panose="020B0604020202020204" pitchFamily="34" charset="0"/>
-              </a:rPr>
-              <a:t>etc</a:t>
-            </a:r>
+          </a:p>
+          <a:p>
+            <a:pPr algn="just"/>
             <a:r>
               <a:rPr lang="en-US" sz="1200" dirty="0">
                 <a:latin typeface="Arial" panose="020B0604020202020204" pitchFamily="34" charset="0"/>
                 <a:cs typeface="Arial" panose="020B0604020202020204" pitchFamily="34" charset="0"/>
               </a:rPr>
-              <a:t>…)</a:t>
+              <a:t>In addition, the polarization of the modes is also affected by the waveguide width. TE and TM modes experience different levels of confinement due to their field distributions, which leads to changes in their TE and TM proportions however this phenomenon is better appreciated on Si core waveguides.</a:t>
             </a:r>
-          </a:p>
-          <a:p>
-            <a:pPr algn="just"/>
-            <a:endParaRPr lang="en-US" sz="1200" dirty="0">
-              <a:latin typeface="Arial" panose="020B0604020202020204" pitchFamily="34" charset="0"/>
-              <a:cs typeface="Arial" panose="020B0604020202020204" pitchFamily="34" charset="0"/>
-            </a:endParaRPr>
-          </a:p>
-          <a:p>
-            <a:pPr algn="just"/>
-            <a:endParaRPr lang="en-US" sz="1200" dirty="0">
-              <a:latin typeface="Arial" panose="020B0604020202020204" pitchFamily="34" charset="0"/>
-              <a:cs typeface="Arial" panose="020B0604020202020204" pitchFamily="34" charset="0"/>
-            </a:endParaRPr>
-          </a:p>
-          <a:p>
-            <a:pPr algn="just"/>
-            <a:endParaRPr lang="en-US" sz="1200" dirty="0">
-              <a:latin typeface="Arial" panose="020B0604020202020204" pitchFamily="34" charset="0"/>
-              <a:cs typeface="Arial" panose="020B0604020202020204" pitchFamily="34" charset="0"/>
-            </a:endParaRPr>
-          </a:p>
-          <a:p>
-            <a:pPr algn="just"/>
-            <a:endParaRPr lang="en-US" sz="1200" dirty="0">
-              <a:latin typeface="Arial" panose="020B0604020202020204" pitchFamily="34" charset="0"/>
-              <a:cs typeface="Arial" panose="020B0604020202020204" pitchFamily="34" charset="0"/>
-            </a:endParaRPr>
           </a:p>
           <a:p>
             <a:pPr algn="just"/>
@@ -6031,8 +7609,8 @@
         </p:nvSpPr>
         <p:spPr>
           <a:xfrm>
-            <a:off x="609441" y="1418373"/>
-            <a:ext cx="11199971" cy="3306028"/>
+            <a:off x="607886" y="846874"/>
+            <a:ext cx="11199971" cy="4334725"/>
           </a:xfrm>
           <a:prstGeom prst="rect">
             <a:avLst/>
@@ -6069,57 +7647,6 @@
           </a:p>
         </p:txBody>
       </p:sp>
-      <p:sp>
-        <p:nvSpPr>
-          <p:cNvPr id="8" name="CuadroTexto 7">
-            <a:extLst>
-              <a:ext uri="{FF2B5EF4-FFF2-40B4-BE49-F238E27FC236}">
-                <a16:creationId xmlns:a16="http://schemas.microsoft.com/office/drawing/2014/main" id="{1EF5BFDA-8EC1-8C73-A932-F36C4DB93C73}"/>
-              </a:ext>
-            </a:extLst>
-          </p:cNvPr>
-          <p:cNvSpPr txBox="1"/>
-          <p:nvPr/>
-        </p:nvSpPr>
-        <p:spPr>
-          <a:xfrm>
-            <a:off x="2286000" y="2671278"/>
-            <a:ext cx="7718580" cy="923330"/>
-          </a:xfrm>
-          <a:prstGeom prst="rect">
-            <a:avLst/>
-          </a:prstGeom>
-          <a:noFill/>
-        </p:spPr>
-        <p:txBody>
-          <a:bodyPr wrap="square" rtlCol="0">
-            <a:spAutoFit/>
-          </a:bodyPr>
-          <a:lstStyle/>
-          <a:p>
-            <a:pPr algn="ctr"/>
-            <a:r>
-              <a:rPr lang="en-US" b="1" dirty="0"/>
-              <a:t>deep</a:t>
-            </a:r>
-            <a:r>
-              <a:rPr lang="en-US" dirty="0"/>
-              <a:t> waveguide</a:t>
-            </a:r>
-          </a:p>
-          <a:p>
-            <a:pPr algn="ctr"/>
-            <a:endParaRPr lang="en-US" dirty="0"/>
-          </a:p>
-          <a:p>
-            <a:pPr algn="ctr"/>
-            <a:r>
-              <a:rPr lang="en-US" dirty="0"/>
-              <a:t>Paste plot here</a:t>
-            </a:r>
-          </a:p>
-        </p:txBody>
-      </p:sp>
     </p:spTree>
     <p:extLst>
       <p:ext uri="{BB962C8B-B14F-4D97-AF65-F5344CB8AC3E}">
@@ -6133,7 +7660,2737 @@
 </p:sld>
 </file>
 
-<file path=ppt/slides/slide7.xml><?xml version="1.0" encoding="utf-8"?>
+<file path=ppt/slides/slide5.xml><?xml version="1.0" encoding="utf-8"?>
+<p:sld xmlns:a="http://schemas.openxmlformats.org/drawingml/2006/main" xmlns:r="http://schemas.openxmlformats.org/officeDocument/2006/relationships" xmlns:p="http://schemas.openxmlformats.org/presentationml/2006/main">
+  <p:cSld>
+    <p:spTree>
+      <p:nvGrpSpPr>
+        <p:cNvPr id="1" name=""/>
+        <p:cNvGrpSpPr/>
+        <p:nvPr/>
+      </p:nvGrpSpPr>
+      <p:grpSpPr>
+        <a:xfrm>
+          <a:off x="0" y="0"/>
+          <a:ext cx="0" cy="0"/>
+          <a:chOff x="0" y="0"/>
+          <a:chExt cx="0" cy="0"/>
+        </a:xfrm>
+      </p:grpSpPr>
+      <mc:AlternateContent xmlns:mc="http://schemas.openxmlformats.org/markup-compatibility/2006">
+        <mc:Choice xmlns:a14="http://schemas.microsoft.com/office/drawing/2010/main" Requires="a14">
+          <p:sp>
+            <p:nvSpPr>
+              <p:cNvPr id="24" name="Rectangle 23">
+                <a:extLst>
+                  <a:ext uri="{FF2B5EF4-FFF2-40B4-BE49-F238E27FC236}">
+                    <a16:creationId xmlns:a16="http://schemas.microsoft.com/office/drawing/2014/main" id="{9354D1F9-7CAA-F960-BDE4-6051891B75F6}"/>
+                  </a:ext>
+                </a:extLst>
+              </p:cNvPr>
+              <p:cNvSpPr/>
+              <p:nvPr/>
+            </p:nvSpPr>
+            <p:spPr>
+              <a:xfrm>
+                <a:off x="754380" y="1402224"/>
+                <a:ext cx="5181600" cy="4800600"/>
+              </a:xfrm>
+              <a:prstGeom prst="rect">
+                <a:avLst/>
+              </a:prstGeom>
+              <a:solidFill>
+                <a:srgbClr val="F2F2F2"/>
+              </a:solidFill>
+            </p:spPr>
+            <p:style>
+              <a:lnRef idx="2">
+                <a:schemeClr val="accent6"/>
+              </a:lnRef>
+              <a:fillRef idx="1">
+                <a:schemeClr val="lt1"/>
+              </a:fillRef>
+              <a:effectRef idx="0">
+                <a:schemeClr val="accent6"/>
+              </a:effectRef>
+              <a:fontRef idx="minor">
+                <a:schemeClr val="dk1"/>
+              </a:fontRef>
+            </p:style>
+            <p:txBody>
+              <a:bodyPr rtlCol="0" anchor="t"/>
+              <a:lstStyle/>
+              <a:p>
+                <a:pPr algn="ctr"/>
+                <a:r>
+                  <a:rPr lang="en-US" dirty="0">
+                    <a:solidFill>
+                      <a:schemeClr val="accent6">
+                        <a:lumMod val="75000"/>
+                      </a:schemeClr>
+                    </a:solidFill>
+                  </a:rPr>
+                  <a:t>Group index of the guided mode</a:t>
+                </a:r>
+              </a:p>
+              <a:p>
+                <a:pPr algn="just"/>
+                <a:r>
+                  <a:rPr lang="en-US" dirty="0"/>
+                  <a:t>Considering the first derivative of </a:t>
+                </a:r>
+                <a14:m>
+                  <m:oMath xmlns:m="http://schemas.openxmlformats.org/officeDocument/2006/math">
+                    <m:sSub>
+                      <m:sSubPr>
+                        <m:ctrlPr>
+                          <a:rPr lang="es-CO" i="1">
+                            <a:latin typeface="Cambria Math" panose="02040503050406030204" pitchFamily="18" charset="0"/>
+                          </a:rPr>
+                        </m:ctrlPr>
+                      </m:sSubPr>
+                      <m:e>
+                        <m:r>
+                          <a:rPr lang="es-CO" i="1">
+                            <a:latin typeface="Cambria Math" panose="02040503050406030204" pitchFamily="18" charset="0"/>
+                          </a:rPr>
+                          <m:t>𝑛</m:t>
+                        </m:r>
+                      </m:e>
+                      <m:sub>
+                        <m:r>
+                          <m:rPr>
+                            <m:sty m:val="p"/>
+                          </m:rPr>
+                          <a:rPr lang="es-CO">
+                            <a:latin typeface="Cambria Math" panose="02040503050406030204" pitchFamily="18" charset="0"/>
+                          </a:rPr>
+                          <m:t>eff</m:t>
+                        </m:r>
+                      </m:sub>
+                    </m:sSub>
+                    <m:d>
+                      <m:dPr>
+                        <m:ctrlPr>
+                          <a:rPr lang="es-CO" i="1">
+                            <a:latin typeface="Cambria Math" panose="02040503050406030204" pitchFamily="18" charset="0"/>
+                          </a:rPr>
+                        </m:ctrlPr>
+                      </m:dPr>
+                      <m:e>
+                        <m:r>
+                          <a:rPr lang="es-CO" i="1">
+                            <a:latin typeface="Cambria Math" panose="02040503050406030204" pitchFamily="18" charset="0"/>
+                          </a:rPr>
+                          <m:t>𝜆</m:t>
+                        </m:r>
+                      </m:e>
+                    </m:d>
+                  </m:oMath>
+                </a14:m>
+                <a:r>
+                  <a:rPr lang="en-US" dirty="0"/>
+                  <a:t> with respect to </a:t>
+                </a:r>
+                <a14:m>
+                  <m:oMath xmlns:m="http://schemas.openxmlformats.org/officeDocument/2006/math">
+                    <m:r>
+                      <a:rPr lang="es-CO" i="1">
+                        <a:latin typeface="Cambria Math" panose="02040503050406030204" pitchFamily="18" charset="0"/>
+                      </a:rPr>
+                      <m:t>𝜆</m:t>
+                    </m:r>
+                  </m:oMath>
+                </a14:m>
+                <a:endParaRPr lang="en-US" dirty="0"/>
+              </a:p>
+              <a:p>
+                <a:pPr algn="just"/>
+                <a:endParaRPr lang="en-US" dirty="0"/>
+              </a:p>
+              <a:p>
+                <a:pPr algn="just"/>
+                <a:endParaRPr lang="en-US" dirty="0"/>
+              </a:p>
+              <a:p>
+                <a:pPr algn="just"/>
+                <a:r>
+                  <a:rPr lang="en-US" dirty="0"/>
+                  <a:t>If evaluated at the central wavelength </a:t>
+                </a:r>
+                <a14:m>
+                  <m:oMath xmlns:m="http://schemas.openxmlformats.org/officeDocument/2006/math">
+                    <m:sSub>
+                      <m:sSubPr>
+                        <m:ctrlPr>
+                          <a:rPr lang="es-CO" i="1">
+                            <a:latin typeface="Cambria Math" panose="02040503050406030204" pitchFamily="18" charset="0"/>
+                          </a:rPr>
+                        </m:ctrlPr>
+                      </m:sSubPr>
+                      <m:e>
+                        <m:r>
+                          <a:rPr lang="es-CO" i="1">
+                            <a:latin typeface="Cambria Math" panose="02040503050406030204" pitchFamily="18" charset="0"/>
+                          </a:rPr>
+                          <m:t>𝜆</m:t>
+                        </m:r>
+                        <m:r>
+                          <a:rPr lang="es-MX" i="1">
+                            <a:latin typeface="Cambria Math" panose="02040503050406030204" pitchFamily="18" charset="0"/>
+                          </a:rPr>
+                          <m:t>=</m:t>
+                        </m:r>
+                        <m:r>
+                          <a:rPr lang="es-CO" i="1">
+                            <a:latin typeface="Cambria Math" panose="02040503050406030204" pitchFamily="18" charset="0"/>
+                          </a:rPr>
+                          <m:t>𝜆</m:t>
+                        </m:r>
+                      </m:e>
+                      <m:sub>
+                        <m:r>
+                          <a:rPr lang="es-CO">
+                            <a:latin typeface="Cambria Math" panose="02040503050406030204" pitchFamily="18" charset="0"/>
+                          </a:rPr>
+                          <m:t>0</m:t>
+                        </m:r>
+                      </m:sub>
+                    </m:sSub>
+                  </m:oMath>
+                </a14:m>
+                <a:endParaRPr lang="en-US" dirty="0"/>
+              </a:p>
+            </p:txBody>
+          </p:sp>
+        </mc:Choice>
+        <mc:Fallback>
+          <p:sp>
+            <p:nvSpPr>
+              <p:cNvPr id="24" name="Rectangle 23">
+                <a:extLst>
+                  <a:ext uri="{FF2B5EF4-FFF2-40B4-BE49-F238E27FC236}">
+                    <a16:creationId xmlns:a16="http://schemas.microsoft.com/office/drawing/2014/main" id="{9354D1F9-7CAA-F960-BDE4-6051891B75F6}"/>
+                  </a:ext>
+                </a:extLst>
+              </p:cNvPr>
+              <p:cNvSpPr>
+                <a:spLocks noRot="1" noChangeAspect="1" noMove="1" noResize="1" noEditPoints="1" noAdjustHandles="1" noChangeArrowheads="1" noChangeShapeType="1" noTextEdit="1"/>
+              </p:cNvSpPr>
+              <p:nvPr/>
+            </p:nvSpPr>
+            <p:spPr>
+              <a:xfrm>
+                <a:off x="754380" y="1402224"/>
+                <a:ext cx="5181600" cy="4800600"/>
+              </a:xfrm>
+              <a:prstGeom prst="rect">
+                <a:avLst/>
+              </a:prstGeom>
+              <a:blipFill>
+                <a:blip r:embed="rId2"/>
+                <a:stretch>
+                  <a:fillRect l="-820" t="-379" r="-703"/>
+                </a:stretch>
+              </a:blipFill>
+            </p:spPr>
+            <p:txBody>
+              <a:bodyPr/>
+              <a:lstStyle/>
+              <a:p>
+                <a:r>
+                  <a:rPr lang="es-CO">
+                    <a:noFill/>
+                  </a:rPr>
+                  <a:t> </a:t>
+                </a:r>
+              </a:p>
+            </p:txBody>
+          </p:sp>
+        </mc:Fallback>
+      </mc:AlternateContent>
+      <p:sp>
+        <p:nvSpPr>
+          <p:cNvPr id="4" name="Footer Placeholder 3">
+            <a:extLst>
+              <a:ext uri="{FF2B5EF4-FFF2-40B4-BE49-F238E27FC236}">
+                <a16:creationId xmlns:a16="http://schemas.microsoft.com/office/drawing/2014/main" id="{D46F2A7F-4C55-5710-3ED2-B7DC1FAE0BC1}"/>
+              </a:ext>
+            </a:extLst>
+          </p:cNvPr>
+          <p:cNvSpPr>
+            <a:spLocks noGrp="1"/>
+          </p:cNvSpPr>
+          <p:nvPr>
+            <p:ph type="ftr" sz="quarter" idx="5"/>
+          </p:nvPr>
+        </p:nvSpPr>
+        <p:spPr/>
+        <p:txBody>
+          <a:bodyPr/>
+          <a:lstStyle/>
+          <a:p>
+            <a:pPr marL="12700">
+              <a:spcBef>
+                <a:spcPts val="15"/>
+              </a:spcBef>
+            </a:pPr>
+            <a:r>
+              <a:rPr lang="es-ES" spc="-5"/>
+              <a:t>LAB 1.0. WAVEGUIDES</a:t>
+            </a:r>
+            <a:endParaRPr lang="es-ES" spc="-5" dirty="0"/>
+          </a:p>
+        </p:txBody>
+      </p:sp>
+      <p:sp>
+        <p:nvSpPr>
+          <p:cNvPr id="5" name="Slide Number Placeholder 4">
+            <a:extLst>
+              <a:ext uri="{FF2B5EF4-FFF2-40B4-BE49-F238E27FC236}">
+                <a16:creationId xmlns:a16="http://schemas.microsoft.com/office/drawing/2014/main" id="{D40DE6D9-5E39-1814-A401-471233B9DD17}"/>
+              </a:ext>
+            </a:extLst>
+          </p:cNvPr>
+          <p:cNvSpPr>
+            <a:spLocks noGrp="1"/>
+          </p:cNvSpPr>
+          <p:nvPr>
+            <p:ph type="sldNum" sz="quarter" idx="7"/>
+          </p:nvPr>
+        </p:nvSpPr>
+        <p:spPr>
+          <a:xfrm>
+            <a:off x="9311640" y="6362700"/>
+            <a:ext cx="2804160" cy="342900"/>
+          </a:xfrm>
+        </p:spPr>
+        <p:txBody>
+          <a:bodyPr/>
+          <a:lstStyle/>
+          <a:p>
+            <a:fld id="{B6F15528-21DE-4FAA-801E-634DDDAF4B2B}" type="slidenum">
+              <a:rPr lang="es-CO" smtClean="0"/>
+              <a:t>5</a:t>
+            </a:fld>
+            <a:endParaRPr lang="es-CO" dirty="0"/>
+          </a:p>
+        </p:txBody>
+      </p:sp>
+      <mc:AlternateContent xmlns:mc="http://schemas.openxmlformats.org/markup-compatibility/2006">
+        <mc:Choice xmlns:a14="http://schemas.microsoft.com/office/drawing/2010/main" Requires="a14">
+          <p:sp>
+            <p:nvSpPr>
+              <p:cNvPr id="13" name="TextBox 12">
+                <a:extLst>
+                  <a:ext uri="{FF2B5EF4-FFF2-40B4-BE49-F238E27FC236}">
+                    <a16:creationId xmlns:a16="http://schemas.microsoft.com/office/drawing/2014/main" id="{9F52424B-6A2D-C225-171F-318174D3582B}"/>
+                  </a:ext>
+                </a:extLst>
+              </p:cNvPr>
+              <p:cNvSpPr txBox="1"/>
+              <p:nvPr/>
+            </p:nvSpPr>
+            <p:spPr>
+              <a:xfrm>
+                <a:off x="1295400" y="2164420"/>
+                <a:ext cx="4099560" cy="618311"/>
+              </a:xfrm>
+              <a:prstGeom prst="rect">
+                <a:avLst/>
+              </a:prstGeom>
+              <a:noFill/>
+            </p:spPr>
+            <p:txBody>
+              <a:bodyPr wrap="square">
+                <a:spAutoFit/>
+              </a:bodyPr>
+              <a:lstStyle/>
+              <a:p>
+                <a:pPr/>
+                <a14:m>
+                  <m:oMathPara xmlns:m="http://schemas.openxmlformats.org/officeDocument/2006/math">
+                    <m:oMathParaPr>
+                      <m:jc m:val="centerGroup"/>
+                    </m:oMathParaPr>
+                    <m:oMath xmlns:m="http://schemas.openxmlformats.org/officeDocument/2006/math">
+                      <m:m>
+                        <m:mPr>
+                          <m:plcHide m:val="on"/>
+                          <m:mcs>
+                            <m:mc>
+                              <m:mcPr>
+                                <m:count m:val="1"/>
+                                <m:mcJc m:val="center"/>
+                              </m:mcPr>
+                            </m:mc>
+                          </m:mcs>
+                          <m:ctrlPr>
+                            <a:rPr lang="es-CO" i="1" smtClean="0">
+                              <a:latin typeface="Cambria Math" panose="02040503050406030204" pitchFamily="18" charset="0"/>
+                            </a:rPr>
+                          </m:ctrlPr>
+                        </m:mPr>
+                        <m:mr>
+                          <m:e>
+                            <m:f>
+                              <m:fPr>
+                                <m:ctrlPr>
+                                  <a:rPr lang="es-CO" i="1">
+                                    <a:latin typeface="Cambria Math" panose="02040503050406030204" pitchFamily="18" charset="0"/>
+                                  </a:rPr>
+                                </m:ctrlPr>
+                              </m:fPr>
+                              <m:num>
+                                <m:r>
+                                  <a:rPr lang="es-CO" i="1">
+                                    <a:latin typeface="Cambria Math" panose="02040503050406030204" pitchFamily="18" charset="0"/>
+                                  </a:rPr>
+                                  <m:t>𝑑</m:t>
+                                </m:r>
+                                <m:sSub>
+                                  <m:sSubPr>
+                                    <m:ctrlPr>
+                                      <a:rPr lang="es-CO" i="1">
+                                        <a:latin typeface="Cambria Math" panose="02040503050406030204" pitchFamily="18" charset="0"/>
+                                      </a:rPr>
+                                    </m:ctrlPr>
+                                  </m:sSubPr>
+                                  <m:e>
+                                    <m:r>
+                                      <a:rPr lang="es-CO" i="1">
+                                        <a:latin typeface="Cambria Math" panose="02040503050406030204" pitchFamily="18" charset="0"/>
+                                      </a:rPr>
+                                      <m:t>𝑛</m:t>
+                                    </m:r>
+                                  </m:e>
+                                  <m:sub>
+                                    <m:r>
+                                      <m:rPr>
+                                        <m:sty m:val="p"/>
+                                      </m:rPr>
+                                      <a:rPr lang="es-CO" i="0">
+                                        <a:latin typeface="Cambria Math" panose="02040503050406030204" pitchFamily="18" charset="0"/>
+                                      </a:rPr>
+                                      <m:t>eff</m:t>
+                                    </m:r>
+                                  </m:sub>
+                                </m:sSub>
+                              </m:num>
+                              <m:den>
+                                <m:r>
+                                  <a:rPr lang="es-CO" i="1">
+                                    <a:latin typeface="Cambria Math" panose="02040503050406030204" pitchFamily="18" charset="0"/>
+                                  </a:rPr>
+                                  <m:t>𝑑</m:t>
+                                </m:r>
+                                <m:r>
+                                  <a:rPr lang="es-CO" i="1">
+                                    <a:latin typeface="Cambria Math" panose="02040503050406030204" pitchFamily="18" charset="0"/>
+                                  </a:rPr>
+                                  <m:t>𝜆</m:t>
+                                </m:r>
+                              </m:den>
+                            </m:f>
+                            <m:r>
+                              <a:rPr lang="es-CO" i="0">
+                                <a:latin typeface="Cambria Math" panose="02040503050406030204" pitchFamily="18" charset="0"/>
+                              </a:rPr>
+                              <m:t>=</m:t>
+                            </m:r>
+                            <m:sSub>
+                              <m:sSubPr>
+                                <m:ctrlPr>
+                                  <a:rPr lang="es-CO" i="1">
+                                    <a:latin typeface="Cambria Math" panose="02040503050406030204" pitchFamily="18" charset="0"/>
+                                  </a:rPr>
+                                </m:ctrlPr>
+                              </m:sSubPr>
+                              <m:e>
+                                <m:r>
+                                  <a:rPr lang="es-CO" i="1">
+                                    <a:latin typeface="Cambria Math" panose="02040503050406030204" pitchFamily="18" charset="0"/>
+                                  </a:rPr>
+                                  <m:t>𝑛</m:t>
+                                </m:r>
+                              </m:e>
+                              <m:sub>
+                                <m:r>
+                                  <a:rPr lang="es-CO" i="0">
+                                    <a:latin typeface="Cambria Math" panose="02040503050406030204" pitchFamily="18" charset="0"/>
+                                  </a:rPr>
+                                  <m:t>2</m:t>
+                                </m:r>
+                              </m:sub>
+                            </m:sSub>
+                            <m:r>
+                              <a:rPr lang="es-CO" i="0">
+                                <a:latin typeface="Cambria Math" panose="02040503050406030204" pitchFamily="18" charset="0"/>
+                              </a:rPr>
+                              <m:t>+</m:t>
+                            </m:r>
+                            <m:r>
+                              <a:rPr lang="es-CO" i="0">
+                                <a:latin typeface="Cambria Math" panose="02040503050406030204" pitchFamily="18" charset="0"/>
+                              </a:rPr>
+                              <m:t>2</m:t>
+                            </m:r>
+                            <m:sSub>
+                              <m:sSubPr>
+                                <m:ctrlPr>
+                                  <a:rPr lang="es-CO" i="1">
+                                    <a:latin typeface="Cambria Math" panose="02040503050406030204" pitchFamily="18" charset="0"/>
+                                  </a:rPr>
+                                </m:ctrlPr>
+                              </m:sSubPr>
+                              <m:e>
+                                <m:r>
+                                  <a:rPr lang="es-CO" i="1">
+                                    <a:latin typeface="Cambria Math" panose="02040503050406030204" pitchFamily="18" charset="0"/>
+                                  </a:rPr>
+                                  <m:t>𝑛</m:t>
+                                </m:r>
+                              </m:e>
+                              <m:sub>
+                                <m:r>
+                                  <a:rPr lang="es-CO" i="0">
+                                    <a:latin typeface="Cambria Math" panose="02040503050406030204" pitchFamily="18" charset="0"/>
+                                  </a:rPr>
+                                  <m:t>3</m:t>
+                                </m:r>
+                              </m:sub>
+                            </m:sSub>
+                            <m:d>
+                              <m:dPr>
+                                <m:ctrlPr>
+                                  <a:rPr lang="es-CO" i="1">
+                                    <a:latin typeface="Cambria Math" panose="02040503050406030204" pitchFamily="18" charset="0"/>
+                                  </a:rPr>
+                                </m:ctrlPr>
+                              </m:dPr>
+                              <m:e>
+                                <m:r>
+                                  <a:rPr lang="es-CO" i="1">
+                                    <a:latin typeface="Cambria Math" panose="02040503050406030204" pitchFamily="18" charset="0"/>
+                                  </a:rPr>
+                                  <m:t>𝜆</m:t>
+                                </m:r>
+                                <m:r>
+                                  <a:rPr lang="es-CO" i="0">
+                                    <a:latin typeface="Cambria Math" panose="02040503050406030204" pitchFamily="18" charset="0"/>
+                                  </a:rPr>
+                                  <m:t>−</m:t>
+                                </m:r>
+                                <m:sSub>
+                                  <m:sSubPr>
+                                    <m:ctrlPr>
+                                      <a:rPr lang="es-CO" i="1">
+                                        <a:latin typeface="Cambria Math" panose="02040503050406030204" pitchFamily="18" charset="0"/>
+                                      </a:rPr>
+                                    </m:ctrlPr>
+                                  </m:sSubPr>
+                                  <m:e>
+                                    <m:r>
+                                      <a:rPr lang="es-CO" i="1">
+                                        <a:latin typeface="Cambria Math" panose="02040503050406030204" pitchFamily="18" charset="0"/>
+                                      </a:rPr>
+                                      <m:t>𝜆</m:t>
+                                    </m:r>
+                                  </m:e>
+                                  <m:sub>
+                                    <m:r>
+                                      <a:rPr lang="es-CO" i="0">
+                                        <a:latin typeface="Cambria Math" panose="02040503050406030204" pitchFamily="18" charset="0"/>
+                                      </a:rPr>
+                                      <m:t>0</m:t>
+                                    </m:r>
+                                  </m:sub>
+                                </m:sSub>
+                              </m:e>
+                            </m:d>
+                          </m:e>
+                        </m:mr>
+                      </m:m>
+                    </m:oMath>
+                  </m:oMathPara>
+                </a14:m>
+                <a:endParaRPr lang="es-CO" dirty="0"/>
+              </a:p>
+            </p:txBody>
+          </p:sp>
+        </mc:Choice>
+        <mc:Fallback>
+          <p:sp>
+            <p:nvSpPr>
+              <p:cNvPr id="13" name="TextBox 12">
+                <a:extLst>
+                  <a:ext uri="{FF2B5EF4-FFF2-40B4-BE49-F238E27FC236}">
+                    <a16:creationId xmlns:a16="http://schemas.microsoft.com/office/drawing/2014/main" id="{9F52424B-6A2D-C225-171F-318174D3582B}"/>
+                  </a:ext>
+                </a:extLst>
+              </p:cNvPr>
+              <p:cNvSpPr txBox="1">
+                <a:spLocks noRot="1" noChangeAspect="1" noMove="1" noResize="1" noEditPoints="1" noAdjustHandles="1" noChangeArrowheads="1" noChangeShapeType="1" noTextEdit="1"/>
+              </p:cNvSpPr>
+              <p:nvPr/>
+            </p:nvSpPr>
+            <p:spPr>
+              <a:xfrm>
+                <a:off x="1295400" y="2164420"/>
+                <a:ext cx="4099560" cy="618311"/>
+              </a:xfrm>
+              <a:prstGeom prst="rect">
+                <a:avLst/>
+              </a:prstGeom>
+              <a:blipFill>
+                <a:blip r:embed="rId3"/>
+                <a:stretch>
+                  <a:fillRect/>
+                </a:stretch>
+              </a:blipFill>
+            </p:spPr>
+            <p:txBody>
+              <a:bodyPr/>
+              <a:lstStyle/>
+              <a:p>
+                <a:r>
+                  <a:rPr lang="es-CO">
+                    <a:noFill/>
+                  </a:rPr>
+                  <a:t> </a:t>
+                </a:r>
+              </a:p>
+            </p:txBody>
+          </p:sp>
+        </mc:Fallback>
+      </mc:AlternateContent>
+      <mc:AlternateContent xmlns:mc="http://schemas.openxmlformats.org/markup-compatibility/2006">
+        <mc:Choice xmlns:a14="http://schemas.microsoft.com/office/drawing/2010/main" Requires="a14">
+          <p:sp>
+            <p:nvSpPr>
+              <p:cNvPr id="17" name="TextBox 16">
+                <a:extLst>
+                  <a:ext uri="{FF2B5EF4-FFF2-40B4-BE49-F238E27FC236}">
+                    <a16:creationId xmlns:a16="http://schemas.microsoft.com/office/drawing/2014/main" id="{2327856F-C7E8-CAA1-A763-87593E7863D6}"/>
+                  </a:ext>
+                </a:extLst>
+              </p:cNvPr>
+              <p:cNvSpPr txBox="1"/>
+              <p:nvPr/>
+            </p:nvSpPr>
+            <p:spPr>
+              <a:xfrm>
+                <a:off x="1943100" y="4388254"/>
+                <a:ext cx="2804160" cy="618311"/>
+              </a:xfrm>
+              <a:prstGeom prst="rect">
+                <a:avLst/>
+              </a:prstGeom>
+              <a:noFill/>
+            </p:spPr>
+            <p:txBody>
+              <a:bodyPr wrap="square">
+                <a:spAutoFit/>
+              </a:bodyPr>
+              <a:lstStyle/>
+              <a:p>
+                <a:pPr/>
+                <a14:m>
+                  <m:oMathPara xmlns:m="http://schemas.openxmlformats.org/officeDocument/2006/math">
+                    <m:oMathParaPr>
+                      <m:jc m:val="centerGroup"/>
+                    </m:oMathParaPr>
+                    <m:oMath xmlns:m="http://schemas.openxmlformats.org/officeDocument/2006/math">
+                      <m:m>
+                        <m:mPr>
+                          <m:plcHide m:val="on"/>
+                          <m:mcs>
+                            <m:mc>
+                              <m:mcPr>
+                                <m:count m:val="1"/>
+                                <m:mcJc m:val="center"/>
+                              </m:mcPr>
+                            </m:mc>
+                          </m:mcs>
+                          <m:ctrlPr>
+                            <a:rPr lang="es-CO" i="1" smtClean="0">
+                              <a:latin typeface="Cambria Math" panose="02040503050406030204" pitchFamily="18" charset="0"/>
+                            </a:rPr>
+                          </m:ctrlPr>
+                        </m:mPr>
+                        <m:mr>
+                          <m:e>
+                            <m:sSub>
+                              <m:sSubPr>
+                                <m:ctrlPr>
+                                  <a:rPr lang="es-CO" i="1">
+                                    <a:latin typeface="Cambria Math" panose="02040503050406030204" pitchFamily="18" charset="0"/>
+                                  </a:rPr>
+                                </m:ctrlPr>
+                              </m:sSubPr>
+                              <m:e>
+                                <m:r>
+                                  <a:rPr lang="es-CO" i="1">
+                                    <a:latin typeface="Cambria Math" panose="02040503050406030204" pitchFamily="18" charset="0"/>
+                                  </a:rPr>
+                                  <m:t>𝑛</m:t>
+                                </m:r>
+                              </m:e>
+                              <m:sub>
+                                <m:r>
+                                  <a:rPr lang="es-CO" i="1">
+                                    <a:latin typeface="Cambria Math" panose="02040503050406030204" pitchFamily="18" charset="0"/>
+                                  </a:rPr>
+                                  <m:t>𝑔</m:t>
+                                </m:r>
+                              </m:sub>
+                            </m:sSub>
+                            <m:r>
+                              <a:rPr lang="es-CO" i="0">
+                                <a:latin typeface="Cambria Math" panose="02040503050406030204" pitchFamily="18" charset="0"/>
+                              </a:rPr>
+                              <m:t>=</m:t>
+                            </m:r>
+                            <m:sSub>
+                              <m:sSubPr>
+                                <m:ctrlPr>
+                                  <a:rPr lang="es-CO" i="1">
+                                    <a:latin typeface="Cambria Math" panose="02040503050406030204" pitchFamily="18" charset="0"/>
+                                  </a:rPr>
+                                </m:ctrlPr>
+                              </m:sSubPr>
+                              <m:e>
+                                <m:r>
+                                  <a:rPr lang="es-CO" i="1">
+                                    <a:latin typeface="Cambria Math" panose="02040503050406030204" pitchFamily="18" charset="0"/>
+                                  </a:rPr>
+                                  <m:t>𝑛</m:t>
+                                </m:r>
+                              </m:e>
+                              <m:sub>
+                                <m:r>
+                                  <m:rPr>
+                                    <m:sty m:val="p"/>
+                                  </m:rPr>
+                                  <a:rPr lang="es-CO" i="0">
+                                    <a:latin typeface="Cambria Math" panose="02040503050406030204" pitchFamily="18" charset="0"/>
+                                  </a:rPr>
+                                  <m:t>eff</m:t>
+                                </m:r>
+                              </m:sub>
+                            </m:sSub>
+                            <m:r>
+                              <a:rPr lang="es-CO" i="0">
+                                <a:latin typeface="Cambria Math" panose="02040503050406030204" pitchFamily="18" charset="0"/>
+                              </a:rPr>
+                              <m:t>−</m:t>
+                            </m:r>
+                            <m:r>
+                              <a:rPr lang="es-CO" i="1">
+                                <a:latin typeface="Cambria Math" panose="02040503050406030204" pitchFamily="18" charset="0"/>
+                              </a:rPr>
+                              <m:t>𝜆</m:t>
+                            </m:r>
+                            <m:f>
+                              <m:fPr>
+                                <m:ctrlPr>
+                                  <a:rPr lang="es-CO" i="1">
+                                    <a:latin typeface="Cambria Math" panose="02040503050406030204" pitchFamily="18" charset="0"/>
+                                  </a:rPr>
+                                </m:ctrlPr>
+                              </m:fPr>
+                              <m:num>
+                                <m:r>
+                                  <a:rPr lang="es-CO" i="1">
+                                    <a:latin typeface="Cambria Math" panose="02040503050406030204" pitchFamily="18" charset="0"/>
+                                  </a:rPr>
+                                  <m:t>𝑑</m:t>
+                                </m:r>
+                                <m:sSub>
+                                  <m:sSubPr>
+                                    <m:ctrlPr>
+                                      <a:rPr lang="es-CO" i="1">
+                                        <a:latin typeface="Cambria Math" panose="02040503050406030204" pitchFamily="18" charset="0"/>
+                                      </a:rPr>
+                                    </m:ctrlPr>
+                                  </m:sSubPr>
+                                  <m:e>
+                                    <m:r>
+                                      <a:rPr lang="es-CO" i="1">
+                                        <a:latin typeface="Cambria Math" panose="02040503050406030204" pitchFamily="18" charset="0"/>
+                                      </a:rPr>
+                                      <m:t>𝑛</m:t>
+                                    </m:r>
+                                  </m:e>
+                                  <m:sub>
+                                    <m:r>
+                                      <m:rPr>
+                                        <m:sty m:val="p"/>
+                                      </m:rPr>
+                                      <a:rPr lang="es-CO" i="0">
+                                        <a:latin typeface="Cambria Math" panose="02040503050406030204" pitchFamily="18" charset="0"/>
+                                      </a:rPr>
+                                      <m:t>eff</m:t>
+                                    </m:r>
+                                  </m:sub>
+                                </m:sSub>
+                              </m:num>
+                              <m:den>
+                                <m:r>
+                                  <a:rPr lang="es-CO" i="1">
+                                    <a:latin typeface="Cambria Math" panose="02040503050406030204" pitchFamily="18" charset="0"/>
+                                  </a:rPr>
+                                  <m:t>𝑑</m:t>
+                                </m:r>
+                                <m:r>
+                                  <a:rPr lang="es-CO" i="1">
+                                    <a:latin typeface="Cambria Math" panose="02040503050406030204" pitchFamily="18" charset="0"/>
+                                  </a:rPr>
+                                  <m:t>𝜆</m:t>
+                                </m:r>
+                              </m:den>
+                            </m:f>
+                          </m:e>
+                        </m:mr>
+                      </m:m>
+                    </m:oMath>
+                  </m:oMathPara>
+                </a14:m>
+                <a:endParaRPr lang="es-CO" dirty="0"/>
+              </a:p>
+            </p:txBody>
+          </p:sp>
+        </mc:Choice>
+        <mc:Fallback>
+          <p:sp>
+            <p:nvSpPr>
+              <p:cNvPr id="17" name="TextBox 16">
+                <a:extLst>
+                  <a:ext uri="{FF2B5EF4-FFF2-40B4-BE49-F238E27FC236}">
+                    <a16:creationId xmlns:a16="http://schemas.microsoft.com/office/drawing/2014/main" id="{2327856F-C7E8-CAA1-A763-87593E7863D6}"/>
+                  </a:ext>
+                </a:extLst>
+              </p:cNvPr>
+              <p:cNvSpPr txBox="1">
+                <a:spLocks noRot="1" noChangeAspect="1" noMove="1" noResize="1" noEditPoints="1" noAdjustHandles="1" noChangeArrowheads="1" noChangeShapeType="1" noTextEdit="1"/>
+              </p:cNvSpPr>
+              <p:nvPr/>
+            </p:nvSpPr>
+            <p:spPr>
+              <a:xfrm>
+                <a:off x="1943100" y="4388254"/>
+                <a:ext cx="2804160" cy="618311"/>
+              </a:xfrm>
+              <a:prstGeom prst="rect">
+                <a:avLst/>
+              </a:prstGeom>
+              <a:blipFill>
+                <a:blip r:embed="rId4"/>
+                <a:stretch>
+                  <a:fillRect/>
+                </a:stretch>
+              </a:blipFill>
+            </p:spPr>
+            <p:txBody>
+              <a:bodyPr/>
+              <a:lstStyle/>
+              <a:p>
+                <a:r>
+                  <a:rPr lang="es-CO">
+                    <a:noFill/>
+                  </a:rPr>
+                  <a:t> </a:t>
+                </a:r>
+              </a:p>
+            </p:txBody>
+          </p:sp>
+        </mc:Fallback>
+      </mc:AlternateContent>
+      <mc:AlternateContent xmlns:mc="http://schemas.openxmlformats.org/markup-compatibility/2006">
+        <mc:Choice xmlns:a14="http://schemas.microsoft.com/office/drawing/2010/main" Requires="a14">
+          <p:sp>
+            <p:nvSpPr>
+              <p:cNvPr id="20" name="TextBox 19">
+                <a:extLst>
+                  <a:ext uri="{FF2B5EF4-FFF2-40B4-BE49-F238E27FC236}">
+                    <a16:creationId xmlns:a16="http://schemas.microsoft.com/office/drawing/2014/main" id="{955A0DB2-70EE-CA7D-04ED-A075067803F3}"/>
+                  </a:ext>
+                </a:extLst>
+              </p:cNvPr>
+              <p:cNvSpPr txBox="1"/>
+              <p:nvPr/>
+            </p:nvSpPr>
+            <p:spPr>
+              <a:xfrm>
+                <a:off x="487680" y="3987671"/>
+                <a:ext cx="5257800" cy="391902"/>
+              </a:xfrm>
+              <a:prstGeom prst="rect">
+                <a:avLst/>
+              </a:prstGeom>
+              <a:noFill/>
+            </p:spPr>
+            <p:txBody>
+              <a:bodyPr wrap="square">
+                <a:spAutoFit/>
+              </a:bodyPr>
+              <a:lstStyle/>
+              <a:p>
+                <a:pPr algn="ctr"/>
+                <a:r>
+                  <a:rPr lang="es-MX" dirty="0" err="1"/>
+                  <a:t>Considering</a:t>
+                </a:r>
+                <a:r>
+                  <a:rPr lang="es-MX" dirty="0"/>
+                  <a:t> </a:t>
+                </a:r>
+                <a:r>
+                  <a:rPr lang="es-MX" dirty="0" err="1"/>
+                  <a:t>the</a:t>
+                </a:r>
+                <a:r>
+                  <a:rPr lang="es-MX" dirty="0"/>
+                  <a:t> </a:t>
+                </a:r>
+                <a:r>
+                  <a:rPr lang="es-MX" dirty="0" err="1"/>
+                  <a:t>equation</a:t>
+                </a:r>
+                <a:r>
+                  <a:rPr lang="es-MX" dirty="0"/>
+                  <a:t> </a:t>
+                </a:r>
+                <a:r>
+                  <a:rPr lang="es-MX" dirty="0" err="1"/>
+                  <a:t>for</a:t>
+                </a:r>
+                <a:r>
+                  <a:rPr lang="es-MX" dirty="0"/>
+                  <a:t> </a:t>
+                </a:r>
+                <a:r>
+                  <a:rPr lang="es-MX" dirty="0" err="1"/>
+                  <a:t>the</a:t>
+                </a:r>
+                <a:r>
+                  <a:rPr lang="es-MX" dirty="0"/>
+                  <a:t> </a:t>
+                </a:r>
+                <a:r>
+                  <a:rPr lang="es-MX" dirty="0" err="1"/>
+                  <a:t>group</a:t>
+                </a:r>
+                <a:r>
+                  <a:rPr lang="es-MX" dirty="0"/>
+                  <a:t> </a:t>
+                </a:r>
+                <a:r>
+                  <a:rPr lang="es-MX" dirty="0" err="1"/>
+                  <a:t>index</a:t>
+                </a:r>
+                <a:r>
+                  <a:rPr lang="es-MX" dirty="0"/>
+                  <a:t> </a:t>
+                </a:r>
+                <a14:m>
+                  <m:oMath xmlns:m="http://schemas.openxmlformats.org/officeDocument/2006/math">
+                    <m:sSub>
+                      <m:sSubPr>
+                        <m:ctrlPr>
+                          <a:rPr lang="es-CO" i="1">
+                            <a:latin typeface="Cambria Math" panose="02040503050406030204" pitchFamily="18" charset="0"/>
+                          </a:rPr>
+                        </m:ctrlPr>
+                      </m:sSubPr>
+                      <m:e>
+                        <m:r>
+                          <a:rPr lang="es-CO" i="1">
+                            <a:latin typeface="Cambria Math" panose="02040503050406030204" pitchFamily="18" charset="0"/>
+                          </a:rPr>
+                          <m:t>𝑛</m:t>
+                        </m:r>
+                      </m:e>
+                      <m:sub>
+                        <m:r>
+                          <a:rPr lang="es-CO" i="1">
+                            <a:latin typeface="Cambria Math" panose="02040503050406030204" pitchFamily="18" charset="0"/>
+                          </a:rPr>
+                          <m:t>𝑔</m:t>
+                        </m:r>
+                      </m:sub>
+                    </m:sSub>
+                  </m:oMath>
+                </a14:m>
+                <a:endParaRPr lang="en-US" dirty="0"/>
+              </a:p>
+            </p:txBody>
+          </p:sp>
+        </mc:Choice>
+        <mc:Fallback>
+          <p:sp>
+            <p:nvSpPr>
+              <p:cNvPr id="20" name="TextBox 19">
+                <a:extLst>
+                  <a:ext uri="{FF2B5EF4-FFF2-40B4-BE49-F238E27FC236}">
+                    <a16:creationId xmlns:a16="http://schemas.microsoft.com/office/drawing/2014/main" id="{955A0DB2-70EE-CA7D-04ED-A075067803F3}"/>
+                  </a:ext>
+                </a:extLst>
+              </p:cNvPr>
+              <p:cNvSpPr txBox="1">
+                <a:spLocks noRot="1" noChangeAspect="1" noMove="1" noResize="1" noEditPoints="1" noAdjustHandles="1" noChangeArrowheads="1" noChangeShapeType="1" noTextEdit="1"/>
+              </p:cNvSpPr>
+              <p:nvPr/>
+            </p:nvSpPr>
+            <p:spPr>
+              <a:xfrm>
+                <a:off x="487680" y="3987671"/>
+                <a:ext cx="5257800" cy="391902"/>
+              </a:xfrm>
+              <a:prstGeom prst="rect">
+                <a:avLst/>
+              </a:prstGeom>
+              <a:blipFill>
+                <a:blip r:embed="rId5"/>
+                <a:stretch>
+                  <a:fillRect t="-6250" b="-20313"/>
+                </a:stretch>
+              </a:blipFill>
+            </p:spPr>
+            <p:txBody>
+              <a:bodyPr/>
+              <a:lstStyle/>
+              <a:p>
+                <a:r>
+                  <a:rPr lang="es-CO">
+                    <a:noFill/>
+                  </a:rPr>
+                  <a:t> </a:t>
+                </a:r>
+              </a:p>
+            </p:txBody>
+          </p:sp>
+        </mc:Fallback>
+      </mc:AlternateContent>
+      <mc:AlternateContent xmlns:mc="http://schemas.openxmlformats.org/markup-compatibility/2006">
+        <mc:Choice xmlns:a14="http://schemas.microsoft.com/office/drawing/2010/main" Requires="a14">
+          <p:sp>
+            <p:nvSpPr>
+              <p:cNvPr id="21" name="TextBox 20">
+                <a:extLst>
+                  <a:ext uri="{FF2B5EF4-FFF2-40B4-BE49-F238E27FC236}">
+                    <a16:creationId xmlns:a16="http://schemas.microsoft.com/office/drawing/2014/main" id="{75F8FB5F-5A35-223B-69D0-9B4C123B173E}"/>
+                  </a:ext>
+                </a:extLst>
+              </p:cNvPr>
+              <p:cNvSpPr txBox="1"/>
+              <p:nvPr/>
+            </p:nvSpPr>
+            <p:spPr>
+              <a:xfrm>
+                <a:off x="1066800" y="3184213"/>
+                <a:ext cx="4099560" cy="618311"/>
+              </a:xfrm>
+              <a:prstGeom prst="rect">
+                <a:avLst/>
+              </a:prstGeom>
+              <a:noFill/>
+            </p:spPr>
+            <p:txBody>
+              <a:bodyPr wrap="square">
+                <a:spAutoFit/>
+              </a:bodyPr>
+              <a:lstStyle/>
+              <a:p>
+                <a:pPr/>
+                <a14:m>
+                  <m:oMathPara xmlns:m="http://schemas.openxmlformats.org/officeDocument/2006/math">
+                    <m:oMathParaPr>
+                      <m:jc m:val="centerGroup"/>
+                    </m:oMathParaPr>
+                    <m:oMath xmlns:m="http://schemas.openxmlformats.org/officeDocument/2006/math">
+                      <m:m>
+                        <m:mPr>
+                          <m:plcHide m:val="on"/>
+                          <m:mcs>
+                            <m:mc>
+                              <m:mcPr>
+                                <m:count m:val="1"/>
+                                <m:mcJc m:val="center"/>
+                              </m:mcPr>
+                            </m:mc>
+                          </m:mcs>
+                          <m:ctrlPr>
+                            <a:rPr lang="es-CO" i="1" smtClean="0">
+                              <a:latin typeface="Cambria Math" panose="02040503050406030204" pitchFamily="18" charset="0"/>
+                            </a:rPr>
+                          </m:ctrlPr>
+                        </m:mPr>
+                        <m:mr>
+                          <m:e>
+                            <m:f>
+                              <m:fPr>
+                                <m:ctrlPr>
+                                  <a:rPr lang="es-CO" i="1">
+                                    <a:latin typeface="Cambria Math" panose="02040503050406030204" pitchFamily="18" charset="0"/>
+                                  </a:rPr>
+                                </m:ctrlPr>
+                              </m:fPr>
+                              <m:num>
+                                <m:r>
+                                  <a:rPr lang="es-CO" i="1">
+                                    <a:latin typeface="Cambria Math" panose="02040503050406030204" pitchFamily="18" charset="0"/>
+                                  </a:rPr>
+                                  <m:t>𝑑</m:t>
+                                </m:r>
+                                <m:sSub>
+                                  <m:sSubPr>
+                                    <m:ctrlPr>
+                                      <a:rPr lang="es-CO" i="1">
+                                        <a:latin typeface="Cambria Math" panose="02040503050406030204" pitchFamily="18" charset="0"/>
+                                      </a:rPr>
+                                    </m:ctrlPr>
+                                  </m:sSubPr>
+                                  <m:e>
+                                    <m:r>
+                                      <a:rPr lang="es-CO" i="1">
+                                        <a:latin typeface="Cambria Math" panose="02040503050406030204" pitchFamily="18" charset="0"/>
+                                      </a:rPr>
+                                      <m:t>𝑛</m:t>
+                                    </m:r>
+                                  </m:e>
+                                  <m:sub>
+                                    <m:r>
+                                      <m:rPr>
+                                        <m:sty m:val="p"/>
+                                      </m:rPr>
+                                      <a:rPr lang="es-CO" i="0">
+                                        <a:latin typeface="Cambria Math" panose="02040503050406030204" pitchFamily="18" charset="0"/>
+                                      </a:rPr>
+                                      <m:t>eff</m:t>
+                                    </m:r>
+                                  </m:sub>
+                                </m:sSub>
+                              </m:num>
+                              <m:den>
+                                <m:r>
+                                  <a:rPr lang="es-CO" i="1">
+                                    <a:latin typeface="Cambria Math" panose="02040503050406030204" pitchFamily="18" charset="0"/>
+                                  </a:rPr>
+                                  <m:t>𝑑</m:t>
+                                </m:r>
+                                <m:r>
+                                  <a:rPr lang="es-CO" i="1">
+                                    <a:latin typeface="Cambria Math" panose="02040503050406030204" pitchFamily="18" charset="0"/>
+                                  </a:rPr>
+                                  <m:t>𝜆</m:t>
+                                </m:r>
+                              </m:den>
+                            </m:f>
+                            <m:r>
+                              <a:rPr lang="es-CO" i="0">
+                                <a:latin typeface="Cambria Math" panose="02040503050406030204" pitchFamily="18" charset="0"/>
+                              </a:rPr>
+                              <m:t>=</m:t>
+                            </m:r>
+                            <m:sSub>
+                              <m:sSubPr>
+                                <m:ctrlPr>
+                                  <a:rPr lang="es-CO" i="1">
+                                    <a:latin typeface="Cambria Math" panose="02040503050406030204" pitchFamily="18" charset="0"/>
+                                  </a:rPr>
+                                </m:ctrlPr>
+                              </m:sSubPr>
+                              <m:e>
+                                <m:r>
+                                  <a:rPr lang="es-CO" i="1">
+                                    <a:latin typeface="Cambria Math" panose="02040503050406030204" pitchFamily="18" charset="0"/>
+                                  </a:rPr>
+                                  <m:t>𝑛</m:t>
+                                </m:r>
+                              </m:e>
+                              <m:sub>
+                                <m:r>
+                                  <a:rPr lang="es-CO" i="0">
+                                    <a:latin typeface="Cambria Math" panose="02040503050406030204" pitchFamily="18" charset="0"/>
+                                  </a:rPr>
+                                  <m:t>2</m:t>
+                                </m:r>
+                              </m:sub>
+                            </m:sSub>
+                          </m:e>
+                        </m:mr>
+                      </m:m>
+                    </m:oMath>
+                  </m:oMathPara>
+                </a14:m>
+                <a:endParaRPr lang="es-CO" dirty="0"/>
+              </a:p>
+            </p:txBody>
+          </p:sp>
+        </mc:Choice>
+        <mc:Fallback>
+          <p:sp>
+            <p:nvSpPr>
+              <p:cNvPr id="21" name="TextBox 20">
+                <a:extLst>
+                  <a:ext uri="{FF2B5EF4-FFF2-40B4-BE49-F238E27FC236}">
+                    <a16:creationId xmlns:a16="http://schemas.microsoft.com/office/drawing/2014/main" id="{75F8FB5F-5A35-223B-69D0-9B4C123B173E}"/>
+                  </a:ext>
+                </a:extLst>
+              </p:cNvPr>
+              <p:cNvSpPr txBox="1">
+                <a:spLocks noRot="1" noChangeAspect="1" noMove="1" noResize="1" noEditPoints="1" noAdjustHandles="1" noChangeArrowheads="1" noChangeShapeType="1" noTextEdit="1"/>
+              </p:cNvSpPr>
+              <p:nvPr/>
+            </p:nvSpPr>
+            <p:spPr>
+              <a:xfrm>
+                <a:off x="1066800" y="3184213"/>
+                <a:ext cx="4099560" cy="618311"/>
+              </a:xfrm>
+              <a:prstGeom prst="rect">
+                <a:avLst/>
+              </a:prstGeom>
+              <a:blipFill>
+                <a:blip r:embed="rId6"/>
+                <a:stretch>
+                  <a:fillRect/>
+                </a:stretch>
+              </a:blipFill>
+            </p:spPr>
+            <p:txBody>
+              <a:bodyPr/>
+              <a:lstStyle/>
+              <a:p>
+                <a:r>
+                  <a:rPr lang="es-CO">
+                    <a:noFill/>
+                  </a:rPr>
+                  <a:t> </a:t>
+                </a:r>
+              </a:p>
+            </p:txBody>
+          </p:sp>
+        </mc:Fallback>
+      </mc:AlternateContent>
+      <mc:AlternateContent xmlns:mc="http://schemas.openxmlformats.org/markup-compatibility/2006">
+        <mc:Choice xmlns:a14="http://schemas.microsoft.com/office/drawing/2010/main" Requires="a14">
+          <p:sp>
+            <p:nvSpPr>
+              <p:cNvPr id="22" name="TextBox 21">
+                <a:extLst>
+                  <a:ext uri="{FF2B5EF4-FFF2-40B4-BE49-F238E27FC236}">
+                    <a16:creationId xmlns:a16="http://schemas.microsoft.com/office/drawing/2014/main" id="{C01C3D3A-D016-40F3-7319-F1FB3AFCA839}"/>
+                  </a:ext>
+                </a:extLst>
+              </p:cNvPr>
+              <p:cNvSpPr txBox="1"/>
+              <p:nvPr/>
+            </p:nvSpPr>
+            <p:spPr>
+              <a:xfrm>
+                <a:off x="1714500" y="5021822"/>
+                <a:ext cx="2804160" cy="369332"/>
+              </a:xfrm>
+              <a:prstGeom prst="rect">
+                <a:avLst/>
+              </a:prstGeom>
+              <a:noFill/>
+            </p:spPr>
+            <p:txBody>
+              <a:bodyPr wrap="square">
+                <a:spAutoFit/>
+              </a:bodyPr>
+              <a:lstStyle/>
+              <a:p>
+                <a:pPr/>
+                <a14:m>
+                  <m:oMathPara xmlns:m="http://schemas.openxmlformats.org/officeDocument/2006/math">
+                    <m:oMathParaPr>
+                      <m:jc m:val="centerGroup"/>
+                    </m:oMathParaPr>
+                    <m:oMath xmlns:m="http://schemas.openxmlformats.org/officeDocument/2006/math">
+                      <m:m>
+                        <m:mPr>
+                          <m:plcHide m:val="on"/>
+                          <m:mcs>
+                            <m:mc>
+                              <m:mcPr>
+                                <m:count m:val="1"/>
+                                <m:mcJc m:val="center"/>
+                              </m:mcPr>
+                            </m:mc>
+                          </m:mcs>
+                          <m:ctrlPr>
+                            <a:rPr lang="es-CO" i="1" smtClean="0">
+                              <a:latin typeface="Cambria Math" panose="02040503050406030204" pitchFamily="18" charset="0"/>
+                            </a:rPr>
+                          </m:ctrlPr>
+                        </m:mPr>
+                        <m:mr>
+                          <m:e>
+                            <m:sSub>
+                              <m:sSubPr>
+                                <m:ctrlPr>
+                                  <a:rPr lang="es-CO" i="1">
+                                    <a:latin typeface="Cambria Math" panose="02040503050406030204" pitchFamily="18" charset="0"/>
+                                  </a:rPr>
+                                </m:ctrlPr>
+                              </m:sSubPr>
+                              <m:e>
+                                <m:r>
+                                  <a:rPr lang="es-CO" i="1">
+                                    <a:latin typeface="Cambria Math" panose="02040503050406030204" pitchFamily="18" charset="0"/>
+                                  </a:rPr>
+                                  <m:t>𝑛</m:t>
+                                </m:r>
+                              </m:e>
+                              <m:sub>
+                                <m:r>
+                                  <a:rPr lang="es-CO" i="1">
+                                    <a:latin typeface="Cambria Math" panose="02040503050406030204" pitchFamily="18" charset="0"/>
+                                  </a:rPr>
+                                  <m:t>𝑔</m:t>
+                                </m:r>
+                              </m:sub>
+                            </m:sSub>
+                            <m:r>
+                              <a:rPr lang="es-CO" i="0">
+                                <a:latin typeface="Cambria Math" panose="02040503050406030204" pitchFamily="18" charset="0"/>
+                              </a:rPr>
+                              <m:t>=</m:t>
+                            </m:r>
+                            <m:sSub>
+                              <m:sSubPr>
+                                <m:ctrlPr>
+                                  <a:rPr lang="es-CO" i="1">
+                                    <a:latin typeface="Cambria Math" panose="02040503050406030204" pitchFamily="18" charset="0"/>
+                                  </a:rPr>
+                                </m:ctrlPr>
+                              </m:sSubPr>
+                              <m:e>
+                                <m:r>
+                                  <a:rPr lang="es-CO" i="1">
+                                    <a:latin typeface="Cambria Math" panose="02040503050406030204" pitchFamily="18" charset="0"/>
+                                  </a:rPr>
+                                  <m:t>𝑛</m:t>
+                                </m:r>
+                              </m:e>
+                              <m:sub>
+                                <m:r>
+                                  <a:rPr lang="es-MX" b="0" i="0" smtClean="0">
+                                    <a:latin typeface="Cambria Math" panose="02040503050406030204" pitchFamily="18" charset="0"/>
+                                  </a:rPr>
+                                  <m:t>1</m:t>
+                                </m:r>
+                              </m:sub>
+                            </m:sSub>
+                            <m:r>
+                              <a:rPr lang="es-CO" i="0">
+                                <a:latin typeface="Cambria Math" panose="02040503050406030204" pitchFamily="18" charset="0"/>
+                              </a:rPr>
+                              <m:t>−</m:t>
+                            </m:r>
+                            <m:r>
+                              <a:rPr lang="es-CO" i="1">
+                                <a:latin typeface="Cambria Math" panose="02040503050406030204" pitchFamily="18" charset="0"/>
+                              </a:rPr>
+                              <m:t>𝜆</m:t>
+                            </m:r>
+                            <m:sSub>
+                              <m:sSubPr>
+                                <m:ctrlPr>
+                                  <a:rPr lang="es-CO" i="1">
+                                    <a:latin typeface="Cambria Math" panose="02040503050406030204" pitchFamily="18" charset="0"/>
+                                  </a:rPr>
+                                </m:ctrlPr>
+                              </m:sSubPr>
+                              <m:e>
+                                <m:r>
+                                  <a:rPr lang="es-CO" i="1">
+                                    <a:latin typeface="Cambria Math" panose="02040503050406030204" pitchFamily="18" charset="0"/>
+                                  </a:rPr>
+                                  <m:t>𝑛</m:t>
+                                </m:r>
+                              </m:e>
+                              <m:sub>
+                                <m:r>
+                                  <a:rPr lang="es-CO">
+                                    <a:latin typeface="Cambria Math" panose="02040503050406030204" pitchFamily="18" charset="0"/>
+                                  </a:rPr>
+                                  <m:t>2</m:t>
+                                </m:r>
+                              </m:sub>
+                            </m:sSub>
+                          </m:e>
+                        </m:mr>
+                      </m:m>
+                    </m:oMath>
+                  </m:oMathPara>
+                </a14:m>
+                <a:endParaRPr lang="es-CO" dirty="0"/>
+              </a:p>
+            </p:txBody>
+          </p:sp>
+        </mc:Choice>
+        <mc:Fallback>
+          <p:sp>
+            <p:nvSpPr>
+              <p:cNvPr id="22" name="TextBox 21">
+                <a:extLst>
+                  <a:ext uri="{FF2B5EF4-FFF2-40B4-BE49-F238E27FC236}">
+                    <a16:creationId xmlns:a16="http://schemas.microsoft.com/office/drawing/2014/main" id="{C01C3D3A-D016-40F3-7319-F1FB3AFCA839}"/>
+                  </a:ext>
+                </a:extLst>
+              </p:cNvPr>
+              <p:cNvSpPr txBox="1">
+                <a:spLocks noRot="1" noChangeAspect="1" noMove="1" noResize="1" noEditPoints="1" noAdjustHandles="1" noChangeArrowheads="1" noChangeShapeType="1" noTextEdit="1"/>
+              </p:cNvSpPr>
+              <p:nvPr/>
+            </p:nvSpPr>
+            <p:spPr>
+              <a:xfrm>
+                <a:off x="1714500" y="5021822"/>
+                <a:ext cx="2804160" cy="369332"/>
+              </a:xfrm>
+              <a:prstGeom prst="rect">
+                <a:avLst/>
+              </a:prstGeom>
+              <a:blipFill>
+                <a:blip r:embed="rId7"/>
+                <a:stretch>
+                  <a:fillRect b="-3333"/>
+                </a:stretch>
+              </a:blipFill>
+            </p:spPr>
+            <p:txBody>
+              <a:bodyPr/>
+              <a:lstStyle/>
+              <a:p>
+                <a:r>
+                  <a:rPr lang="es-CO">
+                    <a:noFill/>
+                  </a:rPr>
+                  <a:t> </a:t>
+                </a:r>
+              </a:p>
+            </p:txBody>
+          </p:sp>
+        </mc:Fallback>
+      </mc:AlternateContent>
+      <mc:AlternateContent xmlns:mc="http://schemas.openxmlformats.org/markup-compatibility/2006">
+        <mc:Choice xmlns:a14="http://schemas.microsoft.com/office/drawing/2010/main" Requires="a14">
+          <p:sp>
+            <p:nvSpPr>
+              <p:cNvPr id="25" name="Rectangle 24">
+                <a:extLst>
+                  <a:ext uri="{FF2B5EF4-FFF2-40B4-BE49-F238E27FC236}">
+                    <a16:creationId xmlns:a16="http://schemas.microsoft.com/office/drawing/2014/main" id="{9D380BB5-3327-B335-02BF-56BF2A822980}"/>
+                  </a:ext>
+                </a:extLst>
+              </p:cNvPr>
+              <p:cNvSpPr/>
+              <p:nvPr/>
+            </p:nvSpPr>
+            <p:spPr>
+              <a:xfrm>
+                <a:off x="6477000" y="1371600"/>
+                <a:ext cx="5181600" cy="4800600"/>
+              </a:xfrm>
+              <a:prstGeom prst="rect">
+                <a:avLst/>
+              </a:prstGeom>
+              <a:solidFill>
+                <a:srgbClr val="F2F2F2"/>
+              </a:solidFill>
+            </p:spPr>
+            <p:style>
+              <a:lnRef idx="2">
+                <a:schemeClr val="accent6"/>
+              </a:lnRef>
+              <a:fillRef idx="1">
+                <a:schemeClr val="lt1"/>
+              </a:fillRef>
+              <a:effectRef idx="0">
+                <a:schemeClr val="accent6"/>
+              </a:effectRef>
+              <a:fontRef idx="minor">
+                <a:schemeClr val="dk1"/>
+              </a:fontRef>
+            </p:style>
+            <p:txBody>
+              <a:bodyPr rtlCol="0" anchor="t"/>
+              <a:lstStyle/>
+              <a:p>
+                <a:pPr algn="ctr"/>
+                <a:r>
+                  <a:rPr lang="en-US" dirty="0">
+                    <a:solidFill>
+                      <a:schemeClr val="accent6">
+                        <a:lumMod val="75000"/>
+                      </a:schemeClr>
+                    </a:solidFill>
+                  </a:rPr>
+                  <a:t>Group index of the guided mode</a:t>
+                </a:r>
+              </a:p>
+              <a:p>
+                <a:pPr algn="just"/>
+                <a:r>
+                  <a:rPr lang="en-US" dirty="0"/>
+                  <a:t>Considering the second derivative of </a:t>
+                </a:r>
+                <a14:m>
+                  <m:oMath xmlns:m="http://schemas.openxmlformats.org/officeDocument/2006/math">
+                    <m:sSub>
+                      <m:sSubPr>
+                        <m:ctrlPr>
+                          <a:rPr lang="es-CO" i="1">
+                            <a:latin typeface="Cambria Math" panose="02040503050406030204" pitchFamily="18" charset="0"/>
+                          </a:rPr>
+                        </m:ctrlPr>
+                      </m:sSubPr>
+                      <m:e>
+                        <m:r>
+                          <a:rPr lang="es-CO" i="1">
+                            <a:latin typeface="Cambria Math" panose="02040503050406030204" pitchFamily="18" charset="0"/>
+                          </a:rPr>
+                          <m:t>𝑛</m:t>
+                        </m:r>
+                      </m:e>
+                      <m:sub>
+                        <m:r>
+                          <m:rPr>
+                            <m:sty m:val="p"/>
+                          </m:rPr>
+                          <a:rPr lang="es-CO">
+                            <a:latin typeface="Cambria Math" panose="02040503050406030204" pitchFamily="18" charset="0"/>
+                          </a:rPr>
+                          <m:t>eff</m:t>
+                        </m:r>
+                      </m:sub>
+                    </m:sSub>
+                    <m:d>
+                      <m:dPr>
+                        <m:ctrlPr>
+                          <a:rPr lang="es-CO" i="1">
+                            <a:latin typeface="Cambria Math" panose="02040503050406030204" pitchFamily="18" charset="0"/>
+                          </a:rPr>
+                        </m:ctrlPr>
+                      </m:dPr>
+                      <m:e>
+                        <m:r>
+                          <a:rPr lang="es-CO" i="1">
+                            <a:latin typeface="Cambria Math" panose="02040503050406030204" pitchFamily="18" charset="0"/>
+                          </a:rPr>
+                          <m:t>𝜆</m:t>
+                        </m:r>
+                      </m:e>
+                    </m:d>
+                  </m:oMath>
+                </a14:m>
+                <a:r>
+                  <a:rPr lang="en-US" dirty="0"/>
+                  <a:t> with respect to </a:t>
+                </a:r>
+                <a14:m>
+                  <m:oMath xmlns:m="http://schemas.openxmlformats.org/officeDocument/2006/math">
+                    <m:r>
+                      <a:rPr lang="es-CO" i="1">
+                        <a:latin typeface="Cambria Math" panose="02040503050406030204" pitchFamily="18" charset="0"/>
+                      </a:rPr>
+                      <m:t>𝜆</m:t>
+                    </m:r>
+                  </m:oMath>
+                </a14:m>
+                <a:endParaRPr lang="en-US" dirty="0"/>
+              </a:p>
+              <a:p>
+                <a:pPr algn="just"/>
+                <a:endParaRPr lang="en-US" dirty="0"/>
+              </a:p>
+              <a:p>
+                <a:pPr algn="just"/>
+                <a:endParaRPr lang="en-US" dirty="0"/>
+              </a:p>
+              <a:p>
+                <a:pPr algn="just"/>
+                <a:r>
+                  <a:rPr lang="es-MX" dirty="0" err="1"/>
+                  <a:t>Considering</a:t>
+                </a:r>
+                <a:r>
+                  <a:rPr lang="es-MX" dirty="0"/>
+                  <a:t> </a:t>
+                </a:r>
+                <a:r>
+                  <a:rPr lang="es-MX" dirty="0" err="1"/>
+                  <a:t>the</a:t>
+                </a:r>
+                <a:r>
+                  <a:rPr lang="es-MX" dirty="0"/>
+                  <a:t> </a:t>
+                </a:r>
+                <a:r>
+                  <a:rPr lang="es-MX" dirty="0" err="1"/>
+                  <a:t>equation</a:t>
+                </a:r>
+                <a:r>
+                  <a:rPr lang="es-MX" dirty="0"/>
+                  <a:t> </a:t>
+                </a:r>
+                <a:r>
+                  <a:rPr lang="es-MX" dirty="0" err="1"/>
+                  <a:t>for</a:t>
+                </a:r>
+                <a:r>
+                  <a:rPr lang="es-MX" dirty="0"/>
+                  <a:t> </a:t>
+                </a:r>
+                <a:r>
+                  <a:rPr lang="es-MX" dirty="0" err="1"/>
+                  <a:t>the</a:t>
+                </a:r>
+                <a:r>
+                  <a:rPr lang="es-MX" dirty="0"/>
+                  <a:t> dispersión </a:t>
+                </a:r>
+                <a:r>
+                  <a:rPr lang="es-MX" dirty="0" err="1"/>
+                  <a:t>parameter</a:t>
+                </a:r>
+                <a:r>
+                  <a:rPr lang="es-MX" dirty="0"/>
+                  <a:t> </a:t>
+                </a:r>
+                <a14:m>
+                  <m:oMath xmlns:m="http://schemas.openxmlformats.org/officeDocument/2006/math">
+                    <m:r>
+                      <a:rPr lang="es-CO" i="1">
+                        <a:latin typeface="Cambria Math" panose="02040503050406030204" pitchFamily="18" charset="0"/>
+                      </a:rPr>
+                      <m:t>𝐷</m:t>
+                    </m:r>
+                    <m:r>
+                      <a:rPr lang="es-MX" b="0" i="0" smtClean="0">
+                        <a:latin typeface="Cambria Math" panose="02040503050406030204" pitchFamily="18" charset="0"/>
+                      </a:rPr>
+                      <m:t>.</m:t>
+                    </m:r>
+                  </m:oMath>
+                </a14:m>
+                <a:endParaRPr lang="en-US" dirty="0"/>
+              </a:p>
+            </p:txBody>
+          </p:sp>
+        </mc:Choice>
+        <mc:Fallback>
+          <p:sp>
+            <p:nvSpPr>
+              <p:cNvPr id="25" name="Rectangle 24">
+                <a:extLst>
+                  <a:ext uri="{FF2B5EF4-FFF2-40B4-BE49-F238E27FC236}">
+                    <a16:creationId xmlns:a16="http://schemas.microsoft.com/office/drawing/2014/main" id="{9D380BB5-3327-B335-02BF-56BF2A822980}"/>
+                  </a:ext>
+                </a:extLst>
+              </p:cNvPr>
+              <p:cNvSpPr>
+                <a:spLocks noRot="1" noChangeAspect="1" noMove="1" noResize="1" noEditPoints="1" noAdjustHandles="1" noChangeArrowheads="1" noChangeShapeType="1" noTextEdit="1"/>
+              </p:cNvSpPr>
+              <p:nvPr/>
+            </p:nvSpPr>
+            <p:spPr>
+              <a:xfrm>
+                <a:off x="6477000" y="1371600"/>
+                <a:ext cx="5181600" cy="4800600"/>
+              </a:xfrm>
+              <a:prstGeom prst="rect">
+                <a:avLst/>
+              </a:prstGeom>
+              <a:blipFill>
+                <a:blip r:embed="rId8"/>
+                <a:stretch>
+                  <a:fillRect l="-820" t="-379" r="-703"/>
+                </a:stretch>
+              </a:blipFill>
+            </p:spPr>
+            <p:txBody>
+              <a:bodyPr/>
+              <a:lstStyle/>
+              <a:p>
+                <a:r>
+                  <a:rPr lang="es-CO">
+                    <a:noFill/>
+                  </a:rPr>
+                  <a:t> </a:t>
+                </a:r>
+              </a:p>
+            </p:txBody>
+          </p:sp>
+        </mc:Fallback>
+      </mc:AlternateContent>
+      <mc:AlternateContent xmlns:mc="http://schemas.openxmlformats.org/markup-compatibility/2006">
+        <mc:Choice xmlns:a14="http://schemas.microsoft.com/office/drawing/2010/main" Requires="a14">
+          <p:sp>
+            <p:nvSpPr>
+              <p:cNvPr id="15" name="TextBox 14">
+                <a:extLst>
+                  <a:ext uri="{FF2B5EF4-FFF2-40B4-BE49-F238E27FC236}">
+                    <a16:creationId xmlns:a16="http://schemas.microsoft.com/office/drawing/2014/main" id="{7435CD63-BDEA-D0B8-5ECF-A34A071C0159}"/>
+                  </a:ext>
+                </a:extLst>
+              </p:cNvPr>
+              <p:cNvSpPr txBox="1"/>
+              <p:nvPr/>
+            </p:nvSpPr>
+            <p:spPr>
+              <a:xfrm>
+                <a:off x="7627620" y="2079737"/>
+                <a:ext cx="2880360" cy="648191"/>
+              </a:xfrm>
+              <a:prstGeom prst="rect">
+                <a:avLst/>
+              </a:prstGeom>
+              <a:noFill/>
+            </p:spPr>
+            <p:txBody>
+              <a:bodyPr wrap="square">
+                <a:spAutoFit/>
+              </a:bodyPr>
+              <a:lstStyle/>
+              <a:p>
+                <a:pPr/>
+                <a14:m>
+                  <m:oMathPara xmlns:m="http://schemas.openxmlformats.org/officeDocument/2006/math">
+                    <m:oMathParaPr>
+                      <m:jc m:val="centerGroup"/>
+                    </m:oMathParaPr>
+                    <m:oMath xmlns:m="http://schemas.openxmlformats.org/officeDocument/2006/math">
+                      <m:m>
+                        <m:mPr>
+                          <m:plcHide m:val="on"/>
+                          <m:mcs>
+                            <m:mc>
+                              <m:mcPr>
+                                <m:count m:val="1"/>
+                                <m:mcJc m:val="center"/>
+                              </m:mcPr>
+                            </m:mc>
+                          </m:mcs>
+                          <m:ctrlPr>
+                            <a:rPr lang="es-CO" i="1" smtClean="0">
+                              <a:latin typeface="Cambria Math" panose="02040503050406030204" pitchFamily="18" charset="0"/>
+                            </a:rPr>
+                          </m:ctrlPr>
+                        </m:mPr>
+                        <m:mr>
+                          <m:e>
+                            <m:f>
+                              <m:fPr>
+                                <m:ctrlPr>
+                                  <a:rPr lang="es-CO" i="1">
+                                    <a:latin typeface="Cambria Math" panose="02040503050406030204" pitchFamily="18" charset="0"/>
+                                  </a:rPr>
+                                </m:ctrlPr>
+                              </m:fPr>
+                              <m:num>
+                                <m:sSup>
+                                  <m:sSupPr>
+                                    <m:ctrlPr>
+                                      <a:rPr lang="es-CO" i="1">
+                                        <a:latin typeface="Cambria Math" panose="02040503050406030204" pitchFamily="18" charset="0"/>
+                                      </a:rPr>
+                                    </m:ctrlPr>
+                                  </m:sSupPr>
+                                  <m:e>
+                                    <m:r>
+                                      <a:rPr lang="es-CO" i="1">
+                                        <a:latin typeface="Cambria Math" panose="02040503050406030204" pitchFamily="18" charset="0"/>
+                                      </a:rPr>
+                                      <m:t>𝑑</m:t>
+                                    </m:r>
+                                  </m:e>
+                                  <m:sup>
+                                    <m:r>
+                                      <a:rPr lang="es-CO" i="0">
+                                        <a:latin typeface="Cambria Math" panose="02040503050406030204" pitchFamily="18" charset="0"/>
+                                      </a:rPr>
+                                      <m:t>2</m:t>
+                                    </m:r>
+                                  </m:sup>
+                                </m:sSup>
+                                <m:sSub>
+                                  <m:sSubPr>
+                                    <m:ctrlPr>
+                                      <a:rPr lang="es-CO" i="1">
+                                        <a:latin typeface="Cambria Math" panose="02040503050406030204" pitchFamily="18" charset="0"/>
+                                      </a:rPr>
+                                    </m:ctrlPr>
+                                  </m:sSubPr>
+                                  <m:e>
+                                    <m:r>
+                                      <a:rPr lang="es-CO" i="1">
+                                        <a:latin typeface="Cambria Math" panose="02040503050406030204" pitchFamily="18" charset="0"/>
+                                      </a:rPr>
+                                      <m:t>𝑛</m:t>
+                                    </m:r>
+                                  </m:e>
+                                  <m:sub>
+                                    <m:r>
+                                      <m:rPr>
+                                        <m:sty m:val="p"/>
+                                      </m:rPr>
+                                      <a:rPr lang="es-CO" i="0">
+                                        <a:latin typeface="Cambria Math" panose="02040503050406030204" pitchFamily="18" charset="0"/>
+                                      </a:rPr>
+                                      <m:t>eff</m:t>
+                                    </m:r>
+                                  </m:sub>
+                                </m:sSub>
+                              </m:num>
+                              <m:den>
+                                <m:r>
+                                  <a:rPr lang="es-CO" i="1">
+                                    <a:latin typeface="Cambria Math" panose="02040503050406030204" pitchFamily="18" charset="0"/>
+                                  </a:rPr>
+                                  <m:t>𝑑</m:t>
+                                </m:r>
+                                <m:sSup>
+                                  <m:sSupPr>
+                                    <m:ctrlPr>
+                                      <a:rPr lang="es-CO" i="1">
+                                        <a:latin typeface="Cambria Math" panose="02040503050406030204" pitchFamily="18" charset="0"/>
+                                      </a:rPr>
+                                    </m:ctrlPr>
+                                  </m:sSupPr>
+                                  <m:e>
+                                    <m:r>
+                                      <a:rPr lang="es-CO" i="1">
+                                        <a:latin typeface="Cambria Math" panose="02040503050406030204" pitchFamily="18" charset="0"/>
+                                      </a:rPr>
+                                      <m:t>𝜆</m:t>
+                                    </m:r>
+                                  </m:e>
+                                  <m:sup>
+                                    <m:r>
+                                      <a:rPr lang="es-CO" i="0">
+                                        <a:latin typeface="Cambria Math" panose="02040503050406030204" pitchFamily="18" charset="0"/>
+                                      </a:rPr>
+                                      <m:t>2</m:t>
+                                    </m:r>
+                                  </m:sup>
+                                </m:sSup>
+                              </m:den>
+                            </m:f>
+                            <m:r>
+                              <a:rPr lang="es-CO" i="0">
+                                <a:latin typeface="Cambria Math" panose="02040503050406030204" pitchFamily="18" charset="0"/>
+                              </a:rPr>
+                              <m:t>=</m:t>
+                            </m:r>
+                            <m:r>
+                              <a:rPr lang="es-CO" i="0">
+                                <a:latin typeface="Cambria Math" panose="02040503050406030204" pitchFamily="18" charset="0"/>
+                              </a:rPr>
+                              <m:t>2</m:t>
+                            </m:r>
+                            <m:sSub>
+                              <m:sSubPr>
+                                <m:ctrlPr>
+                                  <a:rPr lang="es-CO" i="1">
+                                    <a:latin typeface="Cambria Math" panose="02040503050406030204" pitchFamily="18" charset="0"/>
+                                  </a:rPr>
+                                </m:ctrlPr>
+                              </m:sSubPr>
+                              <m:e>
+                                <m:r>
+                                  <a:rPr lang="es-CO" i="1">
+                                    <a:latin typeface="Cambria Math" panose="02040503050406030204" pitchFamily="18" charset="0"/>
+                                  </a:rPr>
+                                  <m:t>𝑛</m:t>
+                                </m:r>
+                              </m:e>
+                              <m:sub>
+                                <m:r>
+                                  <a:rPr lang="es-CO" i="0">
+                                    <a:latin typeface="Cambria Math" panose="02040503050406030204" pitchFamily="18" charset="0"/>
+                                  </a:rPr>
+                                  <m:t>3</m:t>
+                                </m:r>
+                              </m:sub>
+                            </m:sSub>
+                          </m:e>
+                        </m:mr>
+                      </m:m>
+                    </m:oMath>
+                  </m:oMathPara>
+                </a14:m>
+                <a:endParaRPr lang="es-CO" dirty="0"/>
+              </a:p>
+            </p:txBody>
+          </p:sp>
+        </mc:Choice>
+        <mc:Fallback>
+          <p:sp>
+            <p:nvSpPr>
+              <p:cNvPr id="15" name="TextBox 14">
+                <a:extLst>
+                  <a:ext uri="{FF2B5EF4-FFF2-40B4-BE49-F238E27FC236}">
+                    <a16:creationId xmlns:a16="http://schemas.microsoft.com/office/drawing/2014/main" id="{7435CD63-BDEA-D0B8-5ECF-A34A071C0159}"/>
+                  </a:ext>
+                </a:extLst>
+              </p:cNvPr>
+              <p:cNvSpPr txBox="1">
+                <a:spLocks noRot="1" noChangeAspect="1" noMove="1" noResize="1" noEditPoints="1" noAdjustHandles="1" noChangeArrowheads="1" noChangeShapeType="1" noTextEdit="1"/>
+              </p:cNvSpPr>
+              <p:nvPr/>
+            </p:nvSpPr>
+            <p:spPr>
+              <a:xfrm>
+                <a:off x="7627620" y="2079737"/>
+                <a:ext cx="2880360" cy="648191"/>
+              </a:xfrm>
+              <a:prstGeom prst="rect">
+                <a:avLst/>
+              </a:prstGeom>
+              <a:blipFill>
+                <a:blip r:embed="rId9"/>
+                <a:stretch>
+                  <a:fillRect/>
+                </a:stretch>
+              </a:blipFill>
+            </p:spPr>
+            <p:txBody>
+              <a:bodyPr/>
+              <a:lstStyle/>
+              <a:p>
+                <a:r>
+                  <a:rPr lang="es-CO">
+                    <a:noFill/>
+                  </a:rPr>
+                  <a:t> </a:t>
+                </a:r>
+              </a:p>
+            </p:txBody>
+          </p:sp>
+        </mc:Fallback>
+      </mc:AlternateContent>
+      <mc:AlternateContent xmlns:mc="http://schemas.openxmlformats.org/markup-compatibility/2006">
+        <mc:Choice xmlns:a14="http://schemas.microsoft.com/office/drawing/2010/main" Requires="a14">
+          <p:sp>
+            <p:nvSpPr>
+              <p:cNvPr id="27" name="TextBox 26">
+                <a:extLst>
+                  <a:ext uri="{FF2B5EF4-FFF2-40B4-BE49-F238E27FC236}">
+                    <a16:creationId xmlns:a16="http://schemas.microsoft.com/office/drawing/2014/main" id="{7AD19F35-16CA-66E6-9A60-D1BB63DD645F}"/>
+                  </a:ext>
+                </a:extLst>
+              </p:cNvPr>
+              <p:cNvSpPr txBox="1"/>
+              <p:nvPr/>
+            </p:nvSpPr>
+            <p:spPr>
+              <a:xfrm>
+                <a:off x="7741920" y="3477777"/>
+                <a:ext cx="2453640" cy="648191"/>
+              </a:xfrm>
+              <a:prstGeom prst="rect">
+                <a:avLst/>
+              </a:prstGeom>
+              <a:noFill/>
+            </p:spPr>
+            <p:txBody>
+              <a:bodyPr wrap="square">
+                <a:spAutoFit/>
+              </a:bodyPr>
+              <a:lstStyle/>
+              <a:p>
+                <a:pPr/>
+                <a14:m>
+                  <m:oMathPara xmlns:m="http://schemas.openxmlformats.org/officeDocument/2006/math">
+                    <m:oMathParaPr>
+                      <m:jc m:val="centerGroup"/>
+                    </m:oMathParaPr>
+                    <m:oMath xmlns:m="http://schemas.openxmlformats.org/officeDocument/2006/math">
+                      <m:m>
+                        <m:mPr>
+                          <m:plcHide m:val="on"/>
+                          <m:mcs>
+                            <m:mc>
+                              <m:mcPr>
+                                <m:count m:val="1"/>
+                                <m:mcJc m:val="center"/>
+                              </m:mcPr>
+                            </m:mc>
+                          </m:mcs>
+                          <m:ctrlPr>
+                            <a:rPr lang="es-CO" i="1" smtClean="0">
+                              <a:latin typeface="Cambria Math" panose="02040503050406030204" pitchFamily="18" charset="0"/>
+                            </a:rPr>
+                          </m:ctrlPr>
+                        </m:mPr>
+                        <m:mr>
+                          <m:e>
+                            <m:r>
+                              <a:rPr lang="es-CO" i="1">
+                                <a:latin typeface="Cambria Math" panose="02040503050406030204" pitchFamily="18" charset="0"/>
+                              </a:rPr>
+                              <m:t>𝐷</m:t>
+                            </m:r>
+                            <m:r>
+                              <a:rPr lang="es-CO" i="0">
+                                <a:latin typeface="Cambria Math" panose="02040503050406030204" pitchFamily="18" charset="0"/>
+                              </a:rPr>
+                              <m:t>=−</m:t>
+                            </m:r>
+                            <m:f>
+                              <m:fPr>
+                                <m:ctrlPr>
+                                  <a:rPr lang="es-CO" i="1">
+                                    <a:latin typeface="Cambria Math" panose="02040503050406030204" pitchFamily="18" charset="0"/>
+                                  </a:rPr>
+                                </m:ctrlPr>
+                              </m:fPr>
+                              <m:num>
+                                <m:r>
+                                  <a:rPr lang="es-CO" i="1">
+                                    <a:latin typeface="Cambria Math" panose="02040503050406030204" pitchFamily="18" charset="0"/>
+                                  </a:rPr>
+                                  <m:t>𝜆</m:t>
+                                </m:r>
+                              </m:num>
+                              <m:den>
+                                <m:r>
+                                  <a:rPr lang="es-CO" i="1">
+                                    <a:latin typeface="Cambria Math" panose="02040503050406030204" pitchFamily="18" charset="0"/>
+                                  </a:rPr>
+                                  <m:t>𝑐</m:t>
+                                </m:r>
+                              </m:den>
+                            </m:f>
+                            <m:f>
+                              <m:fPr>
+                                <m:ctrlPr>
+                                  <a:rPr lang="es-CO" i="1">
+                                    <a:latin typeface="Cambria Math" panose="02040503050406030204" pitchFamily="18" charset="0"/>
+                                  </a:rPr>
+                                </m:ctrlPr>
+                              </m:fPr>
+                              <m:num>
+                                <m:sSup>
+                                  <m:sSupPr>
+                                    <m:ctrlPr>
+                                      <a:rPr lang="es-CO" i="1">
+                                        <a:latin typeface="Cambria Math" panose="02040503050406030204" pitchFamily="18" charset="0"/>
+                                      </a:rPr>
+                                    </m:ctrlPr>
+                                  </m:sSupPr>
+                                  <m:e>
+                                    <m:r>
+                                      <a:rPr lang="es-CO" i="1">
+                                        <a:latin typeface="Cambria Math" panose="02040503050406030204" pitchFamily="18" charset="0"/>
+                                      </a:rPr>
+                                      <m:t>𝑑</m:t>
+                                    </m:r>
+                                  </m:e>
+                                  <m:sup>
+                                    <m:r>
+                                      <a:rPr lang="es-CO" i="0">
+                                        <a:latin typeface="Cambria Math" panose="02040503050406030204" pitchFamily="18" charset="0"/>
+                                      </a:rPr>
+                                      <m:t>2</m:t>
+                                    </m:r>
+                                  </m:sup>
+                                </m:sSup>
+                                <m:sSub>
+                                  <m:sSubPr>
+                                    <m:ctrlPr>
+                                      <a:rPr lang="es-CO" i="1">
+                                        <a:latin typeface="Cambria Math" panose="02040503050406030204" pitchFamily="18" charset="0"/>
+                                      </a:rPr>
+                                    </m:ctrlPr>
+                                  </m:sSubPr>
+                                  <m:e>
+                                    <m:r>
+                                      <a:rPr lang="es-CO" i="1">
+                                        <a:latin typeface="Cambria Math" panose="02040503050406030204" pitchFamily="18" charset="0"/>
+                                      </a:rPr>
+                                      <m:t>𝑛</m:t>
+                                    </m:r>
+                                  </m:e>
+                                  <m:sub>
+                                    <m:r>
+                                      <m:rPr>
+                                        <m:sty m:val="p"/>
+                                      </m:rPr>
+                                      <a:rPr lang="es-CO" i="0">
+                                        <a:latin typeface="Cambria Math" panose="02040503050406030204" pitchFamily="18" charset="0"/>
+                                      </a:rPr>
+                                      <m:t>eff</m:t>
+                                    </m:r>
+                                  </m:sub>
+                                </m:sSub>
+                              </m:num>
+                              <m:den>
+                                <m:r>
+                                  <a:rPr lang="es-CO" i="1">
+                                    <a:latin typeface="Cambria Math" panose="02040503050406030204" pitchFamily="18" charset="0"/>
+                                  </a:rPr>
+                                  <m:t>𝑑</m:t>
+                                </m:r>
+                                <m:sSup>
+                                  <m:sSupPr>
+                                    <m:ctrlPr>
+                                      <a:rPr lang="es-CO" i="1">
+                                        <a:latin typeface="Cambria Math" panose="02040503050406030204" pitchFamily="18" charset="0"/>
+                                      </a:rPr>
+                                    </m:ctrlPr>
+                                  </m:sSupPr>
+                                  <m:e>
+                                    <m:r>
+                                      <a:rPr lang="es-CO" i="1">
+                                        <a:latin typeface="Cambria Math" panose="02040503050406030204" pitchFamily="18" charset="0"/>
+                                      </a:rPr>
+                                      <m:t>𝜆</m:t>
+                                    </m:r>
+                                  </m:e>
+                                  <m:sup>
+                                    <m:r>
+                                      <a:rPr lang="es-CO" i="0">
+                                        <a:latin typeface="Cambria Math" panose="02040503050406030204" pitchFamily="18" charset="0"/>
+                                      </a:rPr>
+                                      <m:t>2</m:t>
+                                    </m:r>
+                                  </m:sup>
+                                </m:sSup>
+                              </m:den>
+                            </m:f>
+                          </m:e>
+                        </m:mr>
+                      </m:m>
+                    </m:oMath>
+                  </m:oMathPara>
+                </a14:m>
+                <a:endParaRPr lang="es-CO" dirty="0"/>
+              </a:p>
+            </p:txBody>
+          </p:sp>
+        </mc:Choice>
+        <mc:Fallback>
+          <p:sp>
+            <p:nvSpPr>
+              <p:cNvPr id="27" name="TextBox 26">
+                <a:extLst>
+                  <a:ext uri="{FF2B5EF4-FFF2-40B4-BE49-F238E27FC236}">
+                    <a16:creationId xmlns:a16="http://schemas.microsoft.com/office/drawing/2014/main" id="{7AD19F35-16CA-66E6-9A60-D1BB63DD645F}"/>
+                  </a:ext>
+                </a:extLst>
+              </p:cNvPr>
+              <p:cNvSpPr txBox="1">
+                <a:spLocks noRot="1" noChangeAspect="1" noMove="1" noResize="1" noEditPoints="1" noAdjustHandles="1" noChangeArrowheads="1" noChangeShapeType="1" noTextEdit="1"/>
+              </p:cNvSpPr>
+              <p:nvPr/>
+            </p:nvSpPr>
+            <p:spPr>
+              <a:xfrm>
+                <a:off x="7741920" y="3477777"/>
+                <a:ext cx="2453640" cy="648191"/>
+              </a:xfrm>
+              <a:prstGeom prst="rect">
+                <a:avLst/>
+              </a:prstGeom>
+              <a:blipFill>
+                <a:blip r:embed="rId10"/>
+                <a:stretch>
+                  <a:fillRect/>
+                </a:stretch>
+              </a:blipFill>
+            </p:spPr>
+            <p:txBody>
+              <a:bodyPr/>
+              <a:lstStyle/>
+              <a:p>
+                <a:r>
+                  <a:rPr lang="es-CO">
+                    <a:noFill/>
+                  </a:rPr>
+                  <a:t> </a:t>
+                </a:r>
+              </a:p>
+            </p:txBody>
+          </p:sp>
+        </mc:Fallback>
+      </mc:AlternateContent>
+      <mc:AlternateContent xmlns:mc="http://schemas.openxmlformats.org/markup-compatibility/2006">
+        <mc:Choice xmlns:a14="http://schemas.microsoft.com/office/drawing/2010/main" Requires="a14">
+          <p:sp>
+            <p:nvSpPr>
+              <p:cNvPr id="28" name="TextBox 27">
+                <a:extLst>
+                  <a:ext uri="{FF2B5EF4-FFF2-40B4-BE49-F238E27FC236}">
+                    <a16:creationId xmlns:a16="http://schemas.microsoft.com/office/drawing/2014/main" id="{73CFECAE-56C3-9992-5A18-B8573B9750DE}"/>
+                  </a:ext>
+                </a:extLst>
+              </p:cNvPr>
+              <p:cNvSpPr txBox="1"/>
+              <p:nvPr/>
+            </p:nvSpPr>
+            <p:spPr>
+              <a:xfrm>
+                <a:off x="7726680" y="4333451"/>
+                <a:ext cx="2453640" cy="618374"/>
+              </a:xfrm>
+              <a:prstGeom prst="rect">
+                <a:avLst/>
+              </a:prstGeom>
+              <a:noFill/>
+            </p:spPr>
+            <p:txBody>
+              <a:bodyPr wrap="square">
+                <a:spAutoFit/>
+              </a:bodyPr>
+              <a:lstStyle/>
+              <a:p>
+                <a:pPr/>
+                <a14:m>
+                  <m:oMathPara xmlns:m="http://schemas.openxmlformats.org/officeDocument/2006/math">
+                    <m:oMathParaPr>
+                      <m:jc m:val="centerGroup"/>
+                    </m:oMathParaPr>
+                    <m:oMath xmlns:m="http://schemas.openxmlformats.org/officeDocument/2006/math">
+                      <m:m>
+                        <m:mPr>
+                          <m:plcHide m:val="on"/>
+                          <m:mcs>
+                            <m:mc>
+                              <m:mcPr>
+                                <m:count m:val="1"/>
+                                <m:mcJc m:val="center"/>
+                              </m:mcPr>
+                            </m:mc>
+                          </m:mcs>
+                          <m:ctrlPr>
+                            <a:rPr lang="es-CO" i="1" smtClean="0">
+                              <a:latin typeface="Cambria Math" panose="02040503050406030204" pitchFamily="18" charset="0"/>
+                            </a:rPr>
+                          </m:ctrlPr>
+                        </m:mPr>
+                        <m:mr>
+                          <m:e>
+                            <m:r>
+                              <a:rPr lang="es-CO" i="1">
+                                <a:latin typeface="Cambria Math" panose="02040503050406030204" pitchFamily="18" charset="0"/>
+                              </a:rPr>
+                              <m:t>𝐷</m:t>
+                            </m:r>
+                            <m:r>
+                              <a:rPr lang="es-CO" i="0">
+                                <a:latin typeface="Cambria Math" panose="02040503050406030204" pitchFamily="18" charset="0"/>
+                              </a:rPr>
+                              <m:t>=−</m:t>
+                            </m:r>
+                            <m:f>
+                              <m:fPr>
+                                <m:ctrlPr>
+                                  <a:rPr lang="es-CO" i="1">
+                                    <a:latin typeface="Cambria Math" panose="02040503050406030204" pitchFamily="18" charset="0"/>
+                                  </a:rPr>
+                                </m:ctrlPr>
+                              </m:fPr>
+                              <m:num>
+                                <m:r>
+                                  <a:rPr lang="es-MX" b="0" i="1" smtClean="0">
+                                    <a:latin typeface="Cambria Math" panose="02040503050406030204" pitchFamily="18" charset="0"/>
+                                  </a:rPr>
+                                  <m:t>2</m:t>
+                                </m:r>
+                                <m:r>
+                                  <a:rPr lang="es-CO" i="1">
+                                    <a:latin typeface="Cambria Math" panose="02040503050406030204" pitchFamily="18" charset="0"/>
+                                  </a:rPr>
+                                  <m:t>𝜆</m:t>
+                                </m:r>
+                              </m:num>
+                              <m:den>
+                                <m:r>
+                                  <a:rPr lang="es-CO" i="1">
+                                    <a:latin typeface="Cambria Math" panose="02040503050406030204" pitchFamily="18" charset="0"/>
+                                  </a:rPr>
+                                  <m:t>𝑐</m:t>
+                                </m:r>
+                              </m:den>
+                            </m:f>
+                            <m:sSub>
+                              <m:sSubPr>
+                                <m:ctrlPr>
+                                  <a:rPr lang="es-CO" i="1">
+                                    <a:latin typeface="Cambria Math" panose="02040503050406030204" pitchFamily="18" charset="0"/>
+                                  </a:rPr>
+                                </m:ctrlPr>
+                              </m:sSubPr>
+                              <m:e>
+                                <m:r>
+                                  <a:rPr lang="es-CO" i="1">
+                                    <a:latin typeface="Cambria Math" panose="02040503050406030204" pitchFamily="18" charset="0"/>
+                                  </a:rPr>
+                                  <m:t>𝑛</m:t>
+                                </m:r>
+                              </m:e>
+                              <m:sub>
+                                <m:r>
+                                  <a:rPr lang="es-CO">
+                                    <a:latin typeface="Cambria Math" panose="02040503050406030204" pitchFamily="18" charset="0"/>
+                                  </a:rPr>
+                                  <m:t>3</m:t>
+                                </m:r>
+                              </m:sub>
+                            </m:sSub>
+                          </m:e>
+                        </m:mr>
+                      </m:m>
+                    </m:oMath>
+                  </m:oMathPara>
+                </a14:m>
+                <a:endParaRPr lang="es-CO" dirty="0"/>
+              </a:p>
+            </p:txBody>
+          </p:sp>
+        </mc:Choice>
+        <mc:Fallback>
+          <p:sp>
+            <p:nvSpPr>
+              <p:cNvPr id="28" name="TextBox 27">
+                <a:extLst>
+                  <a:ext uri="{FF2B5EF4-FFF2-40B4-BE49-F238E27FC236}">
+                    <a16:creationId xmlns:a16="http://schemas.microsoft.com/office/drawing/2014/main" id="{73CFECAE-56C3-9992-5A18-B8573B9750DE}"/>
+                  </a:ext>
+                </a:extLst>
+              </p:cNvPr>
+              <p:cNvSpPr txBox="1">
+                <a:spLocks noRot="1" noChangeAspect="1" noMove="1" noResize="1" noEditPoints="1" noAdjustHandles="1" noChangeArrowheads="1" noChangeShapeType="1" noTextEdit="1"/>
+              </p:cNvSpPr>
+              <p:nvPr/>
+            </p:nvSpPr>
+            <p:spPr>
+              <a:xfrm>
+                <a:off x="7726680" y="4333451"/>
+                <a:ext cx="2453640" cy="618374"/>
+              </a:xfrm>
+              <a:prstGeom prst="rect">
+                <a:avLst/>
+              </a:prstGeom>
+              <a:blipFill>
+                <a:blip r:embed="rId11"/>
+                <a:stretch>
+                  <a:fillRect/>
+                </a:stretch>
+              </a:blipFill>
+            </p:spPr>
+            <p:txBody>
+              <a:bodyPr/>
+              <a:lstStyle/>
+              <a:p>
+                <a:r>
+                  <a:rPr lang="es-CO">
+                    <a:noFill/>
+                  </a:rPr>
+                  <a:t> </a:t>
+                </a:r>
+              </a:p>
+            </p:txBody>
+          </p:sp>
+        </mc:Fallback>
+      </mc:AlternateContent>
+      <mc:AlternateContent xmlns:mc="http://schemas.openxmlformats.org/markup-compatibility/2006">
+        <mc:Choice xmlns:a14="http://schemas.microsoft.com/office/drawing/2010/main" Requires="a14">
+          <p:sp>
+            <p:nvSpPr>
+              <p:cNvPr id="29" name="object 16">
+                <a:extLst>
+                  <a:ext uri="{FF2B5EF4-FFF2-40B4-BE49-F238E27FC236}">
+                    <a16:creationId xmlns:a16="http://schemas.microsoft.com/office/drawing/2014/main" id="{6BCE33EE-58DE-364F-FD8F-5EA4175B887B}"/>
+                  </a:ext>
+                </a:extLst>
+              </p:cNvPr>
+              <p:cNvSpPr txBox="1">
+                <a:spLocks noGrp="1"/>
+              </p:cNvSpPr>
+              <p:nvPr>
+                <p:ph type="title"/>
+              </p:nvPr>
+            </p:nvSpPr>
+            <p:spPr>
+              <a:xfrm>
+                <a:off x="560695" y="149274"/>
+                <a:ext cx="10994410" cy="1071255"/>
+              </a:xfrm>
+              <a:prstGeom prst="rect">
+                <a:avLst/>
+              </a:prstGeom>
+            </p:spPr>
+            <p:txBody>
+              <a:bodyPr vert="horz" wrap="square" lIns="0" tIns="12700" rIns="0" bIns="0" rtlCol="0">
+                <a:spAutoFit/>
+              </a:bodyPr>
+              <a:lstStyle/>
+              <a:p>
+                <a:pPr marL="12700">
+                  <a:lnSpc>
+                    <a:spcPct val="100000"/>
+                  </a:lnSpc>
+                  <a:spcBef>
+                    <a:spcPts val="100"/>
+                  </a:spcBef>
+                </a:pPr>
+                <a:r>
+                  <a:rPr lang="en-US" sz="2500" dirty="0"/>
+                  <a:t>Learning outcome #3 – Waveguide compact model</a:t>
+                </a:r>
+                <a:br>
+                  <a:rPr lang="en-US" sz="2500" spc="-5" dirty="0">
+                    <a:latin typeface="+mj-lt"/>
+                    <a:cs typeface="Lucida Sans"/>
+                  </a:rPr>
+                </a:br>
+                <a:r>
+                  <a:rPr lang="en-US" b="0" dirty="0"/>
+                  <a:t>Let’s model the waveguide using a second order polynomial: </a:t>
+                </a:r>
+                <a:br>
+                  <a:rPr lang="en-US" b="0" dirty="0"/>
+                </a:br>
+                <a14:m>
+                  <m:oMathPara xmlns:m="http://schemas.openxmlformats.org/officeDocument/2006/math">
+                    <m:oMathParaPr>
+                      <m:jc m:val="centerGroup"/>
+                    </m:oMathParaPr>
+                    <m:oMath xmlns:m="http://schemas.openxmlformats.org/officeDocument/2006/math">
+                      <m:sSub>
+                        <m:sSubPr>
+                          <m:ctrlPr>
+                            <a:rPr lang="es-ES" b="0" i="1" smtClean="0">
+                              <a:latin typeface="Cambria Math" panose="02040503050406030204" pitchFamily="18" charset="0"/>
+                            </a:rPr>
+                          </m:ctrlPr>
+                        </m:sSubPr>
+                        <m:e>
+                          <m:r>
+                            <a:rPr lang="es-ES" b="0" i="1" smtClean="0">
+                              <a:latin typeface="Cambria Math" panose="02040503050406030204" pitchFamily="18" charset="0"/>
+                            </a:rPr>
+                            <m:t>𝑛</m:t>
+                          </m:r>
+                        </m:e>
+                        <m:sub>
+                          <m:r>
+                            <a:rPr lang="es-ES" b="0" i="1" smtClean="0">
+                              <a:latin typeface="Cambria Math" panose="02040503050406030204" pitchFamily="18" charset="0"/>
+                            </a:rPr>
+                            <m:t>𝑒𝑓𝑓</m:t>
+                          </m:r>
+                        </m:sub>
+                      </m:sSub>
+                      <m:d>
+                        <m:dPr>
+                          <m:ctrlPr>
+                            <a:rPr lang="es-ES" b="0" i="1" smtClean="0">
+                              <a:latin typeface="Cambria Math" panose="02040503050406030204" pitchFamily="18" charset="0"/>
+                            </a:rPr>
+                          </m:ctrlPr>
+                        </m:dPr>
+                        <m:e>
+                          <m:r>
+                            <a:rPr lang="es-ES" b="0" i="1" smtClean="0">
+                              <a:latin typeface="Cambria Math" panose="02040503050406030204" pitchFamily="18" charset="0"/>
+                            </a:rPr>
+                            <m:t>𝜆</m:t>
+                          </m:r>
+                        </m:e>
+                      </m:d>
+                      <m:r>
+                        <a:rPr lang="es-ES" b="0" i="1" smtClean="0">
+                          <a:latin typeface="Cambria Math" panose="02040503050406030204" pitchFamily="18" charset="0"/>
+                        </a:rPr>
+                        <m:t>=</m:t>
+                      </m:r>
+                      <m:sSub>
+                        <m:sSubPr>
+                          <m:ctrlPr>
+                            <a:rPr lang="es-ES" b="0" i="1" smtClean="0">
+                              <a:latin typeface="Cambria Math" panose="02040503050406030204" pitchFamily="18" charset="0"/>
+                            </a:rPr>
+                          </m:ctrlPr>
+                        </m:sSubPr>
+                        <m:e>
+                          <m:r>
+                            <a:rPr lang="es-ES" b="0" i="1" smtClean="0">
+                              <a:latin typeface="Cambria Math" panose="02040503050406030204" pitchFamily="18" charset="0"/>
+                            </a:rPr>
+                            <m:t>𝑛</m:t>
+                          </m:r>
+                        </m:e>
+                        <m:sub>
+                          <m:r>
+                            <a:rPr lang="es-ES" b="0" i="1" smtClean="0">
+                              <a:latin typeface="Cambria Math" panose="02040503050406030204" pitchFamily="18" charset="0"/>
+                            </a:rPr>
+                            <m:t>1</m:t>
+                          </m:r>
+                        </m:sub>
+                      </m:sSub>
+                      <m:r>
+                        <a:rPr lang="es-ES" b="0" i="1" smtClean="0">
+                          <a:latin typeface="Cambria Math" panose="02040503050406030204" pitchFamily="18" charset="0"/>
+                        </a:rPr>
+                        <m:t>+</m:t>
+                      </m:r>
+                      <m:sSub>
+                        <m:sSubPr>
+                          <m:ctrlPr>
+                            <a:rPr lang="es-ES" b="0" i="1" smtClean="0">
+                              <a:latin typeface="Cambria Math" panose="02040503050406030204" pitchFamily="18" charset="0"/>
+                            </a:rPr>
+                          </m:ctrlPr>
+                        </m:sSubPr>
+                        <m:e>
+                          <m:r>
+                            <a:rPr lang="es-ES" b="0" i="1" smtClean="0">
+                              <a:latin typeface="Cambria Math" panose="02040503050406030204" pitchFamily="18" charset="0"/>
+                            </a:rPr>
+                            <m:t>𝑛</m:t>
+                          </m:r>
+                        </m:e>
+                        <m:sub>
+                          <m:r>
+                            <a:rPr lang="es-ES" b="0" i="1" smtClean="0">
+                              <a:latin typeface="Cambria Math" panose="02040503050406030204" pitchFamily="18" charset="0"/>
+                            </a:rPr>
+                            <m:t>2</m:t>
+                          </m:r>
+                        </m:sub>
+                      </m:sSub>
+                      <m:d>
+                        <m:dPr>
+                          <m:ctrlPr>
+                            <a:rPr lang="es-ES" b="0" i="1" smtClean="0">
+                              <a:latin typeface="Cambria Math" panose="02040503050406030204" pitchFamily="18" charset="0"/>
+                            </a:rPr>
+                          </m:ctrlPr>
+                        </m:dPr>
+                        <m:e>
+                          <m:r>
+                            <a:rPr lang="es-ES" b="0" i="1" smtClean="0">
+                              <a:latin typeface="Cambria Math" panose="02040503050406030204" pitchFamily="18" charset="0"/>
+                            </a:rPr>
+                            <m:t>𝜆</m:t>
+                          </m:r>
+                          <m:r>
+                            <a:rPr lang="es-ES" b="0" i="1" smtClean="0">
+                              <a:latin typeface="Cambria Math" panose="02040503050406030204" pitchFamily="18" charset="0"/>
+                            </a:rPr>
+                            <m:t>−</m:t>
+                          </m:r>
+                          <m:sSub>
+                            <m:sSubPr>
+                              <m:ctrlPr>
+                                <a:rPr lang="es-ES" b="0" i="1" smtClean="0">
+                                  <a:latin typeface="Cambria Math" panose="02040503050406030204" pitchFamily="18" charset="0"/>
+                                </a:rPr>
+                              </m:ctrlPr>
+                            </m:sSubPr>
+                            <m:e>
+                              <m:r>
+                                <a:rPr lang="es-ES" b="0" i="1" smtClean="0">
+                                  <a:latin typeface="Cambria Math" panose="02040503050406030204" pitchFamily="18" charset="0"/>
+                                </a:rPr>
+                                <m:t>𝜆</m:t>
+                              </m:r>
+                            </m:e>
+                            <m:sub>
+                              <m:r>
+                                <a:rPr lang="es-ES" b="0" i="1" smtClean="0">
+                                  <a:latin typeface="Cambria Math" panose="02040503050406030204" pitchFamily="18" charset="0"/>
+                                </a:rPr>
+                                <m:t>0</m:t>
+                              </m:r>
+                            </m:sub>
+                          </m:sSub>
+                        </m:e>
+                      </m:d>
+                      <m:r>
+                        <a:rPr lang="es-ES" b="0" i="1" smtClean="0">
+                          <a:latin typeface="Cambria Math" panose="02040503050406030204" pitchFamily="18" charset="0"/>
+                        </a:rPr>
+                        <m:t>+</m:t>
+                      </m:r>
+                      <m:sSub>
+                        <m:sSubPr>
+                          <m:ctrlPr>
+                            <a:rPr lang="es-ES" b="0" i="1" smtClean="0">
+                              <a:latin typeface="Cambria Math" panose="02040503050406030204" pitchFamily="18" charset="0"/>
+                            </a:rPr>
+                          </m:ctrlPr>
+                        </m:sSubPr>
+                        <m:e>
+                          <m:r>
+                            <a:rPr lang="es-ES" b="0" i="1" smtClean="0">
+                              <a:latin typeface="Cambria Math" panose="02040503050406030204" pitchFamily="18" charset="0"/>
+                            </a:rPr>
+                            <m:t>𝑛</m:t>
+                          </m:r>
+                        </m:e>
+                        <m:sub>
+                          <m:r>
+                            <a:rPr lang="es-ES" b="0" i="1" smtClean="0">
+                              <a:latin typeface="Cambria Math" panose="02040503050406030204" pitchFamily="18" charset="0"/>
+                            </a:rPr>
+                            <m:t>3</m:t>
+                          </m:r>
+                        </m:sub>
+                      </m:sSub>
+                      <m:sSup>
+                        <m:sSupPr>
+                          <m:ctrlPr>
+                            <a:rPr lang="es-ES" b="0" i="1" smtClean="0">
+                              <a:latin typeface="Cambria Math" panose="02040503050406030204" pitchFamily="18" charset="0"/>
+                            </a:rPr>
+                          </m:ctrlPr>
+                        </m:sSupPr>
+                        <m:e>
+                          <m:d>
+                            <m:dPr>
+                              <m:ctrlPr>
+                                <a:rPr lang="es-ES" b="0" i="1" smtClean="0">
+                                  <a:latin typeface="Cambria Math" panose="02040503050406030204" pitchFamily="18" charset="0"/>
+                                </a:rPr>
+                              </m:ctrlPr>
+                            </m:dPr>
+                            <m:e>
+                              <m:r>
+                                <a:rPr lang="es-ES" b="0" i="1" smtClean="0">
+                                  <a:latin typeface="Cambria Math" panose="02040503050406030204" pitchFamily="18" charset="0"/>
+                                </a:rPr>
+                                <m:t>𝜆</m:t>
+                              </m:r>
+                              <m:r>
+                                <a:rPr lang="es-ES" b="0" i="1" smtClean="0">
+                                  <a:latin typeface="Cambria Math" panose="02040503050406030204" pitchFamily="18" charset="0"/>
+                                </a:rPr>
+                                <m:t>−</m:t>
+                              </m:r>
+                              <m:sSub>
+                                <m:sSubPr>
+                                  <m:ctrlPr>
+                                    <a:rPr lang="es-ES" b="0" i="1" smtClean="0">
+                                      <a:latin typeface="Cambria Math" panose="02040503050406030204" pitchFamily="18" charset="0"/>
+                                    </a:rPr>
+                                  </m:ctrlPr>
+                                </m:sSubPr>
+                                <m:e>
+                                  <m:r>
+                                    <a:rPr lang="es-ES" b="0" i="1" smtClean="0">
+                                      <a:latin typeface="Cambria Math" panose="02040503050406030204" pitchFamily="18" charset="0"/>
+                                    </a:rPr>
+                                    <m:t>𝜆</m:t>
+                                  </m:r>
+                                </m:e>
+                                <m:sub>
+                                  <m:r>
+                                    <a:rPr lang="es-ES" b="0" i="1" smtClean="0">
+                                      <a:latin typeface="Cambria Math" panose="02040503050406030204" pitchFamily="18" charset="0"/>
+                                    </a:rPr>
+                                    <m:t>0</m:t>
+                                  </m:r>
+                                </m:sub>
+                              </m:sSub>
+                            </m:e>
+                          </m:d>
+                        </m:e>
+                        <m:sup>
+                          <m:r>
+                            <a:rPr lang="es-ES" b="0" i="1" smtClean="0">
+                              <a:latin typeface="Cambria Math" panose="02040503050406030204" pitchFamily="18" charset="0"/>
+                            </a:rPr>
+                            <m:t>2</m:t>
+                          </m:r>
+                        </m:sup>
+                      </m:sSup>
+                    </m:oMath>
+                  </m:oMathPara>
+                </a14:m>
+                <a:br>
+                  <a:rPr lang="en-US" b="0" dirty="0"/>
+                </a:br>
+                <a:endParaRPr lang="en-US" sz="2500" b="0" dirty="0">
+                  <a:latin typeface="+mj-lt"/>
+                  <a:cs typeface="Lucida Sans"/>
+                </a:endParaRPr>
+              </a:p>
+            </p:txBody>
+          </p:sp>
+        </mc:Choice>
+        <mc:Fallback>
+          <p:sp>
+            <p:nvSpPr>
+              <p:cNvPr id="29" name="object 16">
+                <a:extLst>
+                  <a:ext uri="{FF2B5EF4-FFF2-40B4-BE49-F238E27FC236}">
+                    <a16:creationId xmlns:a16="http://schemas.microsoft.com/office/drawing/2014/main" id="{6BCE33EE-58DE-364F-FD8F-5EA4175B887B}"/>
+                  </a:ext>
+                </a:extLst>
+              </p:cNvPr>
+              <p:cNvSpPr txBox="1">
+                <a:spLocks noGrp="1" noRot="1" noChangeAspect="1" noMove="1" noResize="1" noEditPoints="1" noAdjustHandles="1" noChangeArrowheads="1" noChangeShapeType="1" noTextEdit="1"/>
+              </p:cNvSpPr>
+              <p:nvPr>
+                <p:ph type="title"/>
+              </p:nvPr>
+            </p:nvSpPr>
+            <p:spPr>
+              <a:xfrm>
+                <a:off x="560695" y="149274"/>
+                <a:ext cx="10994410" cy="1071255"/>
+              </a:xfrm>
+              <a:prstGeom prst="rect">
+                <a:avLst/>
+              </a:prstGeom>
+              <a:blipFill>
+                <a:blip r:embed="rId12"/>
+                <a:stretch>
+                  <a:fillRect l="-1663" t="-6818" b="-4545"/>
+                </a:stretch>
+              </a:blipFill>
+            </p:spPr>
+            <p:txBody>
+              <a:bodyPr/>
+              <a:lstStyle/>
+              <a:p>
+                <a:r>
+                  <a:rPr lang="es-CO">
+                    <a:noFill/>
+                  </a:rPr>
+                  <a:t> </a:t>
+                </a:r>
+              </a:p>
+            </p:txBody>
+          </p:sp>
+        </mc:Fallback>
+      </mc:AlternateContent>
+    </p:spTree>
+    <p:extLst>
+      <p:ext uri="{BB962C8B-B14F-4D97-AF65-F5344CB8AC3E}">
+        <p14:creationId xmlns:p14="http://schemas.microsoft.com/office/powerpoint/2010/main" val="3313194039"/>
+      </p:ext>
+    </p:extLst>
+  </p:cSld>
+  <p:clrMapOvr>
+    <a:masterClrMapping/>
+  </p:clrMapOvr>
+</p:sld>
+</file>
+
+<file path=ppt/slides/slide6.xml><?xml version="1.0" encoding="utf-8"?>
 <p:sld xmlns:a="http://schemas.openxmlformats.org/drawingml/2006/main" xmlns:r="http://schemas.openxmlformats.org/officeDocument/2006/relationships" xmlns:p="http://schemas.openxmlformats.org/presentationml/2006/main">
   <p:cSld>
     <p:spTree>
@@ -6156,6 +10413,78 @@
           <a:chExt cx="0" cy="0"/>
         </a:xfrm>
       </p:grpSpPr>
+      <p:pic>
+        <p:nvPicPr>
+          <p:cNvPr id="19" name="Picture 18">
+            <a:extLst>
+              <a:ext uri="{FF2B5EF4-FFF2-40B4-BE49-F238E27FC236}">
+                <a16:creationId xmlns:a16="http://schemas.microsoft.com/office/drawing/2014/main" id="{71014351-C0C5-D62A-F7B5-A414E9C93056}"/>
+              </a:ext>
+            </a:extLst>
+          </p:cNvPr>
+          <p:cNvPicPr>
+            <a:picLocks noChangeAspect="1"/>
+          </p:cNvPicPr>
+          <p:nvPr/>
+        </p:nvPicPr>
+        <p:blipFill>
+          <a:blip r:embed="rId3">
+            <a:extLst>
+              <a:ext uri="{28A0092B-C50C-407E-A947-70E740481C1C}">
+                <a14:useLocalDpi xmlns:a14="http://schemas.microsoft.com/office/drawing/2010/main" val="0"/>
+              </a:ext>
+            </a:extLst>
+          </a:blip>
+          <a:stretch>
+            <a:fillRect/>
+          </a:stretch>
+        </p:blipFill>
+        <p:spPr>
+          <a:xfrm>
+            <a:off x="631254" y="1379216"/>
+            <a:ext cx="5340107" cy="4023368"/>
+          </a:xfrm>
+          <a:prstGeom prst="rect">
+            <a:avLst/>
+          </a:prstGeom>
+        </p:spPr>
+      </p:pic>
+      <p:pic>
+        <p:nvPicPr>
+          <p:cNvPr id="17" name="Picture 16">
+            <a:extLst>
+              <a:ext uri="{FF2B5EF4-FFF2-40B4-BE49-F238E27FC236}">
+                <a16:creationId xmlns:a16="http://schemas.microsoft.com/office/drawing/2014/main" id="{8E3262C1-CC6C-E16C-8DCD-60563B936AD8}"/>
+              </a:ext>
+            </a:extLst>
+          </p:cNvPr>
+          <p:cNvPicPr>
+            <a:picLocks noChangeAspect="1"/>
+          </p:cNvPicPr>
+          <p:nvPr/>
+        </p:nvPicPr>
+        <p:blipFill>
+          <a:blip r:embed="rId4">
+            <a:extLst>
+              <a:ext uri="{28A0092B-C50C-407E-A947-70E740481C1C}">
+                <a14:useLocalDpi xmlns:a14="http://schemas.microsoft.com/office/drawing/2010/main" val="0"/>
+              </a:ext>
+            </a:extLst>
+          </a:blip>
+          <a:stretch>
+            <a:fillRect/>
+          </a:stretch>
+        </p:blipFill>
+        <p:spPr>
+          <a:xfrm>
+            <a:off x="6394649" y="1379216"/>
+            <a:ext cx="5340107" cy="4023368"/>
+          </a:xfrm>
+          <a:prstGeom prst="rect">
+            <a:avLst/>
+          </a:prstGeom>
+        </p:spPr>
+      </p:pic>
       <mc:AlternateContent xmlns:mc="http://schemas.openxmlformats.org/markup-compatibility/2006" xmlns:a14="http://schemas.microsoft.com/office/drawing/2010/main">
         <mc:Choice Requires="a14">
           <p:sp>
@@ -6510,7 +10839,7 @@
                 <a:avLst/>
               </a:prstGeom>
               <a:blipFill>
-                <a:blip r:embed="rId3"/>
+                <a:blip r:embed="rId5"/>
                 <a:stretch>
                   <a:fillRect l="-1664" t="-7386" b="-4545"/>
                 </a:stretch>
@@ -6546,10 +10875,10 @@
           <p:nvPr/>
         </p:nvPicPr>
         <p:blipFill>
-          <a:blip r:embed="rId4">
+          <a:blip r:embed="rId6">
             <a:extLst>
               <a:ext uri="{96DAC541-7B7A-43D3-8B79-37D633B846F1}">
-                <asvg:svgBlip xmlns:asvg="http://schemas.microsoft.com/office/drawing/2016/SVG/main" r:embed="rId5"/>
+                <asvg:svgBlip xmlns:asvg="http://schemas.microsoft.com/office/drawing/2016/SVG/main" r:embed="rId7"/>
               </a:ext>
             </a:extLst>
           </a:blip>
@@ -6590,7 +10919,7 @@
           <a:p>
             <a:fld id="{B6F15528-21DE-4FAA-801E-634DDDAF4B2B}" type="slidenum">
               <a:rPr lang="es-ES" smtClean="0"/>
-              <a:t>7</a:t>
+              <a:t>6</a:t>
             </a:fld>
             <a:endParaRPr lang="es-ES"/>
           </a:p>
@@ -6630,522 +10959,6 @@
           </a:p>
         </p:txBody>
       </p:sp>
-      <mc:AlternateContent xmlns:mc="http://schemas.openxmlformats.org/markup-compatibility/2006" xmlns:a14="http://schemas.microsoft.com/office/drawing/2010/main">
-        <mc:Choice Requires="a14">
-          <p:sp>
-            <p:nvSpPr>
-              <p:cNvPr id="2" name="CuadroTexto 1">
-                <a:extLst>
-                  <a:ext uri="{FF2B5EF4-FFF2-40B4-BE49-F238E27FC236}">
-                    <a16:creationId xmlns:a16="http://schemas.microsoft.com/office/drawing/2014/main" id="{A440F587-93A3-E474-C0B0-883BB9DAFD85}"/>
-                  </a:ext>
-                </a:extLst>
-              </p:cNvPr>
-              <p:cNvSpPr txBox="1"/>
-              <p:nvPr/>
-            </p:nvSpPr>
-            <p:spPr>
-              <a:xfrm>
-                <a:off x="609441" y="4860334"/>
-                <a:ext cx="11198542" cy="1361911"/>
-              </a:xfrm>
-              <a:prstGeom prst="rect">
-                <a:avLst/>
-              </a:prstGeom>
-              <a:solidFill>
-                <a:schemeClr val="bg1">
-                  <a:lumMod val="95000"/>
-                </a:schemeClr>
-              </a:solidFill>
-              <a:ln w="28575">
-                <a:solidFill>
-                  <a:srgbClr val="E0700D"/>
-                </a:solidFill>
-              </a:ln>
-            </p:spPr>
-            <p:txBody>
-              <a:bodyPr wrap="square" rtlCol="0">
-                <a:spAutoFit/>
-              </a:bodyPr>
-              <a:lstStyle/>
-              <a:p>
-                <a:pPr algn="just"/>
-                <a:r>
-                  <a:rPr lang="en-US" sz="1200" dirty="0">
-                    <a:latin typeface="Arial" panose="020B0604020202020204" pitchFamily="34" charset="0"/>
-                    <a:cs typeface="Arial" panose="020B0604020202020204" pitchFamily="34" charset="0"/>
-                  </a:rPr>
-                  <a:t>Find the second-degree polynomial coefficients and relate them with the group index and the dispersion parameter. </a:t>
-                </a:r>
-                <a14:m>
-                  <m:oMath xmlns:m="http://schemas.openxmlformats.org/officeDocument/2006/math">
-                    <m:d>
-                      <m:dPr>
-                        <m:begChr m:val="{"/>
-                        <m:endChr m:val=""/>
-                        <m:ctrlPr>
-                          <a:rPr lang="es-ES" sz="1200" b="0" i="1" smtClean="0">
-                            <a:latin typeface="Cambria Math" panose="02040503050406030204" pitchFamily="18" charset="0"/>
-                            <a:cs typeface="Arial" panose="020B0604020202020204" pitchFamily="34" charset="0"/>
-                          </a:rPr>
-                        </m:ctrlPr>
-                      </m:dPr>
-                      <m:e>
-                        <m:eqArr>
-                          <m:eqArrPr>
-                            <m:ctrlPr>
-                              <a:rPr lang="es-ES" sz="1200" b="0" i="1" smtClean="0">
-                                <a:latin typeface="Cambria Math" panose="02040503050406030204" pitchFamily="18" charset="0"/>
-                                <a:cs typeface="Arial" panose="020B0604020202020204" pitchFamily="34" charset="0"/>
-                              </a:rPr>
-                            </m:ctrlPr>
-                          </m:eqArrPr>
-                          <m:e>
-                            <m:sSub>
-                              <m:sSubPr>
-                                <m:ctrlPr>
-                                  <a:rPr lang="es-ES" sz="1200" b="0" i="1" smtClean="0">
-                                    <a:latin typeface="Cambria Math" panose="02040503050406030204" pitchFamily="18" charset="0"/>
-                                    <a:cs typeface="Arial" panose="020B0604020202020204" pitchFamily="34" charset="0"/>
-                                  </a:rPr>
-                                </m:ctrlPr>
-                              </m:sSubPr>
-                              <m:e>
-                                <m:r>
-                                  <a:rPr lang="es-ES" sz="1200" b="0" i="1" smtClean="0">
-                                    <a:latin typeface="Cambria Math" panose="02040503050406030204" pitchFamily="18" charset="0"/>
-                                    <a:cs typeface="Arial" panose="020B0604020202020204" pitchFamily="34" charset="0"/>
-                                  </a:rPr>
-                                  <m:t>𝑛</m:t>
-                                </m:r>
-                              </m:e>
-                              <m:sub>
-                                <m:r>
-                                  <a:rPr lang="es-ES" sz="1200" b="0" i="1" smtClean="0">
-                                    <a:latin typeface="Cambria Math" panose="02040503050406030204" pitchFamily="18" charset="0"/>
-                                    <a:cs typeface="Arial" panose="020B0604020202020204" pitchFamily="34" charset="0"/>
-                                  </a:rPr>
-                                  <m:t>𝑒𝑓𝑓</m:t>
-                                </m:r>
-                              </m:sub>
-                            </m:sSub>
-                            <m:r>
-                              <a:rPr lang="es-ES" sz="1200" b="0" i="1" smtClean="0">
-                                <a:latin typeface="Cambria Math" panose="02040503050406030204" pitchFamily="18" charset="0"/>
-                                <a:cs typeface="Arial" panose="020B0604020202020204" pitchFamily="34" charset="0"/>
-                              </a:rPr>
-                              <m:t>=</m:t>
-                            </m:r>
-                            <m:sSub>
-                              <m:sSubPr>
-                                <m:ctrlPr>
-                                  <a:rPr lang="es-ES" sz="1200" b="0" i="1" smtClean="0">
-                                    <a:latin typeface="Cambria Math" panose="02040503050406030204" pitchFamily="18" charset="0"/>
-                                    <a:cs typeface="Arial" panose="020B0604020202020204" pitchFamily="34" charset="0"/>
-                                  </a:rPr>
-                                </m:ctrlPr>
-                              </m:sSubPr>
-                              <m:e>
-                                <m:r>
-                                  <a:rPr lang="es-ES" sz="1200" b="0" i="1" smtClean="0">
-                                    <a:latin typeface="Cambria Math" panose="02040503050406030204" pitchFamily="18" charset="0"/>
-                                    <a:cs typeface="Arial" panose="020B0604020202020204" pitchFamily="34" charset="0"/>
-                                  </a:rPr>
-                                  <m:t>𝑛</m:t>
-                                </m:r>
-                              </m:e>
-                              <m:sub>
-                                <m:r>
-                                  <a:rPr lang="es-ES" sz="1200" b="0" i="1" smtClean="0">
-                                    <a:latin typeface="Cambria Math" panose="02040503050406030204" pitchFamily="18" charset="0"/>
-                                    <a:cs typeface="Arial" panose="020B0604020202020204" pitchFamily="34" charset="0"/>
-                                  </a:rPr>
-                                  <m:t>1</m:t>
-                                </m:r>
-                              </m:sub>
-                            </m:sSub>
-                          </m:e>
-                          <m:e>
-                            <m:sSub>
-                              <m:sSubPr>
-                                <m:ctrlPr>
-                                  <a:rPr lang="es-ES" sz="1200" b="0" i="1" smtClean="0">
-                                    <a:latin typeface="Cambria Math" panose="02040503050406030204" pitchFamily="18" charset="0"/>
-                                    <a:cs typeface="Arial" panose="020B0604020202020204" pitchFamily="34" charset="0"/>
-                                  </a:rPr>
-                                </m:ctrlPr>
-                              </m:sSubPr>
-                              <m:e>
-                                <m:r>
-                                  <a:rPr lang="es-ES" sz="1200" b="0" i="1" smtClean="0">
-                                    <a:latin typeface="Cambria Math" panose="02040503050406030204" pitchFamily="18" charset="0"/>
-                                    <a:cs typeface="Arial" panose="020B0604020202020204" pitchFamily="34" charset="0"/>
-                                  </a:rPr>
-                                  <m:t>𝑛</m:t>
-                                </m:r>
-                              </m:e>
-                              <m:sub>
-                                <m:r>
-                                  <a:rPr lang="es-ES" sz="1200" b="0" i="1" smtClean="0">
-                                    <a:latin typeface="Cambria Math" panose="02040503050406030204" pitchFamily="18" charset="0"/>
-                                    <a:cs typeface="Arial" panose="020B0604020202020204" pitchFamily="34" charset="0"/>
-                                  </a:rPr>
-                                  <m:t>𝑔</m:t>
-                                </m:r>
-                              </m:sub>
-                            </m:sSub>
-                            <m:r>
-                              <a:rPr lang="es-ES" sz="1200" b="0" i="1" smtClean="0">
-                                <a:latin typeface="Cambria Math" panose="02040503050406030204" pitchFamily="18" charset="0"/>
-                                <a:cs typeface="Arial" panose="020B0604020202020204" pitchFamily="34" charset="0"/>
-                              </a:rPr>
-                              <m:t>=</m:t>
-                            </m:r>
-                            <m:sSub>
-                              <m:sSubPr>
-                                <m:ctrlPr>
-                                  <a:rPr lang="es-ES" sz="1200" b="0" i="1" smtClean="0">
-                                    <a:latin typeface="Cambria Math" panose="02040503050406030204" pitchFamily="18" charset="0"/>
-                                    <a:cs typeface="Arial" panose="020B0604020202020204" pitchFamily="34" charset="0"/>
-                                  </a:rPr>
-                                </m:ctrlPr>
-                              </m:sSubPr>
-                              <m:e>
-                                <m:r>
-                                  <a:rPr lang="es-ES" sz="1200" b="0" i="1" smtClean="0">
-                                    <a:latin typeface="Cambria Math" panose="02040503050406030204" pitchFamily="18" charset="0"/>
-                                    <a:cs typeface="Arial" panose="020B0604020202020204" pitchFamily="34" charset="0"/>
-                                  </a:rPr>
-                                  <m:t>𝑛</m:t>
-                                </m:r>
-                              </m:e>
-                              <m:sub>
-                                <m:r>
-                                  <a:rPr lang="es-ES" sz="1200" b="0" i="1" smtClean="0">
-                                    <a:latin typeface="Cambria Math" panose="02040503050406030204" pitchFamily="18" charset="0"/>
-                                    <a:cs typeface="Arial" panose="020B0604020202020204" pitchFamily="34" charset="0"/>
-                                  </a:rPr>
-                                  <m:t>1</m:t>
-                                </m:r>
-                              </m:sub>
-                            </m:sSub>
-                            <m:r>
-                              <a:rPr lang="es-ES" sz="1200" b="0" i="1" smtClean="0">
-                                <a:latin typeface="Cambria Math" panose="02040503050406030204" pitchFamily="18" charset="0"/>
-                                <a:cs typeface="Arial" panose="020B0604020202020204" pitchFamily="34" charset="0"/>
-                              </a:rPr>
-                              <m:t>−</m:t>
-                            </m:r>
-                            <m:sSub>
-                              <m:sSubPr>
-                                <m:ctrlPr>
-                                  <a:rPr lang="es-ES" sz="1200" b="0" i="1" smtClean="0">
-                                    <a:latin typeface="Cambria Math" panose="02040503050406030204" pitchFamily="18" charset="0"/>
-                                    <a:cs typeface="Arial" panose="020B0604020202020204" pitchFamily="34" charset="0"/>
-                                  </a:rPr>
-                                </m:ctrlPr>
-                              </m:sSubPr>
-                              <m:e>
-                                <m:r>
-                                  <a:rPr lang="es-ES" sz="1200" b="0" i="1" smtClean="0">
-                                    <a:latin typeface="Cambria Math" panose="02040503050406030204" pitchFamily="18" charset="0"/>
-                                    <a:cs typeface="Arial" panose="020B0604020202020204" pitchFamily="34" charset="0"/>
-                                  </a:rPr>
-                                  <m:t>𝑛</m:t>
-                                </m:r>
-                              </m:e>
-                              <m:sub>
-                                <m:r>
-                                  <a:rPr lang="es-ES" sz="1200" b="0" i="1" smtClean="0">
-                                    <a:latin typeface="Cambria Math" panose="02040503050406030204" pitchFamily="18" charset="0"/>
-                                    <a:cs typeface="Arial" panose="020B0604020202020204" pitchFamily="34" charset="0"/>
-                                  </a:rPr>
-                                  <m:t>2</m:t>
-                                </m:r>
-                              </m:sub>
-                            </m:sSub>
-                            <m:sSub>
-                              <m:sSubPr>
-                                <m:ctrlPr>
-                                  <a:rPr lang="es-ES" sz="1200" b="0" i="1" smtClean="0">
-                                    <a:latin typeface="Cambria Math" panose="02040503050406030204" pitchFamily="18" charset="0"/>
-                                    <a:cs typeface="Arial" panose="020B0604020202020204" pitchFamily="34" charset="0"/>
-                                  </a:rPr>
-                                </m:ctrlPr>
-                              </m:sSubPr>
-                              <m:e>
-                                <m:r>
-                                  <a:rPr lang="es-ES" sz="1200" b="0" i="1" smtClean="0">
-                                    <a:latin typeface="Cambria Math" panose="02040503050406030204" pitchFamily="18" charset="0"/>
-                                    <a:cs typeface="Arial" panose="020B0604020202020204" pitchFamily="34" charset="0"/>
-                                  </a:rPr>
-                                  <m:t>𝜆</m:t>
-                                </m:r>
-                              </m:e>
-                              <m:sub>
-                                <m:r>
-                                  <a:rPr lang="es-ES" sz="1200" b="0" i="1" smtClean="0">
-                                    <a:latin typeface="Cambria Math" panose="02040503050406030204" pitchFamily="18" charset="0"/>
-                                    <a:cs typeface="Arial" panose="020B0604020202020204" pitchFamily="34" charset="0"/>
-                                  </a:rPr>
-                                  <m:t>0</m:t>
-                                </m:r>
-                              </m:sub>
-                            </m:sSub>
-                          </m:e>
-                          <m:e>
-                            <m:r>
-                              <a:rPr lang="es-ES" sz="1200" b="0" i="1" smtClean="0">
-                                <a:latin typeface="Cambria Math" panose="02040503050406030204" pitchFamily="18" charset="0"/>
-                                <a:cs typeface="Arial" panose="020B0604020202020204" pitchFamily="34" charset="0"/>
-                              </a:rPr>
-                              <m:t>𝐷</m:t>
-                            </m:r>
-                            <m:r>
-                              <a:rPr lang="es-ES" sz="1200" b="0" i="1" smtClean="0">
-                                <a:latin typeface="Cambria Math" panose="02040503050406030204" pitchFamily="18" charset="0"/>
-                                <a:cs typeface="Arial" panose="020B0604020202020204" pitchFamily="34" charset="0"/>
-                              </a:rPr>
-                              <m:t>=−</m:t>
-                            </m:r>
-                            <m:f>
-                              <m:fPr>
-                                <m:ctrlPr>
-                                  <a:rPr lang="es-ES" sz="1200" b="0" i="1" smtClean="0">
-                                    <a:latin typeface="Cambria Math" panose="02040503050406030204" pitchFamily="18" charset="0"/>
-                                    <a:cs typeface="Arial" panose="020B0604020202020204" pitchFamily="34" charset="0"/>
-                                  </a:rPr>
-                                </m:ctrlPr>
-                              </m:fPr>
-                              <m:num>
-                                <m:r>
-                                  <a:rPr lang="es-ES" sz="1200" b="0" i="1" smtClean="0">
-                                    <a:latin typeface="Cambria Math" panose="02040503050406030204" pitchFamily="18" charset="0"/>
-                                    <a:cs typeface="Arial" panose="020B0604020202020204" pitchFamily="34" charset="0"/>
-                                  </a:rPr>
-                                  <m:t>2</m:t>
-                                </m:r>
-                                <m:sSub>
-                                  <m:sSubPr>
-                                    <m:ctrlPr>
-                                      <a:rPr lang="es-ES" sz="1200" b="0" i="1" smtClean="0">
-                                        <a:latin typeface="Cambria Math" panose="02040503050406030204" pitchFamily="18" charset="0"/>
-                                        <a:cs typeface="Arial" panose="020B0604020202020204" pitchFamily="34" charset="0"/>
-                                      </a:rPr>
-                                    </m:ctrlPr>
-                                  </m:sSubPr>
-                                  <m:e>
-                                    <m:r>
-                                      <a:rPr lang="es-ES" sz="1200" b="0" i="1" smtClean="0">
-                                        <a:latin typeface="Cambria Math" panose="02040503050406030204" pitchFamily="18" charset="0"/>
-                                        <a:cs typeface="Arial" panose="020B0604020202020204" pitchFamily="34" charset="0"/>
-                                      </a:rPr>
-                                      <m:t>𝜆</m:t>
-                                    </m:r>
-                                  </m:e>
-                                  <m:sub>
-                                    <m:r>
-                                      <a:rPr lang="es-ES" sz="1200" b="0" i="1" smtClean="0">
-                                        <a:latin typeface="Cambria Math" panose="02040503050406030204" pitchFamily="18" charset="0"/>
-                                        <a:cs typeface="Arial" panose="020B0604020202020204" pitchFamily="34" charset="0"/>
-                                      </a:rPr>
-                                      <m:t>0</m:t>
-                                    </m:r>
-                                  </m:sub>
-                                </m:sSub>
-                                <m:sSub>
-                                  <m:sSubPr>
-                                    <m:ctrlPr>
-                                      <a:rPr lang="es-ES" sz="1200" b="0" i="1" smtClean="0">
-                                        <a:latin typeface="Cambria Math" panose="02040503050406030204" pitchFamily="18" charset="0"/>
-                                        <a:cs typeface="Arial" panose="020B0604020202020204" pitchFamily="34" charset="0"/>
-                                      </a:rPr>
-                                    </m:ctrlPr>
-                                  </m:sSubPr>
-                                  <m:e>
-                                    <m:r>
-                                      <a:rPr lang="es-ES" sz="1200" b="0" i="1" smtClean="0">
-                                        <a:latin typeface="Cambria Math" panose="02040503050406030204" pitchFamily="18" charset="0"/>
-                                        <a:cs typeface="Arial" panose="020B0604020202020204" pitchFamily="34" charset="0"/>
-                                      </a:rPr>
-                                      <m:t>𝑛</m:t>
-                                    </m:r>
-                                  </m:e>
-                                  <m:sub>
-                                    <m:r>
-                                      <a:rPr lang="es-ES" sz="1200" b="0" i="1" smtClean="0">
-                                        <a:latin typeface="Cambria Math" panose="02040503050406030204" pitchFamily="18" charset="0"/>
-                                        <a:cs typeface="Arial" panose="020B0604020202020204" pitchFamily="34" charset="0"/>
-                                      </a:rPr>
-                                      <m:t>3</m:t>
-                                    </m:r>
-                                  </m:sub>
-                                </m:sSub>
-                              </m:num>
-                              <m:den>
-                                <m:r>
-                                  <a:rPr lang="es-ES" sz="1200" b="0" i="1" smtClean="0">
-                                    <a:latin typeface="Cambria Math" panose="02040503050406030204" pitchFamily="18" charset="0"/>
-                                    <a:cs typeface="Arial" panose="020B0604020202020204" pitchFamily="34" charset="0"/>
-                                  </a:rPr>
-                                  <m:t>𝑐</m:t>
-                                </m:r>
-                              </m:den>
-                            </m:f>
-                            <m:d>
-                              <m:dPr>
-                                <m:begChr m:val="["/>
-                                <m:endChr m:val="]"/>
-                                <m:ctrlPr>
-                                  <a:rPr lang="es-ES" sz="1200" b="0" i="1" smtClean="0">
-                                    <a:latin typeface="Cambria Math" panose="02040503050406030204" pitchFamily="18" charset="0"/>
-                                    <a:cs typeface="Arial" panose="020B0604020202020204" pitchFamily="34" charset="0"/>
-                                  </a:rPr>
-                                </m:ctrlPr>
-                              </m:dPr>
-                              <m:e>
-                                <m:f>
-                                  <m:fPr>
-                                    <m:ctrlPr>
-                                      <a:rPr lang="es-ES" sz="1200" b="0" i="1" smtClean="0">
-                                        <a:latin typeface="Cambria Math" panose="02040503050406030204" pitchFamily="18" charset="0"/>
-                                        <a:cs typeface="Arial" panose="020B0604020202020204" pitchFamily="34" charset="0"/>
-                                      </a:rPr>
-                                    </m:ctrlPr>
-                                  </m:fPr>
-                                  <m:num>
-                                    <m:sSup>
-                                      <m:sSupPr>
-                                        <m:ctrlPr>
-                                          <a:rPr lang="es-ES" sz="1200" b="0" i="1" smtClean="0">
-                                            <a:latin typeface="Cambria Math" panose="02040503050406030204" pitchFamily="18" charset="0"/>
-                                            <a:cs typeface="Arial" panose="020B0604020202020204" pitchFamily="34" charset="0"/>
-                                          </a:rPr>
-                                        </m:ctrlPr>
-                                      </m:sSupPr>
-                                      <m:e>
-                                        <m:r>
-                                          <a:rPr lang="es-ES" sz="1200" b="0" i="1" smtClean="0">
-                                            <a:latin typeface="Cambria Math" panose="02040503050406030204" pitchFamily="18" charset="0"/>
-                                            <a:cs typeface="Arial" panose="020B0604020202020204" pitchFamily="34" charset="0"/>
-                                          </a:rPr>
-                                          <m:t>𝑠</m:t>
-                                        </m:r>
-                                      </m:e>
-                                      <m:sup>
-                                        <m:r>
-                                          <a:rPr lang="es-ES" sz="1200" b="0" i="1" smtClean="0">
-                                            <a:latin typeface="Cambria Math" panose="02040503050406030204" pitchFamily="18" charset="0"/>
-                                            <a:cs typeface="Arial" panose="020B0604020202020204" pitchFamily="34" charset="0"/>
-                                          </a:rPr>
-                                          <m:t>2</m:t>
-                                        </m:r>
-                                      </m:sup>
-                                    </m:sSup>
-                                  </m:num>
-                                  <m:den>
-                                    <m:r>
-                                      <a:rPr lang="es-ES" sz="1200" b="0" i="1" smtClean="0">
-                                        <a:latin typeface="Cambria Math" panose="02040503050406030204" pitchFamily="18" charset="0"/>
-                                        <a:cs typeface="Arial" panose="020B0604020202020204" pitchFamily="34" charset="0"/>
-                                      </a:rPr>
-                                      <m:t>𝑚</m:t>
-                                    </m:r>
-                                  </m:den>
-                                </m:f>
-                              </m:e>
-                            </m:d>
-                          </m:e>
-                        </m:eqArr>
-                      </m:e>
-                    </m:d>
-                  </m:oMath>
-                </a14:m>
-                <a:endParaRPr lang="es-ES" sz="1200" b="0" dirty="0">
-                  <a:latin typeface="Arial" panose="020B0604020202020204" pitchFamily="34" charset="0"/>
-                  <a:cs typeface="Arial" panose="020B0604020202020204" pitchFamily="34" charset="0"/>
-                </a:endParaRPr>
-              </a:p>
-              <a:p>
-                <a:pPr algn="just"/>
-                <a:r>
-                  <a:rPr lang="en-US" sz="1200" dirty="0">
-                    <a:latin typeface="Arial" panose="020B0604020202020204" pitchFamily="34" charset="0"/>
-                    <a:cs typeface="Arial" panose="020B0604020202020204" pitchFamily="34" charset="0"/>
-                  </a:rPr>
-                  <a:t> </a:t>
-                </a:r>
-              </a:p>
-              <a:p>
-                <a:pPr algn="just"/>
-                <a:r>
-                  <a:rPr lang="en-US" sz="1200" dirty="0">
-                    <a:latin typeface="Arial" panose="020B0604020202020204" pitchFamily="34" charset="0"/>
-                    <a:cs typeface="Arial" panose="020B0604020202020204" pitchFamily="34" charset="0"/>
-                  </a:rPr>
-                  <a:t>Comment on the results found for the TE0 and TM0 for both deep and shallow waveguides. </a:t>
-                </a:r>
-              </a:p>
-              <a:p>
-                <a:pPr algn="just"/>
-                <a:endParaRPr lang="en-US" sz="1200" dirty="0">
-                  <a:latin typeface="Arial" panose="020B0604020202020204" pitchFamily="34" charset="0"/>
-                  <a:cs typeface="Arial" panose="020B0604020202020204" pitchFamily="34" charset="0"/>
-                </a:endParaRPr>
-              </a:p>
-            </p:txBody>
-          </p:sp>
-        </mc:Choice>
-        <mc:Fallback xmlns="">
-          <p:sp>
-            <p:nvSpPr>
-              <p:cNvPr id="2" name="CuadroTexto 1">
-                <a:extLst>
-                  <a:ext uri="{FF2B5EF4-FFF2-40B4-BE49-F238E27FC236}">
-                    <a16:creationId xmlns:a16="http://schemas.microsoft.com/office/drawing/2014/main" id="{A440F587-93A3-E474-C0B0-883BB9DAFD85}"/>
-                  </a:ext>
-                </a:extLst>
-              </p:cNvPr>
-              <p:cNvSpPr txBox="1">
-                <a:spLocks noRot="1" noChangeAspect="1" noMove="1" noResize="1" noEditPoints="1" noAdjustHandles="1" noChangeArrowheads="1" noChangeShapeType="1" noTextEdit="1"/>
-              </p:cNvSpPr>
-              <p:nvPr/>
-            </p:nvSpPr>
-            <p:spPr>
-              <a:xfrm>
-                <a:off x="609441" y="4860334"/>
-                <a:ext cx="11198542" cy="1361911"/>
-              </a:xfrm>
-              <a:prstGeom prst="rect">
-                <a:avLst/>
-              </a:prstGeom>
-              <a:blipFill>
-                <a:blip r:embed="rId6"/>
-                <a:stretch>
-                  <a:fillRect/>
-                </a:stretch>
-              </a:blipFill>
-              <a:ln w="28575">
-                <a:solidFill>
-                  <a:srgbClr val="E0700D"/>
-                </a:solidFill>
-              </a:ln>
-            </p:spPr>
-            <p:txBody>
-              <a:bodyPr/>
-              <a:lstStyle/>
-              <a:p>
-                <a:r>
-                  <a:rPr lang="es-ES">
-                    <a:noFill/>
-                  </a:rPr>
-                  <a:t> </a:t>
-                </a:r>
-              </a:p>
-            </p:txBody>
-          </p:sp>
-        </mc:Fallback>
-      </mc:AlternateContent>
       <p:sp>
         <p:nvSpPr>
           <p:cNvPr id="5" name="Rectángulo 4">
@@ -7161,7 +10974,7 @@
         <p:spPr>
           <a:xfrm>
             <a:off x="609441" y="1447800"/>
-            <a:ext cx="5486559" cy="3306028"/>
+            <a:ext cx="5486559" cy="3886200"/>
           </a:xfrm>
           <a:prstGeom prst="rect">
             <a:avLst/>
@@ -7213,7 +11026,7 @@
         <p:spPr>
           <a:xfrm>
             <a:off x="6321424" y="1447800"/>
-            <a:ext cx="5486559" cy="3306028"/>
+            <a:ext cx="5486559" cy="3886200"/>
           </a:xfrm>
           <a:prstGeom prst="rect">
             <a:avLst/>
@@ -7250,14 +11063,14 @@
           </a:p>
         </p:txBody>
       </p:sp>
-      <mc:AlternateContent xmlns:mc="http://schemas.openxmlformats.org/markup-compatibility/2006" xmlns:a14="http://schemas.microsoft.com/office/drawing/2010/main">
-        <mc:Choice Requires="a14">
+      <mc:AlternateContent xmlns:mc="http://schemas.openxmlformats.org/markup-compatibility/2006">
+        <mc:Choice xmlns:a14="http://schemas.microsoft.com/office/drawing/2010/main" Requires="a14">
           <p:sp>
             <p:nvSpPr>
-              <p:cNvPr id="9" name="CuadroTexto 8">
+              <p:cNvPr id="4" name="CuadroTexto 9">
                 <a:extLst>
                   <a:ext uri="{FF2B5EF4-FFF2-40B4-BE49-F238E27FC236}">
-                    <a16:creationId xmlns:a16="http://schemas.microsoft.com/office/drawing/2014/main" id="{C59B6428-4395-242F-54D8-A9FC610F2D7A}"/>
+                    <a16:creationId xmlns:a16="http://schemas.microsoft.com/office/drawing/2014/main" id="{9BFD227C-0C00-4526-20C1-AF41442D36AE}"/>
                   </a:ext>
                 </a:extLst>
               </p:cNvPr>
@@ -7266,13 +11079,22 @@
             </p:nvSpPr>
             <p:spPr>
               <a:xfrm>
-                <a:off x="609440" y="2709096"/>
-                <a:ext cx="5486559" cy="1200329"/>
+                <a:off x="608013" y="5419470"/>
+                <a:ext cx="5486560" cy="679930"/>
               </a:xfrm>
               <a:prstGeom prst="rect">
                 <a:avLst/>
               </a:prstGeom>
-              <a:noFill/>
+              <a:solidFill>
+                <a:schemeClr val="bg1">
+                  <a:lumMod val="95000"/>
+                </a:schemeClr>
+              </a:solidFill>
+              <a:ln w="28575">
+                <a:solidFill>
+                  <a:srgbClr val="E0700D"/>
+                </a:solidFill>
+              </a:ln>
             </p:spPr>
             <p:txBody>
               <a:bodyPr wrap="square" rtlCol="0">
@@ -7281,83 +11103,401 @@
               <a:lstStyle/>
               <a:p>
                 <a:pPr algn="ctr"/>
+                <a14:m>
+                  <m:oMath xmlns:m="http://schemas.openxmlformats.org/officeDocument/2006/math">
+                    <m:sSub>
+                      <m:sSubPr>
+                        <m:ctrlPr>
+                          <a:rPr lang="es-ES" sz="1200" i="1" smtClean="0">
+                            <a:latin typeface="Cambria Math" panose="02040503050406030204" pitchFamily="18" charset="0"/>
+                          </a:rPr>
+                        </m:ctrlPr>
+                      </m:sSubPr>
+                      <m:e>
+                        <m:r>
+                          <a:rPr lang="es-ES" sz="1200" i="1">
+                            <a:latin typeface="Cambria Math" panose="02040503050406030204" pitchFamily="18" charset="0"/>
+                          </a:rPr>
+                          <m:t>𝑛</m:t>
+                        </m:r>
+                      </m:e>
+                      <m:sub>
+                        <m:r>
+                          <a:rPr lang="es-ES" sz="1200" i="1">
+                            <a:latin typeface="Cambria Math" panose="02040503050406030204" pitchFamily="18" charset="0"/>
+                          </a:rPr>
+                          <m:t>𝑒𝑓𝑓</m:t>
+                        </m:r>
+                      </m:sub>
+                    </m:sSub>
+                    <m:d>
+                      <m:dPr>
+                        <m:ctrlPr>
+                          <a:rPr lang="es-ES" sz="1200" i="1">
+                            <a:latin typeface="Cambria Math" panose="02040503050406030204" pitchFamily="18" charset="0"/>
+                          </a:rPr>
+                        </m:ctrlPr>
+                      </m:dPr>
+                      <m:e>
+                        <m:r>
+                          <a:rPr lang="es-ES" sz="1200" i="1">
+                            <a:latin typeface="Cambria Math" panose="02040503050406030204" pitchFamily="18" charset="0"/>
+                          </a:rPr>
+                          <m:t>𝜆</m:t>
+                        </m:r>
+                      </m:e>
+                    </m:d>
+                    <m:r>
+                      <a:rPr lang="es-ES" sz="1200" i="1">
+                        <a:latin typeface="Cambria Math" panose="02040503050406030204" pitchFamily="18" charset="0"/>
+                      </a:rPr>
+                      <m:t>=</m:t>
+                    </m:r>
+                    <m:r>
+                      <a:rPr lang="es-MX" sz="1200" b="0" i="1" smtClean="0">
+                        <a:latin typeface="Cambria Math" panose="02040503050406030204" pitchFamily="18" charset="0"/>
+                      </a:rPr>
+                      <m:t>1</m:t>
+                    </m:r>
+                    <m:r>
+                      <a:rPr lang="es-MX" sz="1200" b="0" i="1" smtClean="0">
+                        <a:latin typeface="Cambria Math" panose="02040503050406030204" pitchFamily="18" charset="0"/>
+                      </a:rPr>
+                      <m:t>,</m:t>
+                    </m:r>
+                    <m:r>
+                      <a:rPr lang="es-MX" sz="1200" b="0" i="1" smtClean="0">
+                        <a:latin typeface="Cambria Math" panose="02040503050406030204" pitchFamily="18" charset="0"/>
+                      </a:rPr>
+                      <m:t>60</m:t>
+                    </m:r>
+                    <m:r>
+                      <a:rPr lang="es-MX" sz="1200" b="0" i="1" smtClean="0">
+                        <a:latin typeface="Cambria Math" panose="02040503050406030204" pitchFamily="18" charset="0"/>
+                      </a:rPr>
+                      <m:t>−</m:t>
+                    </m:r>
+                    <m:r>
+                      <a:rPr lang="es-MX" sz="1200" b="0" i="1" smtClean="0">
+                        <a:latin typeface="Cambria Math" panose="02040503050406030204" pitchFamily="18" charset="0"/>
+                      </a:rPr>
+                      <m:t>0</m:t>
+                    </m:r>
+                    <m:r>
+                      <a:rPr lang="es-MX" sz="1200" b="0" i="1" smtClean="0">
+                        <a:latin typeface="Cambria Math" panose="02040503050406030204" pitchFamily="18" charset="0"/>
+                      </a:rPr>
+                      <m:t>,</m:t>
+                    </m:r>
+                    <m:r>
+                      <a:rPr lang="es-MX" sz="1200" b="0" i="1" smtClean="0">
+                        <a:latin typeface="Cambria Math" panose="02040503050406030204" pitchFamily="18" charset="0"/>
+                      </a:rPr>
+                      <m:t>22</m:t>
+                    </m:r>
+                    <m:d>
+                      <m:dPr>
+                        <m:ctrlPr>
+                          <a:rPr lang="es-ES" sz="1200" i="1">
+                            <a:latin typeface="Cambria Math" panose="02040503050406030204" pitchFamily="18" charset="0"/>
+                          </a:rPr>
+                        </m:ctrlPr>
+                      </m:dPr>
+                      <m:e>
+                        <m:r>
+                          <a:rPr lang="es-ES" sz="1200" i="1">
+                            <a:latin typeface="Cambria Math" panose="02040503050406030204" pitchFamily="18" charset="0"/>
+                          </a:rPr>
+                          <m:t>𝜆</m:t>
+                        </m:r>
+                        <m:r>
+                          <a:rPr lang="es-ES" sz="1200" i="1">
+                            <a:latin typeface="Cambria Math" panose="02040503050406030204" pitchFamily="18" charset="0"/>
+                          </a:rPr>
+                          <m:t>−</m:t>
+                        </m:r>
+                        <m:sSub>
+                          <m:sSubPr>
+                            <m:ctrlPr>
+                              <a:rPr lang="es-ES" sz="1200" i="1">
+                                <a:latin typeface="Cambria Math" panose="02040503050406030204" pitchFamily="18" charset="0"/>
+                              </a:rPr>
+                            </m:ctrlPr>
+                          </m:sSubPr>
+                          <m:e>
+                            <m:r>
+                              <a:rPr lang="es-ES" sz="1200" i="1">
+                                <a:latin typeface="Cambria Math" panose="02040503050406030204" pitchFamily="18" charset="0"/>
+                              </a:rPr>
+                              <m:t>𝜆</m:t>
+                            </m:r>
+                          </m:e>
+                          <m:sub>
+                            <m:r>
+                              <a:rPr lang="es-ES" sz="1200" i="1">
+                                <a:latin typeface="Cambria Math" panose="02040503050406030204" pitchFamily="18" charset="0"/>
+                              </a:rPr>
+                              <m:t>0</m:t>
+                            </m:r>
+                          </m:sub>
+                        </m:sSub>
+                      </m:e>
+                    </m:d>
+                    <m:r>
+                      <a:rPr lang="es-ES" sz="1200" i="1">
+                        <a:latin typeface="Cambria Math" panose="02040503050406030204" pitchFamily="18" charset="0"/>
+                      </a:rPr>
+                      <m:t>+</m:t>
+                    </m:r>
+                    <m:r>
+                      <a:rPr lang="es-MX" sz="1200" b="0" i="1" smtClean="0">
+                        <a:latin typeface="Cambria Math" panose="02040503050406030204" pitchFamily="18" charset="0"/>
+                      </a:rPr>
+                      <m:t>0</m:t>
+                    </m:r>
+                    <m:r>
+                      <a:rPr lang="es-MX" sz="1200" b="0" i="1" smtClean="0">
+                        <a:latin typeface="Cambria Math" panose="02040503050406030204" pitchFamily="18" charset="0"/>
+                      </a:rPr>
+                      <m:t>,</m:t>
+                    </m:r>
+                    <m:r>
+                      <a:rPr lang="es-MX" sz="1200" b="0" i="1" smtClean="0">
+                        <a:latin typeface="Cambria Math" panose="02040503050406030204" pitchFamily="18" charset="0"/>
+                      </a:rPr>
+                      <m:t>10</m:t>
+                    </m:r>
+                    <m:sSup>
+                      <m:sSupPr>
+                        <m:ctrlPr>
+                          <a:rPr lang="es-ES" sz="1200" i="1">
+                            <a:latin typeface="Cambria Math" panose="02040503050406030204" pitchFamily="18" charset="0"/>
+                          </a:rPr>
+                        </m:ctrlPr>
+                      </m:sSupPr>
+                      <m:e>
+                        <m:d>
+                          <m:dPr>
+                            <m:ctrlPr>
+                              <a:rPr lang="es-ES" sz="1200" i="1">
+                                <a:latin typeface="Cambria Math" panose="02040503050406030204" pitchFamily="18" charset="0"/>
+                              </a:rPr>
+                            </m:ctrlPr>
+                          </m:dPr>
+                          <m:e>
+                            <m:r>
+                              <a:rPr lang="es-ES" sz="1200" i="1">
+                                <a:latin typeface="Cambria Math" panose="02040503050406030204" pitchFamily="18" charset="0"/>
+                              </a:rPr>
+                              <m:t>𝜆</m:t>
+                            </m:r>
+                            <m:r>
+                              <a:rPr lang="es-ES" sz="1200" i="1">
+                                <a:latin typeface="Cambria Math" panose="02040503050406030204" pitchFamily="18" charset="0"/>
+                              </a:rPr>
+                              <m:t>−</m:t>
+                            </m:r>
+                            <m:sSub>
+                              <m:sSubPr>
+                                <m:ctrlPr>
+                                  <a:rPr lang="es-ES" sz="1200" i="1">
+                                    <a:latin typeface="Cambria Math" panose="02040503050406030204" pitchFamily="18" charset="0"/>
+                                  </a:rPr>
+                                </m:ctrlPr>
+                              </m:sSubPr>
+                              <m:e>
+                                <m:r>
+                                  <a:rPr lang="es-ES" sz="1200" i="1">
+                                    <a:latin typeface="Cambria Math" panose="02040503050406030204" pitchFamily="18" charset="0"/>
+                                  </a:rPr>
+                                  <m:t>𝜆</m:t>
+                                </m:r>
+                              </m:e>
+                              <m:sub>
+                                <m:r>
+                                  <a:rPr lang="es-ES" sz="1200" i="1">
+                                    <a:latin typeface="Cambria Math" panose="02040503050406030204" pitchFamily="18" charset="0"/>
+                                  </a:rPr>
+                                  <m:t>0</m:t>
+                                </m:r>
+                              </m:sub>
+                            </m:sSub>
+                          </m:e>
+                        </m:d>
+                      </m:e>
+                      <m:sup>
+                        <m:r>
+                          <a:rPr lang="es-ES" sz="1200" i="1">
+                            <a:latin typeface="Cambria Math" panose="02040503050406030204" pitchFamily="18" charset="0"/>
+                          </a:rPr>
+                          <m:t>2</m:t>
+                        </m:r>
+                      </m:sup>
+                    </m:sSup>
+                  </m:oMath>
+                </a14:m>
                 <a:r>
-                  <a:rPr lang="en-US" b="1" dirty="0"/>
-                  <a:t>deep</a:t>
-                </a:r>
-                <a:r>
-                  <a:rPr lang="en-US" dirty="0"/>
-                  <a:t> waveguide</a:t>
+                  <a:rPr lang="es-CO" sz="1200" dirty="0"/>
+                  <a:t> </a:t>
                 </a:r>
               </a:p>
               <a:p>
                 <a:pPr algn="ctr"/>
-                <a:endParaRPr lang="en-US" dirty="0"/>
-              </a:p>
-              <a:p>
-                <a:pPr algn="ctr"/>
-                <a:r>
-                  <a:rPr lang="en-US" b="1" dirty="0"/>
-                  <a:t>neff_TE0 vs </a:t>
-                </a:r>
                 <a14:m>
                   <m:oMath xmlns:m="http://schemas.openxmlformats.org/officeDocument/2006/math">
+                    <m:sSub>
+                      <m:sSubPr>
+                        <m:ctrlPr>
+                          <a:rPr lang="es-CO" sz="1200" i="1">
+                            <a:latin typeface="Cambria Math" panose="02040503050406030204" pitchFamily="18" charset="0"/>
+                          </a:rPr>
+                        </m:ctrlPr>
+                      </m:sSubPr>
+                      <m:e>
+                        <m:r>
+                          <a:rPr lang="es-CO" sz="1200" i="1">
+                            <a:latin typeface="Cambria Math" panose="02040503050406030204" pitchFamily="18" charset="0"/>
+                          </a:rPr>
+                          <m:t>𝑛</m:t>
+                        </m:r>
+                      </m:e>
+                      <m:sub>
+                        <m:r>
+                          <a:rPr lang="es-CO" sz="1200" i="1">
+                            <a:latin typeface="Cambria Math" panose="02040503050406030204" pitchFamily="18" charset="0"/>
+                          </a:rPr>
+                          <m:t>𝑔</m:t>
+                        </m:r>
+                      </m:sub>
+                    </m:sSub>
                     <m:r>
-                      <a:rPr lang="es-ES" b="1" i="1" smtClean="0">
+                      <a:rPr lang="es-CO" sz="1200">
                         <a:latin typeface="Cambria Math" panose="02040503050406030204" pitchFamily="18" charset="0"/>
                       </a:rPr>
-                      <m:t>𝝀</m:t>
+                      <m:t>=</m:t>
                     </m:r>
                   </m:oMath>
                 </a14:m>
                 <a:r>
-                  <a:rPr lang="en-US" b="1" dirty="0"/>
-                  <a:t> </a:t>
-                </a:r>
-                <a:r>
-                  <a:rPr lang="en-US" dirty="0"/>
-                  <a:t>with the second-degree polynomial fit  </a:t>
+                  <a:rPr lang="es-CO" sz="1200" dirty="0"/>
+                  <a:t> 1,94</a:t>
                 </a:r>
               </a:p>
               <a:p>
                 <a:pPr algn="ctr"/>
-                <a:r>
-                  <a:rPr lang="en-US" dirty="0"/>
-                  <a:t>&amp; </a:t>
-                </a:r>
-                <a:r>
-                  <a:rPr lang="en-US" b="1" dirty="0"/>
-                  <a:t>neff_TM0 vs </a:t>
-                </a:r>
                 <a14:m>
-                  <m:oMath xmlns:m="http://schemas.openxmlformats.org/officeDocument/2006/math">
-                    <m:r>
-                      <a:rPr lang="es-ES" b="1" i="1">
-                        <a:latin typeface="Cambria Math" panose="02040503050406030204" pitchFamily="18" charset="0"/>
-                      </a:rPr>
-                      <m:t>𝝀</m:t>
-                    </m:r>
-                  </m:oMath>
+                  <m:oMathPara xmlns:m="http://schemas.openxmlformats.org/officeDocument/2006/math">
+                    <m:oMathParaPr>
+                      <m:jc m:val="centerGroup"/>
+                    </m:oMathParaPr>
+                    <m:oMath xmlns:m="http://schemas.openxmlformats.org/officeDocument/2006/math">
+                      <m:m>
+                        <m:mPr>
+                          <m:plcHide m:val="on"/>
+                          <m:mcs>
+                            <m:mc>
+                              <m:mcPr>
+                                <m:count m:val="1"/>
+                                <m:mcJc m:val="center"/>
+                              </m:mcPr>
+                            </m:mc>
+                          </m:mcs>
+                          <m:ctrlPr>
+                            <a:rPr lang="es-CO" sz="1200" dirty="0" smtClean="0">
+                              <a:latin typeface="Cambria Math" panose="02040503050406030204" pitchFamily="18" charset="0"/>
+                            </a:rPr>
+                          </m:ctrlPr>
+                        </m:mPr>
+                        <m:mr>
+                          <m:e>
+                            <m:r>
+                              <m:rPr>
+                                <m:sty m:val="p"/>
+                              </m:rPr>
+                              <a:rPr lang="es-MX" sz="1200" b="0" i="0" dirty="0" smtClean="0">
+                                <a:latin typeface="Cambria Math" panose="02040503050406030204" pitchFamily="18" charset="0"/>
+                              </a:rPr>
+                              <m:t>D</m:t>
+                            </m:r>
+                            <m:r>
+                              <a:rPr lang="es-MX" sz="1200" b="0" i="0" dirty="0" smtClean="0">
+                                <a:latin typeface="Cambria Math" panose="02040503050406030204" pitchFamily="18" charset="0"/>
+                              </a:rPr>
+                              <m:t>=−</m:t>
+                            </m:r>
+                            <m:r>
+                              <a:rPr lang="es-CO" sz="1200" i="0" dirty="0" smtClean="0">
+                                <a:latin typeface="Cambria Math" panose="02040503050406030204" pitchFamily="18" charset="0"/>
+                              </a:rPr>
+                              <m:t>1</m:t>
+                            </m:r>
+                            <m:r>
+                              <a:rPr lang="es-CO" sz="1200" i="0" dirty="0" smtClean="0">
+                                <a:latin typeface="Cambria Math" panose="02040503050406030204" pitchFamily="18" charset="0"/>
+                              </a:rPr>
+                              <m:t>.</m:t>
+                            </m:r>
+                            <m:r>
+                              <a:rPr lang="es-CO" sz="1200" i="0" dirty="0" smtClean="0">
+                                <a:latin typeface="Cambria Math" panose="02040503050406030204" pitchFamily="18" charset="0"/>
+                              </a:rPr>
+                              <m:t>01</m:t>
+                            </m:r>
+                            <m:r>
+                              <a:rPr lang="es-CO" sz="1200" i="0" dirty="0" smtClean="0">
+                                <a:latin typeface="Cambria Math" panose="02040503050406030204" pitchFamily="18" charset="0"/>
+                              </a:rPr>
+                              <m:t>×</m:t>
+                            </m:r>
+                            <m:sSup>
+                              <m:sSupPr>
+                                <m:ctrlPr>
+                                  <a:rPr lang="es-CO" sz="1200" i="1" dirty="0" smtClean="0">
+                                    <a:latin typeface="Cambria Math" panose="02040503050406030204" pitchFamily="18" charset="0"/>
+                                  </a:rPr>
+                                </m:ctrlPr>
+                              </m:sSupPr>
+                              <m:e>
+                                <m:r>
+                                  <a:rPr lang="es-CO" sz="1200" i="0" dirty="0" smtClean="0">
+                                    <a:latin typeface="Cambria Math" panose="02040503050406030204" pitchFamily="18" charset="0"/>
+                                  </a:rPr>
+                                  <m:t>10</m:t>
+                                </m:r>
+                              </m:e>
+                              <m:sup>
+                                <m:r>
+                                  <a:rPr lang="es-CO" sz="1200" i="0" dirty="0" smtClean="0">
+                                    <a:latin typeface="Cambria Math" panose="02040503050406030204" pitchFamily="18" charset="0"/>
+                                  </a:rPr>
+                                  <m:t>−</m:t>
+                                </m:r>
+                                <m:r>
+                                  <a:rPr lang="es-CO" sz="1200" i="0" dirty="0" smtClean="0">
+                                    <a:latin typeface="Cambria Math" panose="02040503050406030204" pitchFamily="18" charset="0"/>
+                                  </a:rPr>
+                                  <m:t>9</m:t>
+                                </m:r>
+                              </m:sup>
+                            </m:sSup>
+                          </m:e>
+                        </m:mr>
+                      </m:m>
+                    </m:oMath>
+                  </m:oMathPara>
                 </a14:m>
-                <a:r>
-                  <a:rPr lang="en-US" b="1" dirty="0"/>
-                  <a:t> </a:t>
-                </a:r>
-                <a:r>
-                  <a:rPr lang="en-US" dirty="0"/>
-                  <a:t>with the second-degree polynomial fit </a:t>
-                </a:r>
+                <a:endParaRPr lang="es-CO" sz="1200" dirty="0"/>
               </a:p>
             </p:txBody>
           </p:sp>
         </mc:Choice>
-        <mc:Fallback xmlns="">
+        <mc:Fallback>
           <p:sp>
             <p:nvSpPr>
-              <p:cNvPr id="9" name="CuadroTexto 8">
+              <p:cNvPr id="4" name="CuadroTexto 9">
                 <a:extLst>
                   <a:ext uri="{FF2B5EF4-FFF2-40B4-BE49-F238E27FC236}">
-                    <a16:creationId xmlns:a16="http://schemas.microsoft.com/office/drawing/2014/main" id="{C59B6428-4395-242F-54D8-A9FC610F2D7A}"/>
+                    <a16:creationId xmlns:a16="http://schemas.microsoft.com/office/drawing/2014/main" id="{9BFD227C-0C00-4526-20C1-AF41442D36AE}"/>
                   </a:ext>
                 </a:extLst>
               </p:cNvPr>
@@ -7368,25 +11508,30 @@
             </p:nvSpPr>
             <p:spPr>
               <a:xfrm>
-                <a:off x="609440" y="2709096"/>
-                <a:ext cx="5486559" cy="1200329"/>
+                <a:off x="608013" y="5419470"/>
+                <a:ext cx="5486560" cy="679930"/>
               </a:xfrm>
               <a:prstGeom prst="rect">
                 <a:avLst/>
               </a:prstGeom>
               <a:blipFill>
-                <a:blip r:embed="rId7"/>
+                <a:blip r:embed="rId8"/>
                 <a:stretch>
-                  <a:fillRect t="-2538" r="-556" b="-7107"/>
+                  <a:fillRect/>
                 </a:stretch>
               </a:blipFill>
+              <a:ln w="28575">
+                <a:solidFill>
+                  <a:srgbClr val="E0700D"/>
+                </a:solidFill>
+              </a:ln>
             </p:spPr>
             <p:txBody>
               <a:bodyPr/>
               <a:lstStyle/>
               <a:p>
                 <a:r>
-                  <a:rPr lang="es-ES">
+                  <a:rPr lang="es-CO">
                     <a:noFill/>
                   </a:rPr>
                   <a:t> </a:t>
@@ -7396,14 +11541,14 @@
           </p:sp>
         </mc:Fallback>
       </mc:AlternateContent>
-      <mc:AlternateContent xmlns:mc="http://schemas.openxmlformats.org/markup-compatibility/2006" xmlns:a14="http://schemas.microsoft.com/office/drawing/2010/main">
-        <mc:Choice Requires="a14">
+      <mc:AlternateContent xmlns:mc="http://schemas.openxmlformats.org/markup-compatibility/2006">
+        <mc:Choice xmlns:a14="http://schemas.microsoft.com/office/drawing/2010/main" Requires="a14">
           <p:sp>
             <p:nvSpPr>
-              <p:cNvPr id="10" name="CuadroTexto 9">
+              <p:cNvPr id="14" name="CuadroTexto 9">
                 <a:extLst>
                   <a:ext uri="{FF2B5EF4-FFF2-40B4-BE49-F238E27FC236}">
-                    <a16:creationId xmlns:a16="http://schemas.microsoft.com/office/drawing/2014/main" id="{9320AF78-1FC6-19F4-8E0B-8A414F20C6DE}"/>
+                    <a16:creationId xmlns:a16="http://schemas.microsoft.com/office/drawing/2014/main" id="{E6CC9CC3-F4F9-1E0A-BD80-34581AECA2DA}"/>
                   </a:ext>
                 </a:extLst>
               </p:cNvPr>
@@ -7412,13 +11557,22 @@
             </p:nvSpPr>
             <p:spPr>
               <a:xfrm>
-                <a:off x="6321421" y="2709096"/>
-                <a:ext cx="5486559" cy="1200329"/>
+                <a:off x="6313803" y="5419470"/>
+                <a:ext cx="5486560" cy="679930"/>
               </a:xfrm>
               <a:prstGeom prst="rect">
                 <a:avLst/>
               </a:prstGeom>
-              <a:noFill/>
+              <a:solidFill>
+                <a:schemeClr val="bg1">
+                  <a:lumMod val="95000"/>
+                </a:schemeClr>
+              </a:solidFill>
+              <a:ln w="28575">
+                <a:solidFill>
+                  <a:srgbClr val="E0700D"/>
+                </a:solidFill>
+              </a:ln>
             </p:spPr>
             <p:txBody>
               <a:bodyPr wrap="square" rtlCol="0">
@@ -7427,83 +11581,433 @@
               <a:lstStyle/>
               <a:p>
                 <a:pPr algn="ctr"/>
-                <a:r>
-                  <a:rPr lang="en-US" b="1" dirty="0"/>
-                  <a:t>shallow</a:t>
-                </a:r>
-                <a:r>
-                  <a:rPr lang="en-US" dirty="0"/>
-                  <a:t> waveguide</a:t>
-                </a:r>
+                <a14:m>
+                  <m:oMathPara xmlns:m="http://schemas.openxmlformats.org/officeDocument/2006/math">
+                    <m:oMathParaPr>
+                      <m:jc m:val="centerGroup"/>
+                    </m:oMathParaPr>
+                    <m:oMath xmlns:m="http://schemas.openxmlformats.org/officeDocument/2006/math">
+                      <m:sSub>
+                        <m:sSubPr>
+                          <m:ctrlPr>
+                            <a:rPr lang="es-ES" sz="1200" i="1">
+                              <a:latin typeface="Cambria Math" panose="02040503050406030204" pitchFamily="18" charset="0"/>
+                            </a:rPr>
+                          </m:ctrlPr>
+                        </m:sSubPr>
+                        <m:e>
+                          <m:r>
+                            <a:rPr lang="es-ES" sz="1200" i="1">
+                              <a:latin typeface="Cambria Math" panose="02040503050406030204" pitchFamily="18" charset="0"/>
+                            </a:rPr>
+                            <m:t>𝑛</m:t>
+                          </m:r>
+                        </m:e>
+                        <m:sub>
+                          <m:r>
+                            <a:rPr lang="es-ES" sz="1200" i="1">
+                              <a:latin typeface="Cambria Math" panose="02040503050406030204" pitchFamily="18" charset="0"/>
+                            </a:rPr>
+                            <m:t>𝑒𝑓𝑓</m:t>
+                          </m:r>
+                        </m:sub>
+                      </m:sSub>
+                      <m:d>
+                        <m:dPr>
+                          <m:ctrlPr>
+                            <a:rPr lang="es-ES" sz="1200" i="1">
+                              <a:latin typeface="Cambria Math" panose="02040503050406030204" pitchFamily="18" charset="0"/>
+                            </a:rPr>
+                          </m:ctrlPr>
+                        </m:dPr>
+                        <m:e>
+                          <m:r>
+                            <a:rPr lang="es-ES" sz="1200" i="1">
+                              <a:latin typeface="Cambria Math" panose="02040503050406030204" pitchFamily="18" charset="0"/>
+                            </a:rPr>
+                            <m:t>𝜆</m:t>
+                          </m:r>
+                        </m:e>
+                      </m:d>
+                      <m:r>
+                        <a:rPr lang="es-ES" sz="1200" i="1">
+                          <a:latin typeface="Cambria Math" panose="02040503050406030204" pitchFamily="18" charset="0"/>
+                        </a:rPr>
+                        <m:t>=</m:t>
+                      </m:r>
+                      <m:r>
+                        <a:rPr lang="es-MX" sz="1200" i="1">
+                          <a:latin typeface="Cambria Math" panose="02040503050406030204" pitchFamily="18" charset="0"/>
+                        </a:rPr>
+                        <m:t>1</m:t>
+                      </m:r>
+                      <m:r>
+                        <a:rPr lang="es-MX" sz="1200" i="1">
+                          <a:latin typeface="Cambria Math" panose="02040503050406030204" pitchFamily="18" charset="0"/>
+                        </a:rPr>
+                        <m:t>,</m:t>
+                      </m:r>
+                      <m:r>
+                        <a:rPr lang="es-MX" sz="1200" b="0" i="1" smtClean="0">
+                          <a:latin typeface="Cambria Math" panose="02040503050406030204" pitchFamily="18" charset="0"/>
+                        </a:rPr>
+                        <m:t>53</m:t>
+                      </m:r>
+                      <m:r>
+                        <a:rPr lang="es-MX" sz="1200" i="1">
+                          <a:latin typeface="Cambria Math" panose="02040503050406030204" pitchFamily="18" charset="0"/>
+                        </a:rPr>
+                        <m:t>−</m:t>
+                      </m:r>
+                      <m:r>
+                        <a:rPr lang="es-MX" sz="1200" i="1">
+                          <a:latin typeface="Cambria Math" panose="02040503050406030204" pitchFamily="18" charset="0"/>
+                        </a:rPr>
+                        <m:t>0</m:t>
+                      </m:r>
+                      <m:r>
+                        <a:rPr lang="es-MX" sz="1200" i="1">
+                          <a:latin typeface="Cambria Math" panose="02040503050406030204" pitchFamily="18" charset="0"/>
+                        </a:rPr>
+                        <m:t>,</m:t>
+                      </m:r>
+                      <m:r>
+                        <a:rPr lang="es-MX" sz="1200" b="0" i="1" smtClean="0">
+                          <a:latin typeface="Cambria Math" panose="02040503050406030204" pitchFamily="18" charset="0"/>
+                        </a:rPr>
+                        <m:t>16</m:t>
+                      </m:r>
+                      <m:d>
+                        <m:dPr>
+                          <m:ctrlPr>
+                            <a:rPr lang="es-ES" sz="1200" i="1">
+                              <a:latin typeface="Cambria Math" panose="02040503050406030204" pitchFamily="18" charset="0"/>
+                            </a:rPr>
+                          </m:ctrlPr>
+                        </m:dPr>
+                        <m:e>
+                          <m:r>
+                            <a:rPr lang="es-ES" sz="1200" i="1">
+                              <a:latin typeface="Cambria Math" panose="02040503050406030204" pitchFamily="18" charset="0"/>
+                            </a:rPr>
+                            <m:t>𝜆</m:t>
+                          </m:r>
+                          <m:r>
+                            <a:rPr lang="es-ES" sz="1200" i="1">
+                              <a:latin typeface="Cambria Math" panose="02040503050406030204" pitchFamily="18" charset="0"/>
+                            </a:rPr>
+                            <m:t>−</m:t>
+                          </m:r>
+                          <m:sSub>
+                            <m:sSubPr>
+                              <m:ctrlPr>
+                                <a:rPr lang="es-ES" sz="1200" i="1">
+                                  <a:latin typeface="Cambria Math" panose="02040503050406030204" pitchFamily="18" charset="0"/>
+                                </a:rPr>
+                              </m:ctrlPr>
+                            </m:sSubPr>
+                            <m:e>
+                              <m:r>
+                                <a:rPr lang="es-ES" sz="1200" i="1">
+                                  <a:latin typeface="Cambria Math" panose="02040503050406030204" pitchFamily="18" charset="0"/>
+                                </a:rPr>
+                                <m:t>𝜆</m:t>
+                              </m:r>
+                            </m:e>
+                            <m:sub>
+                              <m:r>
+                                <a:rPr lang="es-ES" sz="1200" i="1">
+                                  <a:latin typeface="Cambria Math" panose="02040503050406030204" pitchFamily="18" charset="0"/>
+                                </a:rPr>
+                                <m:t>0</m:t>
+                              </m:r>
+                            </m:sub>
+                          </m:sSub>
+                        </m:e>
+                      </m:d>
+                      <m:r>
+                        <a:rPr lang="es-ES" sz="1200" i="1">
+                          <a:latin typeface="Cambria Math" panose="02040503050406030204" pitchFamily="18" charset="0"/>
+                        </a:rPr>
+                        <m:t>+</m:t>
+                      </m:r>
+                      <m:r>
+                        <a:rPr lang="es-MX" sz="1200" i="1">
+                          <a:latin typeface="Cambria Math" panose="02040503050406030204" pitchFamily="18" charset="0"/>
+                        </a:rPr>
+                        <m:t>0</m:t>
+                      </m:r>
+                      <m:r>
+                        <a:rPr lang="es-MX" sz="1200" i="1">
+                          <a:latin typeface="Cambria Math" panose="02040503050406030204" pitchFamily="18" charset="0"/>
+                        </a:rPr>
+                        <m:t>,</m:t>
+                      </m:r>
+                      <m:r>
+                        <a:rPr lang="es-MX" sz="1200" i="1">
+                          <a:latin typeface="Cambria Math" panose="02040503050406030204" pitchFamily="18" charset="0"/>
+                        </a:rPr>
+                        <m:t>15</m:t>
+                      </m:r>
+                      <m:sSup>
+                        <m:sSupPr>
+                          <m:ctrlPr>
+                            <a:rPr lang="es-ES" sz="1200" i="1">
+                              <a:latin typeface="Cambria Math" panose="02040503050406030204" pitchFamily="18" charset="0"/>
+                            </a:rPr>
+                          </m:ctrlPr>
+                        </m:sSupPr>
+                        <m:e>
+                          <m:d>
+                            <m:dPr>
+                              <m:ctrlPr>
+                                <a:rPr lang="es-ES" sz="1200" i="1">
+                                  <a:latin typeface="Cambria Math" panose="02040503050406030204" pitchFamily="18" charset="0"/>
+                                </a:rPr>
+                              </m:ctrlPr>
+                            </m:dPr>
+                            <m:e>
+                              <m:r>
+                                <a:rPr lang="es-ES" sz="1200" i="1">
+                                  <a:latin typeface="Cambria Math" panose="02040503050406030204" pitchFamily="18" charset="0"/>
+                                </a:rPr>
+                                <m:t>𝜆</m:t>
+                              </m:r>
+                              <m:r>
+                                <a:rPr lang="es-ES" sz="1200" i="1">
+                                  <a:latin typeface="Cambria Math" panose="02040503050406030204" pitchFamily="18" charset="0"/>
+                                </a:rPr>
+                                <m:t>−</m:t>
+                              </m:r>
+                              <m:sSub>
+                                <m:sSubPr>
+                                  <m:ctrlPr>
+                                    <a:rPr lang="es-ES" sz="1200" i="1">
+                                      <a:latin typeface="Cambria Math" panose="02040503050406030204" pitchFamily="18" charset="0"/>
+                                    </a:rPr>
+                                  </m:ctrlPr>
+                                </m:sSubPr>
+                                <m:e>
+                                  <m:r>
+                                    <a:rPr lang="es-ES" sz="1200" i="1">
+                                      <a:latin typeface="Cambria Math" panose="02040503050406030204" pitchFamily="18" charset="0"/>
+                                    </a:rPr>
+                                    <m:t>𝜆</m:t>
+                                  </m:r>
+                                </m:e>
+                                <m:sub>
+                                  <m:r>
+                                    <a:rPr lang="es-ES" sz="1200" i="1">
+                                      <a:latin typeface="Cambria Math" panose="02040503050406030204" pitchFamily="18" charset="0"/>
+                                    </a:rPr>
+                                    <m:t>0</m:t>
+                                  </m:r>
+                                </m:sub>
+                              </m:sSub>
+                            </m:e>
+                          </m:d>
+                        </m:e>
+                        <m:sup>
+                          <m:r>
+                            <a:rPr lang="es-ES" sz="1200" i="1">
+                              <a:latin typeface="Cambria Math" panose="02040503050406030204" pitchFamily="18" charset="0"/>
+                            </a:rPr>
+                            <m:t>2</m:t>
+                          </m:r>
+                        </m:sup>
+                      </m:sSup>
+                      <m:r>
+                        <m:rPr>
+                          <m:nor/>
+                        </m:rPr>
+                        <a:rPr lang="es-CO" sz="1200" dirty="0"/>
+                        <m:t> </m:t>
+                      </m:r>
+                    </m:oMath>
+                  </m:oMathPara>
+                </a14:m>
+                <a:endParaRPr lang="es-CO" sz="1200" dirty="0"/>
               </a:p>
               <a:p>
                 <a:pPr algn="ctr"/>
-                <a:endParaRPr lang="en-US" dirty="0"/>
+                <a14:m>
+                  <m:oMathPara xmlns:m="http://schemas.openxmlformats.org/officeDocument/2006/math">
+                    <m:oMathParaPr>
+                      <m:jc m:val="centerGroup"/>
+                    </m:oMathParaPr>
+                    <m:oMath xmlns:m="http://schemas.openxmlformats.org/officeDocument/2006/math">
+                      <m:sSub>
+                        <m:sSubPr>
+                          <m:ctrlPr>
+                            <a:rPr lang="es-CO" sz="1200" i="1">
+                              <a:latin typeface="Cambria Math" panose="02040503050406030204" pitchFamily="18" charset="0"/>
+                            </a:rPr>
+                          </m:ctrlPr>
+                        </m:sSubPr>
+                        <m:e>
+                          <m:r>
+                            <a:rPr lang="es-CO" sz="1200" i="1">
+                              <a:latin typeface="Cambria Math" panose="02040503050406030204" pitchFamily="18" charset="0"/>
+                            </a:rPr>
+                            <m:t>𝑛</m:t>
+                          </m:r>
+                        </m:e>
+                        <m:sub>
+                          <m:r>
+                            <a:rPr lang="es-CO" sz="1200" i="1">
+                              <a:latin typeface="Cambria Math" panose="02040503050406030204" pitchFamily="18" charset="0"/>
+                            </a:rPr>
+                            <m:t>𝑔</m:t>
+                          </m:r>
+                        </m:sub>
+                      </m:sSub>
+                      <m:r>
+                        <a:rPr lang="es-CO" sz="1200">
+                          <a:latin typeface="Cambria Math" panose="02040503050406030204" pitchFamily="18" charset="0"/>
+                        </a:rPr>
+                        <m:t>=</m:t>
+                      </m:r>
+                      <m:r>
+                        <m:rPr>
+                          <m:nor/>
+                        </m:rPr>
+                        <a:rPr lang="es-CO" sz="1200" dirty="0"/>
+                        <m:t> 1</m:t>
+                      </m:r>
+                      <m:r>
+                        <m:rPr>
+                          <m:nor/>
+                        </m:rPr>
+                        <a:rPr lang="es-CO" sz="1200" dirty="0"/>
+                        <m:t>,</m:t>
+                      </m:r>
+                      <m:r>
+                        <m:rPr>
+                          <m:nor/>
+                        </m:rPr>
+                        <a:rPr lang="es-MX" sz="1200" b="0" i="0" dirty="0" smtClean="0"/>
+                        <m:t>77</m:t>
+                      </m:r>
+                    </m:oMath>
+                  </m:oMathPara>
+                </a14:m>
+                <a:endParaRPr lang="es-CO" sz="1200" dirty="0"/>
               </a:p>
               <a:p>
                 <a:pPr algn="ctr"/>
-                <a:r>
-                  <a:rPr lang="en-US" b="1" dirty="0"/>
-                  <a:t>neff_TE0 vs </a:t>
-                </a:r>
                 <a14:m>
-                  <m:oMath xmlns:m="http://schemas.openxmlformats.org/officeDocument/2006/math">
-                    <m:r>
-                      <a:rPr lang="es-ES" b="1" i="1">
-                        <a:latin typeface="Cambria Math" panose="02040503050406030204" pitchFamily="18" charset="0"/>
-                      </a:rPr>
-                      <m:t>𝝀</m:t>
-                    </m:r>
-                  </m:oMath>
+                  <m:oMathPara xmlns:m="http://schemas.openxmlformats.org/officeDocument/2006/math">
+                    <m:oMathParaPr>
+                      <m:jc m:val="centerGroup"/>
+                    </m:oMathParaPr>
+                    <m:oMath xmlns:m="http://schemas.openxmlformats.org/officeDocument/2006/math">
+                      <m:m>
+                        <m:mPr>
+                          <m:plcHide m:val="on"/>
+                          <m:mcs>
+                            <m:mc>
+                              <m:mcPr>
+                                <m:count m:val="1"/>
+                                <m:mcJc m:val="center"/>
+                              </m:mcPr>
+                            </m:mc>
+                          </m:mcs>
+                          <m:ctrlPr>
+                            <a:rPr lang="es-CO" sz="1200" i="1" dirty="0">
+                              <a:latin typeface="Cambria Math" panose="02040503050406030204" pitchFamily="18" charset="0"/>
+                            </a:rPr>
+                          </m:ctrlPr>
+                        </m:mPr>
+                        <m:mr>
+                          <m:e>
+                            <m:r>
+                              <m:rPr>
+                                <m:sty m:val="p"/>
+                              </m:rPr>
+                              <a:rPr lang="es-MX" sz="1200" dirty="0">
+                                <a:latin typeface="Cambria Math" panose="02040503050406030204" pitchFamily="18" charset="0"/>
+                              </a:rPr>
+                              <m:t>D</m:t>
+                            </m:r>
+                            <m:r>
+                              <a:rPr lang="es-MX" sz="1200" dirty="0">
+                                <a:latin typeface="Cambria Math" panose="02040503050406030204" pitchFamily="18" charset="0"/>
+                              </a:rPr>
+                              <m:t>=−</m:t>
+                            </m:r>
+                            <m:r>
+                              <a:rPr lang="es-MX" sz="1200" dirty="0">
+                                <a:latin typeface="Cambria Math" panose="02040503050406030204" pitchFamily="18" charset="0"/>
+                              </a:rPr>
+                              <m:t>1</m:t>
+                            </m:r>
+                            <m:r>
+                              <a:rPr lang="es-CO" sz="1200" dirty="0">
+                                <a:latin typeface="Cambria Math" panose="02040503050406030204" pitchFamily="18" charset="0"/>
+                              </a:rPr>
+                              <m:t>.</m:t>
+                            </m:r>
+                            <m:r>
+                              <a:rPr lang="es-MX" sz="1200" b="0" i="0" dirty="0" smtClean="0">
+                                <a:latin typeface="Cambria Math" panose="02040503050406030204" pitchFamily="18" charset="0"/>
+                              </a:rPr>
+                              <m:t>59</m:t>
+                            </m:r>
+                            <m:r>
+                              <a:rPr lang="es-CO" sz="1200" dirty="0">
+                                <a:latin typeface="Cambria Math" panose="02040503050406030204" pitchFamily="18" charset="0"/>
+                              </a:rPr>
+                              <m:t>×</m:t>
+                            </m:r>
+                            <m:sSup>
+                              <m:sSupPr>
+                                <m:ctrlPr>
+                                  <a:rPr lang="es-CO" sz="1200" i="1" dirty="0">
+                                    <a:latin typeface="Cambria Math" panose="02040503050406030204" pitchFamily="18" charset="0"/>
+                                  </a:rPr>
+                                </m:ctrlPr>
+                              </m:sSupPr>
+                              <m:e>
+                                <m:r>
+                                  <a:rPr lang="es-CO" sz="1200" dirty="0">
+                                    <a:latin typeface="Cambria Math" panose="02040503050406030204" pitchFamily="18" charset="0"/>
+                                  </a:rPr>
+                                  <m:t>10</m:t>
+                                </m:r>
+                              </m:e>
+                              <m:sup>
+                                <m:r>
+                                  <a:rPr lang="es-CO" sz="1200" dirty="0">
+                                    <a:latin typeface="Cambria Math" panose="02040503050406030204" pitchFamily="18" charset="0"/>
+                                  </a:rPr>
+                                  <m:t>−</m:t>
+                                </m:r>
+                                <m:r>
+                                  <a:rPr lang="es-CO" sz="1200" dirty="0">
+                                    <a:latin typeface="Cambria Math" panose="02040503050406030204" pitchFamily="18" charset="0"/>
+                                  </a:rPr>
+                                  <m:t>9</m:t>
+                                </m:r>
+                              </m:sup>
+                            </m:sSup>
+                          </m:e>
+                        </m:mr>
+                      </m:m>
+                    </m:oMath>
+                  </m:oMathPara>
                 </a14:m>
-                <a:r>
-                  <a:rPr lang="en-US" b="1" dirty="0"/>
-                  <a:t> </a:t>
-                </a:r>
-                <a:r>
-                  <a:rPr lang="en-US" dirty="0"/>
-                  <a:t>with the second-degree polynomial fit  </a:t>
-                </a:r>
-              </a:p>
-              <a:p>
-                <a:pPr algn="ctr"/>
-                <a:r>
-                  <a:rPr lang="en-US" dirty="0"/>
-                  <a:t>&amp; </a:t>
-                </a:r>
-                <a:r>
-                  <a:rPr lang="en-US" b="1" dirty="0"/>
-                  <a:t>neff_TM0 vs </a:t>
-                </a:r>
-                <a14:m>
-                  <m:oMath xmlns:m="http://schemas.openxmlformats.org/officeDocument/2006/math">
-                    <m:r>
-                      <a:rPr lang="es-ES" b="1" i="1">
-                        <a:latin typeface="Cambria Math" panose="02040503050406030204" pitchFamily="18" charset="0"/>
-                      </a:rPr>
-                      <m:t>𝝀</m:t>
-                    </m:r>
-                  </m:oMath>
-                </a14:m>
-                <a:r>
-                  <a:rPr lang="en-US" b="1" dirty="0"/>
-                  <a:t> </a:t>
-                </a:r>
-                <a:r>
-                  <a:rPr lang="en-US" dirty="0"/>
-                  <a:t>with the second-degree polynomial fit </a:t>
-                </a:r>
+                <a:endParaRPr lang="es-CO" sz="1200" dirty="0"/>
               </a:p>
             </p:txBody>
           </p:sp>
         </mc:Choice>
-        <mc:Fallback xmlns="">
+        <mc:Fallback>
           <p:sp>
             <p:nvSpPr>
-              <p:cNvPr id="10" name="CuadroTexto 9">
+              <p:cNvPr id="14" name="CuadroTexto 9">
                 <a:extLst>
                   <a:ext uri="{FF2B5EF4-FFF2-40B4-BE49-F238E27FC236}">
-                    <a16:creationId xmlns:a16="http://schemas.microsoft.com/office/drawing/2014/main" id="{9320AF78-1FC6-19F4-8E0B-8A414F20C6DE}"/>
+                    <a16:creationId xmlns:a16="http://schemas.microsoft.com/office/drawing/2014/main" id="{E6CC9CC3-F4F9-1E0A-BD80-34581AECA2DA}"/>
                   </a:ext>
                 </a:extLst>
               </p:cNvPr>
@@ -7514,25 +12018,30 @@
             </p:nvSpPr>
             <p:spPr>
               <a:xfrm>
-                <a:off x="6321421" y="2709096"/>
-                <a:ext cx="5486559" cy="1200329"/>
+                <a:off x="6313803" y="5419470"/>
+                <a:ext cx="5486560" cy="679930"/>
               </a:xfrm>
               <a:prstGeom prst="rect">
                 <a:avLst/>
               </a:prstGeom>
               <a:blipFill>
-                <a:blip r:embed="rId8"/>
+                <a:blip r:embed="rId9"/>
                 <a:stretch>
-                  <a:fillRect t="-2538" r="-556" b="-7107"/>
+                  <a:fillRect/>
                 </a:stretch>
               </a:blipFill>
+              <a:ln w="28575">
+                <a:solidFill>
+                  <a:srgbClr val="E0700D"/>
+                </a:solidFill>
+              </a:ln>
             </p:spPr>
             <p:txBody>
               <a:bodyPr/>
               <a:lstStyle/>
               <a:p>
                 <a:r>
-                  <a:rPr lang="es-ES">
+                  <a:rPr lang="es-CO">
                     <a:noFill/>
                   </a:rPr>
                   <a:t> </a:t>
@@ -7542,12 +12051,522 @@
           </p:sp>
         </mc:Fallback>
       </mc:AlternateContent>
+    </p:spTree>
+    <p:extLst>
+      <p:ext uri="{BB962C8B-B14F-4D97-AF65-F5344CB8AC3E}">
+        <p14:creationId xmlns:p14="http://schemas.microsoft.com/office/powerpoint/2010/main" val="236054401"/>
+      </p:ext>
+    </p:extLst>
+  </p:cSld>
+  <p:clrMapOvr>
+    <a:masterClrMapping/>
+  </p:clrMapOvr>
+</p:sld>
+</file>
+
+<file path=ppt/slides/slide7.xml><?xml version="1.0" encoding="utf-8"?>
+<p:sld xmlns:a="http://schemas.openxmlformats.org/drawingml/2006/main" xmlns:r="http://schemas.openxmlformats.org/officeDocument/2006/relationships" xmlns:p="http://schemas.openxmlformats.org/presentationml/2006/main">
+  <p:cSld>
+    <p:spTree>
+      <p:nvGrpSpPr>
+        <p:cNvPr id="1" name="">
+          <a:extLst>
+            <a:ext uri="{FF2B5EF4-FFF2-40B4-BE49-F238E27FC236}">
+              <a16:creationId xmlns:a16="http://schemas.microsoft.com/office/drawing/2014/main" id="{6B621DA4-5661-22C4-96E6-40B79652641F}"/>
+            </a:ext>
+          </a:extLst>
+        </p:cNvPr>
+        <p:cNvGrpSpPr/>
+        <p:nvPr/>
+      </p:nvGrpSpPr>
+      <p:grpSpPr>
+        <a:xfrm>
+          <a:off x="0" y="0"/>
+          <a:ext cx="0" cy="0"/>
+          <a:chOff x="0" y="0"/>
+          <a:chExt cx="0" cy="0"/>
+        </a:xfrm>
+      </p:grpSpPr>
+      <mc:AlternateContent xmlns:mc="http://schemas.openxmlformats.org/markup-compatibility/2006">
+        <mc:Choice xmlns:a14="http://schemas.microsoft.com/office/drawing/2010/main" Requires="a14">
+          <p:sp>
+            <p:nvSpPr>
+              <p:cNvPr id="16" name="object 16">
+                <a:extLst>
+                  <a:ext uri="{FF2B5EF4-FFF2-40B4-BE49-F238E27FC236}">
+                    <a16:creationId xmlns:a16="http://schemas.microsoft.com/office/drawing/2014/main" id="{3C3470C6-55CF-956B-5D5C-065F21239785}"/>
+                  </a:ext>
+                </a:extLst>
+              </p:cNvPr>
+              <p:cNvSpPr txBox="1">
+                <a:spLocks noGrp="1"/>
+              </p:cNvSpPr>
+              <p:nvPr>
+                <p:ph type="title"/>
+              </p:nvPr>
+            </p:nvSpPr>
+            <p:spPr>
+              <a:xfrm>
+                <a:off x="685800" y="408883"/>
+                <a:ext cx="10994410" cy="1071255"/>
+              </a:xfrm>
+              <a:prstGeom prst="rect">
+                <a:avLst/>
+              </a:prstGeom>
+            </p:spPr>
+            <p:txBody>
+              <a:bodyPr vert="horz" wrap="square" lIns="0" tIns="12700" rIns="0" bIns="0" rtlCol="0">
+                <a:spAutoFit/>
+              </a:bodyPr>
+              <a:lstStyle/>
+              <a:p>
+                <a:pPr marL="12700">
+                  <a:lnSpc>
+                    <a:spcPct val="100000"/>
+                  </a:lnSpc>
+                  <a:spcBef>
+                    <a:spcPts val="100"/>
+                  </a:spcBef>
+                </a:pPr>
+                <a:r>
+                  <a:rPr lang="en-US" sz="2500" dirty="0"/>
+                  <a:t>Learning outcome #3 – Waveguide compact model</a:t>
+                </a:r>
+                <a:br>
+                  <a:rPr lang="en-US" sz="2500" spc="-5" dirty="0">
+                    <a:latin typeface="+mj-lt"/>
+                    <a:cs typeface="Lucida Sans"/>
+                  </a:rPr>
+                </a:br>
+                <a:r>
+                  <a:rPr lang="en-US" b="0" dirty="0"/>
+                  <a:t>Let’s model the waveguide using a second order polynomial: </a:t>
+                </a:r>
+                <a:br>
+                  <a:rPr lang="en-US" b="0" dirty="0"/>
+                </a:br>
+                <a14:m>
+                  <m:oMathPara xmlns:m="http://schemas.openxmlformats.org/officeDocument/2006/math">
+                    <m:oMathParaPr>
+                      <m:jc m:val="centerGroup"/>
+                    </m:oMathParaPr>
+                    <m:oMath xmlns:m="http://schemas.openxmlformats.org/officeDocument/2006/math">
+                      <m:sSub>
+                        <m:sSubPr>
+                          <m:ctrlPr>
+                            <a:rPr lang="es-ES" b="0" i="1" smtClean="0">
+                              <a:latin typeface="Cambria Math" panose="02040503050406030204" pitchFamily="18" charset="0"/>
+                            </a:rPr>
+                          </m:ctrlPr>
+                        </m:sSubPr>
+                        <m:e>
+                          <m:r>
+                            <a:rPr lang="es-ES" b="0" i="1" smtClean="0">
+                              <a:latin typeface="Cambria Math" panose="02040503050406030204" pitchFamily="18" charset="0"/>
+                            </a:rPr>
+                            <m:t>𝑛</m:t>
+                          </m:r>
+                        </m:e>
+                        <m:sub>
+                          <m:r>
+                            <a:rPr lang="es-ES" b="0" i="1" smtClean="0">
+                              <a:latin typeface="Cambria Math" panose="02040503050406030204" pitchFamily="18" charset="0"/>
+                            </a:rPr>
+                            <m:t>𝑒𝑓𝑓</m:t>
+                          </m:r>
+                        </m:sub>
+                      </m:sSub>
+                      <m:d>
+                        <m:dPr>
+                          <m:ctrlPr>
+                            <a:rPr lang="es-ES" b="0" i="1" smtClean="0">
+                              <a:latin typeface="Cambria Math" panose="02040503050406030204" pitchFamily="18" charset="0"/>
+                            </a:rPr>
+                          </m:ctrlPr>
+                        </m:dPr>
+                        <m:e>
+                          <m:r>
+                            <a:rPr lang="es-ES" b="0" i="1" smtClean="0">
+                              <a:latin typeface="Cambria Math" panose="02040503050406030204" pitchFamily="18" charset="0"/>
+                            </a:rPr>
+                            <m:t>𝜆</m:t>
+                          </m:r>
+                        </m:e>
+                      </m:d>
+                      <m:r>
+                        <a:rPr lang="es-ES" b="0" i="1" smtClean="0">
+                          <a:latin typeface="Cambria Math" panose="02040503050406030204" pitchFamily="18" charset="0"/>
+                        </a:rPr>
+                        <m:t>=</m:t>
+                      </m:r>
+                      <m:sSub>
+                        <m:sSubPr>
+                          <m:ctrlPr>
+                            <a:rPr lang="es-ES" b="0" i="1" smtClean="0">
+                              <a:latin typeface="Cambria Math" panose="02040503050406030204" pitchFamily="18" charset="0"/>
+                            </a:rPr>
+                          </m:ctrlPr>
+                        </m:sSubPr>
+                        <m:e>
+                          <m:r>
+                            <a:rPr lang="es-ES" b="0" i="1" smtClean="0">
+                              <a:latin typeface="Cambria Math" panose="02040503050406030204" pitchFamily="18" charset="0"/>
+                            </a:rPr>
+                            <m:t>𝑛</m:t>
+                          </m:r>
+                        </m:e>
+                        <m:sub>
+                          <m:r>
+                            <a:rPr lang="es-ES" b="0" i="1" smtClean="0">
+                              <a:latin typeface="Cambria Math" panose="02040503050406030204" pitchFamily="18" charset="0"/>
+                            </a:rPr>
+                            <m:t>1</m:t>
+                          </m:r>
+                        </m:sub>
+                      </m:sSub>
+                      <m:r>
+                        <a:rPr lang="es-ES" b="0" i="1" smtClean="0">
+                          <a:latin typeface="Cambria Math" panose="02040503050406030204" pitchFamily="18" charset="0"/>
+                        </a:rPr>
+                        <m:t>+</m:t>
+                      </m:r>
+                      <m:sSub>
+                        <m:sSubPr>
+                          <m:ctrlPr>
+                            <a:rPr lang="es-ES" b="0" i="1" smtClean="0">
+                              <a:latin typeface="Cambria Math" panose="02040503050406030204" pitchFamily="18" charset="0"/>
+                            </a:rPr>
+                          </m:ctrlPr>
+                        </m:sSubPr>
+                        <m:e>
+                          <m:r>
+                            <a:rPr lang="es-ES" b="0" i="1" smtClean="0">
+                              <a:latin typeface="Cambria Math" panose="02040503050406030204" pitchFamily="18" charset="0"/>
+                            </a:rPr>
+                            <m:t>𝑛</m:t>
+                          </m:r>
+                        </m:e>
+                        <m:sub>
+                          <m:r>
+                            <a:rPr lang="es-ES" b="0" i="1" smtClean="0">
+                              <a:latin typeface="Cambria Math" panose="02040503050406030204" pitchFamily="18" charset="0"/>
+                            </a:rPr>
+                            <m:t>2</m:t>
+                          </m:r>
+                        </m:sub>
+                      </m:sSub>
+                      <m:d>
+                        <m:dPr>
+                          <m:ctrlPr>
+                            <a:rPr lang="es-ES" b="0" i="1" smtClean="0">
+                              <a:latin typeface="Cambria Math" panose="02040503050406030204" pitchFamily="18" charset="0"/>
+                            </a:rPr>
+                          </m:ctrlPr>
+                        </m:dPr>
+                        <m:e>
+                          <m:r>
+                            <a:rPr lang="es-ES" b="0" i="1" smtClean="0">
+                              <a:latin typeface="Cambria Math" panose="02040503050406030204" pitchFamily="18" charset="0"/>
+                            </a:rPr>
+                            <m:t>𝜆</m:t>
+                          </m:r>
+                          <m:r>
+                            <a:rPr lang="es-ES" b="0" i="1" smtClean="0">
+                              <a:latin typeface="Cambria Math" panose="02040503050406030204" pitchFamily="18" charset="0"/>
+                            </a:rPr>
+                            <m:t>−</m:t>
+                          </m:r>
+                          <m:sSub>
+                            <m:sSubPr>
+                              <m:ctrlPr>
+                                <a:rPr lang="es-ES" b="0" i="1" smtClean="0">
+                                  <a:latin typeface="Cambria Math" panose="02040503050406030204" pitchFamily="18" charset="0"/>
+                                </a:rPr>
+                              </m:ctrlPr>
+                            </m:sSubPr>
+                            <m:e>
+                              <m:r>
+                                <a:rPr lang="es-ES" b="0" i="1" smtClean="0">
+                                  <a:latin typeface="Cambria Math" panose="02040503050406030204" pitchFamily="18" charset="0"/>
+                                </a:rPr>
+                                <m:t>𝜆</m:t>
+                              </m:r>
+                            </m:e>
+                            <m:sub>
+                              <m:r>
+                                <a:rPr lang="es-ES" b="0" i="1" smtClean="0">
+                                  <a:latin typeface="Cambria Math" panose="02040503050406030204" pitchFamily="18" charset="0"/>
+                                </a:rPr>
+                                <m:t>0</m:t>
+                              </m:r>
+                            </m:sub>
+                          </m:sSub>
+                        </m:e>
+                      </m:d>
+                      <m:r>
+                        <a:rPr lang="es-ES" b="0" i="1" smtClean="0">
+                          <a:latin typeface="Cambria Math" panose="02040503050406030204" pitchFamily="18" charset="0"/>
+                        </a:rPr>
+                        <m:t>+</m:t>
+                      </m:r>
+                      <m:sSub>
+                        <m:sSubPr>
+                          <m:ctrlPr>
+                            <a:rPr lang="es-ES" b="0" i="1" smtClean="0">
+                              <a:latin typeface="Cambria Math" panose="02040503050406030204" pitchFamily="18" charset="0"/>
+                            </a:rPr>
+                          </m:ctrlPr>
+                        </m:sSubPr>
+                        <m:e>
+                          <m:r>
+                            <a:rPr lang="es-ES" b="0" i="1" smtClean="0">
+                              <a:latin typeface="Cambria Math" panose="02040503050406030204" pitchFamily="18" charset="0"/>
+                            </a:rPr>
+                            <m:t>𝑛</m:t>
+                          </m:r>
+                        </m:e>
+                        <m:sub>
+                          <m:r>
+                            <a:rPr lang="es-ES" b="0" i="1" smtClean="0">
+                              <a:latin typeface="Cambria Math" panose="02040503050406030204" pitchFamily="18" charset="0"/>
+                            </a:rPr>
+                            <m:t>3</m:t>
+                          </m:r>
+                        </m:sub>
+                      </m:sSub>
+                      <m:sSup>
+                        <m:sSupPr>
+                          <m:ctrlPr>
+                            <a:rPr lang="es-ES" b="0" i="1" smtClean="0">
+                              <a:latin typeface="Cambria Math" panose="02040503050406030204" pitchFamily="18" charset="0"/>
+                            </a:rPr>
+                          </m:ctrlPr>
+                        </m:sSupPr>
+                        <m:e>
+                          <m:d>
+                            <m:dPr>
+                              <m:ctrlPr>
+                                <a:rPr lang="es-ES" b="0" i="1" smtClean="0">
+                                  <a:latin typeface="Cambria Math" panose="02040503050406030204" pitchFamily="18" charset="0"/>
+                                </a:rPr>
+                              </m:ctrlPr>
+                            </m:dPr>
+                            <m:e>
+                              <m:r>
+                                <a:rPr lang="es-ES" b="0" i="1" smtClean="0">
+                                  <a:latin typeface="Cambria Math" panose="02040503050406030204" pitchFamily="18" charset="0"/>
+                                </a:rPr>
+                                <m:t>𝜆</m:t>
+                              </m:r>
+                              <m:r>
+                                <a:rPr lang="es-ES" b="0" i="1" smtClean="0">
+                                  <a:latin typeface="Cambria Math" panose="02040503050406030204" pitchFamily="18" charset="0"/>
+                                </a:rPr>
+                                <m:t>−</m:t>
+                              </m:r>
+                              <m:sSub>
+                                <m:sSubPr>
+                                  <m:ctrlPr>
+                                    <a:rPr lang="es-ES" b="0" i="1" smtClean="0">
+                                      <a:latin typeface="Cambria Math" panose="02040503050406030204" pitchFamily="18" charset="0"/>
+                                    </a:rPr>
+                                  </m:ctrlPr>
+                                </m:sSubPr>
+                                <m:e>
+                                  <m:r>
+                                    <a:rPr lang="es-ES" b="0" i="1" smtClean="0">
+                                      <a:latin typeface="Cambria Math" panose="02040503050406030204" pitchFamily="18" charset="0"/>
+                                    </a:rPr>
+                                    <m:t>𝜆</m:t>
+                                  </m:r>
+                                </m:e>
+                                <m:sub>
+                                  <m:r>
+                                    <a:rPr lang="es-ES" b="0" i="1" smtClean="0">
+                                      <a:latin typeface="Cambria Math" panose="02040503050406030204" pitchFamily="18" charset="0"/>
+                                    </a:rPr>
+                                    <m:t>0</m:t>
+                                  </m:r>
+                                </m:sub>
+                              </m:sSub>
+                            </m:e>
+                          </m:d>
+                        </m:e>
+                        <m:sup>
+                          <m:r>
+                            <a:rPr lang="es-ES" b="0" i="1" smtClean="0">
+                              <a:latin typeface="Cambria Math" panose="02040503050406030204" pitchFamily="18" charset="0"/>
+                            </a:rPr>
+                            <m:t>2</m:t>
+                          </m:r>
+                        </m:sup>
+                      </m:sSup>
+                    </m:oMath>
+                  </m:oMathPara>
+                </a14:m>
+                <a:br>
+                  <a:rPr lang="en-US" b="0" dirty="0"/>
+                </a:br>
+                <a:endParaRPr lang="en-US" sz="2500" b="0" dirty="0">
+                  <a:latin typeface="+mj-lt"/>
+                  <a:cs typeface="Lucida Sans"/>
+                </a:endParaRPr>
+              </a:p>
+            </p:txBody>
+          </p:sp>
+        </mc:Choice>
+        <mc:Fallback>
+          <p:sp>
+            <p:nvSpPr>
+              <p:cNvPr id="16" name="object 16">
+                <a:extLst>
+                  <a:ext uri="{FF2B5EF4-FFF2-40B4-BE49-F238E27FC236}">
+                    <a16:creationId xmlns:a16="http://schemas.microsoft.com/office/drawing/2014/main" id="{3C3470C6-55CF-956B-5D5C-065F21239785}"/>
+                  </a:ext>
+                </a:extLst>
+              </p:cNvPr>
+              <p:cNvSpPr txBox="1">
+                <a:spLocks noGrp="1" noRot="1" noChangeAspect="1" noMove="1" noResize="1" noEditPoints="1" noAdjustHandles="1" noChangeArrowheads="1" noChangeShapeType="1" noTextEdit="1"/>
+              </p:cNvSpPr>
+              <p:nvPr>
+                <p:ph type="title"/>
+              </p:nvPr>
+            </p:nvSpPr>
+            <p:spPr>
+              <a:xfrm>
+                <a:off x="685800" y="408883"/>
+                <a:ext cx="10994410" cy="1071255"/>
+              </a:xfrm>
+              <a:prstGeom prst="rect">
+                <a:avLst/>
+              </a:prstGeom>
+              <a:blipFill>
+                <a:blip r:embed="rId3"/>
+                <a:stretch>
+                  <a:fillRect l="-1664" t="-7386" b="-4545"/>
+                </a:stretch>
+              </a:blipFill>
+            </p:spPr>
+            <p:txBody>
+              <a:bodyPr/>
+              <a:lstStyle/>
+              <a:p>
+                <a:r>
+                  <a:rPr lang="es-CO">
+                    <a:noFill/>
+                  </a:rPr>
+                  <a:t> </a:t>
+                </a:r>
+              </a:p>
+            </p:txBody>
+          </p:sp>
+        </mc:Fallback>
+      </mc:AlternateContent>
+      <p:pic>
+        <p:nvPicPr>
+          <p:cNvPr id="83" name="Gráfico 82">
+            <a:extLst>
+              <a:ext uri="{FF2B5EF4-FFF2-40B4-BE49-F238E27FC236}">
+                <a16:creationId xmlns:a16="http://schemas.microsoft.com/office/drawing/2014/main" id="{F40F4851-113B-BF28-FE9A-D0F138BB841B}"/>
+              </a:ext>
+            </a:extLst>
+          </p:cNvPr>
+          <p:cNvPicPr>
+            <a:picLocks noChangeAspect="1"/>
+          </p:cNvPicPr>
+          <p:nvPr/>
+        </p:nvPicPr>
+        <p:blipFill>
+          <a:blip r:embed="rId4">
+            <a:extLst>
+              <a:ext uri="{96DAC541-7B7A-43D3-8B79-37D633B846F1}">
+                <asvg:svgBlip xmlns:asvg="http://schemas.microsoft.com/office/drawing/2016/SVG/main" r:embed="rId5"/>
+              </a:ext>
+            </a:extLst>
+          </a:blip>
+          <a:stretch>
+            <a:fillRect/>
+          </a:stretch>
+        </p:blipFill>
+        <p:spPr>
+          <a:xfrm>
+            <a:off x="5045006" y="6356057"/>
+            <a:ext cx="6409575" cy="363174"/>
+          </a:xfrm>
+          <a:prstGeom prst="rect">
+            <a:avLst/>
+          </a:prstGeom>
+        </p:spPr>
+      </p:pic>
+      <p:sp>
+        <p:nvSpPr>
+          <p:cNvPr id="84" name="Marcador de número de diapositiva 83">
+            <a:extLst>
+              <a:ext uri="{FF2B5EF4-FFF2-40B4-BE49-F238E27FC236}">
+                <a16:creationId xmlns:a16="http://schemas.microsoft.com/office/drawing/2014/main" id="{8A087237-CB95-B232-3B76-8470F899DD76}"/>
+              </a:ext>
+            </a:extLst>
+          </p:cNvPr>
+          <p:cNvSpPr>
+            <a:spLocks noGrp="1"/>
+          </p:cNvSpPr>
+          <p:nvPr>
+            <p:ph type="sldNum" sz="quarter" idx="7"/>
+          </p:nvPr>
+        </p:nvSpPr>
+        <p:spPr/>
+        <p:txBody>
+          <a:bodyPr/>
+          <a:lstStyle/>
+          <a:p>
+            <a:fld id="{B6F15528-21DE-4FAA-801E-634DDDAF4B2B}" type="slidenum">
+              <a:rPr lang="es-ES" smtClean="0"/>
+              <a:t>7</a:t>
+            </a:fld>
+            <a:endParaRPr lang="es-ES"/>
+          </a:p>
+        </p:txBody>
+      </p:sp>
+      <p:sp>
+        <p:nvSpPr>
+          <p:cNvPr id="3" name="Marcador de pie de página 2">
+            <a:extLst>
+              <a:ext uri="{FF2B5EF4-FFF2-40B4-BE49-F238E27FC236}">
+                <a16:creationId xmlns:a16="http://schemas.microsoft.com/office/drawing/2014/main" id="{FD91F836-46F5-3A0E-7399-671BB59DA629}"/>
+              </a:ext>
+            </a:extLst>
+          </p:cNvPr>
+          <p:cNvSpPr>
+            <a:spLocks noGrp="1"/>
+          </p:cNvSpPr>
+          <p:nvPr>
+            <p:ph type="ftr" sz="quarter" idx="5"/>
+          </p:nvPr>
+        </p:nvSpPr>
+        <p:spPr/>
+        <p:txBody>
+          <a:bodyPr/>
+          <a:lstStyle/>
+          <a:p>
+            <a:pPr marL="12700">
+              <a:spcBef>
+                <a:spcPts val="15"/>
+              </a:spcBef>
+            </a:pPr>
+            <a:r>
+              <a:rPr lang="es-ES" spc="-5"/>
+              <a:t>LAB 1.0. WAVEGUIDES</a:t>
+            </a:r>
+            <a:endParaRPr lang="es-ES" spc="-5" dirty="0"/>
+          </a:p>
+        </p:txBody>
+      </p:sp>
       <p:sp>
         <p:nvSpPr>
           <p:cNvPr id="8" name="CuadroTexto 7">
             <a:extLst>
               <a:ext uri="{FF2B5EF4-FFF2-40B4-BE49-F238E27FC236}">
-                <a16:creationId xmlns:a16="http://schemas.microsoft.com/office/drawing/2014/main" id="{0F38E924-A0E7-A039-C837-916BA77FE89B}"/>
+                <a16:creationId xmlns:a16="http://schemas.microsoft.com/office/drawing/2014/main" id="{18001B43-002B-1A59-42BF-6D76A0BC9F0D}"/>
               </a:ext>
             </a:extLst>
           </p:cNvPr>
@@ -7591,10 +12610,1142 @@
           </a:p>
         </p:txBody>
       </p:sp>
+      <mc:AlternateContent xmlns:mc="http://schemas.openxmlformats.org/markup-compatibility/2006">
+        <mc:Choice xmlns:a14="http://schemas.microsoft.com/office/drawing/2010/main" Requires="a14">
+          <p:sp>
+            <p:nvSpPr>
+              <p:cNvPr id="4" name="CuadroTexto 9">
+                <a:extLst>
+                  <a:ext uri="{FF2B5EF4-FFF2-40B4-BE49-F238E27FC236}">
+                    <a16:creationId xmlns:a16="http://schemas.microsoft.com/office/drawing/2014/main" id="{7091D5EE-B315-A510-9C62-0747D28B0FB0}"/>
+                  </a:ext>
+                </a:extLst>
+              </p:cNvPr>
+              <p:cNvSpPr txBox="1"/>
+              <p:nvPr/>
+            </p:nvSpPr>
+            <p:spPr>
+              <a:xfrm>
+                <a:off x="608013" y="5419470"/>
+                <a:ext cx="5486560" cy="679930"/>
+              </a:xfrm>
+              <a:prstGeom prst="rect">
+                <a:avLst/>
+              </a:prstGeom>
+              <a:solidFill>
+                <a:schemeClr val="bg1">
+                  <a:lumMod val="95000"/>
+                </a:schemeClr>
+              </a:solidFill>
+              <a:ln w="28575">
+                <a:solidFill>
+                  <a:srgbClr val="E0700D"/>
+                </a:solidFill>
+              </a:ln>
+            </p:spPr>
+            <p:txBody>
+              <a:bodyPr wrap="square" rtlCol="0">
+                <a:spAutoFit/>
+              </a:bodyPr>
+              <a:lstStyle/>
+              <a:p>
+                <a:pPr algn="ctr"/>
+                <a14:m>
+                  <m:oMath xmlns:m="http://schemas.openxmlformats.org/officeDocument/2006/math">
+                    <m:sSub>
+                      <m:sSubPr>
+                        <m:ctrlPr>
+                          <a:rPr lang="es-ES" sz="1200" i="1" smtClean="0">
+                            <a:latin typeface="Cambria Math" panose="02040503050406030204" pitchFamily="18" charset="0"/>
+                          </a:rPr>
+                        </m:ctrlPr>
+                      </m:sSubPr>
+                      <m:e>
+                        <m:r>
+                          <a:rPr lang="es-ES" sz="1200" i="1">
+                            <a:latin typeface="Cambria Math" panose="02040503050406030204" pitchFamily="18" charset="0"/>
+                          </a:rPr>
+                          <m:t>𝑛</m:t>
+                        </m:r>
+                      </m:e>
+                      <m:sub>
+                        <m:r>
+                          <a:rPr lang="es-ES" sz="1200" i="1">
+                            <a:latin typeface="Cambria Math" panose="02040503050406030204" pitchFamily="18" charset="0"/>
+                          </a:rPr>
+                          <m:t>𝑒𝑓𝑓</m:t>
+                        </m:r>
+                      </m:sub>
+                    </m:sSub>
+                    <m:d>
+                      <m:dPr>
+                        <m:ctrlPr>
+                          <a:rPr lang="es-ES" sz="1200" i="1">
+                            <a:latin typeface="Cambria Math" panose="02040503050406030204" pitchFamily="18" charset="0"/>
+                          </a:rPr>
+                        </m:ctrlPr>
+                      </m:dPr>
+                      <m:e>
+                        <m:r>
+                          <a:rPr lang="es-ES" sz="1200" i="1">
+                            <a:latin typeface="Cambria Math" panose="02040503050406030204" pitchFamily="18" charset="0"/>
+                          </a:rPr>
+                          <m:t>𝜆</m:t>
+                        </m:r>
+                      </m:e>
+                    </m:d>
+                    <m:r>
+                      <a:rPr lang="es-ES" sz="1200" i="1">
+                        <a:latin typeface="Cambria Math" panose="02040503050406030204" pitchFamily="18" charset="0"/>
+                      </a:rPr>
+                      <m:t>=</m:t>
+                    </m:r>
+                    <m:r>
+                      <a:rPr lang="es-MX" sz="1200" b="0" i="1" smtClean="0">
+                        <a:latin typeface="Cambria Math" panose="02040503050406030204" pitchFamily="18" charset="0"/>
+                      </a:rPr>
+                      <m:t>1</m:t>
+                    </m:r>
+                    <m:r>
+                      <a:rPr lang="es-MX" sz="1200" b="0" i="1" smtClean="0">
+                        <a:latin typeface="Cambria Math" panose="02040503050406030204" pitchFamily="18" charset="0"/>
+                      </a:rPr>
+                      <m:t>,</m:t>
+                    </m:r>
+                    <m:r>
+                      <a:rPr lang="es-MX" sz="1200" b="0" i="1" smtClean="0">
+                        <a:latin typeface="Cambria Math" panose="02040503050406030204" pitchFamily="18" charset="0"/>
+                      </a:rPr>
+                      <m:t>62</m:t>
+                    </m:r>
+                    <m:r>
+                      <a:rPr lang="es-MX" sz="1200" b="0" i="1" smtClean="0">
+                        <a:latin typeface="Cambria Math" panose="02040503050406030204" pitchFamily="18" charset="0"/>
+                      </a:rPr>
+                      <m:t>−</m:t>
+                    </m:r>
+                    <m:r>
+                      <a:rPr lang="es-MX" sz="1200" b="0" i="1" smtClean="0">
+                        <a:latin typeface="Cambria Math" panose="02040503050406030204" pitchFamily="18" charset="0"/>
+                      </a:rPr>
+                      <m:t>0</m:t>
+                    </m:r>
+                    <m:r>
+                      <a:rPr lang="es-MX" sz="1200" b="0" i="1" smtClean="0">
+                        <a:latin typeface="Cambria Math" panose="02040503050406030204" pitchFamily="18" charset="0"/>
+                      </a:rPr>
+                      <m:t>,</m:t>
+                    </m:r>
+                    <m:r>
+                      <a:rPr lang="es-MX" sz="1200" b="0" i="1" smtClean="0">
+                        <a:latin typeface="Cambria Math" panose="02040503050406030204" pitchFamily="18" charset="0"/>
+                      </a:rPr>
+                      <m:t>19</m:t>
+                    </m:r>
+                    <m:d>
+                      <m:dPr>
+                        <m:ctrlPr>
+                          <a:rPr lang="es-ES" sz="1200" i="1">
+                            <a:latin typeface="Cambria Math" panose="02040503050406030204" pitchFamily="18" charset="0"/>
+                          </a:rPr>
+                        </m:ctrlPr>
+                      </m:dPr>
+                      <m:e>
+                        <m:r>
+                          <a:rPr lang="es-ES" sz="1200" i="1">
+                            <a:latin typeface="Cambria Math" panose="02040503050406030204" pitchFamily="18" charset="0"/>
+                          </a:rPr>
+                          <m:t>𝜆</m:t>
+                        </m:r>
+                        <m:r>
+                          <a:rPr lang="es-ES" sz="1200" i="1">
+                            <a:latin typeface="Cambria Math" panose="02040503050406030204" pitchFamily="18" charset="0"/>
+                          </a:rPr>
+                          <m:t>−</m:t>
+                        </m:r>
+                        <m:sSub>
+                          <m:sSubPr>
+                            <m:ctrlPr>
+                              <a:rPr lang="es-ES" sz="1200" i="1">
+                                <a:latin typeface="Cambria Math" panose="02040503050406030204" pitchFamily="18" charset="0"/>
+                              </a:rPr>
+                            </m:ctrlPr>
+                          </m:sSubPr>
+                          <m:e>
+                            <m:r>
+                              <a:rPr lang="es-ES" sz="1200" i="1">
+                                <a:latin typeface="Cambria Math" panose="02040503050406030204" pitchFamily="18" charset="0"/>
+                              </a:rPr>
+                              <m:t>𝜆</m:t>
+                            </m:r>
+                          </m:e>
+                          <m:sub>
+                            <m:r>
+                              <a:rPr lang="es-ES" sz="1200" i="1">
+                                <a:latin typeface="Cambria Math" panose="02040503050406030204" pitchFamily="18" charset="0"/>
+                              </a:rPr>
+                              <m:t>0</m:t>
+                            </m:r>
+                          </m:sub>
+                        </m:sSub>
+                      </m:e>
+                    </m:d>
+                    <m:r>
+                      <a:rPr lang="es-ES" sz="1200" i="1">
+                        <a:latin typeface="Cambria Math" panose="02040503050406030204" pitchFamily="18" charset="0"/>
+                      </a:rPr>
+                      <m:t>+</m:t>
+                    </m:r>
+                    <m:r>
+                      <a:rPr lang="es-MX" sz="1200" b="0" i="1" smtClean="0">
+                        <a:latin typeface="Cambria Math" panose="02040503050406030204" pitchFamily="18" charset="0"/>
+                      </a:rPr>
+                      <m:t>0</m:t>
+                    </m:r>
+                    <m:r>
+                      <a:rPr lang="es-MX" sz="1200" b="0" i="1" smtClean="0">
+                        <a:latin typeface="Cambria Math" panose="02040503050406030204" pitchFamily="18" charset="0"/>
+                      </a:rPr>
+                      <m:t>,</m:t>
+                    </m:r>
+                    <m:r>
+                      <a:rPr lang="es-MX" sz="1200" b="0" i="1" smtClean="0">
+                        <a:latin typeface="Cambria Math" panose="02040503050406030204" pitchFamily="18" charset="0"/>
+                      </a:rPr>
+                      <m:t>10</m:t>
+                    </m:r>
+                    <m:sSup>
+                      <m:sSupPr>
+                        <m:ctrlPr>
+                          <a:rPr lang="es-ES" sz="1200" i="1">
+                            <a:latin typeface="Cambria Math" panose="02040503050406030204" pitchFamily="18" charset="0"/>
+                          </a:rPr>
+                        </m:ctrlPr>
+                      </m:sSupPr>
+                      <m:e>
+                        <m:d>
+                          <m:dPr>
+                            <m:ctrlPr>
+                              <a:rPr lang="es-ES" sz="1200" i="1">
+                                <a:latin typeface="Cambria Math" panose="02040503050406030204" pitchFamily="18" charset="0"/>
+                              </a:rPr>
+                            </m:ctrlPr>
+                          </m:dPr>
+                          <m:e>
+                            <m:r>
+                              <a:rPr lang="es-ES" sz="1200" i="1">
+                                <a:latin typeface="Cambria Math" panose="02040503050406030204" pitchFamily="18" charset="0"/>
+                              </a:rPr>
+                              <m:t>𝜆</m:t>
+                            </m:r>
+                            <m:r>
+                              <a:rPr lang="es-ES" sz="1200" i="1">
+                                <a:latin typeface="Cambria Math" panose="02040503050406030204" pitchFamily="18" charset="0"/>
+                              </a:rPr>
+                              <m:t>−</m:t>
+                            </m:r>
+                            <m:sSub>
+                              <m:sSubPr>
+                                <m:ctrlPr>
+                                  <a:rPr lang="es-ES" sz="1200" i="1">
+                                    <a:latin typeface="Cambria Math" panose="02040503050406030204" pitchFamily="18" charset="0"/>
+                                  </a:rPr>
+                                </m:ctrlPr>
+                              </m:sSubPr>
+                              <m:e>
+                                <m:r>
+                                  <a:rPr lang="es-ES" sz="1200" i="1">
+                                    <a:latin typeface="Cambria Math" panose="02040503050406030204" pitchFamily="18" charset="0"/>
+                                  </a:rPr>
+                                  <m:t>𝜆</m:t>
+                                </m:r>
+                              </m:e>
+                              <m:sub>
+                                <m:r>
+                                  <a:rPr lang="es-ES" sz="1200" i="1">
+                                    <a:latin typeface="Cambria Math" panose="02040503050406030204" pitchFamily="18" charset="0"/>
+                                  </a:rPr>
+                                  <m:t>0</m:t>
+                                </m:r>
+                              </m:sub>
+                            </m:sSub>
+                          </m:e>
+                        </m:d>
+                      </m:e>
+                      <m:sup>
+                        <m:r>
+                          <a:rPr lang="es-ES" sz="1200" i="1">
+                            <a:latin typeface="Cambria Math" panose="02040503050406030204" pitchFamily="18" charset="0"/>
+                          </a:rPr>
+                          <m:t>2</m:t>
+                        </m:r>
+                      </m:sup>
+                    </m:sSup>
+                  </m:oMath>
+                </a14:m>
+                <a:r>
+                  <a:rPr lang="es-CO" sz="1200" dirty="0"/>
+                  <a:t> </a:t>
+                </a:r>
+              </a:p>
+              <a:p>
+                <a:pPr algn="ctr"/>
+                <a14:m>
+                  <m:oMath xmlns:m="http://schemas.openxmlformats.org/officeDocument/2006/math">
+                    <m:sSub>
+                      <m:sSubPr>
+                        <m:ctrlPr>
+                          <a:rPr lang="es-CO" sz="1200" i="1">
+                            <a:latin typeface="Cambria Math" panose="02040503050406030204" pitchFamily="18" charset="0"/>
+                          </a:rPr>
+                        </m:ctrlPr>
+                      </m:sSubPr>
+                      <m:e>
+                        <m:r>
+                          <a:rPr lang="es-CO" sz="1200" i="1">
+                            <a:latin typeface="Cambria Math" panose="02040503050406030204" pitchFamily="18" charset="0"/>
+                          </a:rPr>
+                          <m:t>𝑛</m:t>
+                        </m:r>
+                      </m:e>
+                      <m:sub>
+                        <m:r>
+                          <a:rPr lang="es-CO" sz="1200" i="1">
+                            <a:latin typeface="Cambria Math" panose="02040503050406030204" pitchFamily="18" charset="0"/>
+                          </a:rPr>
+                          <m:t>𝑔</m:t>
+                        </m:r>
+                      </m:sub>
+                    </m:sSub>
+                    <m:r>
+                      <a:rPr lang="es-CO" sz="1200">
+                        <a:latin typeface="Cambria Math" panose="02040503050406030204" pitchFamily="18" charset="0"/>
+                      </a:rPr>
+                      <m:t>=</m:t>
+                    </m:r>
+                  </m:oMath>
+                </a14:m>
+                <a:r>
+                  <a:rPr lang="es-CO" sz="1200" dirty="0"/>
+                  <a:t> 1,92</a:t>
+                </a:r>
+              </a:p>
+              <a:p>
+                <a:pPr algn="ctr"/>
+                <a14:m>
+                  <m:oMathPara xmlns:m="http://schemas.openxmlformats.org/officeDocument/2006/math">
+                    <m:oMathParaPr>
+                      <m:jc m:val="centerGroup"/>
+                    </m:oMathParaPr>
+                    <m:oMath xmlns:m="http://schemas.openxmlformats.org/officeDocument/2006/math">
+                      <m:m>
+                        <m:mPr>
+                          <m:plcHide m:val="on"/>
+                          <m:mcs>
+                            <m:mc>
+                              <m:mcPr>
+                                <m:count m:val="1"/>
+                                <m:mcJc m:val="center"/>
+                              </m:mcPr>
+                            </m:mc>
+                          </m:mcs>
+                          <m:ctrlPr>
+                            <a:rPr lang="es-CO" sz="1200" dirty="0" smtClean="0">
+                              <a:latin typeface="Cambria Math" panose="02040503050406030204" pitchFamily="18" charset="0"/>
+                            </a:rPr>
+                          </m:ctrlPr>
+                        </m:mPr>
+                        <m:mr>
+                          <m:e>
+                            <m:r>
+                              <m:rPr>
+                                <m:sty m:val="p"/>
+                              </m:rPr>
+                              <a:rPr lang="es-MX" sz="1200" b="0" i="0" dirty="0" smtClean="0">
+                                <a:latin typeface="Cambria Math" panose="02040503050406030204" pitchFamily="18" charset="0"/>
+                              </a:rPr>
+                              <m:t>D</m:t>
+                            </m:r>
+                            <m:r>
+                              <a:rPr lang="es-MX" sz="1200" b="0" i="0" dirty="0" smtClean="0">
+                                <a:latin typeface="Cambria Math" panose="02040503050406030204" pitchFamily="18" charset="0"/>
+                              </a:rPr>
+                              <m:t>=−</m:t>
+                            </m:r>
+                            <m:r>
+                              <a:rPr lang="es-MX" sz="1200" b="0" i="0" dirty="0" smtClean="0">
+                                <a:latin typeface="Cambria Math" panose="02040503050406030204" pitchFamily="18" charset="0"/>
+                              </a:rPr>
+                              <m:t>9</m:t>
+                            </m:r>
+                            <m:r>
+                              <a:rPr lang="es-MX" sz="1200" b="0" i="0" dirty="0" smtClean="0">
+                                <a:latin typeface="Cambria Math" panose="02040503050406030204" pitchFamily="18" charset="0"/>
+                              </a:rPr>
+                              <m:t>,</m:t>
+                            </m:r>
+                            <m:r>
+                              <a:rPr lang="es-MX" sz="1200" b="0" i="0" dirty="0" smtClean="0">
+                                <a:latin typeface="Cambria Math" panose="02040503050406030204" pitchFamily="18" charset="0"/>
+                              </a:rPr>
+                              <m:t>89</m:t>
+                            </m:r>
+                            <m:r>
+                              <a:rPr lang="es-CO" sz="1200" i="0" dirty="0" smtClean="0">
+                                <a:latin typeface="Cambria Math" panose="02040503050406030204" pitchFamily="18" charset="0"/>
+                              </a:rPr>
+                              <m:t>×</m:t>
+                            </m:r>
+                            <m:sSup>
+                              <m:sSupPr>
+                                <m:ctrlPr>
+                                  <a:rPr lang="es-CO" sz="1200" i="1" dirty="0" smtClean="0">
+                                    <a:latin typeface="Cambria Math" panose="02040503050406030204" pitchFamily="18" charset="0"/>
+                                  </a:rPr>
+                                </m:ctrlPr>
+                              </m:sSupPr>
+                              <m:e>
+                                <m:r>
+                                  <a:rPr lang="es-CO" sz="1200" i="0" dirty="0" smtClean="0">
+                                    <a:latin typeface="Cambria Math" panose="02040503050406030204" pitchFamily="18" charset="0"/>
+                                  </a:rPr>
+                                  <m:t>10</m:t>
+                                </m:r>
+                              </m:e>
+                              <m:sup>
+                                <m:r>
+                                  <a:rPr lang="es-CO" sz="1200" i="0" dirty="0" smtClean="0">
+                                    <a:latin typeface="Cambria Math" panose="02040503050406030204" pitchFamily="18" charset="0"/>
+                                  </a:rPr>
+                                  <m:t>−</m:t>
+                                </m:r>
+                                <m:r>
+                                  <a:rPr lang="es-MX" sz="1200" b="0" i="1" dirty="0" smtClean="0">
+                                    <a:latin typeface="Cambria Math" panose="02040503050406030204" pitchFamily="18" charset="0"/>
+                                  </a:rPr>
+                                  <m:t>10</m:t>
+                                </m:r>
+                              </m:sup>
+                            </m:sSup>
+                          </m:e>
+                        </m:mr>
+                      </m:m>
+                    </m:oMath>
+                  </m:oMathPara>
+                </a14:m>
+                <a:endParaRPr lang="es-CO" sz="1200" dirty="0"/>
+              </a:p>
+            </p:txBody>
+          </p:sp>
+        </mc:Choice>
+        <mc:Fallback>
+          <p:sp>
+            <p:nvSpPr>
+              <p:cNvPr id="4" name="CuadroTexto 9">
+                <a:extLst>
+                  <a:ext uri="{FF2B5EF4-FFF2-40B4-BE49-F238E27FC236}">
+                    <a16:creationId xmlns:a16="http://schemas.microsoft.com/office/drawing/2014/main" id="{7091D5EE-B315-A510-9C62-0747D28B0FB0}"/>
+                  </a:ext>
+                </a:extLst>
+              </p:cNvPr>
+              <p:cNvSpPr txBox="1">
+                <a:spLocks noRot="1" noChangeAspect="1" noMove="1" noResize="1" noEditPoints="1" noAdjustHandles="1" noChangeArrowheads="1" noChangeShapeType="1" noTextEdit="1"/>
+              </p:cNvSpPr>
+              <p:nvPr/>
+            </p:nvSpPr>
+            <p:spPr>
+              <a:xfrm>
+                <a:off x="608013" y="5419470"/>
+                <a:ext cx="5486560" cy="679930"/>
+              </a:xfrm>
+              <a:prstGeom prst="rect">
+                <a:avLst/>
+              </a:prstGeom>
+              <a:blipFill>
+                <a:blip r:embed="rId6"/>
+                <a:stretch>
+                  <a:fillRect/>
+                </a:stretch>
+              </a:blipFill>
+              <a:ln w="28575">
+                <a:solidFill>
+                  <a:srgbClr val="E0700D"/>
+                </a:solidFill>
+              </a:ln>
+            </p:spPr>
+            <p:txBody>
+              <a:bodyPr/>
+              <a:lstStyle/>
+              <a:p>
+                <a:r>
+                  <a:rPr lang="es-CO">
+                    <a:noFill/>
+                  </a:rPr>
+                  <a:t> </a:t>
+                </a:r>
+              </a:p>
+            </p:txBody>
+          </p:sp>
+        </mc:Fallback>
+      </mc:AlternateContent>
+      <mc:AlternateContent xmlns:mc="http://schemas.openxmlformats.org/markup-compatibility/2006">
+        <mc:Choice xmlns:a14="http://schemas.microsoft.com/office/drawing/2010/main" Requires="a14">
+          <p:sp>
+            <p:nvSpPr>
+              <p:cNvPr id="7" name="CuadroTexto 9">
+                <a:extLst>
+                  <a:ext uri="{FF2B5EF4-FFF2-40B4-BE49-F238E27FC236}">
+                    <a16:creationId xmlns:a16="http://schemas.microsoft.com/office/drawing/2014/main" id="{A23DF1DD-6403-776E-412F-7DF4435BEFA1}"/>
+                  </a:ext>
+                </a:extLst>
+              </p:cNvPr>
+              <p:cNvSpPr txBox="1"/>
+              <p:nvPr/>
+            </p:nvSpPr>
+            <p:spPr>
+              <a:xfrm>
+                <a:off x="6321420" y="5416070"/>
+                <a:ext cx="5486560" cy="679930"/>
+              </a:xfrm>
+              <a:prstGeom prst="rect">
+                <a:avLst/>
+              </a:prstGeom>
+              <a:solidFill>
+                <a:schemeClr val="bg1">
+                  <a:lumMod val="95000"/>
+                </a:schemeClr>
+              </a:solidFill>
+              <a:ln w="28575">
+                <a:solidFill>
+                  <a:srgbClr val="E0700D"/>
+                </a:solidFill>
+              </a:ln>
+            </p:spPr>
+            <p:txBody>
+              <a:bodyPr wrap="square" rtlCol="0">
+                <a:spAutoFit/>
+              </a:bodyPr>
+              <a:lstStyle/>
+              <a:p>
+                <a:pPr algn="ctr"/>
+                <a14:m>
+                  <m:oMath xmlns:m="http://schemas.openxmlformats.org/officeDocument/2006/math">
+                    <m:sSub>
+                      <m:sSubPr>
+                        <m:ctrlPr>
+                          <a:rPr lang="es-ES" sz="1200" i="1" smtClean="0">
+                            <a:latin typeface="Cambria Math" panose="02040503050406030204" pitchFamily="18" charset="0"/>
+                          </a:rPr>
+                        </m:ctrlPr>
+                      </m:sSubPr>
+                      <m:e>
+                        <m:r>
+                          <a:rPr lang="es-ES" sz="1200" i="1">
+                            <a:latin typeface="Cambria Math" panose="02040503050406030204" pitchFamily="18" charset="0"/>
+                          </a:rPr>
+                          <m:t>𝑛</m:t>
+                        </m:r>
+                      </m:e>
+                      <m:sub>
+                        <m:r>
+                          <a:rPr lang="es-ES" sz="1200" i="1">
+                            <a:latin typeface="Cambria Math" panose="02040503050406030204" pitchFamily="18" charset="0"/>
+                          </a:rPr>
+                          <m:t>𝑒𝑓𝑓</m:t>
+                        </m:r>
+                      </m:sub>
+                    </m:sSub>
+                    <m:d>
+                      <m:dPr>
+                        <m:ctrlPr>
+                          <a:rPr lang="es-ES" sz="1200" i="1">
+                            <a:latin typeface="Cambria Math" panose="02040503050406030204" pitchFamily="18" charset="0"/>
+                          </a:rPr>
+                        </m:ctrlPr>
+                      </m:dPr>
+                      <m:e>
+                        <m:r>
+                          <a:rPr lang="es-ES" sz="1200" i="1">
+                            <a:latin typeface="Cambria Math" panose="02040503050406030204" pitchFamily="18" charset="0"/>
+                          </a:rPr>
+                          <m:t>𝜆</m:t>
+                        </m:r>
+                      </m:e>
+                    </m:d>
+                    <m:r>
+                      <a:rPr lang="es-ES" sz="1200" i="1">
+                        <a:latin typeface="Cambria Math" panose="02040503050406030204" pitchFamily="18" charset="0"/>
+                      </a:rPr>
+                      <m:t>=</m:t>
+                    </m:r>
+                    <m:r>
+                      <a:rPr lang="es-MX" sz="1200" b="0" i="1" smtClean="0">
+                        <a:latin typeface="Cambria Math" panose="02040503050406030204" pitchFamily="18" charset="0"/>
+                      </a:rPr>
+                      <m:t>1</m:t>
+                    </m:r>
+                    <m:r>
+                      <a:rPr lang="es-MX" sz="1200" b="0" i="1" smtClean="0">
+                        <a:latin typeface="Cambria Math" panose="02040503050406030204" pitchFamily="18" charset="0"/>
+                      </a:rPr>
+                      <m:t>,</m:t>
+                    </m:r>
+                    <m:r>
+                      <a:rPr lang="es-MX" sz="1200" b="0" i="1" smtClean="0">
+                        <a:latin typeface="Cambria Math" panose="02040503050406030204" pitchFamily="18" charset="0"/>
+                      </a:rPr>
+                      <m:t>54</m:t>
+                    </m:r>
+                    <m:r>
+                      <a:rPr lang="es-MX" sz="1200" b="0" i="1" smtClean="0">
+                        <a:latin typeface="Cambria Math" panose="02040503050406030204" pitchFamily="18" charset="0"/>
+                      </a:rPr>
+                      <m:t>−</m:t>
+                    </m:r>
+                    <m:r>
+                      <a:rPr lang="es-MX" sz="1200" b="0" i="1" smtClean="0">
+                        <a:latin typeface="Cambria Math" panose="02040503050406030204" pitchFamily="18" charset="0"/>
+                      </a:rPr>
+                      <m:t>0</m:t>
+                    </m:r>
+                    <m:r>
+                      <a:rPr lang="es-MX" sz="1200" b="0" i="1" smtClean="0">
+                        <a:latin typeface="Cambria Math" panose="02040503050406030204" pitchFamily="18" charset="0"/>
+                      </a:rPr>
+                      <m:t>,</m:t>
+                    </m:r>
+                    <m:r>
+                      <a:rPr lang="es-MX" sz="1200" b="0" i="1" smtClean="0">
+                        <a:latin typeface="Cambria Math" panose="02040503050406030204" pitchFamily="18" charset="0"/>
+                      </a:rPr>
+                      <m:t>13</m:t>
+                    </m:r>
+                    <m:d>
+                      <m:dPr>
+                        <m:ctrlPr>
+                          <a:rPr lang="es-ES" sz="1200" i="1">
+                            <a:latin typeface="Cambria Math" panose="02040503050406030204" pitchFamily="18" charset="0"/>
+                          </a:rPr>
+                        </m:ctrlPr>
+                      </m:dPr>
+                      <m:e>
+                        <m:r>
+                          <a:rPr lang="es-ES" sz="1200" i="1">
+                            <a:latin typeface="Cambria Math" panose="02040503050406030204" pitchFamily="18" charset="0"/>
+                          </a:rPr>
+                          <m:t>𝜆</m:t>
+                        </m:r>
+                        <m:r>
+                          <a:rPr lang="es-ES" sz="1200" i="1">
+                            <a:latin typeface="Cambria Math" panose="02040503050406030204" pitchFamily="18" charset="0"/>
+                          </a:rPr>
+                          <m:t>−</m:t>
+                        </m:r>
+                        <m:sSub>
+                          <m:sSubPr>
+                            <m:ctrlPr>
+                              <a:rPr lang="es-ES" sz="1200" i="1">
+                                <a:latin typeface="Cambria Math" panose="02040503050406030204" pitchFamily="18" charset="0"/>
+                              </a:rPr>
+                            </m:ctrlPr>
+                          </m:sSubPr>
+                          <m:e>
+                            <m:r>
+                              <a:rPr lang="es-ES" sz="1200" i="1">
+                                <a:latin typeface="Cambria Math" panose="02040503050406030204" pitchFamily="18" charset="0"/>
+                              </a:rPr>
+                              <m:t>𝜆</m:t>
+                            </m:r>
+                          </m:e>
+                          <m:sub>
+                            <m:r>
+                              <a:rPr lang="es-ES" sz="1200" i="1">
+                                <a:latin typeface="Cambria Math" panose="02040503050406030204" pitchFamily="18" charset="0"/>
+                              </a:rPr>
+                              <m:t>0</m:t>
+                            </m:r>
+                          </m:sub>
+                        </m:sSub>
+                      </m:e>
+                    </m:d>
+                    <m:r>
+                      <a:rPr lang="es-ES" sz="1200" i="1">
+                        <a:latin typeface="Cambria Math" panose="02040503050406030204" pitchFamily="18" charset="0"/>
+                      </a:rPr>
+                      <m:t>+</m:t>
+                    </m:r>
+                    <m:r>
+                      <a:rPr lang="es-MX" sz="1200" b="0" i="1" smtClean="0">
+                        <a:latin typeface="Cambria Math" panose="02040503050406030204" pitchFamily="18" charset="0"/>
+                      </a:rPr>
+                      <m:t>0</m:t>
+                    </m:r>
+                    <m:r>
+                      <a:rPr lang="es-MX" sz="1200" b="0" i="1" smtClean="0">
+                        <a:latin typeface="Cambria Math" panose="02040503050406030204" pitchFamily="18" charset="0"/>
+                      </a:rPr>
+                      <m:t>,</m:t>
+                    </m:r>
+                    <m:r>
+                      <a:rPr lang="es-MX" sz="1200" b="0" i="1" smtClean="0">
+                        <a:latin typeface="Cambria Math" panose="02040503050406030204" pitchFamily="18" charset="0"/>
+                      </a:rPr>
+                      <m:t>15</m:t>
+                    </m:r>
+                    <m:sSup>
+                      <m:sSupPr>
+                        <m:ctrlPr>
+                          <a:rPr lang="es-ES" sz="1200" i="1">
+                            <a:latin typeface="Cambria Math" panose="02040503050406030204" pitchFamily="18" charset="0"/>
+                          </a:rPr>
+                        </m:ctrlPr>
+                      </m:sSupPr>
+                      <m:e>
+                        <m:d>
+                          <m:dPr>
+                            <m:ctrlPr>
+                              <a:rPr lang="es-ES" sz="1200" i="1">
+                                <a:latin typeface="Cambria Math" panose="02040503050406030204" pitchFamily="18" charset="0"/>
+                              </a:rPr>
+                            </m:ctrlPr>
+                          </m:dPr>
+                          <m:e>
+                            <m:r>
+                              <a:rPr lang="es-ES" sz="1200" i="1">
+                                <a:latin typeface="Cambria Math" panose="02040503050406030204" pitchFamily="18" charset="0"/>
+                              </a:rPr>
+                              <m:t>𝜆</m:t>
+                            </m:r>
+                            <m:r>
+                              <a:rPr lang="es-ES" sz="1200" i="1">
+                                <a:latin typeface="Cambria Math" panose="02040503050406030204" pitchFamily="18" charset="0"/>
+                              </a:rPr>
+                              <m:t>−</m:t>
+                            </m:r>
+                            <m:sSub>
+                              <m:sSubPr>
+                                <m:ctrlPr>
+                                  <a:rPr lang="es-ES" sz="1200" i="1">
+                                    <a:latin typeface="Cambria Math" panose="02040503050406030204" pitchFamily="18" charset="0"/>
+                                  </a:rPr>
+                                </m:ctrlPr>
+                              </m:sSubPr>
+                              <m:e>
+                                <m:r>
+                                  <a:rPr lang="es-ES" sz="1200" i="1">
+                                    <a:latin typeface="Cambria Math" panose="02040503050406030204" pitchFamily="18" charset="0"/>
+                                  </a:rPr>
+                                  <m:t>𝜆</m:t>
+                                </m:r>
+                              </m:e>
+                              <m:sub>
+                                <m:r>
+                                  <a:rPr lang="es-ES" sz="1200" i="1">
+                                    <a:latin typeface="Cambria Math" panose="02040503050406030204" pitchFamily="18" charset="0"/>
+                                  </a:rPr>
+                                  <m:t>0</m:t>
+                                </m:r>
+                              </m:sub>
+                            </m:sSub>
+                          </m:e>
+                        </m:d>
+                      </m:e>
+                      <m:sup>
+                        <m:r>
+                          <a:rPr lang="es-ES" sz="1200" i="1">
+                            <a:latin typeface="Cambria Math" panose="02040503050406030204" pitchFamily="18" charset="0"/>
+                          </a:rPr>
+                          <m:t>2</m:t>
+                        </m:r>
+                      </m:sup>
+                    </m:sSup>
+                  </m:oMath>
+                </a14:m>
+                <a:r>
+                  <a:rPr lang="es-CO" sz="1200" dirty="0"/>
+                  <a:t> </a:t>
+                </a:r>
+              </a:p>
+              <a:p>
+                <a:pPr algn="ctr"/>
+                <a14:m>
+                  <m:oMath xmlns:m="http://schemas.openxmlformats.org/officeDocument/2006/math">
+                    <m:sSub>
+                      <m:sSubPr>
+                        <m:ctrlPr>
+                          <a:rPr lang="es-CO" sz="1200" i="1">
+                            <a:latin typeface="Cambria Math" panose="02040503050406030204" pitchFamily="18" charset="0"/>
+                          </a:rPr>
+                        </m:ctrlPr>
+                      </m:sSubPr>
+                      <m:e>
+                        <m:r>
+                          <a:rPr lang="es-CO" sz="1200" i="1">
+                            <a:latin typeface="Cambria Math" panose="02040503050406030204" pitchFamily="18" charset="0"/>
+                          </a:rPr>
+                          <m:t>𝑛</m:t>
+                        </m:r>
+                      </m:e>
+                      <m:sub>
+                        <m:r>
+                          <a:rPr lang="es-CO" sz="1200" i="1">
+                            <a:latin typeface="Cambria Math" panose="02040503050406030204" pitchFamily="18" charset="0"/>
+                          </a:rPr>
+                          <m:t>𝑔</m:t>
+                        </m:r>
+                      </m:sub>
+                    </m:sSub>
+                    <m:r>
+                      <a:rPr lang="es-CO" sz="1200">
+                        <a:latin typeface="Cambria Math" panose="02040503050406030204" pitchFamily="18" charset="0"/>
+                      </a:rPr>
+                      <m:t>=</m:t>
+                    </m:r>
+                  </m:oMath>
+                </a14:m>
+                <a:r>
+                  <a:rPr lang="es-CO" sz="1200" dirty="0"/>
+                  <a:t> 1,75</a:t>
+                </a:r>
+              </a:p>
+              <a:p>
+                <a:pPr algn="ctr"/>
+                <a14:m>
+                  <m:oMathPara xmlns:m="http://schemas.openxmlformats.org/officeDocument/2006/math">
+                    <m:oMathParaPr>
+                      <m:jc m:val="centerGroup"/>
+                    </m:oMathParaPr>
+                    <m:oMath xmlns:m="http://schemas.openxmlformats.org/officeDocument/2006/math">
+                      <m:m>
+                        <m:mPr>
+                          <m:plcHide m:val="on"/>
+                          <m:mcs>
+                            <m:mc>
+                              <m:mcPr>
+                                <m:count m:val="1"/>
+                                <m:mcJc m:val="center"/>
+                              </m:mcPr>
+                            </m:mc>
+                          </m:mcs>
+                          <m:ctrlPr>
+                            <a:rPr lang="es-CO" sz="1200" dirty="0" smtClean="0">
+                              <a:latin typeface="Cambria Math" panose="02040503050406030204" pitchFamily="18" charset="0"/>
+                            </a:rPr>
+                          </m:ctrlPr>
+                        </m:mPr>
+                        <m:mr>
+                          <m:e>
+                            <m:r>
+                              <m:rPr>
+                                <m:sty m:val="p"/>
+                              </m:rPr>
+                              <a:rPr lang="es-MX" sz="1200" b="0" i="0" dirty="0" smtClean="0">
+                                <a:latin typeface="Cambria Math" panose="02040503050406030204" pitchFamily="18" charset="0"/>
+                              </a:rPr>
+                              <m:t>D</m:t>
+                            </m:r>
+                            <m:r>
+                              <a:rPr lang="es-MX" sz="1200" b="0" i="0" dirty="0" smtClean="0">
+                                <a:latin typeface="Cambria Math" panose="02040503050406030204" pitchFamily="18" charset="0"/>
+                              </a:rPr>
+                              <m:t>=−</m:t>
+                            </m:r>
+                            <m:r>
+                              <a:rPr lang="es-CO" sz="1200" i="0" dirty="0" smtClean="0">
+                                <a:latin typeface="Cambria Math" panose="02040503050406030204" pitchFamily="18" charset="0"/>
+                              </a:rPr>
+                              <m:t>1</m:t>
+                            </m:r>
+                            <m:r>
+                              <a:rPr lang="es-CO" sz="1200" i="0" dirty="0" smtClean="0">
+                                <a:latin typeface="Cambria Math" panose="02040503050406030204" pitchFamily="18" charset="0"/>
+                              </a:rPr>
+                              <m:t>.</m:t>
+                            </m:r>
+                            <m:r>
+                              <a:rPr lang="es-MX" sz="1200" b="0" i="0" dirty="0" smtClean="0">
+                                <a:latin typeface="Cambria Math" panose="02040503050406030204" pitchFamily="18" charset="0"/>
+                              </a:rPr>
+                              <m:t>53</m:t>
+                            </m:r>
+                            <m:r>
+                              <a:rPr lang="es-MX" sz="1200" b="0" i="0" dirty="0" smtClean="0">
+                                <a:latin typeface="Cambria Math" panose="02040503050406030204" pitchFamily="18" charset="0"/>
+                              </a:rPr>
+                              <m:t>,×</m:t>
+                            </m:r>
+                            <m:sSup>
+                              <m:sSupPr>
+                                <m:ctrlPr>
+                                  <a:rPr lang="es-CO" sz="1200" i="1" dirty="0" smtClean="0">
+                                    <a:latin typeface="Cambria Math" panose="02040503050406030204" pitchFamily="18" charset="0"/>
+                                  </a:rPr>
+                                </m:ctrlPr>
+                              </m:sSupPr>
+                              <m:e>
+                                <m:r>
+                                  <a:rPr lang="es-CO" sz="1200" i="0" dirty="0" smtClean="0">
+                                    <a:latin typeface="Cambria Math" panose="02040503050406030204" pitchFamily="18" charset="0"/>
+                                  </a:rPr>
+                                  <m:t>10</m:t>
+                                </m:r>
+                              </m:e>
+                              <m:sup>
+                                <m:r>
+                                  <a:rPr lang="es-CO" sz="1200" i="0" dirty="0" smtClean="0">
+                                    <a:latin typeface="Cambria Math" panose="02040503050406030204" pitchFamily="18" charset="0"/>
+                                  </a:rPr>
+                                  <m:t>−</m:t>
+                                </m:r>
+                                <m:r>
+                                  <a:rPr lang="es-CO" sz="1200" i="0" dirty="0" smtClean="0">
+                                    <a:latin typeface="Cambria Math" panose="02040503050406030204" pitchFamily="18" charset="0"/>
+                                  </a:rPr>
+                                  <m:t>9</m:t>
+                                </m:r>
+                              </m:sup>
+                            </m:sSup>
+                          </m:e>
+                        </m:mr>
+                      </m:m>
+                    </m:oMath>
+                  </m:oMathPara>
+                </a14:m>
+                <a:endParaRPr lang="es-CO" sz="1200" dirty="0"/>
+              </a:p>
+            </p:txBody>
+          </p:sp>
+        </mc:Choice>
+        <mc:Fallback>
+          <p:sp>
+            <p:nvSpPr>
+              <p:cNvPr id="7" name="CuadroTexto 9">
+                <a:extLst>
+                  <a:ext uri="{FF2B5EF4-FFF2-40B4-BE49-F238E27FC236}">
+                    <a16:creationId xmlns:a16="http://schemas.microsoft.com/office/drawing/2014/main" id="{A23DF1DD-6403-776E-412F-7DF4435BEFA1}"/>
+                  </a:ext>
+                </a:extLst>
+              </p:cNvPr>
+              <p:cNvSpPr txBox="1">
+                <a:spLocks noRot="1" noChangeAspect="1" noMove="1" noResize="1" noEditPoints="1" noAdjustHandles="1" noChangeArrowheads="1" noChangeShapeType="1" noTextEdit="1"/>
+              </p:cNvSpPr>
+              <p:nvPr/>
+            </p:nvSpPr>
+            <p:spPr>
+              <a:xfrm>
+                <a:off x="6321420" y="5416070"/>
+                <a:ext cx="5486560" cy="679930"/>
+              </a:xfrm>
+              <a:prstGeom prst="rect">
+                <a:avLst/>
+              </a:prstGeom>
+              <a:blipFill>
+                <a:blip r:embed="rId7"/>
+                <a:stretch>
+                  <a:fillRect/>
+                </a:stretch>
+              </a:blipFill>
+              <a:ln w="28575">
+                <a:solidFill>
+                  <a:srgbClr val="E0700D"/>
+                </a:solidFill>
+              </a:ln>
+            </p:spPr>
+            <p:txBody>
+              <a:bodyPr/>
+              <a:lstStyle/>
+              <a:p>
+                <a:r>
+                  <a:rPr lang="es-CO">
+                    <a:noFill/>
+                  </a:rPr>
+                  <a:t> </a:t>
+                </a:r>
+              </a:p>
+            </p:txBody>
+          </p:sp>
+        </mc:Fallback>
+      </mc:AlternateContent>
+      <p:pic>
+        <p:nvPicPr>
+          <p:cNvPr id="11" name="Picture 10">
+            <a:extLst>
+              <a:ext uri="{FF2B5EF4-FFF2-40B4-BE49-F238E27FC236}">
+                <a16:creationId xmlns:a16="http://schemas.microsoft.com/office/drawing/2014/main" id="{C5D75C20-3C84-A63D-BE18-5CFFADDE38CC}"/>
+              </a:ext>
+            </a:extLst>
+          </p:cNvPr>
+          <p:cNvPicPr>
+            <a:picLocks noChangeAspect="1"/>
+          </p:cNvPicPr>
+          <p:nvPr/>
+        </p:nvPicPr>
+        <p:blipFill>
+          <a:blip r:embed="rId8">
+            <a:extLst>
+              <a:ext uri="{28A0092B-C50C-407E-A947-70E740481C1C}">
+                <a14:useLocalDpi xmlns:a14="http://schemas.microsoft.com/office/drawing/2010/main" val="0"/>
+              </a:ext>
+            </a:extLst>
+          </a:blip>
+          <a:stretch>
+            <a:fillRect/>
+          </a:stretch>
+        </p:blipFill>
+        <p:spPr>
+          <a:xfrm>
+            <a:off x="6347723" y="1402072"/>
+            <a:ext cx="5340107" cy="4023368"/>
+          </a:xfrm>
+          <a:prstGeom prst="rect">
+            <a:avLst/>
+          </a:prstGeom>
+        </p:spPr>
+      </p:pic>
+      <p:pic>
+        <p:nvPicPr>
+          <p:cNvPr id="12" name="Picture 11">
+            <a:extLst>
+              <a:ext uri="{FF2B5EF4-FFF2-40B4-BE49-F238E27FC236}">
+                <a16:creationId xmlns:a16="http://schemas.microsoft.com/office/drawing/2014/main" id="{4FB439BE-286A-0F65-3D6B-383EA1F64B14}"/>
+              </a:ext>
+            </a:extLst>
+          </p:cNvPr>
+          <p:cNvPicPr>
+            <a:picLocks noChangeAspect="1"/>
+          </p:cNvPicPr>
+          <p:nvPr/>
+        </p:nvPicPr>
+        <p:blipFill>
+          <a:blip r:embed="rId9">
+            <a:extLst>
+              <a:ext uri="{28A0092B-C50C-407E-A947-70E740481C1C}">
+                <a14:useLocalDpi xmlns:a14="http://schemas.microsoft.com/office/drawing/2010/main" val="0"/>
+              </a:ext>
+            </a:extLst>
+          </a:blip>
+          <a:stretch>
+            <a:fillRect/>
+          </a:stretch>
+        </p:blipFill>
+        <p:spPr>
+          <a:xfrm>
+            <a:off x="678180" y="1386832"/>
+            <a:ext cx="5340107" cy="4023368"/>
+          </a:xfrm>
+          <a:prstGeom prst="rect">
+            <a:avLst/>
+          </a:prstGeom>
+        </p:spPr>
+      </p:pic>
+      <p:sp>
+        <p:nvSpPr>
+          <p:cNvPr id="13" name="Rectángulo 4">
+            <a:extLst>
+              <a:ext uri="{FF2B5EF4-FFF2-40B4-BE49-F238E27FC236}">
+                <a16:creationId xmlns:a16="http://schemas.microsoft.com/office/drawing/2014/main" id="{7981359F-1B27-5785-DFDD-B663D2AB8F9E}"/>
+              </a:ext>
+            </a:extLst>
+          </p:cNvPr>
+          <p:cNvSpPr/>
+          <p:nvPr/>
+        </p:nvSpPr>
+        <p:spPr>
+          <a:xfrm>
+            <a:off x="609441" y="1447800"/>
+            <a:ext cx="5486559" cy="3886200"/>
+          </a:xfrm>
+          <a:prstGeom prst="rect">
+            <a:avLst/>
+          </a:prstGeom>
+          <a:noFill/>
+          <a:ln w="28575">
+            <a:solidFill>
+              <a:srgbClr val="E0700D"/>
+            </a:solidFill>
+          </a:ln>
+        </p:spPr>
+        <p:style>
+          <a:lnRef idx="2">
+            <a:schemeClr val="accent1">
+              <a:shade val="15000"/>
+            </a:schemeClr>
+          </a:lnRef>
+          <a:fillRef idx="1">
+            <a:schemeClr val="accent1"/>
+          </a:fillRef>
+          <a:effectRef idx="0">
+            <a:schemeClr val="accent1"/>
+          </a:effectRef>
+          <a:fontRef idx="minor">
+            <a:schemeClr val="lt1"/>
+          </a:fontRef>
+        </p:style>
+        <p:txBody>
+          <a:bodyPr rtlCol="0" anchor="ctr"/>
+          <a:lstStyle/>
+          <a:p>
+            <a:pPr algn="ctr"/>
+            <a:endParaRPr lang="en-US"/>
+          </a:p>
+        </p:txBody>
+      </p:sp>
+      <p:sp>
+        <p:nvSpPr>
+          <p:cNvPr id="14" name="Rectángulo 5">
+            <a:extLst>
+              <a:ext uri="{FF2B5EF4-FFF2-40B4-BE49-F238E27FC236}">
+                <a16:creationId xmlns:a16="http://schemas.microsoft.com/office/drawing/2014/main" id="{7DD93676-71D9-C083-4073-01A0A20B3D57}"/>
+              </a:ext>
+            </a:extLst>
+          </p:cNvPr>
+          <p:cNvSpPr/>
+          <p:nvPr/>
+        </p:nvSpPr>
+        <p:spPr>
+          <a:xfrm>
+            <a:off x="6321424" y="1447800"/>
+            <a:ext cx="5486559" cy="3886200"/>
+          </a:xfrm>
+          <a:prstGeom prst="rect">
+            <a:avLst/>
+          </a:prstGeom>
+          <a:noFill/>
+          <a:ln w="28575">
+            <a:solidFill>
+              <a:srgbClr val="E0700D"/>
+            </a:solidFill>
+          </a:ln>
+        </p:spPr>
+        <p:style>
+          <a:lnRef idx="2">
+            <a:schemeClr val="accent1">
+              <a:shade val="15000"/>
+            </a:schemeClr>
+          </a:lnRef>
+          <a:fillRef idx="1">
+            <a:schemeClr val="accent1"/>
+          </a:fillRef>
+          <a:effectRef idx="0">
+            <a:schemeClr val="accent1"/>
+          </a:effectRef>
+          <a:fontRef idx="minor">
+            <a:schemeClr val="lt1"/>
+          </a:fontRef>
+        </p:style>
+        <p:txBody>
+          <a:bodyPr rtlCol="0" anchor="ctr"/>
+          <a:lstStyle/>
+          <a:p>
+            <a:pPr algn="ctr"/>
+            <a:endParaRPr lang="en-US"/>
+          </a:p>
+        </p:txBody>
+      </p:sp>
     </p:spTree>
     <p:extLst>
       <p:ext uri="{BB962C8B-B14F-4D97-AF65-F5344CB8AC3E}">
-        <p14:creationId xmlns:p14="http://schemas.microsoft.com/office/powerpoint/2010/main" val="236054401"/>
+        <p14:creationId xmlns:p14="http://schemas.microsoft.com/office/powerpoint/2010/main" val="1623387681"/>
       </p:ext>
     </p:extLst>
   </p:cSld>
@@ -8245,109 +14396,44 @@
       </p:grpSpPr>
       <p:sp>
         <p:nvSpPr>
-          <p:cNvPr id="3" name="object 3"/>
-          <p:cNvSpPr/>
-          <p:nvPr/>
+          <p:cNvPr id="4" name="Footer Placeholder 3">
+            <a:extLst>
+              <a:ext uri="{FF2B5EF4-FFF2-40B4-BE49-F238E27FC236}">
+                <a16:creationId xmlns:a16="http://schemas.microsoft.com/office/drawing/2014/main" id="{B29FD2FF-21A0-0794-10A3-A2E2456C49FC}"/>
+              </a:ext>
+            </a:extLst>
+          </p:cNvPr>
+          <p:cNvSpPr>
+            <a:spLocks noGrp="1"/>
+          </p:cNvSpPr>
+          <p:nvPr>
+            <p:ph type="ftr" sz="quarter" idx="5"/>
+          </p:nvPr>
         </p:nvSpPr>
-        <p:spPr>
-          <a:xfrm>
-            <a:off x="3945635" y="2636520"/>
-            <a:ext cx="8246363" cy="1584959"/>
-          </a:xfrm>
-          <a:prstGeom prst="rect">
-            <a:avLst/>
-          </a:prstGeom>
-          <a:blipFill>
-            <a:blip r:embed="rId2" cstate="print"/>
-            <a:stretch>
-              <a:fillRect/>
-            </a:stretch>
-          </a:blipFill>
-        </p:spPr>
+        <p:spPr/>
         <p:txBody>
-          <a:bodyPr wrap="square" lIns="0" tIns="0" rIns="0" bIns="0" rtlCol="0"/>
+          <a:bodyPr/>
           <a:lstStyle/>
           <a:p>
-            <a:endParaRPr/>
+            <a:pPr marL="12700">
+              <a:spcBef>
+                <a:spcPts val="15"/>
+              </a:spcBef>
+            </a:pPr>
+            <a:r>
+              <a:rPr lang="es-ES" spc="-5"/>
+              <a:t>LAB 1.0. WAVEGUIDES</a:t>
+            </a:r>
+            <a:endParaRPr lang="es-ES" spc="-5" dirty="0"/>
           </a:p>
         </p:txBody>
       </p:sp>
       <p:sp>
         <p:nvSpPr>
-          <p:cNvPr id="4" name="object 4"/>
-          <p:cNvSpPr txBox="1">
-            <a:spLocks noGrp="1"/>
-          </p:cNvSpPr>
-          <p:nvPr>
-            <p:ph type="title"/>
-          </p:nvPr>
-        </p:nvSpPr>
-        <p:spPr>
-          <a:xfrm>
-            <a:off x="4513326" y="3165729"/>
-            <a:ext cx="2233295" cy="513715"/>
-          </a:xfrm>
-          <a:prstGeom prst="rect">
-            <a:avLst/>
-          </a:prstGeom>
-        </p:spPr>
-        <p:txBody>
-          <a:bodyPr vert="horz" wrap="square" lIns="0" tIns="13335" rIns="0" bIns="0" rtlCol="0">
-            <a:spAutoFit/>
-          </a:bodyPr>
-          <a:lstStyle/>
-          <a:p>
-            <a:pPr marL="12700">
-              <a:lnSpc>
-                <a:spcPct val="100000"/>
-              </a:lnSpc>
-              <a:spcBef>
-                <a:spcPts val="105"/>
-              </a:spcBef>
-            </a:pPr>
-            <a:r>
-              <a:rPr sz="3200" b="1" spc="-5" dirty="0">
-                <a:solidFill>
-                  <a:srgbClr val="FFFFFF"/>
-                </a:solidFill>
-                <a:latin typeface="Lucida Sans"/>
-                <a:cs typeface="Lucida Sans"/>
-              </a:rPr>
-              <a:t>Thank</a:t>
-            </a:r>
-            <a:r>
-              <a:rPr sz="3200" b="1" spc="-55" dirty="0">
-                <a:solidFill>
-                  <a:srgbClr val="FFFFFF"/>
-                </a:solidFill>
-                <a:latin typeface="Lucida Sans"/>
-                <a:cs typeface="Lucida Sans"/>
-              </a:rPr>
-              <a:t> </a:t>
-            </a:r>
-            <a:r>
-              <a:rPr sz="3200" b="1" dirty="0">
-                <a:solidFill>
-                  <a:srgbClr val="FFFFFF"/>
-                </a:solidFill>
-                <a:latin typeface="Lucida Sans"/>
-                <a:cs typeface="Lucida Sans"/>
-              </a:rPr>
-              <a:t>you</a:t>
-            </a:r>
-            <a:endParaRPr sz="3200">
-              <a:latin typeface="Lucida Sans"/>
-              <a:cs typeface="Lucida Sans"/>
-            </a:endParaRPr>
-          </a:p>
-        </p:txBody>
-      </p:sp>
-      <p:sp>
-        <p:nvSpPr>
-          <p:cNvPr id="5" name="Marcador de número de diapositiva 4">
+          <p:cNvPr id="5" name="Slide Number Placeholder 4">
             <a:extLst>
               <a:ext uri="{FF2B5EF4-FFF2-40B4-BE49-F238E27FC236}">
-                <a16:creationId xmlns:a16="http://schemas.microsoft.com/office/drawing/2014/main" id="{B052DA19-AD24-7D24-2AE9-51F8F5A7F5E0}"/>
+                <a16:creationId xmlns:a16="http://schemas.microsoft.com/office/drawing/2014/main" id="{8E90FDAE-F86B-C2EB-5701-7575E72FDC11}"/>
               </a:ext>
             </a:extLst>
           </p:cNvPr>
@@ -8364,14 +14450,68 @@
           <a:lstStyle/>
           <a:p>
             <a:fld id="{B6F15528-21DE-4FAA-801E-634DDDAF4B2B}" type="slidenum">
-              <a:rPr lang="es-ES" smtClean="0"/>
+              <a:rPr lang="es-CO" smtClean="0"/>
               <a:t>9</a:t>
             </a:fld>
-            <a:endParaRPr lang="es-ES"/>
+            <a:endParaRPr lang="es-CO"/>
+          </a:p>
+        </p:txBody>
+      </p:sp>
+      <p:sp>
+        <p:nvSpPr>
+          <p:cNvPr id="6" name="object 3">
+            <a:extLst>
+              <a:ext uri="{FF2B5EF4-FFF2-40B4-BE49-F238E27FC236}">
+                <a16:creationId xmlns:a16="http://schemas.microsoft.com/office/drawing/2014/main" id="{DAE5BB78-9D88-4FD5-45EA-A86D69257267}"/>
+              </a:ext>
+            </a:extLst>
+          </p:cNvPr>
+          <p:cNvSpPr txBox="1"/>
+          <p:nvPr/>
+        </p:nvSpPr>
+        <p:spPr>
+          <a:xfrm>
+            <a:off x="5372100" y="2743200"/>
+            <a:ext cx="1447800" cy="513715"/>
+          </a:xfrm>
+          <a:prstGeom prst="rect">
+            <a:avLst/>
+          </a:prstGeom>
+        </p:spPr>
+        <p:txBody>
+          <a:bodyPr vert="horz" wrap="square" lIns="0" tIns="12700" rIns="0" bIns="0" rtlCol="0">
+            <a:spAutoFit/>
+          </a:bodyPr>
+          <a:lstStyle/>
+          <a:p>
+            <a:pPr marL="12700" algn="ctr">
+              <a:lnSpc>
+                <a:spcPct val="100000"/>
+              </a:lnSpc>
+              <a:spcBef>
+                <a:spcPts val="100"/>
+              </a:spcBef>
+            </a:pPr>
+            <a:r>
+              <a:rPr lang="es-ES" sz="3200" b="1" dirty="0">
+                <a:latin typeface="Lucida Sans"/>
+                <a:cs typeface="Lucida Sans"/>
+              </a:rPr>
+              <a:t>Extras</a:t>
+            </a:r>
+            <a:endParaRPr sz="3200" dirty="0">
+              <a:latin typeface="Lucida Sans"/>
+              <a:cs typeface="Lucida Sans"/>
+            </a:endParaRPr>
           </a:p>
         </p:txBody>
       </p:sp>
     </p:spTree>
+    <p:extLst>
+      <p:ext uri="{BB962C8B-B14F-4D97-AF65-F5344CB8AC3E}">
+        <p14:creationId xmlns:p14="http://schemas.microsoft.com/office/powerpoint/2010/main" val="905725830"/>
+      </p:ext>
+    </p:extLst>
   </p:cSld>
   <p:clrMapOvr>
     <a:masterClrMapping/>

--- a/LabBook_10.pptx
+++ b/LabBook_10.pptx
@@ -5,10 +5,10 @@
     <p:sldMasterId id="2147483648" r:id="rId1"/>
   </p:sldMasterIdLst>
   <p:notesMasterIdLst>
-    <p:notesMasterId r:id="rId14"/>
+    <p:notesMasterId r:id="rId15"/>
   </p:notesMasterIdLst>
   <p:handoutMasterIdLst>
-    <p:handoutMasterId r:id="rId15"/>
+    <p:handoutMasterId r:id="rId16"/>
   </p:handoutMasterIdLst>
   <p:sldIdLst>
     <p:sldId id="256" r:id="rId2"/>
@@ -22,7 +22,8 @@
     <p:sldId id="300" r:id="rId10"/>
     <p:sldId id="301" r:id="rId11"/>
     <p:sldId id="302" r:id="rId12"/>
-    <p:sldId id="288" r:id="rId13"/>
+    <p:sldId id="306" r:id="rId13"/>
+    <p:sldId id="288" r:id="rId14"/>
   </p:sldIdLst>
   <p:sldSz cx="12192000" cy="6858000"/>
   <p:notesSz cx="12192000" cy="6858000"/>
@@ -1597,6 +1598,114 @@
 </p:notes>
 </file>
 
+<file path=ppt/notesSlides/notesSlide8.xml><?xml version="1.0" encoding="utf-8"?>
+<p:notes xmlns:a="http://schemas.openxmlformats.org/drawingml/2006/main" xmlns:r="http://schemas.openxmlformats.org/officeDocument/2006/relationships" xmlns:p="http://schemas.openxmlformats.org/presentationml/2006/main">
+  <p:cSld>
+    <p:spTree>
+      <p:nvGrpSpPr>
+        <p:cNvPr id="1" name="">
+          <a:extLst>
+            <a:ext uri="{FF2B5EF4-FFF2-40B4-BE49-F238E27FC236}">
+              <a16:creationId xmlns:a16="http://schemas.microsoft.com/office/drawing/2014/main" id="{7ABD7477-A31A-12AF-5704-A25FDE618EFF}"/>
+            </a:ext>
+          </a:extLst>
+        </p:cNvPr>
+        <p:cNvGrpSpPr/>
+        <p:nvPr/>
+      </p:nvGrpSpPr>
+      <p:grpSpPr>
+        <a:xfrm>
+          <a:off x="0" y="0"/>
+          <a:ext cx="0" cy="0"/>
+          <a:chOff x="0" y="0"/>
+          <a:chExt cx="0" cy="0"/>
+        </a:xfrm>
+      </p:grpSpPr>
+      <p:sp>
+        <p:nvSpPr>
+          <p:cNvPr id="2" name="Marcador de imagen de diapositiva 1">
+            <a:extLst>
+              <a:ext uri="{FF2B5EF4-FFF2-40B4-BE49-F238E27FC236}">
+                <a16:creationId xmlns:a16="http://schemas.microsoft.com/office/drawing/2014/main" id="{6D893BBD-A876-AD91-E2FF-4EAABE3D8AB9}"/>
+              </a:ext>
+            </a:extLst>
+          </p:cNvPr>
+          <p:cNvSpPr>
+            <a:spLocks noGrp="1" noRot="1" noChangeAspect="1"/>
+          </p:cNvSpPr>
+          <p:nvPr>
+            <p:ph type="sldImg"/>
+          </p:nvPr>
+        </p:nvSpPr>
+        <p:spPr/>
+      </p:sp>
+      <p:sp>
+        <p:nvSpPr>
+          <p:cNvPr id="3" name="Marcador de notas 2">
+            <a:extLst>
+              <a:ext uri="{FF2B5EF4-FFF2-40B4-BE49-F238E27FC236}">
+                <a16:creationId xmlns:a16="http://schemas.microsoft.com/office/drawing/2014/main" id="{08A7857F-CEDD-0E01-C7EA-77EC3D1A0892}"/>
+              </a:ext>
+            </a:extLst>
+          </p:cNvPr>
+          <p:cNvSpPr>
+            <a:spLocks noGrp="1"/>
+          </p:cNvSpPr>
+          <p:nvPr>
+            <p:ph type="body" idx="1"/>
+          </p:nvPr>
+        </p:nvSpPr>
+        <p:spPr/>
+        <p:txBody>
+          <a:bodyPr/>
+          <a:lstStyle/>
+          <a:p>
+            <a:endParaRPr lang="es-ES" dirty="0"/>
+          </a:p>
+        </p:txBody>
+      </p:sp>
+      <p:sp>
+        <p:nvSpPr>
+          <p:cNvPr id="4" name="Marcador de número de diapositiva 3">
+            <a:extLst>
+              <a:ext uri="{FF2B5EF4-FFF2-40B4-BE49-F238E27FC236}">
+                <a16:creationId xmlns:a16="http://schemas.microsoft.com/office/drawing/2014/main" id="{4F09EE65-34B4-2788-BEEF-2A3DBF2B1B7D}"/>
+              </a:ext>
+            </a:extLst>
+          </p:cNvPr>
+          <p:cNvSpPr>
+            <a:spLocks noGrp="1"/>
+          </p:cNvSpPr>
+          <p:nvPr>
+            <p:ph type="sldNum" sz="quarter" idx="5"/>
+          </p:nvPr>
+        </p:nvSpPr>
+        <p:spPr/>
+        <p:txBody>
+          <a:bodyPr/>
+          <a:lstStyle/>
+          <a:p>
+            <a:fld id="{676223B9-C868-4436-87D9-1A3152E1157A}" type="slidenum">
+              <a:rPr lang="es-ES" smtClean="0"/>
+              <a:t>12</a:t>
+            </a:fld>
+            <a:endParaRPr lang="es-ES"/>
+          </a:p>
+        </p:txBody>
+      </p:sp>
+    </p:spTree>
+    <p:extLst>
+      <p:ext uri="{BB962C8B-B14F-4D97-AF65-F5344CB8AC3E}">
+        <p14:creationId xmlns:p14="http://schemas.microsoft.com/office/powerpoint/2010/main" val="1585211807"/>
+      </p:ext>
+    </p:extLst>
+  </p:cSld>
+  <p:clrMapOvr>
+    <a:masterClrMapping/>
+  </p:clrMapOvr>
+</p:notes>
+</file>
+
 <file path=ppt/slideLayouts/slideLayout1.xml><?xml version="1.0" encoding="utf-8"?>
 <p:sldLayout xmlns:a="http://schemas.openxmlformats.org/drawingml/2006/main" xmlns:r="http://schemas.openxmlformats.org/officeDocument/2006/relationships" xmlns:p="http://schemas.openxmlformats.org/presentationml/2006/main" type="obj" preserve="1">
   <p:cSld name="Title Slide">
@@ -3427,8 +3536,8 @@
           </a:p>
         </p:txBody>
       </p:sp>
-      <mc:AlternateContent xmlns:mc="http://schemas.openxmlformats.org/markup-compatibility/2006">
-        <mc:Choice xmlns:a14="http://schemas.microsoft.com/office/drawing/2010/main" Requires="a14">
+      <mc:AlternateContent xmlns:mc="http://schemas.openxmlformats.org/markup-compatibility/2006" xmlns:a14="http://schemas.microsoft.com/office/drawing/2010/main">
+        <mc:Choice Requires="a14">
           <p:sp>
             <p:nvSpPr>
               <p:cNvPr id="10" name="CuadroTexto 9">
@@ -3740,7 +3849,9 @@
                     <m:sSub>
                       <m:sSubPr>
                         <m:ctrlPr>
-                          <a:rPr lang="ar-AE" sz="1200"/>
+                          <a:rPr lang="ar-AE" sz="1200" i="1">
+                            <a:latin typeface="Cambria Math" panose="02040503050406030204" pitchFamily="18" charset="0"/>
+                          </a:rPr>
                         </m:ctrlPr>
                       </m:sSubPr>
                       <m:e>
@@ -3748,7 +3859,9 @@
                           <m:rPr>
                             <m:sty m:val="p"/>
                           </m:rPr>
-                          <a:rPr lang="ar-AE" sz="1200" b="0" i="1"/>
+                          <a:rPr lang="ar-AE" sz="1200" b="0" i="1">
+                            <a:latin typeface="Cambria Math" panose="02040503050406030204" pitchFamily="18" charset="0"/>
+                          </a:rPr>
                           <m:t>n</m:t>
                         </m:r>
                       </m:e>
@@ -3763,26 +3876,28 @@
                       </m:sub>
                     </m:sSub>
                     <m:r>
-                      <a:rPr lang="ar-AE" sz="1200" b="0"/>
+                      <a:rPr lang="ar-AE" sz="1200" b="0">
+                        <a:latin typeface="Cambria Math" panose="02040503050406030204" pitchFamily="18" charset="0"/>
+                      </a:rPr>
                       <m:t>≈</m:t>
                     </m:r>
                     <m:r>
-                      <a:rPr lang="ar-AE" sz="1200" b="0"/>
+                      <a:rPr lang="ar-AE" sz="1200" b="0">
+                        <a:latin typeface="Cambria Math" panose="02040503050406030204" pitchFamily="18" charset="0"/>
+                      </a:rPr>
                       <m:t>2</m:t>
                     </m:r>
                     <m:r>
-                      <a:rPr lang="ar-AE" sz="1200" b="0"/>
+                      <a:rPr lang="ar-AE" sz="1200" b="0">
+                        <a:latin typeface="Cambria Math" panose="02040503050406030204" pitchFamily="18" charset="0"/>
+                      </a:rPr>
                       <m:t>.</m:t>
                     </m:r>
                     <m:r>
-                      <a:rPr lang="ar-AE" sz="1200" b="0"/>
-                      <m:t>44</m:t>
-                    </m:r>
-                    <m:r>
-                      <a:rPr lang="es-MX" sz="1200" b="0" i="0" smtClean="0">
+                      <a:rPr lang="ar-AE" sz="1200" b="0">
                         <a:latin typeface="Cambria Math" panose="02040503050406030204" pitchFamily="18" charset="0"/>
                       </a:rPr>
-                      <m:t>3</m:t>
+                      <m:t>443</m:t>
                     </m:r>
                   </m:oMath>
                 </a14:m>
@@ -3818,12 +3933,16 @@
                     <m:sSub>
                       <m:sSubPr>
                         <m:ctrlPr>
-                          <a:rPr lang="es-CO" sz="1200"/>
+                          <a:rPr lang="es-CO" sz="1200" i="1">
+                            <a:latin typeface="Cambria Math" panose="02040503050406030204" pitchFamily="18" charset="0"/>
+                          </a:rPr>
                         </m:ctrlPr>
                       </m:sSubPr>
                       <m:e>
                         <m:r>
-                          <a:rPr lang="es-CO" sz="1200"/>
+                          <a:rPr lang="es-CO" sz="1200">
+                            <a:latin typeface="Cambria Math" panose="02040503050406030204" pitchFamily="18" charset="0"/>
+                          </a:rPr>
                           <m:t>𝑛</m:t>
                         </m:r>
                       </m:e>
@@ -3838,7 +3957,9 @@
                       </m:sub>
                     </m:sSub>
                     <m:r>
-                      <a:rPr lang="en-US" sz="1200"/>
+                      <a:rPr lang="en-US" sz="1200">
+                        <a:latin typeface="Cambria Math" panose="02040503050406030204" pitchFamily="18" charset="0"/>
+                      </a:rPr>
                       <m:t>≈</m:t>
                     </m:r>
                   </m:oMath>
@@ -3860,7 +3981,7 @@
             </p:txBody>
           </p:sp>
         </mc:Choice>
-        <mc:Fallback>
+        <mc:Fallback xmlns="">
           <p:sp>
             <p:nvSpPr>
               <p:cNvPr id="10" name="CuadroTexto 9">
@@ -4742,6 +4863,447 @@
   <p:cSld>
     <p:spTree>
       <p:nvGrpSpPr>
+        <p:cNvPr id="1" name="">
+          <a:extLst>
+            <a:ext uri="{FF2B5EF4-FFF2-40B4-BE49-F238E27FC236}">
+              <a16:creationId xmlns:a16="http://schemas.microsoft.com/office/drawing/2014/main" id="{42C988F9-DEBC-5A60-37F6-C72FA4E1E98A}"/>
+            </a:ext>
+          </a:extLst>
+        </p:cNvPr>
+        <p:cNvGrpSpPr/>
+        <p:nvPr/>
+      </p:nvGrpSpPr>
+      <p:grpSpPr>
+        <a:xfrm>
+          <a:off x="0" y="0"/>
+          <a:ext cx="0" cy="0"/>
+          <a:chOff x="0" y="0"/>
+          <a:chExt cx="0" cy="0"/>
+        </a:xfrm>
+      </p:grpSpPr>
+      <p:pic>
+        <p:nvPicPr>
+          <p:cNvPr id="9" name="Picture 8">
+            <a:extLst>
+              <a:ext uri="{FF2B5EF4-FFF2-40B4-BE49-F238E27FC236}">
+                <a16:creationId xmlns:a16="http://schemas.microsoft.com/office/drawing/2014/main" id="{E0ACB417-0DCB-13A4-3E8B-9D3D0DBBA177}"/>
+              </a:ext>
+            </a:extLst>
+          </p:cNvPr>
+          <p:cNvPicPr>
+            <a:picLocks noChangeAspect="1"/>
+          </p:cNvPicPr>
+          <p:nvPr/>
+        </p:nvPicPr>
+        <p:blipFill>
+          <a:blip r:embed="rId3">
+            <a:extLst>
+              <a:ext uri="{28A0092B-C50C-407E-A947-70E740481C1C}">
+                <a14:useLocalDpi xmlns:a14="http://schemas.microsoft.com/office/drawing/2010/main" val="0"/>
+              </a:ext>
+            </a:extLst>
+          </a:blip>
+          <a:stretch>
+            <a:fillRect/>
+          </a:stretch>
+        </p:blipFill>
+        <p:spPr>
+          <a:xfrm>
+            <a:off x="6385549" y="914400"/>
+            <a:ext cx="5349251" cy="4023368"/>
+          </a:xfrm>
+          <a:prstGeom prst="rect">
+            <a:avLst/>
+          </a:prstGeom>
+        </p:spPr>
+      </p:pic>
+      <p:pic>
+        <p:nvPicPr>
+          <p:cNvPr id="12" name="Picture 11">
+            <a:extLst>
+              <a:ext uri="{FF2B5EF4-FFF2-40B4-BE49-F238E27FC236}">
+                <a16:creationId xmlns:a16="http://schemas.microsoft.com/office/drawing/2014/main" id="{D0CEA290-416D-F214-C95F-D425AB69E10B}"/>
+              </a:ext>
+            </a:extLst>
+          </p:cNvPr>
+          <p:cNvPicPr>
+            <a:picLocks noChangeAspect="1"/>
+          </p:cNvPicPr>
+          <p:nvPr/>
+        </p:nvPicPr>
+        <p:blipFill>
+          <a:blip r:embed="rId4">
+            <a:extLst>
+              <a:ext uri="{28A0092B-C50C-407E-A947-70E740481C1C}">
+                <a14:useLocalDpi xmlns:a14="http://schemas.microsoft.com/office/drawing/2010/main" val="0"/>
+              </a:ext>
+            </a:extLst>
+          </a:blip>
+          <a:stretch>
+            <a:fillRect/>
+          </a:stretch>
+        </p:blipFill>
+        <p:spPr>
+          <a:xfrm>
+            <a:off x="609600" y="914400"/>
+            <a:ext cx="5349251" cy="4023368"/>
+          </a:xfrm>
+          <a:prstGeom prst="rect">
+            <a:avLst/>
+          </a:prstGeom>
+        </p:spPr>
+      </p:pic>
+      <p:pic>
+        <p:nvPicPr>
+          <p:cNvPr id="83" name="Gráfico 82">
+            <a:extLst>
+              <a:ext uri="{FF2B5EF4-FFF2-40B4-BE49-F238E27FC236}">
+                <a16:creationId xmlns:a16="http://schemas.microsoft.com/office/drawing/2014/main" id="{CF43C3A0-265F-31E1-2BBC-C1F84FF58531}"/>
+              </a:ext>
+            </a:extLst>
+          </p:cNvPr>
+          <p:cNvPicPr>
+            <a:picLocks noChangeAspect="1"/>
+          </p:cNvPicPr>
+          <p:nvPr/>
+        </p:nvPicPr>
+        <p:blipFill>
+          <a:blip r:embed="rId5">
+            <a:extLst>
+              <a:ext uri="{96DAC541-7B7A-43D3-8B79-37D633B846F1}">
+                <asvg:svgBlip xmlns:asvg="http://schemas.microsoft.com/office/drawing/2016/SVG/main" r:embed="rId6"/>
+              </a:ext>
+            </a:extLst>
+          </a:blip>
+          <a:stretch>
+            <a:fillRect/>
+          </a:stretch>
+        </p:blipFill>
+        <p:spPr>
+          <a:xfrm>
+            <a:off x="5045006" y="6356057"/>
+            <a:ext cx="6409575" cy="363174"/>
+          </a:xfrm>
+          <a:prstGeom prst="rect">
+            <a:avLst/>
+          </a:prstGeom>
+        </p:spPr>
+      </p:pic>
+      <p:sp>
+        <p:nvSpPr>
+          <p:cNvPr id="84" name="Marcador de número de diapositiva 83">
+            <a:extLst>
+              <a:ext uri="{FF2B5EF4-FFF2-40B4-BE49-F238E27FC236}">
+                <a16:creationId xmlns:a16="http://schemas.microsoft.com/office/drawing/2014/main" id="{BBCF3F94-3E91-FC75-F014-8DBEAE4FBFB9}"/>
+              </a:ext>
+            </a:extLst>
+          </p:cNvPr>
+          <p:cNvSpPr>
+            <a:spLocks noGrp="1"/>
+          </p:cNvSpPr>
+          <p:nvPr>
+            <p:ph type="sldNum" sz="quarter" idx="7"/>
+          </p:nvPr>
+        </p:nvSpPr>
+        <p:spPr/>
+        <p:txBody>
+          <a:bodyPr/>
+          <a:lstStyle/>
+          <a:p>
+            <a:fld id="{B6F15528-21DE-4FAA-801E-634DDDAF4B2B}" type="slidenum">
+              <a:rPr lang="es-ES" smtClean="0"/>
+              <a:t>12</a:t>
+            </a:fld>
+            <a:endParaRPr lang="es-ES"/>
+          </a:p>
+        </p:txBody>
+      </p:sp>
+      <p:sp>
+        <p:nvSpPr>
+          <p:cNvPr id="3" name="Marcador de pie de página 2">
+            <a:extLst>
+              <a:ext uri="{FF2B5EF4-FFF2-40B4-BE49-F238E27FC236}">
+                <a16:creationId xmlns:a16="http://schemas.microsoft.com/office/drawing/2014/main" id="{7DB307F9-A2C9-8E22-9D2B-4E342C70C60B}"/>
+              </a:ext>
+            </a:extLst>
+          </p:cNvPr>
+          <p:cNvSpPr>
+            <a:spLocks noGrp="1"/>
+          </p:cNvSpPr>
+          <p:nvPr>
+            <p:ph type="ftr" sz="quarter" idx="5"/>
+          </p:nvPr>
+        </p:nvSpPr>
+        <p:spPr/>
+        <p:txBody>
+          <a:bodyPr/>
+          <a:lstStyle/>
+          <a:p>
+            <a:pPr marL="12700">
+              <a:spcBef>
+                <a:spcPts val="15"/>
+              </a:spcBef>
+            </a:pPr>
+            <a:r>
+              <a:rPr lang="es-ES" spc="-5"/>
+              <a:t>LAB 1.0. WAVEGUIDES</a:t>
+            </a:r>
+            <a:endParaRPr lang="es-ES" spc="-5" dirty="0"/>
+          </a:p>
+        </p:txBody>
+      </p:sp>
+      <p:sp>
+        <p:nvSpPr>
+          <p:cNvPr id="10" name="CuadroTexto 9">
+            <a:extLst>
+              <a:ext uri="{FF2B5EF4-FFF2-40B4-BE49-F238E27FC236}">
+                <a16:creationId xmlns:a16="http://schemas.microsoft.com/office/drawing/2014/main" id="{415C7420-B9C4-9428-6402-6B7248B0D2D0}"/>
+              </a:ext>
+            </a:extLst>
+          </p:cNvPr>
+          <p:cNvSpPr txBox="1"/>
+          <p:nvPr/>
+        </p:nvSpPr>
+        <p:spPr>
+          <a:xfrm>
+            <a:off x="593693" y="5015552"/>
+            <a:ext cx="11199971" cy="276999"/>
+          </a:xfrm>
+          <a:prstGeom prst="rect">
+            <a:avLst/>
+          </a:prstGeom>
+          <a:solidFill>
+            <a:schemeClr val="bg1">
+              <a:lumMod val="95000"/>
+            </a:schemeClr>
+          </a:solidFill>
+          <a:ln w="28575">
+            <a:solidFill>
+              <a:srgbClr val="E0700D"/>
+            </a:solidFill>
+          </a:ln>
+        </p:spPr>
+        <p:txBody>
+          <a:bodyPr wrap="square" rtlCol="0">
+            <a:spAutoFit/>
+          </a:bodyPr>
+          <a:lstStyle/>
+          <a:p>
+            <a:pPr algn="just"/>
+            <a:r>
+              <a:rPr lang="en-US" sz="1200" dirty="0"/>
+              <a:t>With SOI technology, bend radii as small as 5 </a:t>
+            </a:r>
+            <a:r>
+              <a:rPr lang="en-US" sz="1200" dirty="0" err="1"/>
+              <a:t>μm</a:t>
+            </a:r>
+            <a:r>
+              <a:rPr lang="en-US" sz="1200" dirty="0"/>
+              <a:t> can be achieved without exceeding losses of 0.1 </a:t>
+            </a:r>
+            <a:r>
+              <a:rPr lang="en-US" sz="1200" dirty="0" err="1"/>
+              <a:t>dB.</a:t>
+            </a:r>
+            <a:r>
+              <a:rPr lang="en-US" sz="1200" dirty="0"/>
+              <a:t> This is due to the stronger optical confinement provided by SOI waveguides.</a:t>
+            </a:r>
+            <a:endParaRPr lang="es-CO" sz="1200" dirty="0"/>
+          </a:p>
+        </p:txBody>
+      </p:sp>
+      <p:sp>
+        <p:nvSpPr>
+          <p:cNvPr id="6" name="Rectángulo 5">
+            <a:extLst>
+              <a:ext uri="{FF2B5EF4-FFF2-40B4-BE49-F238E27FC236}">
+                <a16:creationId xmlns:a16="http://schemas.microsoft.com/office/drawing/2014/main" id="{AACFE2DC-5CAB-D9A4-951F-493FF9D6444F}"/>
+              </a:ext>
+            </a:extLst>
+          </p:cNvPr>
+          <p:cNvSpPr/>
+          <p:nvPr/>
+        </p:nvSpPr>
+        <p:spPr>
+          <a:xfrm>
+            <a:off x="601313" y="914400"/>
+            <a:ext cx="5486559" cy="4023368"/>
+          </a:xfrm>
+          <a:prstGeom prst="rect">
+            <a:avLst/>
+          </a:prstGeom>
+          <a:noFill/>
+          <a:ln w="28575">
+            <a:solidFill>
+              <a:srgbClr val="E0700D"/>
+            </a:solidFill>
+          </a:ln>
+        </p:spPr>
+        <p:style>
+          <a:lnRef idx="2">
+            <a:schemeClr val="accent1">
+              <a:shade val="15000"/>
+            </a:schemeClr>
+          </a:lnRef>
+          <a:fillRef idx="1">
+            <a:schemeClr val="accent1"/>
+          </a:fillRef>
+          <a:effectRef idx="0">
+            <a:schemeClr val="accent1"/>
+          </a:effectRef>
+          <a:fontRef idx="minor">
+            <a:schemeClr val="lt1"/>
+          </a:fontRef>
+        </p:style>
+        <p:txBody>
+          <a:bodyPr rtlCol="0" anchor="ctr"/>
+          <a:lstStyle/>
+          <a:p>
+            <a:pPr algn="ctr"/>
+            <a:endParaRPr lang="en-US"/>
+          </a:p>
+        </p:txBody>
+      </p:sp>
+      <p:sp>
+        <p:nvSpPr>
+          <p:cNvPr id="20" name="Rectángulo 5">
+            <a:extLst>
+              <a:ext uri="{FF2B5EF4-FFF2-40B4-BE49-F238E27FC236}">
+                <a16:creationId xmlns:a16="http://schemas.microsoft.com/office/drawing/2014/main" id="{CA68AF07-EB65-9E1D-B96C-CE5A0A6E5490}"/>
+              </a:ext>
+            </a:extLst>
+          </p:cNvPr>
+          <p:cNvSpPr/>
+          <p:nvPr/>
+        </p:nvSpPr>
+        <p:spPr>
+          <a:xfrm>
+            <a:off x="6307105" y="914400"/>
+            <a:ext cx="5486559" cy="4023368"/>
+          </a:xfrm>
+          <a:prstGeom prst="rect">
+            <a:avLst/>
+          </a:prstGeom>
+          <a:noFill/>
+          <a:ln w="28575">
+            <a:solidFill>
+              <a:srgbClr val="E0700D"/>
+            </a:solidFill>
+          </a:ln>
+        </p:spPr>
+        <p:style>
+          <a:lnRef idx="2">
+            <a:schemeClr val="accent1">
+              <a:shade val="15000"/>
+            </a:schemeClr>
+          </a:lnRef>
+          <a:fillRef idx="1">
+            <a:schemeClr val="accent1"/>
+          </a:fillRef>
+          <a:effectRef idx="0">
+            <a:schemeClr val="accent1"/>
+          </a:effectRef>
+          <a:fontRef idx="minor">
+            <a:schemeClr val="lt1"/>
+          </a:fontRef>
+        </p:style>
+        <p:txBody>
+          <a:bodyPr rtlCol="0" anchor="ctr"/>
+          <a:lstStyle/>
+          <a:p>
+            <a:pPr algn="ctr"/>
+            <a:endParaRPr lang="en-US"/>
+          </a:p>
+        </p:txBody>
+      </p:sp>
+      <p:sp>
+        <p:nvSpPr>
+          <p:cNvPr id="2" name="object 16">
+            <a:extLst>
+              <a:ext uri="{FF2B5EF4-FFF2-40B4-BE49-F238E27FC236}">
+                <a16:creationId xmlns:a16="http://schemas.microsoft.com/office/drawing/2014/main" id="{B7B8D17C-FDD1-FF0B-4808-067E3C1CD6C8}"/>
+              </a:ext>
+            </a:extLst>
+          </p:cNvPr>
+          <p:cNvSpPr txBox="1">
+            <a:spLocks noGrp="1"/>
+          </p:cNvSpPr>
+          <p:nvPr>
+            <p:ph type="title"/>
+          </p:nvPr>
+        </p:nvSpPr>
+        <p:spPr>
+          <a:xfrm>
+            <a:off x="590667" y="37322"/>
+            <a:ext cx="10994410" cy="1090042"/>
+          </a:xfrm>
+          <a:prstGeom prst="rect">
+            <a:avLst/>
+          </a:prstGeom>
+        </p:spPr>
+        <p:txBody>
+          <a:bodyPr vert="horz" wrap="square" lIns="0" tIns="12700" rIns="0" bIns="0" rtlCol="0">
+            <a:spAutoFit/>
+          </a:bodyPr>
+          <a:lstStyle/>
+          <a:p>
+            <a:pPr marL="12700">
+              <a:lnSpc>
+                <a:spcPct val="100000"/>
+              </a:lnSpc>
+              <a:spcBef>
+                <a:spcPts val="100"/>
+              </a:spcBef>
+            </a:pPr>
+            <a:r>
+              <a:rPr lang="en-US" sz="2500" dirty="0"/>
+              <a:t>Learning outcome #4 – Bend waveguide radius vs. loss – deep</a:t>
+            </a:r>
+            <a:br>
+              <a:rPr lang="en-US" sz="2500" dirty="0"/>
+            </a:br>
+            <a:r>
+              <a:rPr lang="en-US" b="0" dirty="0"/>
+              <a:t>Find  neff_TE0 for </a:t>
+            </a:r>
+            <a:r>
+              <a:rPr lang="en-US" b="0" dirty="0" err="1"/>
+              <a:t>wvl</a:t>
+            </a:r>
+            <a:r>
+              <a:rPr lang="en-US" b="0" dirty="0"/>
+              <a:t> 1.55 µm</a:t>
+            </a:r>
+            <a:br>
+              <a:rPr lang="en-US" sz="2500" dirty="0"/>
+            </a:br>
+            <a:endParaRPr lang="en-US" sz="2500" b="0" dirty="0">
+              <a:latin typeface="+mj-lt"/>
+              <a:cs typeface="Lucida Sans"/>
+            </a:endParaRPr>
+          </a:p>
+        </p:txBody>
+      </p:sp>
+    </p:spTree>
+    <p:extLst>
+      <p:ext uri="{BB962C8B-B14F-4D97-AF65-F5344CB8AC3E}">
+        <p14:creationId xmlns:p14="http://schemas.microsoft.com/office/powerpoint/2010/main" val="1662452170"/>
+      </p:ext>
+    </p:extLst>
+  </p:cSld>
+  <p:clrMapOvr>
+    <a:masterClrMapping/>
+  </p:clrMapOvr>
+</p:sld>
+</file>
+
+<file path=ppt/slides/slide13.xml><?xml version="1.0" encoding="utf-8"?>
+<p:sld xmlns:a="http://schemas.openxmlformats.org/drawingml/2006/main" xmlns:r="http://schemas.openxmlformats.org/officeDocument/2006/relationships" xmlns:p="http://schemas.openxmlformats.org/presentationml/2006/main">
+  <p:cSld>
+    <p:spTree>
+      <p:nvGrpSpPr>
         <p:cNvPr id="1" name=""/>
         <p:cNvGrpSpPr/>
         <p:nvPr/>
@@ -4876,7 +5438,7 @@
           <a:p>
             <a:fld id="{B6F15528-21DE-4FAA-801E-634DDDAF4B2B}" type="slidenum">
               <a:rPr lang="es-ES" smtClean="0"/>
-              <a:t>12</a:t>
+              <a:t>13</a:t>
             </a:fld>
             <a:endParaRPr lang="es-ES"/>
           </a:p>
@@ -7677,8 +8239,8 @@
           <a:chExt cx="0" cy="0"/>
         </a:xfrm>
       </p:grpSpPr>
-      <mc:AlternateContent xmlns:mc="http://schemas.openxmlformats.org/markup-compatibility/2006">
-        <mc:Choice xmlns:a14="http://schemas.microsoft.com/office/drawing/2010/main" Requires="a14">
+      <mc:AlternateContent xmlns:mc="http://schemas.openxmlformats.org/markup-compatibility/2006" xmlns:a14="http://schemas.microsoft.com/office/drawing/2010/main">
+        <mc:Choice Requires="a14">
           <p:sp>
             <p:nvSpPr>
               <p:cNvPr id="24" name="Rectangle 23">
@@ -7864,7 +8426,7 @@
             </p:txBody>
           </p:sp>
         </mc:Choice>
-        <mc:Fallback>
+        <mc:Fallback xmlns="">
           <p:sp>
             <p:nvSpPr>
               <p:cNvPr id="24" name="Rectangle 23">
@@ -7977,8 +8539,8 @@
           </a:p>
         </p:txBody>
       </p:sp>
-      <mc:AlternateContent xmlns:mc="http://schemas.openxmlformats.org/markup-compatibility/2006">
-        <mc:Choice xmlns:a14="http://schemas.microsoft.com/office/drawing/2010/main" Requires="a14">
+      <mc:AlternateContent xmlns:mc="http://schemas.openxmlformats.org/markup-compatibility/2006" xmlns:a14="http://schemas.microsoft.com/office/drawing/2010/main">
+        <mc:Choice Requires="a14">
           <p:sp>
             <p:nvSpPr>
               <p:cNvPr id="13" name="TextBox 12">
@@ -8219,7 +8781,7 @@
             </p:txBody>
           </p:sp>
         </mc:Choice>
-        <mc:Fallback>
+        <mc:Fallback xmlns="">
           <p:sp>
             <p:nvSpPr>
               <p:cNvPr id="13" name="TextBox 12">
@@ -8264,8 +8826,8 @@
           </p:sp>
         </mc:Fallback>
       </mc:AlternateContent>
-      <mc:AlternateContent xmlns:mc="http://schemas.openxmlformats.org/markup-compatibility/2006">
-        <mc:Choice xmlns:a14="http://schemas.microsoft.com/office/drawing/2010/main" Requires="a14">
+      <mc:AlternateContent xmlns:mc="http://schemas.openxmlformats.org/markup-compatibility/2006" xmlns:a14="http://schemas.microsoft.com/office/drawing/2010/main">
+        <mc:Choice Requires="a14">
           <p:sp>
             <p:nvSpPr>
               <p:cNvPr id="17" name="TextBox 16">
@@ -8461,7 +9023,7 @@
             </p:txBody>
           </p:sp>
         </mc:Choice>
-        <mc:Fallback>
+        <mc:Fallback xmlns="">
           <p:sp>
             <p:nvSpPr>
               <p:cNvPr id="17" name="TextBox 16">
@@ -8506,8 +9068,8 @@
           </p:sp>
         </mc:Fallback>
       </mc:AlternateContent>
-      <mc:AlternateContent xmlns:mc="http://schemas.openxmlformats.org/markup-compatibility/2006">
-        <mc:Choice xmlns:a14="http://schemas.microsoft.com/office/drawing/2010/main" Requires="a14">
+      <mc:AlternateContent xmlns:mc="http://schemas.openxmlformats.org/markup-compatibility/2006" xmlns:a14="http://schemas.microsoft.com/office/drawing/2010/main">
+        <mc:Choice Requires="a14">
           <p:sp>
             <p:nvSpPr>
               <p:cNvPr id="20" name="TextBox 19">
@@ -8627,7 +9189,7 @@
             </p:txBody>
           </p:sp>
         </mc:Choice>
-        <mc:Fallback>
+        <mc:Fallback xmlns="">
           <p:sp>
             <p:nvSpPr>
               <p:cNvPr id="20" name="TextBox 19">
@@ -8672,8 +9234,8 @@
           </p:sp>
         </mc:Fallback>
       </mc:AlternateContent>
-      <mc:AlternateContent xmlns:mc="http://schemas.openxmlformats.org/markup-compatibility/2006">
-        <mc:Choice xmlns:a14="http://schemas.microsoft.com/office/drawing/2010/main" Requires="a14">
+      <mc:AlternateContent xmlns:mc="http://schemas.openxmlformats.org/markup-compatibility/2006" xmlns:a14="http://schemas.microsoft.com/office/drawing/2010/main">
+        <mc:Choice Requires="a14">
           <p:sp>
             <p:nvSpPr>
               <p:cNvPr id="21" name="TextBox 20">
@@ -8829,7 +9391,7 @@
             </p:txBody>
           </p:sp>
         </mc:Choice>
-        <mc:Fallback>
+        <mc:Fallback xmlns="">
           <p:sp>
             <p:nvSpPr>
               <p:cNvPr id="21" name="TextBox 20">
@@ -8874,8 +9436,8 @@
           </p:sp>
         </mc:Fallback>
       </mc:AlternateContent>
-      <mc:AlternateContent xmlns:mc="http://schemas.openxmlformats.org/markup-compatibility/2006">
-        <mc:Choice xmlns:a14="http://schemas.microsoft.com/office/drawing/2010/main" Requires="a14">
+      <mc:AlternateContent xmlns:mc="http://schemas.openxmlformats.org/markup-compatibility/2006" xmlns:a14="http://schemas.microsoft.com/office/drawing/2010/main">
+        <mc:Choice Requires="a14">
           <p:sp>
             <p:nvSpPr>
               <p:cNvPr id="22" name="TextBox 21">
@@ -9034,7 +9596,7 @@
             </p:txBody>
           </p:sp>
         </mc:Choice>
-        <mc:Fallback>
+        <mc:Fallback xmlns="">
           <p:sp>
             <p:nvSpPr>
               <p:cNvPr id="22" name="TextBox 21">
@@ -9079,8 +9641,8 @@
           </p:sp>
         </mc:Fallback>
       </mc:AlternateContent>
-      <mc:AlternateContent xmlns:mc="http://schemas.openxmlformats.org/markup-compatibility/2006">
-        <mc:Choice xmlns:a14="http://schemas.microsoft.com/office/drawing/2010/main" Requires="a14">
+      <mc:AlternateContent xmlns:mc="http://schemas.openxmlformats.org/markup-compatibility/2006" xmlns:a14="http://schemas.microsoft.com/office/drawing/2010/main">
+        <mc:Choice Requires="a14">
           <p:sp>
             <p:nvSpPr>
               <p:cNvPr id="25" name="Rectangle 24">
@@ -9285,7 +9847,7 @@
             </p:txBody>
           </p:sp>
         </mc:Choice>
-        <mc:Fallback>
+        <mc:Fallback xmlns="">
           <p:sp>
             <p:nvSpPr>
               <p:cNvPr id="25" name="Rectangle 24">
@@ -9330,8 +9892,8 @@
           </p:sp>
         </mc:Fallback>
       </mc:AlternateContent>
-      <mc:AlternateContent xmlns:mc="http://schemas.openxmlformats.org/markup-compatibility/2006">
-        <mc:Choice xmlns:a14="http://schemas.microsoft.com/office/drawing/2010/main" Requires="a14">
+      <mc:AlternateContent xmlns:mc="http://schemas.openxmlformats.org/markup-compatibility/2006" xmlns:a14="http://schemas.microsoft.com/office/drawing/2010/main">
+        <mc:Choice Requires="a14">
           <p:sp>
             <p:nvSpPr>
               <p:cNvPr id="15" name="TextBox 14">
@@ -9531,7 +10093,7 @@
             </p:txBody>
           </p:sp>
         </mc:Choice>
-        <mc:Fallback>
+        <mc:Fallback xmlns="">
           <p:sp>
             <p:nvSpPr>
               <p:cNvPr id="15" name="TextBox 14">
@@ -9576,8 +10138,8 @@
           </p:sp>
         </mc:Fallback>
       </mc:AlternateContent>
-      <mc:AlternateContent xmlns:mc="http://schemas.openxmlformats.org/markup-compatibility/2006">
-        <mc:Choice xmlns:a14="http://schemas.microsoft.com/office/drawing/2010/main" Requires="a14">
+      <mc:AlternateContent xmlns:mc="http://schemas.openxmlformats.org/markup-compatibility/2006" xmlns:a14="http://schemas.microsoft.com/office/drawing/2010/main">
+        <mc:Choice Requires="a14">
           <p:sp>
             <p:nvSpPr>
               <p:cNvPr id="27" name="TextBox 26">
@@ -9777,7 +10339,7 @@
             </p:txBody>
           </p:sp>
         </mc:Choice>
-        <mc:Fallback>
+        <mc:Fallback xmlns="">
           <p:sp>
             <p:nvSpPr>
               <p:cNvPr id="27" name="TextBox 26">
@@ -9822,8 +10384,8 @@
           </p:sp>
         </mc:Fallback>
       </mc:AlternateContent>
-      <mc:AlternateContent xmlns:mc="http://schemas.openxmlformats.org/markup-compatibility/2006">
-        <mc:Choice xmlns:a14="http://schemas.microsoft.com/office/drawing/2010/main" Requires="a14">
+      <mc:AlternateContent xmlns:mc="http://schemas.openxmlformats.org/markup-compatibility/2006" xmlns:a14="http://schemas.microsoft.com/office/drawing/2010/main">
+        <mc:Choice Requires="a14">
           <p:sp>
             <p:nvSpPr>
               <p:cNvPr id="28" name="TextBox 27">
@@ -9957,7 +10519,7 @@
             </p:txBody>
           </p:sp>
         </mc:Choice>
-        <mc:Fallback>
+        <mc:Fallback xmlns="">
           <p:sp>
             <p:nvSpPr>
               <p:cNvPr id="28" name="TextBox 27">
@@ -10002,8 +10564,8 @@
           </p:sp>
         </mc:Fallback>
       </mc:AlternateContent>
-      <mc:AlternateContent xmlns:mc="http://schemas.openxmlformats.org/markup-compatibility/2006">
-        <mc:Choice xmlns:a14="http://schemas.microsoft.com/office/drawing/2010/main" Requires="a14">
+      <mc:AlternateContent xmlns:mc="http://schemas.openxmlformats.org/markup-compatibility/2006" xmlns:a14="http://schemas.microsoft.com/office/drawing/2010/main">
+        <mc:Choice Requires="a14">
           <p:sp>
             <p:nvSpPr>
               <p:cNvPr id="29" name="object 16">
@@ -10330,7 +10892,7 @@
             </p:txBody>
           </p:sp>
         </mc:Choice>
-        <mc:Fallback>
+        <mc:Fallback xmlns="">
           <p:sp>
             <p:nvSpPr>
               <p:cNvPr id="29" name="object 16">
@@ -11063,8 +11625,8 @@
           </a:p>
         </p:txBody>
       </p:sp>
-      <mc:AlternateContent xmlns:mc="http://schemas.openxmlformats.org/markup-compatibility/2006">
-        <mc:Choice xmlns:a14="http://schemas.microsoft.com/office/drawing/2010/main" Requires="a14">
+      <mc:AlternateContent xmlns:mc="http://schemas.openxmlformats.org/markup-compatibility/2006" xmlns:a14="http://schemas.microsoft.com/office/drawing/2010/main">
+        <mc:Choice Requires="a14">
           <p:sp>
             <p:nvSpPr>
               <p:cNvPr id="4" name="CuadroTexto 9">
@@ -11403,7 +11965,7 @@
                             </m:mc>
                           </m:mcs>
                           <m:ctrlPr>
-                            <a:rPr lang="es-CO" sz="1200" dirty="0" smtClean="0">
+                            <a:rPr lang="es-CO" sz="1200" i="1" dirty="0" smtClean="0">
                               <a:latin typeface="Cambria Math" panose="02040503050406030204" pitchFamily="18" charset="0"/>
                             </a:rPr>
                           </m:ctrlPr>
@@ -11491,7 +12053,7 @@
             </p:txBody>
           </p:sp>
         </mc:Choice>
-        <mc:Fallback>
+        <mc:Fallback xmlns="">
           <p:sp>
             <p:nvSpPr>
               <p:cNvPr id="4" name="CuadroTexto 9">
@@ -11541,8 +12103,8 @@
           </p:sp>
         </mc:Fallback>
       </mc:AlternateContent>
-      <mc:AlternateContent xmlns:mc="http://schemas.openxmlformats.org/markup-compatibility/2006">
-        <mc:Choice xmlns:a14="http://schemas.microsoft.com/office/drawing/2010/main" Requires="a14">
+      <mc:AlternateContent xmlns:mc="http://schemas.openxmlformats.org/markup-compatibility/2006" xmlns:a14="http://schemas.microsoft.com/office/drawing/2010/main">
+        <mc:Choice Requires="a14">
           <p:sp>
             <p:nvSpPr>
               <p:cNvPr id="14" name="CuadroTexto 9">
@@ -12001,7 +12563,7 @@
             </p:txBody>
           </p:sp>
         </mc:Choice>
-        <mc:Fallback>
+        <mc:Fallback xmlns="">
           <p:sp>
             <p:nvSpPr>
               <p:cNvPr id="14" name="CuadroTexto 9">
@@ -12087,8 +12649,8 @@
           <a:chExt cx="0" cy="0"/>
         </a:xfrm>
       </p:grpSpPr>
-      <mc:AlternateContent xmlns:mc="http://schemas.openxmlformats.org/markup-compatibility/2006">
-        <mc:Choice xmlns:a14="http://schemas.microsoft.com/office/drawing/2010/main" Requires="a14">
+      <mc:AlternateContent xmlns:mc="http://schemas.openxmlformats.org/markup-compatibility/2006" xmlns:a14="http://schemas.microsoft.com/office/drawing/2010/main">
+        <mc:Choice Requires="a14">
           <p:sp>
             <p:nvSpPr>
               <p:cNvPr id="16" name="object 16">
@@ -12415,7 +12977,7 @@
             </p:txBody>
           </p:sp>
         </mc:Choice>
-        <mc:Fallback>
+        <mc:Fallback xmlns="">
           <p:sp>
             <p:nvSpPr>
               <p:cNvPr id="16" name="object 16">
@@ -12610,8 +13172,8 @@
           </a:p>
         </p:txBody>
       </p:sp>
-      <mc:AlternateContent xmlns:mc="http://schemas.openxmlformats.org/markup-compatibility/2006">
-        <mc:Choice xmlns:a14="http://schemas.microsoft.com/office/drawing/2010/main" Requires="a14">
+      <mc:AlternateContent xmlns:mc="http://schemas.openxmlformats.org/markup-compatibility/2006" xmlns:a14="http://schemas.microsoft.com/office/drawing/2010/main">
+        <mc:Choice Requires="a14">
           <p:sp>
             <p:nvSpPr>
               <p:cNvPr id="4" name="CuadroTexto 9">
@@ -12704,43 +13266,7 @@
                       <a:rPr lang="es-MX" sz="1200" b="0" i="1" smtClean="0">
                         <a:latin typeface="Cambria Math" panose="02040503050406030204" pitchFamily="18" charset="0"/>
                       </a:rPr>
-                      <m:t>1</m:t>
-                    </m:r>
-                    <m:r>
-                      <a:rPr lang="es-MX" sz="1200" b="0" i="1" smtClean="0">
-                        <a:latin typeface="Cambria Math" panose="02040503050406030204" pitchFamily="18" charset="0"/>
-                      </a:rPr>
-                      <m:t>,</m:t>
-                    </m:r>
-                    <m:r>
-                      <a:rPr lang="es-MX" sz="1200" b="0" i="1" smtClean="0">
-                        <a:latin typeface="Cambria Math" panose="02040503050406030204" pitchFamily="18" charset="0"/>
-                      </a:rPr>
-                      <m:t>62</m:t>
-                    </m:r>
-                    <m:r>
-                      <a:rPr lang="es-MX" sz="1200" b="0" i="1" smtClean="0">
-                        <a:latin typeface="Cambria Math" panose="02040503050406030204" pitchFamily="18" charset="0"/>
-                      </a:rPr>
-                      <m:t>−</m:t>
-                    </m:r>
-                    <m:r>
-                      <a:rPr lang="es-MX" sz="1200" b="0" i="1" smtClean="0">
-                        <a:latin typeface="Cambria Math" panose="02040503050406030204" pitchFamily="18" charset="0"/>
-                      </a:rPr>
-                      <m:t>0</m:t>
-                    </m:r>
-                    <m:r>
-                      <a:rPr lang="es-MX" sz="1200" b="0" i="1" smtClean="0">
-                        <a:latin typeface="Cambria Math" panose="02040503050406030204" pitchFamily="18" charset="0"/>
-                      </a:rPr>
-                      <m:t>,</m:t>
-                    </m:r>
-                    <m:r>
-                      <a:rPr lang="es-MX" sz="1200" b="0" i="1" smtClean="0">
-                        <a:latin typeface="Cambria Math" panose="02040503050406030204" pitchFamily="18" charset="0"/>
-                      </a:rPr>
-                      <m:t>19</m:t>
+                      <m:t>1,62−0,19</m:t>
                     </m:r>
                     <m:d>
                       <m:dPr>
@@ -12800,19 +13326,7 @@
                       <a:rPr lang="es-MX" sz="1200" b="0" i="1" smtClean="0">
                         <a:latin typeface="Cambria Math" panose="02040503050406030204" pitchFamily="18" charset="0"/>
                       </a:rPr>
-                      <m:t>0</m:t>
-                    </m:r>
-                    <m:r>
-                      <a:rPr lang="es-MX" sz="1200" b="0" i="1" smtClean="0">
-                        <a:latin typeface="Cambria Math" panose="02040503050406030204" pitchFamily="18" charset="0"/>
-                      </a:rPr>
-                      <m:t>,</m:t>
-                    </m:r>
-                    <m:r>
-                      <a:rPr lang="es-MX" sz="1200" b="0" i="1" smtClean="0">
-                        <a:latin typeface="Cambria Math" panose="02040503050406030204" pitchFamily="18" charset="0"/>
-                      </a:rPr>
-                      <m:t>10</m:t>
+                      <m:t>0,10</m:t>
                     </m:r>
                     <m:sSup>
                       <m:sSupPr>
@@ -12950,7 +13464,7 @@
                             </m:mc>
                           </m:mcs>
                           <m:ctrlPr>
-                            <a:rPr lang="es-CO" sz="1200" dirty="0" smtClean="0">
+                            <a:rPr lang="es-CO" sz="1200" i="1" dirty="0" smtClean="0">
                               <a:latin typeface="Cambria Math" panose="02040503050406030204" pitchFamily="18" charset="0"/>
                             </a:rPr>
                           </m:ctrlPr>
@@ -12970,31 +13484,7 @@
                               <a:rPr lang="es-MX" sz="1200" b="0" i="0" dirty="0" smtClean="0">
                                 <a:latin typeface="Cambria Math" panose="02040503050406030204" pitchFamily="18" charset="0"/>
                               </a:rPr>
-                              <m:t>=−</m:t>
-                            </m:r>
-                            <m:r>
-                              <a:rPr lang="es-MX" sz="1200" b="0" i="0" dirty="0" smtClean="0">
-                                <a:latin typeface="Cambria Math" panose="02040503050406030204" pitchFamily="18" charset="0"/>
-                              </a:rPr>
-                              <m:t>9</m:t>
-                            </m:r>
-                            <m:r>
-                              <a:rPr lang="es-MX" sz="1200" b="0" i="0" dirty="0" smtClean="0">
-                                <a:latin typeface="Cambria Math" panose="02040503050406030204" pitchFamily="18" charset="0"/>
-                              </a:rPr>
-                              <m:t>,</m:t>
-                            </m:r>
-                            <m:r>
-                              <a:rPr lang="es-MX" sz="1200" b="0" i="0" dirty="0" smtClean="0">
-                                <a:latin typeface="Cambria Math" panose="02040503050406030204" pitchFamily="18" charset="0"/>
-                              </a:rPr>
-                              <m:t>89</m:t>
-                            </m:r>
-                            <m:r>
-                              <a:rPr lang="es-CO" sz="1200" i="0" dirty="0" smtClean="0">
-                                <a:latin typeface="Cambria Math" panose="02040503050406030204" pitchFamily="18" charset="0"/>
-                              </a:rPr>
-                              <m:t>×</m:t>
+                              <m:t>=−9,89×</m:t>
                             </m:r>
                             <m:sSup>
                               <m:sSupPr>
@@ -13038,7 +13528,7 @@
             </p:txBody>
           </p:sp>
         </mc:Choice>
-        <mc:Fallback>
+        <mc:Fallback xmlns="">
           <p:sp>
             <p:nvSpPr>
               <p:cNvPr id="4" name="CuadroTexto 9">
@@ -13088,8 +13578,8 @@
           </p:sp>
         </mc:Fallback>
       </mc:AlternateContent>
-      <mc:AlternateContent xmlns:mc="http://schemas.openxmlformats.org/markup-compatibility/2006">
-        <mc:Choice xmlns:a14="http://schemas.microsoft.com/office/drawing/2010/main" Requires="a14">
+      <mc:AlternateContent xmlns:mc="http://schemas.openxmlformats.org/markup-compatibility/2006" xmlns:a14="http://schemas.microsoft.com/office/drawing/2010/main">
+        <mc:Choice Requires="a14">
           <p:sp>
             <p:nvSpPr>
               <p:cNvPr id="7" name="CuadroTexto 9">
@@ -13182,43 +13672,7 @@
                       <a:rPr lang="es-MX" sz="1200" b="0" i="1" smtClean="0">
                         <a:latin typeface="Cambria Math" panose="02040503050406030204" pitchFamily="18" charset="0"/>
                       </a:rPr>
-                      <m:t>1</m:t>
-                    </m:r>
-                    <m:r>
-                      <a:rPr lang="es-MX" sz="1200" b="0" i="1" smtClean="0">
-                        <a:latin typeface="Cambria Math" panose="02040503050406030204" pitchFamily="18" charset="0"/>
-                      </a:rPr>
-                      <m:t>,</m:t>
-                    </m:r>
-                    <m:r>
-                      <a:rPr lang="es-MX" sz="1200" b="0" i="1" smtClean="0">
-                        <a:latin typeface="Cambria Math" panose="02040503050406030204" pitchFamily="18" charset="0"/>
-                      </a:rPr>
-                      <m:t>54</m:t>
-                    </m:r>
-                    <m:r>
-                      <a:rPr lang="es-MX" sz="1200" b="0" i="1" smtClean="0">
-                        <a:latin typeface="Cambria Math" panose="02040503050406030204" pitchFamily="18" charset="0"/>
-                      </a:rPr>
-                      <m:t>−</m:t>
-                    </m:r>
-                    <m:r>
-                      <a:rPr lang="es-MX" sz="1200" b="0" i="1" smtClean="0">
-                        <a:latin typeface="Cambria Math" panose="02040503050406030204" pitchFamily="18" charset="0"/>
-                      </a:rPr>
-                      <m:t>0</m:t>
-                    </m:r>
-                    <m:r>
-                      <a:rPr lang="es-MX" sz="1200" b="0" i="1" smtClean="0">
-                        <a:latin typeface="Cambria Math" panose="02040503050406030204" pitchFamily="18" charset="0"/>
-                      </a:rPr>
-                      <m:t>,</m:t>
-                    </m:r>
-                    <m:r>
-                      <a:rPr lang="es-MX" sz="1200" b="0" i="1" smtClean="0">
-                        <a:latin typeface="Cambria Math" panose="02040503050406030204" pitchFamily="18" charset="0"/>
-                      </a:rPr>
-                      <m:t>13</m:t>
+                      <m:t>1,54−0,13</m:t>
                     </m:r>
                     <m:d>
                       <m:dPr>
@@ -13278,19 +13732,7 @@
                       <a:rPr lang="es-MX" sz="1200" b="0" i="1" smtClean="0">
                         <a:latin typeface="Cambria Math" panose="02040503050406030204" pitchFamily="18" charset="0"/>
                       </a:rPr>
-                      <m:t>0</m:t>
-                    </m:r>
-                    <m:r>
-                      <a:rPr lang="es-MX" sz="1200" b="0" i="1" smtClean="0">
-                        <a:latin typeface="Cambria Math" panose="02040503050406030204" pitchFamily="18" charset="0"/>
-                      </a:rPr>
-                      <m:t>,</m:t>
-                    </m:r>
-                    <m:r>
-                      <a:rPr lang="es-MX" sz="1200" b="0" i="1" smtClean="0">
-                        <a:latin typeface="Cambria Math" panose="02040503050406030204" pitchFamily="18" charset="0"/>
-                      </a:rPr>
-                      <m:t>15</m:t>
+                      <m:t>0,15</m:t>
                     </m:r>
                     <m:sSup>
                       <m:sSupPr>
@@ -13428,7 +13870,7 @@
                             </m:mc>
                           </m:mcs>
                           <m:ctrlPr>
-                            <a:rPr lang="es-CO" sz="1200" dirty="0" smtClean="0">
+                            <a:rPr lang="es-CO" sz="1200" i="1" dirty="0" smtClean="0">
                               <a:latin typeface="Cambria Math" panose="02040503050406030204" pitchFamily="18" charset="0"/>
                             </a:rPr>
                           </m:ctrlPr>
@@ -13448,31 +13890,13 @@
                               <a:rPr lang="es-MX" sz="1200" b="0" i="0" dirty="0" smtClean="0">
                                 <a:latin typeface="Cambria Math" panose="02040503050406030204" pitchFamily="18" charset="0"/>
                               </a:rPr>
-                              <m:t>=−</m:t>
-                            </m:r>
-                            <m:r>
-                              <a:rPr lang="es-CO" sz="1200" i="0" dirty="0" smtClean="0">
-                                <a:latin typeface="Cambria Math" panose="02040503050406030204" pitchFamily="18" charset="0"/>
-                              </a:rPr>
-                              <m:t>1</m:t>
-                            </m:r>
-                            <m:r>
-                              <a:rPr lang="es-CO" sz="1200" i="0" dirty="0" smtClean="0">
-                                <a:latin typeface="Cambria Math" panose="02040503050406030204" pitchFamily="18" charset="0"/>
-                              </a:rPr>
-                              <m:t>.</m:t>
+                              <m:t>=−1.</m:t>
                             </m:r>
                             <m:r>
                               <a:rPr lang="es-MX" sz="1200" b="0" i="0" dirty="0" smtClean="0">
                                 <a:latin typeface="Cambria Math" panose="02040503050406030204" pitchFamily="18" charset="0"/>
                               </a:rPr>
-                              <m:t>53</m:t>
-                            </m:r>
-                            <m:r>
-                              <a:rPr lang="es-MX" sz="1200" b="0" i="0" dirty="0" smtClean="0">
-                                <a:latin typeface="Cambria Math" panose="02040503050406030204" pitchFamily="18" charset="0"/>
-                              </a:rPr>
-                              <m:t>,×</m:t>
+                              <m:t>53,×</m:t>
                             </m:r>
                             <m:sSup>
                               <m:sSupPr>
@@ -13495,13 +13919,7 @@
                                   <a:rPr lang="es-CO" sz="1200" i="0" dirty="0" smtClean="0">
                                     <a:latin typeface="Cambria Math" panose="02040503050406030204" pitchFamily="18" charset="0"/>
                                   </a:rPr>
-                                  <m:t>−</m:t>
-                                </m:r>
-                                <m:r>
-                                  <a:rPr lang="es-CO" sz="1200" i="0" dirty="0" smtClean="0">
-                                    <a:latin typeface="Cambria Math" panose="02040503050406030204" pitchFamily="18" charset="0"/>
-                                  </a:rPr>
-                                  <m:t>9</m:t>
+                                  <m:t>−9</m:t>
                                 </m:r>
                               </m:sup>
                             </m:sSup>
@@ -13516,7 +13934,7 @@
             </p:txBody>
           </p:sp>
         </mc:Choice>
-        <mc:Fallback>
+        <mc:Fallback xmlns="">
           <p:sp>
             <p:nvSpPr>
               <p:cNvPr id="7" name="CuadroTexto 9">
@@ -13778,6 +14196,42 @@
           <a:chExt cx="0" cy="0"/>
         </a:xfrm>
       </p:grpSpPr>
+      <p:pic>
+        <p:nvPicPr>
+          <p:cNvPr id="5" name="Picture 4">
+            <a:extLst>
+              <a:ext uri="{FF2B5EF4-FFF2-40B4-BE49-F238E27FC236}">
+                <a16:creationId xmlns:a16="http://schemas.microsoft.com/office/drawing/2014/main" id="{3666AE94-949C-34BE-ADAA-484928263EFA}"/>
+              </a:ext>
+            </a:extLst>
+          </p:cNvPr>
+          <p:cNvPicPr>
+            <a:picLocks noChangeAspect="1"/>
+          </p:cNvPicPr>
+          <p:nvPr/>
+        </p:nvPicPr>
+        <p:blipFill>
+          <a:blip r:embed="rId3">
+            <a:extLst>
+              <a:ext uri="{28A0092B-C50C-407E-A947-70E740481C1C}">
+                <a14:useLocalDpi xmlns:a14="http://schemas.microsoft.com/office/drawing/2010/main" val="0"/>
+              </a:ext>
+            </a:extLst>
+          </a:blip>
+          <a:stretch>
+            <a:fillRect/>
+          </a:stretch>
+        </p:blipFill>
+        <p:spPr>
+          <a:xfrm>
+            <a:off x="664640" y="1067671"/>
+            <a:ext cx="10789941" cy="4480569"/>
+          </a:xfrm>
+          <a:prstGeom prst="rect">
+            <a:avLst/>
+          </a:prstGeom>
+        </p:spPr>
+      </p:pic>
       <p:sp>
         <p:nvSpPr>
           <p:cNvPr id="16" name="object 16">
@@ -13861,10 +14315,10 @@
           <p:nvPr/>
         </p:nvPicPr>
         <p:blipFill>
-          <a:blip r:embed="rId3">
+          <a:blip r:embed="rId4">
             <a:extLst>
               <a:ext uri="{96DAC541-7B7A-43D3-8B79-37D633B846F1}">
-                <asvg:svgBlip xmlns:asvg="http://schemas.microsoft.com/office/drawing/2016/SVG/main" r:embed="rId4"/>
+                <asvg:svgBlip xmlns:asvg="http://schemas.microsoft.com/office/drawing/2016/SVG/main" r:embed="rId5"/>
               </a:ext>
             </a:extLst>
           </a:blip>
@@ -13959,8 +14413,8 @@
         </p:nvSpPr>
         <p:spPr>
           <a:xfrm>
-            <a:off x="609441" y="4860334"/>
-            <a:ext cx="11199971" cy="1200329"/>
+            <a:off x="609441" y="5560697"/>
+            <a:ext cx="11199971" cy="646331"/>
           </a:xfrm>
           <a:prstGeom prst="rect">
             <a:avLst/>
@@ -13988,15 +14442,36 @@
                 <a:latin typeface="Arial" panose="020B0604020202020204" pitchFamily="34" charset="0"/>
                 <a:cs typeface="Arial" panose="020B0604020202020204" pitchFamily="34" charset="0"/>
               </a:rPr>
-              <a:t>Comment results, which is the safe radius, consider safe means less than 0.1 dB/90º.</a:t>
+              <a:t>For radii larger than 30 </a:t>
             </a:r>
-          </a:p>
-          <a:p>
-            <a:pPr algn="just"/>
-            <a:endParaRPr lang="en-US" sz="1200" u="sng" dirty="0">
-              <a:latin typeface="Arial" panose="020B0604020202020204" pitchFamily="34" charset="0"/>
-              <a:cs typeface="Arial" panose="020B0604020202020204" pitchFamily="34" charset="0"/>
-            </a:endParaRPr>
+            <a:r>
+              <a:rPr lang="en-US" sz="1200" dirty="0" err="1">
+                <a:latin typeface="Arial" panose="020B0604020202020204" pitchFamily="34" charset="0"/>
+                <a:cs typeface="Arial" panose="020B0604020202020204" pitchFamily="34" charset="0"/>
+              </a:rPr>
+              <a:t>μm</a:t>
+            </a:r>
+            <a:r>
+              <a:rPr lang="en-US" sz="1200" dirty="0">
+                <a:latin typeface="Arial" panose="020B0604020202020204" pitchFamily="34" charset="0"/>
+                <a:cs typeface="Arial" panose="020B0604020202020204" pitchFamily="34" charset="0"/>
+              </a:rPr>
+              <a:t>, it can be ensured that the losses remain below 0.1 dB for silicon nitride (</a:t>
+            </a:r>
+            <a:r>
+              <a:rPr lang="en-US" sz="1200" dirty="0" err="1">
+                <a:latin typeface="Arial" panose="020B0604020202020204" pitchFamily="34" charset="0"/>
+                <a:cs typeface="Arial" panose="020B0604020202020204" pitchFamily="34" charset="0"/>
+              </a:rPr>
+              <a:t>Si₃N</a:t>
+            </a:r>
+            <a:r>
+              <a:rPr lang="en-US" sz="1200" dirty="0">
+                <a:latin typeface="Arial" panose="020B0604020202020204" pitchFamily="34" charset="0"/>
+                <a:cs typeface="Arial" panose="020B0604020202020204" pitchFamily="34" charset="0"/>
+              </a:rPr>
+              <a:t>₄) technology.</a:t>
+            </a:r>
           </a:p>
           <a:p>
             <a:pPr algn="just"/>
@@ -14012,255 +14487,8 @@
               <a:cs typeface="Arial" panose="020B0604020202020204" pitchFamily="34" charset="0"/>
             </a:endParaRPr>
           </a:p>
-          <a:p>
-            <a:pPr algn="just"/>
-            <a:endParaRPr lang="en-US" sz="1200" dirty="0">
-              <a:latin typeface="Arial" panose="020B0604020202020204" pitchFamily="34" charset="0"/>
-              <a:cs typeface="Arial" panose="020B0604020202020204" pitchFamily="34" charset="0"/>
-            </a:endParaRPr>
-          </a:p>
-          <a:p>
-            <a:pPr algn="just"/>
-            <a:endParaRPr lang="en-US" sz="1200" dirty="0">
-              <a:latin typeface="Arial" panose="020B0604020202020204" pitchFamily="34" charset="0"/>
-              <a:cs typeface="Arial" panose="020B0604020202020204" pitchFamily="34" charset="0"/>
-            </a:endParaRPr>
-          </a:p>
         </p:txBody>
       </p:sp>
-      <mc:AlternateContent xmlns:mc="http://schemas.openxmlformats.org/markup-compatibility/2006" xmlns:a14="http://schemas.microsoft.com/office/drawing/2010/main">
-        <mc:Choice Requires="a14">
-          <p:sp>
-            <p:nvSpPr>
-              <p:cNvPr id="6" name="CuadroTexto 5">
-                <a:extLst>
-                  <a:ext uri="{FF2B5EF4-FFF2-40B4-BE49-F238E27FC236}">
-                    <a16:creationId xmlns:a16="http://schemas.microsoft.com/office/drawing/2014/main" id="{409FBBBB-69CA-B7E5-7176-8227F2788CF5}"/>
-                  </a:ext>
-                </a:extLst>
-              </p:cNvPr>
-              <p:cNvSpPr txBox="1"/>
-              <p:nvPr/>
-            </p:nvSpPr>
-            <p:spPr>
-              <a:xfrm>
-                <a:off x="9941529" y="4179383"/>
-                <a:ext cx="1856534" cy="439608"/>
-              </a:xfrm>
-              <a:prstGeom prst="rect">
-                <a:avLst/>
-              </a:prstGeom>
-              <a:noFill/>
-            </p:spPr>
-            <p:txBody>
-              <a:bodyPr wrap="none" lIns="0" tIns="0" rIns="0" bIns="0" rtlCol="0">
-                <a:spAutoFit/>
-              </a:bodyPr>
-              <a:lstStyle/>
-              <a:p>
-                <a14:m>
-                  <m:oMath xmlns:m="http://schemas.openxmlformats.org/officeDocument/2006/math">
-                    <m:r>
-                      <a:rPr lang="es-ES" sz="1800" b="0" i="1" smtClean="0">
-                        <a:latin typeface="Cambria Math" panose="02040503050406030204" pitchFamily="18" charset="0"/>
-                      </a:rPr>
-                      <m:t>𝛼</m:t>
-                    </m:r>
-                    <m:d>
-                      <m:dPr>
-                        <m:begChr m:val="["/>
-                        <m:endChr m:val="]"/>
-                        <m:ctrlPr>
-                          <a:rPr lang="es-ES" sz="1800" b="0" i="1" smtClean="0">
-                            <a:latin typeface="Cambria Math" panose="02040503050406030204" pitchFamily="18" charset="0"/>
-                          </a:rPr>
-                        </m:ctrlPr>
-                      </m:dPr>
-                      <m:e>
-                        <m:f>
-                          <m:fPr>
-                            <m:ctrlPr>
-                              <a:rPr lang="es-ES" sz="1800" b="0" i="1" smtClean="0">
-                                <a:latin typeface="Cambria Math" panose="02040503050406030204" pitchFamily="18" charset="0"/>
-                              </a:rPr>
-                            </m:ctrlPr>
-                          </m:fPr>
-                          <m:num>
-                            <m:r>
-                              <a:rPr lang="es-ES" sz="1800" b="0" i="1" smtClean="0">
-                                <a:latin typeface="Cambria Math" panose="02040503050406030204" pitchFamily="18" charset="0"/>
-                              </a:rPr>
-                              <m:t>𝑑𝐵</m:t>
-                            </m:r>
-                          </m:num>
-                          <m:den>
-                            <m:r>
-                              <a:rPr lang="es-ES" sz="1800" b="0" i="1" smtClean="0">
-                                <a:latin typeface="Cambria Math" panose="02040503050406030204" pitchFamily="18" charset="0"/>
-                              </a:rPr>
-                              <m:t>90</m:t>
-                            </m:r>
-                            <m:r>
-                              <a:rPr lang="es-ES" sz="1800" b="0" i="1" smtClean="0">
-                                <a:latin typeface="Cambria Math" panose="02040503050406030204" pitchFamily="18" charset="0"/>
-                                <a:ea typeface="Cambria Math" panose="02040503050406030204" pitchFamily="18" charset="0"/>
-                              </a:rPr>
-                              <m:t>°</m:t>
-                            </m:r>
-                          </m:den>
-                        </m:f>
-                      </m:e>
-                    </m:d>
-                    <m:r>
-                      <a:rPr lang="es-ES" sz="1800" b="0" i="1" smtClean="0">
-                        <a:latin typeface="Cambria Math" panose="02040503050406030204" pitchFamily="18" charset="0"/>
-                      </a:rPr>
-                      <m:t>=</m:t>
-                    </m:r>
-                  </m:oMath>
-                </a14:m>
-                <a:r>
-                  <a:rPr lang="es-ES" sz="1800" dirty="0"/>
-                  <a:t> </a:t>
-                </a:r>
-                <a14:m>
-                  <m:oMath xmlns:m="http://schemas.openxmlformats.org/officeDocument/2006/math">
-                    <m:r>
-                      <m:rPr>
-                        <m:sty m:val="p"/>
-                      </m:rPr>
-                      <a:rPr lang="es-ES" sz="1800" b="0" i="0" smtClean="0">
-                        <a:latin typeface="Cambria Math" panose="02040503050406030204" pitchFamily="18" charset="0"/>
-                      </a:rPr>
-                      <m:t>R</m:t>
-                    </m:r>
-                    <m:f>
-                      <m:fPr>
-                        <m:ctrlPr>
-                          <a:rPr lang="es-ES" sz="1800" b="0" i="1" smtClean="0">
-                            <a:latin typeface="Cambria Math" panose="02040503050406030204" pitchFamily="18" charset="0"/>
-                          </a:rPr>
-                        </m:ctrlPr>
-                      </m:fPr>
-                      <m:num>
-                        <m:r>
-                          <a:rPr lang="es-ES" sz="1800" b="0" i="1" smtClean="0">
-                            <a:latin typeface="Cambria Math" panose="02040503050406030204" pitchFamily="18" charset="0"/>
-                          </a:rPr>
-                          <m:t>𝜋</m:t>
-                        </m:r>
-                      </m:num>
-                      <m:den>
-                        <m:r>
-                          <a:rPr lang="es-ES" sz="1800" b="0" i="1" smtClean="0">
-                            <a:latin typeface="Cambria Math" panose="02040503050406030204" pitchFamily="18" charset="0"/>
-                          </a:rPr>
-                          <m:t>2</m:t>
-                        </m:r>
-                      </m:den>
-                    </m:f>
-                    <m:r>
-                      <a:rPr lang="es-ES" sz="1800" i="1">
-                        <a:latin typeface="Cambria Math" panose="02040503050406030204" pitchFamily="18" charset="0"/>
-                      </a:rPr>
-                      <m:t>𝛼</m:t>
-                    </m:r>
-                    <m:d>
-                      <m:dPr>
-                        <m:begChr m:val="["/>
-                        <m:endChr m:val="]"/>
-                        <m:ctrlPr>
-                          <a:rPr lang="es-ES" sz="1800" i="1">
-                            <a:latin typeface="Cambria Math" panose="02040503050406030204" pitchFamily="18" charset="0"/>
-                          </a:rPr>
-                        </m:ctrlPr>
-                      </m:dPr>
-                      <m:e>
-                        <m:f>
-                          <m:fPr>
-                            <m:ctrlPr>
-                              <a:rPr lang="es-ES" sz="1800" i="1">
-                                <a:latin typeface="Cambria Math" panose="02040503050406030204" pitchFamily="18" charset="0"/>
-                              </a:rPr>
-                            </m:ctrlPr>
-                          </m:fPr>
-                          <m:num>
-                            <m:r>
-                              <a:rPr lang="es-ES" sz="1800" i="1">
-                                <a:latin typeface="Cambria Math" panose="02040503050406030204" pitchFamily="18" charset="0"/>
-                              </a:rPr>
-                              <m:t>𝑑𝐵</m:t>
-                            </m:r>
-                          </m:num>
-                          <m:den>
-                            <m:r>
-                              <a:rPr lang="es-ES" sz="1800" i="1">
-                                <a:latin typeface="Cambria Math" panose="02040503050406030204" pitchFamily="18" charset="0"/>
-                              </a:rPr>
-                              <m:t>µ</m:t>
-                            </m:r>
-                            <m:r>
-                              <a:rPr lang="es-ES" sz="1800" i="1">
-                                <a:latin typeface="Cambria Math" panose="02040503050406030204" pitchFamily="18" charset="0"/>
-                              </a:rPr>
-                              <m:t>𝑚</m:t>
-                            </m:r>
-                          </m:den>
-                        </m:f>
-                      </m:e>
-                    </m:d>
-                  </m:oMath>
-                </a14:m>
-                <a:endParaRPr lang="en-US" sz="1800" dirty="0"/>
-              </a:p>
-            </p:txBody>
-          </p:sp>
-        </mc:Choice>
-        <mc:Fallback xmlns="">
-          <p:sp>
-            <p:nvSpPr>
-              <p:cNvPr id="6" name="CuadroTexto 5">
-                <a:extLst>
-                  <a:ext uri="{FF2B5EF4-FFF2-40B4-BE49-F238E27FC236}">
-                    <a16:creationId xmlns:a16="http://schemas.microsoft.com/office/drawing/2014/main" id="{409FBBBB-69CA-B7E5-7176-8227F2788CF5}"/>
-                  </a:ext>
-                </a:extLst>
-              </p:cNvPr>
-              <p:cNvSpPr txBox="1">
-                <a:spLocks noRot="1" noChangeAspect="1" noMove="1" noResize="1" noEditPoints="1" noAdjustHandles="1" noChangeArrowheads="1" noChangeShapeType="1" noTextEdit="1"/>
-              </p:cNvSpPr>
-              <p:nvPr/>
-            </p:nvSpPr>
-            <p:spPr>
-              <a:xfrm>
-                <a:off x="9941529" y="4179383"/>
-                <a:ext cx="1856534" cy="439608"/>
-              </a:xfrm>
-              <a:prstGeom prst="rect">
-                <a:avLst/>
-              </a:prstGeom>
-              <a:blipFill>
-                <a:blip r:embed="rId5"/>
-                <a:stretch>
-                  <a:fillRect l="-3289" b="-13889"/>
-                </a:stretch>
-              </a:blipFill>
-            </p:spPr>
-            <p:txBody>
-              <a:bodyPr/>
-              <a:lstStyle/>
-              <a:p>
-                <a:r>
-                  <a:rPr lang="es-ES">
-                    <a:noFill/>
-                  </a:rPr>
-                  <a:t> </a:t>
-                </a:r>
-              </a:p>
-            </p:txBody>
-          </p:sp>
-        </mc:Fallback>
-      </mc:AlternateContent>
       <p:sp>
         <p:nvSpPr>
           <p:cNvPr id="7" name="Rectángulo 6">
@@ -14275,8 +14503,8 @@
         </p:nvSpPr>
         <p:spPr>
           <a:xfrm>
-            <a:off x="609441" y="1418373"/>
-            <a:ext cx="11199971" cy="3306028"/>
+            <a:off x="609441" y="1143000"/>
+            <a:ext cx="11199971" cy="4351412"/>
           </a:xfrm>
           <a:prstGeom prst="rect">
             <a:avLst/>
@@ -14310,57 +14538,6 @@
           <a:p>
             <a:pPr algn="ctr"/>
             <a:endParaRPr lang="en-US"/>
-          </a:p>
-        </p:txBody>
-      </p:sp>
-      <p:sp>
-        <p:nvSpPr>
-          <p:cNvPr id="8" name="CuadroTexto 7">
-            <a:extLst>
-              <a:ext uri="{FF2B5EF4-FFF2-40B4-BE49-F238E27FC236}">
-                <a16:creationId xmlns:a16="http://schemas.microsoft.com/office/drawing/2014/main" id="{331EBD86-BA6C-68C9-2D38-FC8CFBA7ADC4}"/>
-              </a:ext>
-            </a:extLst>
-          </p:cNvPr>
-          <p:cNvSpPr txBox="1"/>
-          <p:nvPr/>
-        </p:nvSpPr>
-        <p:spPr>
-          <a:xfrm>
-            <a:off x="2978141" y="2784355"/>
-            <a:ext cx="6235717" cy="923330"/>
-          </a:xfrm>
-          <a:prstGeom prst="rect">
-            <a:avLst/>
-          </a:prstGeom>
-          <a:noFill/>
-        </p:spPr>
-        <p:txBody>
-          <a:bodyPr wrap="square" rtlCol="0">
-            <a:spAutoFit/>
-          </a:bodyPr>
-          <a:lstStyle/>
-          <a:p>
-            <a:pPr algn="ctr"/>
-            <a:r>
-              <a:rPr lang="en-US" b="1" dirty="0"/>
-              <a:t>deep</a:t>
-            </a:r>
-            <a:r>
-              <a:rPr lang="en-US" dirty="0"/>
-              <a:t> waveguide</a:t>
-            </a:r>
-          </a:p>
-          <a:p>
-            <a:pPr algn="ctr"/>
-            <a:endParaRPr lang="en-US" dirty="0"/>
-          </a:p>
-          <a:p>
-            <a:pPr algn="ctr"/>
-            <a:r>
-              <a:rPr lang="en-US" dirty="0"/>
-              <a:t>Paste dB/90º neff_TE0 &amp; neff_TM0 vs R</a:t>
-            </a:r>
           </a:p>
         </p:txBody>
       </p:sp>
